--- a/Redes/REDES DE COMPUTADORES.pptx
+++ b/Redes/REDES DE COMPUTADORES.pptx
@@ -5,10 +5,10 @@
     <p:sldMasterId id="2147483672" r:id="rId1"/>
   </p:sldMasterIdLst>
   <p:notesMasterIdLst>
-    <p:notesMasterId r:id="rId24"/>
+    <p:notesMasterId r:id="rId32"/>
   </p:notesMasterIdLst>
   <p:handoutMasterIdLst>
-    <p:handoutMasterId r:id="rId25"/>
+    <p:handoutMasterId r:id="rId33"/>
   </p:handoutMasterIdLst>
   <p:sldIdLst>
     <p:sldId id="256" r:id="rId2"/>
@@ -32,7 +32,15 @@
     <p:sldId id="279" r:id="rId20"/>
     <p:sldId id="282" r:id="rId21"/>
     <p:sldId id="283" r:id="rId22"/>
-    <p:sldId id="260" r:id="rId23"/>
+    <p:sldId id="284" r:id="rId23"/>
+    <p:sldId id="286" r:id="rId24"/>
+    <p:sldId id="287" r:id="rId25"/>
+    <p:sldId id="290" r:id="rId26"/>
+    <p:sldId id="291" r:id="rId27"/>
+    <p:sldId id="288" r:id="rId28"/>
+    <p:sldId id="289" r:id="rId29"/>
+    <p:sldId id="285" r:id="rId30"/>
+    <p:sldId id="260" r:id="rId31"/>
   </p:sldIdLst>
   <p:sldSz cx="12192000" cy="6858000"/>
   <p:notesSz cx="6858000" cy="9144000"/>
@@ -238,7 +246,7 @@
             <a:pPr rtl="0"/>
             <a:fld id="{A517C7B7-34F5-4531-9889-28687F60FAC8}" type="datetime1">
               <a:rPr lang="pt-BR" smtClean="0"/>
-              <a:t>03/03/2026</a:t>
+              <a:t>06/04/2026</a:t>
             </a:fld>
             <a:endParaRPr lang="pt-BR" dirty="0"/>
           </a:p>
@@ -419,7 +427,7 @@
             <a:fld id="{40C3EC75-555C-481D-9088-738CE6DDFC83}" type="datetime1">
               <a:rPr lang="pt-BR" smtClean="0"/>
               <a:pPr/>
-              <a:t>03/03/2026</a:t>
+              <a:t>06/04/2026</a:t>
             </a:fld>
             <a:endParaRPr lang="pt-BR" dirty="0"/>
           </a:p>
@@ -842,7 +850,7 @@
             <a:pPr rtl="0"/>
             <a:fld id="{C6B3AB32-59DF-41F1-9618-EDFBF5049629}" type="slidenum">
               <a:rPr lang="pt-BR" smtClean="0"/>
-              <a:t>22</a:t>
+              <a:t>30</a:t>
             </a:fld>
             <a:endParaRPr lang="pt-BR"/>
           </a:p>
@@ -1107,7 +1115,7 @@
             <a:pPr rtl="0"/>
             <a:fld id="{2AF5B136-74F1-42D3-987D-A097EEF8F2FE}" type="datetime1">
               <a:rPr lang="pt-BR" noProof="0" smtClean="0"/>
-              <a:t>03/03/2026</a:t>
+              <a:t>06/04/2026</a:t>
             </a:fld>
             <a:endParaRPr lang="pt-BR" noProof="0"/>
           </a:p>
@@ -1372,7 +1380,7 @@
             <a:pPr rtl="0"/>
             <a:fld id="{0229B074-15EB-43FB-8347-3A734D799093}" type="datetime1">
               <a:rPr lang="pt-BR" noProof="0" smtClean="0"/>
-              <a:t>03/03/2026</a:t>
+              <a:t>06/04/2026</a:t>
             </a:fld>
             <a:endParaRPr lang="pt-BR" noProof="0"/>
           </a:p>
@@ -1610,7 +1618,7 @@
             <a:pPr rtl="0"/>
             <a:fld id="{036303E3-8DE9-4C2D-91EE-6F377AE582A8}" type="datetime1">
               <a:rPr lang="pt-BR" noProof="0" smtClean="0"/>
-              <a:t>03/03/2026</a:t>
+              <a:t>06/04/2026</a:t>
             </a:fld>
             <a:endParaRPr lang="pt-BR" noProof="0"/>
           </a:p>
@@ -1853,7 +1861,7 @@
             <a:pPr rtl="0"/>
             <a:fld id="{B04AF3F4-81C7-4F15-8991-6D0E8D06651A}" type="datetime1">
               <a:rPr lang="pt-BR" noProof="0" smtClean="0"/>
-              <a:t>03/03/2026</a:t>
+              <a:t>06/04/2026</a:t>
             </a:fld>
             <a:endParaRPr lang="pt-BR" noProof="0"/>
           </a:p>
@@ -2164,7 +2172,7 @@
             <a:pPr rtl="0"/>
             <a:fld id="{6E2946E4-8964-43BF-B1D5-4261B83248E5}" type="datetime1">
               <a:rPr lang="pt-BR" noProof="0" smtClean="0"/>
-              <a:t>03/03/2026</a:t>
+              <a:t>06/04/2026</a:t>
             </a:fld>
             <a:endParaRPr lang="pt-BR" noProof="0"/>
           </a:p>
@@ -2468,7 +2476,7 @@
             <a:pPr rtl="0"/>
             <a:fld id="{97C9F420-083C-437A-9265-7F13EB97C6A2}" type="datetime1">
               <a:rPr lang="pt-BR" noProof="0" smtClean="0"/>
-              <a:t>03/03/2026</a:t>
+              <a:t>06/04/2026</a:t>
             </a:fld>
             <a:endParaRPr lang="pt-BR" noProof="0"/>
           </a:p>
@@ -2892,7 +2900,7 @@
             <a:pPr rtl="0"/>
             <a:fld id="{BE07AF20-ED70-4B21-B799-75BB5818AB43}" type="datetime1">
               <a:rPr lang="pt-BR" noProof="0" smtClean="0"/>
-              <a:t>03/03/2026</a:t>
+              <a:t>06/04/2026</a:t>
             </a:fld>
             <a:endParaRPr lang="pt-BR" noProof="0"/>
           </a:p>
@@ -2991,7 +2999,7 @@
             <a:pPr rtl="0"/>
             <a:fld id="{0D33D876-8C34-42FC-BFF7-457557B97BB7}" type="datetime1">
               <a:rPr lang="pt-BR" noProof="0" smtClean="0"/>
-              <a:t>03/03/2026</a:t>
+              <a:t>06/04/2026</a:t>
             </a:fld>
             <a:endParaRPr lang="pt-BR" noProof="0"/>
           </a:p>
@@ -3157,7 +3165,7 @@
             <a:pPr rtl="0"/>
             <a:fld id="{4592437E-206F-4A1C-947F-806A50A40B88}" type="datetime1">
               <a:rPr lang="pt-BR" noProof="0" smtClean="0"/>
-              <a:t>03/03/2026</a:t>
+              <a:t>06/04/2026</a:t>
             </a:fld>
             <a:endParaRPr lang="pt-BR" noProof="0"/>
           </a:p>
@@ -3538,7 +3546,7 @@
             <a:pPr rtl="0"/>
             <a:fld id="{B036DDBC-F1EF-4D09-A533-5995BC167053}" type="datetime1">
               <a:rPr lang="pt-BR" noProof="0" smtClean="0"/>
-              <a:t>03/03/2026</a:t>
+              <a:t>06/04/2026</a:t>
             </a:fld>
             <a:endParaRPr lang="pt-BR" noProof="0"/>
           </a:p>
@@ -3831,7 +3839,7 @@
             <a:pPr rtl="0"/>
             <a:fld id="{DFFDDC01-A1CF-4C3A-BE96-FBC60101324D}" type="datetime1">
               <a:rPr lang="pt-BR" noProof="0" smtClean="0"/>
-              <a:t>03/03/2026</a:t>
+              <a:t>06/04/2026</a:t>
             </a:fld>
             <a:endParaRPr lang="pt-BR" noProof="0"/>
           </a:p>
@@ -4045,7 +4053,7 @@
             <a:pPr rtl="0"/>
             <a:fld id="{52266794-2CD5-4ED3-94F8-8B8DC65FDDE3}" type="datetime1">
               <a:rPr lang="pt-BR" noProof="0" smtClean="0"/>
-              <a:t>03/03/2026</a:t>
+              <a:t>06/04/2026</a:t>
             </a:fld>
             <a:endParaRPr lang="pt-BR" noProof="0"/>
           </a:p>
@@ -6843,6 +6851,1609 @@
 <file path=ppt/slides/slide22.xml><?xml version="1.0" encoding="utf-8"?>
 <p:sld xmlns:a="http://schemas.openxmlformats.org/drawingml/2006/main" xmlns:r="http://schemas.openxmlformats.org/officeDocument/2006/relationships" xmlns:p="http://schemas.openxmlformats.org/presentationml/2006/main">
   <p:cSld>
+    <p:spTree>
+      <p:nvGrpSpPr>
+        <p:cNvPr id="1" name="">
+          <a:extLst>
+            <a:ext uri="{FF2B5EF4-FFF2-40B4-BE49-F238E27FC236}">
+              <a16:creationId xmlns:a16="http://schemas.microsoft.com/office/drawing/2014/main" id="{E493CB9C-1F52-EB3A-497D-E9123CACACD8}"/>
+            </a:ext>
+          </a:extLst>
+        </p:cNvPr>
+        <p:cNvGrpSpPr/>
+        <p:nvPr/>
+      </p:nvGrpSpPr>
+      <p:grpSpPr>
+        <a:xfrm>
+          <a:off x="0" y="0"/>
+          <a:ext cx="0" cy="0"/>
+          <a:chOff x="0" y="0"/>
+          <a:chExt cx="0" cy="0"/>
+        </a:xfrm>
+      </p:grpSpPr>
+      <p:sp>
+        <p:nvSpPr>
+          <p:cNvPr id="2" name="Título 1">
+            <a:extLst>
+              <a:ext uri="{FF2B5EF4-FFF2-40B4-BE49-F238E27FC236}">
+                <a16:creationId xmlns:a16="http://schemas.microsoft.com/office/drawing/2014/main" id="{A9720919-8362-815F-5ED9-C45474B29EB3}"/>
+              </a:ext>
+            </a:extLst>
+          </p:cNvPr>
+          <p:cNvSpPr>
+            <a:spLocks noGrp="1"/>
+          </p:cNvSpPr>
+          <p:nvPr>
+            <p:ph type="title"/>
+          </p:nvPr>
+        </p:nvSpPr>
+        <p:spPr/>
+        <p:txBody>
+          <a:bodyPr/>
+          <a:lstStyle/>
+          <a:p>
+            <a:r>
+              <a:rPr lang="pt-BR" dirty="0"/>
+              <a:t>Transmissão via satélite</a:t>
+            </a:r>
+          </a:p>
+        </p:txBody>
+      </p:sp>
+      <p:pic>
+        <p:nvPicPr>
+          <p:cNvPr id="1026" name="Picture 2" descr="Artigo Como Funciona a TV por Satélite">
+            <a:extLst>
+              <a:ext uri="{FF2B5EF4-FFF2-40B4-BE49-F238E27FC236}">
+                <a16:creationId xmlns:a16="http://schemas.microsoft.com/office/drawing/2014/main" id="{0D34D90C-CDAC-8250-DEC6-A92A7932C038}"/>
+              </a:ext>
+            </a:extLst>
+          </p:cNvPr>
+          <p:cNvPicPr>
+            <a:picLocks noGrp="1" noChangeAspect="1" noChangeArrowheads="1"/>
+          </p:cNvPicPr>
+          <p:nvPr>
+            <p:ph idx="1"/>
+          </p:nvPr>
+        </p:nvPicPr>
+        <p:blipFill>
+          <a:blip r:embed="rId2">
+            <a:extLst>
+              <a:ext uri="{28A0092B-C50C-407E-A947-70E740481C1C}">
+                <a14:useLocalDpi xmlns:a14="http://schemas.microsoft.com/office/drawing/2010/main" val="0"/>
+              </a:ext>
+            </a:extLst>
+          </a:blip>
+          <a:srcRect/>
+          <a:stretch>
+            <a:fillRect/>
+          </a:stretch>
+        </p:blipFill>
+        <p:spPr bwMode="auto">
+          <a:xfrm>
+            <a:off x="3262312" y="2319178"/>
+            <a:ext cx="5195888" cy="3891901"/>
+          </a:xfrm>
+          <a:prstGeom prst="rect">
+            <a:avLst/>
+          </a:prstGeom>
+          <a:noFill/>
+          <a:extLst>
+            <a:ext uri="{909E8E84-426E-40DD-AFC4-6F175D3DCCD1}">
+              <a14:hiddenFill xmlns:a14="http://schemas.microsoft.com/office/drawing/2010/main">
+                <a:solidFill>
+                  <a:srgbClr val="FFFFFF"/>
+                </a:solidFill>
+              </a14:hiddenFill>
+            </a:ext>
+          </a:extLst>
+        </p:spPr>
+      </p:pic>
+    </p:spTree>
+    <p:extLst>
+      <p:ext uri="{BB962C8B-B14F-4D97-AF65-F5344CB8AC3E}">
+        <p14:creationId xmlns:p14="http://schemas.microsoft.com/office/powerpoint/2010/main" val="911633565"/>
+      </p:ext>
+    </p:extLst>
+  </p:cSld>
+  <p:clrMapOvr>
+    <a:masterClrMapping/>
+  </p:clrMapOvr>
+</p:sld>
+</file>
+
+<file path=ppt/slides/slide23.xml><?xml version="1.0" encoding="utf-8"?>
+<p:sld xmlns:a="http://schemas.openxmlformats.org/drawingml/2006/main" xmlns:r="http://schemas.openxmlformats.org/officeDocument/2006/relationships" xmlns:p="http://schemas.openxmlformats.org/presentationml/2006/main">
+  <p:cSld>
+    <p:spTree>
+      <p:nvGrpSpPr>
+        <p:cNvPr id="1" name=""/>
+        <p:cNvGrpSpPr/>
+        <p:nvPr/>
+      </p:nvGrpSpPr>
+      <p:grpSpPr>
+        <a:xfrm>
+          <a:off x="0" y="0"/>
+          <a:ext cx="0" cy="0"/>
+          <a:chOff x="0" y="0"/>
+          <a:chExt cx="0" cy="0"/>
+        </a:xfrm>
+      </p:grpSpPr>
+      <p:sp>
+        <p:nvSpPr>
+          <p:cNvPr id="2" name="Título 1">
+            <a:extLst>
+              <a:ext uri="{FF2B5EF4-FFF2-40B4-BE49-F238E27FC236}">
+                <a16:creationId xmlns:a16="http://schemas.microsoft.com/office/drawing/2014/main" id="{2FEC765A-EDB1-7570-9627-8F58D8F503B8}"/>
+              </a:ext>
+            </a:extLst>
+          </p:cNvPr>
+          <p:cNvSpPr>
+            <a:spLocks noGrp="1"/>
+          </p:cNvSpPr>
+          <p:nvPr>
+            <p:ph type="title"/>
+          </p:nvPr>
+        </p:nvSpPr>
+        <p:spPr/>
+        <p:txBody>
+          <a:bodyPr/>
+          <a:lstStyle/>
+          <a:p>
+            <a:r>
+              <a:rPr lang="pt-BR" dirty="0"/>
+              <a:t>CLASSIFICAÇÃO DAS REDES</a:t>
+            </a:r>
+          </a:p>
+        </p:txBody>
+      </p:sp>
+      <p:sp>
+        <p:nvSpPr>
+          <p:cNvPr id="3" name="Espaço Reservado para Conteúdo 2">
+            <a:extLst>
+              <a:ext uri="{FF2B5EF4-FFF2-40B4-BE49-F238E27FC236}">
+                <a16:creationId xmlns:a16="http://schemas.microsoft.com/office/drawing/2014/main" id="{01334B42-EA1C-E175-BF10-6999DDB79EE0}"/>
+              </a:ext>
+            </a:extLst>
+          </p:cNvPr>
+          <p:cNvSpPr>
+            <a:spLocks noGrp="1"/>
+          </p:cNvSpPr>
+          <p:nvPr>
+            <p:ph idx="1"/>
+          </p:nvPr>
+        </p:nvSpPr>
+        <p:spPr/>
+        <p:txBody>
+          <a:bodyPr>
+            <a:normAutofit fontScale="77500" lnSpcReduction="20000"/>
+          </a:bodyPr>
+          <a:lstStyle/>
+          <a:p>
+            <a:r>
+              <a:rPr lang="pt-BR" dirty="0"/>
+              <a:t>A classificação de redes em categorias pode ser feita a partir de vários critérios:</a:t>
+            </a:r>
+          </a:p>
+          <a:p>
+            <a:pPr marL="666900" lvl="1" indent="-342900">
+              <a:buFont typeface="+mj-lt"/>
+              <a:buAutoNum type="alphaLcParenR"/>
+            </a:pPr>
+            <a:r>
+              <a:rPr lang="pt-BR" dirty="0"/>
+              <a:t>dimensão ou área geográfica ocupada;</a:t>
+            </a:r>
+          </a:p>
+          <a:p>
+            <a:pPr marL="666900" lvl="1" indent="-342900">
+              <a:buFont typeface="+mj-lt"/>
+              <a:buAutoNum type="alphaLcParenR"/>
+            </a:pPr>
+            <a:r>
+              <a:rPr lang="pt-BR" dirty="0"/>
+              <a:t>capacidade de transferência de dados;</a:t>
+            </a:r>
+          </a:p>
+          <a:p>
+            <a:pPr marL="666900" lvl="1" indent="-342900">
+              <a:buFont typeface="+mj-lt"/>
+              <a:buAutoNum type="alphaLcParenR"/>
+            </a:pPr>
+            <a:r>
+              <a:rPr lang="pt-BR" dirty="0"/>
+              <a:t>topologia (forma da rede);</a:t>
+            </a:r>
+          </a:p>
+          <a:p>
+            <a:pPr marL="666900" lvl="1" indent="-342900">
+              <a:buFont typeface="+mj-lt"/>
+              <a:buAutoNum type="alphaLcParenR"/>
+            </a:pPr>
+            <a:r>
+              <a:rPr lang="pt-BR" dirty="0"/>
+              <a:t>ambiente em que se insere (rede corporativa/rede industrial);</a:t>
+            </a:r>
+          </a:p>
+          <a:p>
+            <a:pPr marL="666900" lvl="1" indent="-342900">
+              <a:buFont typeface="+mj-lt"/>
+              <a:buAutoNum type="alphaLcParenR"/>
+            </a:pPr>
+            <a:r>
+              <a:rPr lang="pt-BR" dirty="0"/>
+              <a:t>meio físico de envio de dados (redes cabeadas e redes não cabeadas);</a:t>
+            </a:r>
+          </a:p>
+          <a:p>
+            <a:pPr marL="666900" lvl="1" indent="-342900">
+              <a:buFont typeface="+mj-lt"/>
+              <a:buAutoNum type="alphaLcParenR"/>
+            </a:pPr>
+            <a:r>
+              <a:rPr lang="pt-BR" dirty="0"/>
+              <a:t>tecnologia de transmissão (redes ethernet, redes ATM). </a:t>
+            </a:r>
+            <a:br>
+              <a:rPr lang="pt-BR" dirty="0"/>
+            </a:br>
+            <a:endParaRPr lang="pt-BR" dirty="0"/>
+          </a:p>
+          <a:p>
+            <a:r>
+              <a:rPr lang="pt-BR" dirty="0"/>
+              <a:t>É convencionada a classificação das redes em locais – </a:t>
+            </a:r>
+          </a:p>
+          <a:p>
+            <a:pPr lvl="1"/>
+            <a:r>
+              <a:rPr lang="pt-BR" dirty="0" err="1"/>
+              <a:t>LANs</a:t>
+            </a:r>
+            <a:r>
+              <a:rPr lang="pt-BR" dirty="0"/>
+              <a:t> (</a:t>
+            </a:r>
+            <a:r>
+              <a:rPr lang="pt-BR" i="1" dirty="0"/>
+              <a:t>Local Area Networks</a:t>
+            </a:r>
+            <a:r>
+              <a:rPr lang="pt-BR" dirty="0"/>
+              <a:t>),</a:t>
+            </a:r>
+          </a:p>
+          <a:p>
+            <a:pPr lvl="1"/>
+            <a:r>
+              <a:rPr lang="pt-BR" dirty="0"/>
+              <a:t>Metropolitanas – </a:t>
+            </a:r>
+            <a:r>
+              <a:rPr lang="pt-BR" dirty="0" err="1"/>
+              <a:t>MANs</a:t>
+            </a:r>
+            <a:r>
+              <a:rPr lang="pt-BR" dirty="0"/>
+              <a:t> (</a:t>
+            </a:r>
+            <a:r>
+              <a:rPr lang="pt-BR" i="1" dirty="0"/>
+              <a:t>Metropolitan Area Networks</a:t>
+            </a:r>
+            <a:r>
+              <a:rPr lang="pt-BR" dirty="0"/>
+              <a:t>) e </a:t>
+            </a:r>
+          </a:p>
+          <a:p>
+            <a:pPr lvl="1"/>
+            <a:r>
+              <a:rPr lang="pt-BR" dirty="0"/>
+              <a:t>Geograficamente distribuídas – </a:t>
+            </a:r>
+            <a:r>
+              <a:rPr lang="pt-BR" dirty="0" err="1"/>
+              <a:t>WANs</a:t>
+            </a:r>
+            <a:r>
+              <a:rPr lang="pt-BR" dirty="0"/>
+              <a:t> (</a:t>
+            </a:r>
+            <a:r>
+              <a:rPr lang="pt-BR" i="1" dirty="0" err="1"/>
+              <a:t>Wide</a:t>
+            </a:r>
+            <a:r>
+              <a:rPr lang="pt-BR" i="1" dirty="0"/>
+              <a:t> Area Networks</a:t>
+            </a:r>
+            <a:r>
+              <a:rPr lang="pt-BR" dirty="0"/>
+              <a:t>). </a:t>
+            </a:r>
+            <a:br>
+              <a:rPr lang="pt-BR" dirty="0"/>
+            </a:br>
+            <a:br>
+              <a:rPr lang="pt-BR" dirty="0"/>
+            </a:br>
+            <a:endParaRPr lang="pt-BR" dirty="0"/>
+          </a:p>
+        </p:txBody>
+      </p:sp>
+    </p:spTree>
+    <p:extLst>
+      <p:ext uri="{BB962C8B-B14F-4D97-AF65-F5344CB8AC3E}">
+        <p14:creationId xmlns:p14="http://schemas.microsoft.com/office/powerpoint/2010/main" val="1769726290"/>
+      </p:ext>
+    </p:extLst>
+  </p:cSld>
+  <p:clrMapOvr>
+    <a:masterClrMapping/>
+  </p:clrMapOvr>
+</p:sld>
+</file>
+
+<file path=ppt/slides/slide24.xml><?xml version="1.0" encoding="utf-8"?>
+<p:sld xmlns:a="http://schemas.openxmlformats.org/drawingml/2006/main" xmlns:r="http://schemas.openxmlformats.org/officeDocument/2006/relationships" xmlns:p="http://schemas.openxmlformats.org/presentationml/2006/main">
+  <p:cSld>
+    <p:spTree>
+      <p:nvGrpSpPr>
+        <p:cNvPr id="1" name="">
+          <a:extLst>
+            <a:ext uri="{FF2B5EF4-FFF2-40B4-BE49-F238E27FC236}">
+              <a16:creationId xmlns:a16="http://schemas.microsoft.com/office/drawing/2014/main" id="{B659ABCC-F449-0078-9612-22BDEB52E327}"/>
+            </a:ext>
+          </a:extLst>
+        </p:cNvPr>
+        <p:cNvGrpSpPr/>
+        <p:nvPr/>
+      </p:nvGrpSpPr>
+      <p:grpSpPr>
+        <a:xfrm>
+          <a:off x="0" y="0"/>
+          <a:ext cx="0" cy="0"/>
+          <a:chOff x="0" y="0"/>
+          <a:chExt cx="0" cy="0"/>
+        </a:xfrm>
+      </p:grpSpPr>
+      <p:sp>
+        <p:nvSpPr>
+          <p:cNvPr id="2" name="Título 1">
+            <a:extLst>
+              <a:ext uri="{FF2B5EF4-FFF2-40B4-BE49-F238E27FC236}">
+                <a16:creationId xmlns:a16="http://schemas.microsoft.com/office/drawing/2014/main" id="{A4E8D7E8-FBE3-9169-3A78-11C83A9361C9}"/>
+              </a:ext>
+            </a:extLst>
+          </p:cNvPr>
+          <p:cNvSpPr>
+            <a:spLocks noGrp="1"/>
+          </p:cNvSpPr>
+          <p:nvPr>
+            <p:ph type="title"/>
+          </p:nvPr>
+        </p:nvSpPr>
+        <p:spPr/>
+        <p:txBody>
+          <a:bodyPr/>
+          <a:lstStyle/>
+          <a:p>
+            <a:r>
+              <a:rPr lang="pt-BR" dirty="0"/>
+              <a:t>CLASSIFICAÇÃO DAS REDES</a:t>
+            </a:r>
+          </a:p>
+        </p:txBody>
+      </p:sp>
+      <p:sp>
+        <p:nvSpPr>
+          <p:cNvPr id="3" name="Espaço Reservado para Conteúdo 2">
+            <a:extLst>
+              <a:ext uri="{FF2B5EF4-FFF2-40B4-BE49-F238E27FC236}">
+                <a16:creationId xmlns:a16="http://schemas.microsoft.com/office/drawing/2014/main" id="{62F0B93E-99EC-7EC8-5C9A-7E1B5356219E}"/>
+              </a:ext>
+            </a:extLst>
+          </p:cNvPr>
+          <p:cNvSpPr>
+            <a:spLocks noGrp="1"/>
+          </p:cNvSpPr>
+          <p:nvPr>
+            <p:ph idx="1"/>
+          </p:nvPr>
+        </p:nvSpPr>
+        <p:spPr>
+          <a:xfrm>
+            <a:off x="581193" y="2180496"/>
+            <a:ext cx="5033224" cy="3678303"/>
+          </a:xfrm>
+        </p:spPr>
+        <p:txBody>
+          <a:bodyPr>
+            <a:normAutofit lnSpcReduction="10000"/>
+          </a:bodyPr>
+          <a:lstStyle/>
+          <a:p>
+            <a:r>
+              <a:rPr lang="pt-BR" dirty="0" err="1"/>
+              <a:t>PANs</a:t>
+            </a:r>
+            <a:r>
+              <a:rPr lang="pt-BR" dirty="0"/>
+              <a:t> (</a:t>
+            </a:r>
+            <a:r>
+              <a:rPr lang="pt-BR" i="1" dirty="0"/>
+              <a:t>Personal Area Networks</a:t>
+            </a:r>
+            <a:r>
+              <a:rPr lang="pt-BR" dirty="0"/>
+              <a:t>),	</a:t>
+            </a:r>
+          </a:p>
+          <a:p>
+            <a:pPr lvl="1"/>
+            <a:r>
+              <a:rPr lang="pt-BR" dirty="0"/>
+              <a:t>Curtíssima extensão geográfica: cobre apenas algumas dezenas de metros</a:t>
+            </a:r>
+          </a:p>
+          <a:p>
+            <a:pPr lvl="1"/>
+            <a:r>
+              <a:rPr lang="pt-BR" dirty="0"/>
+              <a:t>Taxa de transferência relativamente baixa, em torno de 2Mbps</a:t>
+            </a:r>
+          </a:p>
+          <a:p>
+            <a:pPr lvl="1"/>
+            <a:r>
+              <a:rPr lang="pt-BR" dirty="0"/>
+              <a:t>Tecnologia relativamente nova: riscos de segurança</a:t>
+            </a:r>
+          </a:p>
+          <a:p>
+            <a:pPr lvl="1"/>
+            <a:r>
+              <a:rPr lang="pt-BR" dirty="0"/>
+              <a:t>Centraliza as operações em uma única pessoa: foco na comunicação de um único usuário e na comunicação de um dispositivo com outro</a:t>
+            </a:r>
+          </a:p>
+          <a:p>
+            <a:pPr lvl="1"/>
+            <a:r>
+              <a:rPr lang="pt-BR" dirty="0"/>
+              <a:t>Bluetooth, infravermelho </a:t>
+            </a:r>
+            <a:r>
+              <a:rPr lang="pt-BR" dirty="0" err="1"/>
+              <a:t>etc</a:t>
+            </a:r>
+            <a:br>
+              <a:rPr lang="pt-BR" dirty="0"/>
+            </a:br>
+            <a:br>
+              <a:rPr lang="pt-BR" dirty="0"/>
+            </a:br>
+            <a:br>
+              <a:rPr lang="pt-BR" dirty="0"/>
+            </a:br>
+            <a:endParaRPr lang="pt-BR" dirty="0"/>
+          </a:p>
+        </p:txBody>
+      </p:sp>
+      <p:pic>
+        <p:nvPicPr>
+          <p:cNvPr id="1026" name="Picture 2" descr="Tipos de redes: PAN, LAN, MAN, WAN – CONEXIÓN DE REDES">
+            <a:extLst>
+              <a:ext uri="{FF2B5EF4-FFF2-40B4-BE49-F238E27FC236}">
+                <a16:creationId xmlns:a16="http://schemas.microsoft.com/office/drawing/2014/main" id="{1AB1874A-6B34-BD22-361A-D25E7051AE39}"/>
+              </a:ext>
+            </a:extLst>
+          </p:cNvPr>
+          <p:cNvPicPr>
+            <a:picLocks noChangeAspect="1" noChangeArrowheads="1"/>
+          </p:cNvPicPr>
+          <p:nvPr/>
+        </p:nvPicPr>
+        <p:blipFill>
+          <a:blip r:embed="rId2">
+            <a:clrChange>
+              <a:clrFrom>
+                <a:srgbClr val="FFFFFF"/>
+              </a:clrFrom>
+              <a:clrTo>
+                <a:srgbClr val="FFFFFF">
+                  <a:alpha val="0"/>
+                </a:srgbClr>
+              </a:clrTo>
+            </a:clrChange>
+            <a:extLst>
+              <a:ext uri="{28A0092B-C50C-407E-A947-70E740481C1C}">
+                <a14:useLocalDpi xmlns:a14="http://schemas.microsoft.com/office/drawing/2010/main" val="0"/>
+              </a:ext>
+            </a:extLst>
+          </a:blip>
+          <a:srcRect/>
+          <a:stretch>
+            <a:fillRect/>
+          </a:stretch>
+        </p:blipFill>
+        <p:spPr bwMode="auto">
+          <a:xfrm>
+            <a:off x="6096000" y="2180496"/>
+            <a:ext cx="5638800" cy="3740590"/>
+          </a:xfrm>
+          <a:prstGeom prst="rect">
+            <a:avLst/>
+          </a:prstGeom>
+          <a:noFill/>
+          <a:extLst>
+            <a:ext uri="{909E8E84-426E-40DD-AFC4-6F175D3DCCD1}">
+              <a14:hiddenFill xmlns:a14="http://schemas.microsoft.com/office/drawing/2010/main">
+                <a:solidFill>
+                  <a:srgbClr val="FFFFFF"/>
+                </a:solidFill>
+              </a14:hiddenFill>
+            </a:ext>
+          </a:extLst>
+        </p:spPr>
+      </p:pic>
+    </p:spTree>
+    <p:extLst>
+      <p:ext uri="{BB962C8B-B14F-4D97-AF65-F5344CB8AC3E}">
+        <p14:creationId xmlns:p14="http://schemas.microsoft.com/office/powerpoint/2010/main" val="1716036987"/>
+      </p:ext>
+    </p:extLst>
+  </p:cSld>
+  <p:clrMapOvr>
+    <a:masterClrMapping/>
+  </p:clrMapOvr>
+</p:sld>
+</file>
+
+<file path=ppt/slides/slide25.xml><?xml version="1.0" encoding="utf-8"?>
+<p:sld xmlns:a="http://schemas.openxmlformats.org/drawingml/2006/main" xmlns:r="http://schemas.openxmlformats.org/officeDocument/2006/relationships" xmlns:p="http://schemas.openxmlformats.org/presentationml/2006/main">
+  <p:cSld>
+    <p:spTree>
+      <p:nvGrpSpPr>
+        <p:cNvPr id="1" name="">
+          <a:extLst>
+            <a:ext uri="{FF2B5EF4-FFF2-40B4-BE49-F238E27FC236}">
+              <a16:creationId xmlns:a16="http://schemas.microsoft.com/office/drawing/2014/main" id="{14B6FFA4-58EA-479C-C540-E1FEC104BF7D}"/>
+            </a:ext>
+          </a:extLst>
+        </p:cNvPr>
+        <p:cNvGrpSpPr/>
+        <p:nvPr/>
+      </p:nvGrpSpPr>
+      <p:grpSpPr>
+        <a:xfrm>
+          <a:off x="0" y="0"/>
+          <a:ext cx="0" cy="0"/>
+          <a:chOff x="0" y="0"/>
+          <a:chExt cx="0" cy="0"/>
+        </a:xfrm>
+      </p:grpSpPr>
+      <p:sp>
+        <p:nvSpPr>
+          <p:cNvPr id="2" name="Título 1">
+            <a:extLst>
+              <a:ext uri="{FF2B5EF4-FFF2-40B4-BE49-F238E27FC236}">
+                <a16:creationId xmlns:a16="http://schemas.microsoft.com/office/drawing/2014/main" id="{0EBB59A8-D7DE-36FF-33AD-50E022583124}"/>
+              </a:ext>
+            </a:extLst>
+          </p:cNvPr>
+          <p:cNvSpPr>
+            <a:spLocks noGrp="1"/>
+          </p:cNvSpPr>
+          <p:nvPr>
+            <p:ph type="title"/>
+          </p:nvPr>
+        </p:nvSpPr>
+        <p:spPr/>
+        <p:txBody>
+          <a:bodyPr/>
+          <a:lstStyle/>
+          <a:p>
+            <a:r>
+              <a:rPr lang="pt-BR" dirty="0"/>
+              <a:t>CLASSIFICAÇÃO DAS REDES</a:t>
+            </a:r>
+          </a:p>
+        </p:txBody>
+      </p:sp>
+      <p:sp>
+        <p:nvSpPr>
+          <p:cNvPr id="3" name="Espaço Reservado para Conteúdo 2">
+            <a:extLst>
+              <a:ext uri="{FF2B5EF4-FFF2-40B4-BE49-F238E27FC236}">
+                <a16:creationId xmlns:a16="http://schemas.microsoft.com/office/drawing/2014/main" id="{0DEED0AA-4AE6-C3FA-A1D8-86AAD41886C7}"/>
+              </a:ext>
+            </a:extLst>
+          </p:cNvPr>
+          <p:cNvSpPr>
+            <a:spLocks noGrp="1"/>
+          </p:cNvSpPr>
+          <p:nvPr>
+            <p:ph idx="1"/>
+          </p:nvPr>
+        </p:nvSpPr>
+        <p:spPr>
+          <a:xfrm>
+            <a:off x="581193" y="2180496"/>
+            <a:ext cx="5033224" cy="3678303"/>
+          </a:xfrm>
+        </p:spPr>
+        <p:txBody>
+          <a:bodyPr>
+            <a:normAutofit fontScale="92500" lnSpcReduction="20000"/>
+          </a:bodyPr>
+          <a:lstStyle/>
+          <a:p>
+            <a:r>
+              <a:rPr lang="pt-BR" dirty="0" err="1"/>
+              <a:t>LANs</a:t>
+            </a:r>
+            <a:r>
+              <a:rPr lang="pt-BR" dirty="0"/>
+              <a:t> (</a:t>
+            </a:r>
+            <a:r>
+              <a:rPr lang="pt-BR" i="1" dirty="0"/>
+              <a:t>Local Area Networks</a:t>
+            </a:r>
+            <a:r>
+              <a:rPr lang="pt-BR" dirty="0"/>
+              <a:t>),	</a:t>
+            </a:r>
+          </a:p>
+          <a:p>
+            <a:r>
+              <a:rPr lang="pt-BR" dirty="0"/>
+              <a:t>baixo custo e simplicidade </a:t>
+            </a:r>
+          </a:p>
+          <a:p>
+            <a:r>
+              <a:rPr lang="pt-BR" dirty="0"/>
+              <a:t>estão limitadas a apenas alguns quilômetros de extensão, como um campus universitário, um edifício, uma casa etc. </a:t>
+            </a:r>
+          </a:p>
+          <a:p>
+            <a:r>
+              <a:rPr lang="pt-BR" dirty="0"/>
+              <a:t>o acesso a esse tipo de rede é feito através de computadores pessoais ou estações de trabalho. </a:t>
+            </a:r>
+            <a:br>
+              <a:rPr lang="pt-BR" dirty="0"/>
+            </a:br>
+            <a:r>
+              <a:rPr lang="pt-BR" dirty="0"/>
+              <a:t>As duas tecnologias mais comuns são a transmissão através de cabos (coaxial, fibra óptica etc.) e a transmissão sem fio, também chamada de WLAN (</a:t>
+            </a:r>
+            <a:r>
+              <a:rPr lang="pt-BR" i="1" dirty="0"/>
+              <a:t>wireless </a:t>
+            </a:r>
+            <a:r>
+              <a:rPr lang="pt-BR" dirty="0"/>
+              <a:t>LAN) </a:t>
+            </a:r>
+          </a:p>
+          <a:p>
+            <a:r>
+              <a:rPr lang="pt-BR" dirty="0"/>
+              <a:t>A velocidade de transmissão de uma LAN varia de 10 Mbps até 10 Gbps, com baixíssimas taxas de erro ou atraso. </a:t>
+            </a:r>
+          </a:p>
+        </p:txBody>
+      </p:sp>
+      <p:pic>
+        <p:nvPicPr>
+          <p:cNvPr id="2050" name="Picture 2" descr="What is local area network (LAN) in computer – IT Release">
+            <a:extLst>
+              <a:ext uri="{FF2B5EF4-FFF2-40B4-BE49-F238E27FC236}">
+                <a16:creationId xmlns:a16="http://schemas.microsoft.com/office/drawing/2014/main" id="{2F1F8EB2-4E52-78E7-36FC-29C42498FC83}"/>
+              </a:ext>
+            </a:extLst>
+          </p:cNvPr>
+          <p:cNvPicPr>
+            <a:picLocks noChangeAspect="1" noChangeArrowheads="1"/>
+          </p:cNvPicPr>
+          <p:nvPr/>
+        </p:nvPicPr>
+        <p:blipFill>
+          <a:blip r:embed="rId2">
+            <a:extLst>
+              <a:ext uri="{28A0092B-C50C-407E-A947-70E740481C1C}">
+                <a14:useLocalDpi xmlns:a14="http://schemas.microsoft.com/office/drawing/2010/main" val="0"/>
+              </a:ext>
+            </a:extLst>
+          </a:blip>
+          <a:srcRect/>
+          <a:stretch>
+            <a:fillRect/>
+          </a:stretch>
+        </p:blipFill>
+        <p:spPr bwMode="auto">
+          <a:xfrm>
+            <a:off x="5742243" y="2014548"/>
+            <a:ext cx="5444999" cy="3960000"/>
+          </a:xfrm>
+          <a:prstGeom prst="rect">
+            <a:avLst/>
+          </a:prstGeom>
+          <a:noFill/>
+          <a:extLst>
+            <a:ext uri="{909E8E84-426E-40DD-AFC4-6F175D3DCCD1}">
+              <a14:hiddenFill xmlns:a14="http://schemas.microsoft.com/office/drawing/2010/main">
+                <a:solidFill>
+                  <a:srgbClr val="FFFFFF"/>
+                </a:solidFill>
+              </a14:hiddenFill>
+            </a:ext>
+          </a:extLst>
+        </p:spPr>
+      </p:pic>
+      <p:sp>
+        <p:nvSpPr>
+          <p:cNvPr id="4" name="CaixaDeTexto 3">
+            <a:extLst>
+              <a:ext uri="{FF2B5EF4-FFF2-40B4-BE49-F238E27FC236}">
+                <a16:creationId xmlns:a16="http://schemas.microsoft.com/office/drawing/2014/main" id="{9293006D-909D-E42C-8639-6EA586CB28A0}"/>
+              </a:ext>
+            </a:extLst>
+          </p:cNvPr>
+          <p:cNvSpPr txBox="1"/>
+          <p:nvPr/>
+        </p:nvSpPr>
+        <p:spPr>
+          <a:xfrm>
+            <a:off x="6096000" y="5894234"/>
+            <a:ext cx="4823756" cy="261610"/>
+          </a:xfrm>
+          <a:prstGeom prst="rect">
+            <a:avLst/>
+          </a:prstGeom>
+          <a:noFill/>
+        </p:spPr>
+        <p:txBody>
+          <a:bodyPr wrap="none" rtlCol="0">
+            <a:spAutoFit/>
+          </a:bodyPr>
+          <a:lstStyle/>
+          <a:p>
+            <a:r>
+              <a:rPr lang="pt-BR" sz="1100" dirty="0">
+                <a:solidFill>
+                  <a:schemeClr val="bg1">
+                    <a:lumMod val="75000"/>
+                  </a:schemeClr>
+                </a:solidFill>
+              </a:rPr>
+              <a:t>Fonte: https://itrelease.com/2021/04/what-is-local-area-network-lan-in-computer/</a:t>
+            </a:r>
+          </a:p>
+        </p:txBody>
+      </p:sp>
+    </p:spTree>
+    <p:extLst>
+      <p:ext uri="{BB962C8B-B14F-4D97-AF65-F5344CB8AC3E}">
+        <p14:creationId xmlns:p14="http://schemas.microsoft.com/office/powerpoint/2010/main" val="2093014187"/>
+      </p:ext>
+    </p:extLst>
+  </p:cSld>
+  <p:clrMapOvr>
+    <a:masterClrMapping/>
+  </p:clrMapOvr>
+</p:sld>
+</file>
+
+<file path=ppt/slides/slide26.xml><?xml version="1.0" encoding="utf-8"?>
+<p:sld xmlns:a="http://schemas.openxmlformats.org/drawingml/2006/main" xmlns:r="http://schemas.openxmlformats.org/officeDocument/2006/relationships" xmlns:p="http://schemas.openxmlformats.org/presentationml/2006/main">
+  <p:cSld>
+    <p:spTree>
+      <p:nvGrpSpPr>
+        <p:cNvPr id="1" name="">
+          <a:extLst>
+            <a:ext uri="{FF2B5EF4-FFF2-40B4-BE49-F238E27FC236}">
+              <a16:creationId xmlns:a16="http://schemas.microsoft.com/office/drawing/2014/main" id="{06F5CE68-D015-00E5-00DB-6B41EFA688F8}"/>
+            </a:ext>
+          </a:extLst>
+        </p:cNvPr>
+        <p:cNvGrpSpPr/>
+        <p:nvPr/>
+      </p:nvGrpSpPr>
+      <p:grpSpPr>
+        <a:xfrm>
+          <a:off x="0" y="0"/>
+          <a:ext cx="0" cy="0"/>
+          <a:chOff x="0" y="0"/>
+          <a:chExt cx="0" cy="0"/>
+        </a:xfrm>
+      </p:grpSpPr>
+      <p:sp>
+        <p:nvSpPr>
+          <p:cNvPr id="2" name="Título 1">
+            <a:extLst>
+              <a:ext uri="{FF2B5EF4-FFF2-40B4-BE49-F238E27FC236}">
+                <a16:creationId xmlns:a16="http://schemas.microsoft.com/office/drawing/2014/main" id="{4C1B62BB-8937-F45E-A49D-DA92788BEBA0}"/>
+              </a:ext>
+            </a:extLst>
+          </p:cNvPr>
+          <p:cNvSpPr>
+            <a:spLocks noGrp="1"/>
+          </p:cNvSpPr>
+          <p:nvPr>
+            <p:ph type="title"/>
+          </p:nvPr>
+        </p:nvSpPr>
+        <p:spPr/>
+        <p:txBody>
+          <a:bodyPr/>
+          <a:lstStyle/>
+          <a:p>
+            <a:r>
+              <a:rPr lang="pt-BR" dirty="0"/>
+              <a:t>CLASSIFICAÇÃO DAS REDES</a:t>
+            </a:r>
+          </a:p>
+        </p:txBody>
+      </p:sp>
+      <p:sp>
+        <p:nvSpPr>
+          <p:cNvPr id="3" name="Espaço Reservado para Conteúdo 2">
+            <a:extLst>
+              <a:ext uri="{FF2B5EF4-FFF2-40B4-BE49-F238E27FC236}">
+                <a16:creationId xmlns:a16="http://schemas.microsoft.com/office/drawing/2014/main" id="{FBA4E312-1DCB-B2CB-55BA-479E4C2DD5D3}"/>
+              </a:ext>
+            </a:extLst>
+          </p:cNvPr>
+          <p:cNvSpPr>
+            <a:spLocks noGrp="1"/>
+          </p:cNvSpPr>
+          <p:nvPr>
+            <p:ph idx="1"/>
+          </p:nvPr>
+        </p:nvSpPr>
+        <p:spPr>
+          <a:xfrm>
+            <a:off x="581193" y="2180496"/>
+            <a:ext cx="5033224" cy="3678303"/>
+          </a:xfrm>
+        </p:spPr>
+        <p:txBody>
+          <a:bodyPr>
+            <a:normAutofit/>
+          </a:bodyPr>
+          <a:lstStyle/>
+          <a:p>
+            <a:r>
+              <a:rPr lang="pt-BR" dirty="0" err="1"/>
+              <a:t>LANs</a:t>
+            </a:r>
+            <a:r>
+              <a:rPr lang="pt-BR" dirty="0"/>
+              <a:t> (</a:t>
+            </a:r>
+            <a:r>
+              <a:rPr lang="pt-BR" i="1" dirty="0"/>
+              <a:t>Local Area Networks</a:t>
+            </a:r>
+            <a:r>
+              <a:rPr lang="pt-BR" dirty="0"/>
+              <a:t>),	</a:t>
+            </a:r>
+          </a:p>
+          <a:p>
+            <a:r>
+              <a:rPr lang="pt-BR" dirty="0"/>
+              <a:t>Principais motivos de uso</a:t>
+            </a:r>
+          </a:p>
+          <a:p>
+            <a:pPr lvl="1"/>
+            <a:r>
+              <a:rPr lang="pt-BR" dirty="0"/>
+              <a:t>Mobilidade para o usuário: </a:t>
+            </a:r>
+          </a:p>
+          <a:p>
+            <a:pPr lvl="1"/>
+            <a:r>
+              <a:rPr lang="pt-BR" dirty="0"/>
+              <a:t>Instalação facilitada e de custo reduzido:</a:t>
+            </a:r>
+          </a:p>
+          <a:p>
+            <a:pPr lvl="1"/>
+            <a:r>
+              <a:rPr lang="pt-BR" dirty="0"/>
+              <a:t>Dispositivos compatíveis </a:t>
+            </a:r>
+          </a:p>
+        </p:txBody>
+      </p:sp>
+      <p:pic>
+        <p:nvPicPr>
+          <p:cNvPr id="2050" name="Picture 2" descr="What is local area network (LAN) in computer – IT Release">
+            <a:extLst>
+              <a:ext uri="{FF2B5EF4-FFF2-40B4-BE49-F238E27FC236}">
+                <a16:creationId xmlns:a16="http://schemas.microsoft.com/office/drawing/2014/main" id="{31AAABB4-27AA-6C65-BE34-0AC196A1D276}"/>
+              </a:ext>
+            </a:extLst>
+          </p:cNvPr>
+          <p:cNvPicPr>
+            <a:picLocks noChangeAspect="1" noChangeArrowheads="1"/>
+          </p:cNvPicPr>
+          <p:nvPr/>
+        </p:nvPicPr>
+        <p:blipFill>
+          <a:blip r:embed="rId2">
+            <a:extLst>
+              <a:ext uri="{28A0092B-C50C-407E-A947-70E740481C1C}">
+                <a14:useLocalDpi xmlns:a14="http://schemas.microsoft.com/office/drawing/2010/main" val="0"/>
+              </a:ext>
+            </a:extLst>
+          </a:blip>
+          <a:srcRect/>
+          <a:stretch>
+            <a:fillRect/>
+          </a:stretch>
+        </p:blipFill>
+        <p:spPr bwMode="auto">
+          <a:xfrm>
+            <a:off x="5742243" y="2014548"/>
+            <a:ext cx="5444999" cy="3960000"/>
+          </a:xfrm>
+          <a:prstGeom prst="rect">
+            <a:avLst/>
+          </a:prstGeom>
+          <a:noFill/>
+          <a:extLst>
+            <a:ext uri="{909E8E84-426E-40DD-AFC4-6F175D3DCCD1}">
+              <a14:hiddenFill xmlns:a14="http://schemas.microsoft.com/office/drawing/2010/main">
+                <a:solidFill>
+                  <a:srgbClr val="FFFFFF"/>
+                </a:solidFill>
+              </a14:hiddenFill>
+            </a:ext>
+          </a:extLst>
+        </p:spPr>
+      </p:pic>
+      <p:sp>
+        <p:nvSpPr>
+          <p:cNvPr id="4" name="CaixaDeTexto 3">
+            <a:extLst>
+              <a:ext uri="{FF2B5EF4-FFF2-40B4-BE49-F238E27FC236}">
+                <a16:creationId xmlns:a16="http://schemas.microsoft.com/office/drawing/2014/main" id="{047617A7-39B0-B7B1-AE66-F8AD1674B579}"/>
+              </a:ext>
+            </a:extLst>
+          </p:cNvPr>
+          <p:cNvSpPr txBox="1"/>
+          <p:nvPr/>
+        </p:nvSpPr>
+        <p:spPr>
+          <a:xfrm>
+            <a:off x="6096000" y="5894234"/>
+            <a:ext cx="4823756" cy="261610"/>
+          </a:xfrm>
+          <a:prstGeom prst="rect">
+            <a:avLst/>
+          </a:prstGeom>
+          <a:noFill/>
+        </p:spPr>
+        <p:txBody>
+          <a:bodyPr wrap="none" rtlCol="0">
+            <a:spAutoFit/>
+          </a:bodyPr>
+          <a:lstStyle/>
+          <a:p>
+            <a:r>
+              <a:rPr lang="pt-BR" sz="1100" dirty="0">
+                <a:solidFill>
+                  <a:schemeClr val="bg1">
+                    <a:lumMod val="75000"/>
+                  </a:schemeClr>
+                </a:solidFill>
+              </a:rPr>
+              <a:t>Fonte: https://itrelease.com/2021/04/what-is-local-area-network-lan-in-computer/</a:t>
+            </a:r>
+          </a:p>
+        </p:txBody>
+      </p:sp>
+    </p:spTree>
+    <p:extLst>
+      <p:ext uri="{BB962C8B-B14F-4D97-AF65-F5344CB8AC3E}">
+        <p14:creationId xmlns:p14="http://schemas.microsoft.com/office/powerpoint/2010/main" val="2316626432"/>
+      </p:ext>
+    </p:extLst>
+  </p:cSld>
+  <p:clrMapOvr>
+    <a:masterClrMapping/>
+  </p:clrMapOvr>
+</p:sld>
+</file>
+
+<file path=ppt/slides/slide27.xml><?xml version="1.0" encoding="utf-8"?>
+<p:sld xmlns:a="http://schemas.openxmlformats.org/drawingml/2006/main" xmlns:r="http://schemas.openxmlformats.org/officeDocument/2006/relationships" xmlns:p="http://schemas.openxmlformats.org/presentationml/2006/main">
+  <p:cSld>
+    <p:spTree>
+      <p:nvGrpSpPr>
+        <p:cNvPr id="1" name="">
+          <a:extLst>
+            <a:ext uri="{FF2B5EF4-FFF2-40B4-BE49-F238E27FC236}">
+              <a16:creationId xmlns:a16="http://schemas.microsoft.com/office/drawing/2014/main" id="{08B191A0-9F6B-2414-F293-28D23A97AC21}"/>
+            </a:ext>
+          </a:extLst>
+        </p:cNvPr>
+        <p:cNvGrpSpPr/>
+        <p:nvPr/>
+      </p:nvGrpSpPr>
+      <p:grpSpPr>
+        <a:xfrm>
+          <a:off x="0" y="0"/>
+          <a:ext cx="0" cy="0"/>
+          <a:chOff x="0" y="0"/>
+          <a:chExt cx="0" cy="0"/>
+        </a:xfrm>
+      </p:grpSpPr>
+      <p:sp>
+        <p:nvSpPr>
+          <p:cNvPr id="2" name="Título 1">
+            <a:extLst>
+              <a:ext uri="{FF2B5EF4-FFF2-40B4-BE49-F238E27FC236}">
+                <a16:creationId xmlns:a16="http://schemas.microsoft.com/office/drawing/2014/main" id="{3E797601-DEEA-888C-4AD3-8C8594FAEFAE}"/>
+              </a:ext>
+            </a:extLst>
+          </p:cNvPr>
+          <p:cNvSpPr>
+            <a:spLocks noGrp="1"/>
+          </p:cNvSpPr>
+          <p:nvPr>
+            <p:ph type="title"/>
+          </p:nvPr>
+        </p:nvSpPr>
+        <p:spPr/>
+        <p:txBody>
+          <a:bodyPr/>
+          <a:lstStyle/>
+          <a:p>
+            <a:r>
+              <a:rPr lang="pt-BR" dirty="0"/>
+              <a:t>CLASSIFICAÇÃO DAS REDES</a:t>
+            </a:r>
+          </a:p>
+        </p:txBody>
+      </p:sp>
+      <p:sp>
+        <p:nvSpPr>
+          <p:cNvPr id="3" name="Espaço Reservado para Conteúdo 2">
+            <a:extLst>
+              <a:ext uri="{FF2B5EF4-FFF2-40B4-BE49-F238E27FC236}">
+                <a16:creationId xmlns:a16="http://schemas.microsoft.com/office/drawing/2014/main" id="{CB2474BF-937E-A168-29E8-61C617BC723B}"/>
+              </a:ext>
+            </a:extLst>
+          </p:cNvPr>
+          <p:cNvSpPr>
+            <a:spLocks noGrp="1"/>
+          </p:cNvSpPr>
+          <p:nvPr>
+            <p:ph idx="1"/>
+          </p:nvPr>
+        </p:nvSpPr>
+        <p:spPr>
+          <a:xfrm>
+            <a:off x="581193" y="2180496"/>
+            <a:ext cx="5033224" cy="3678303"/>
+          </a:xfrm>
+        </p:spPr>
+        <p:txBody>
+          <a:bodyPr>
+            <a:normAutofit fontScale="92500" lnSpcReduction="20000"/>
+          </a:bodyPr>
+          <a:lstStyle/>
+          <a:p>
+            <a:r>
+              <a:rPr lang="pt-BR" dirty="0"/>
+              <a:t>MAN (</a:t>
+            </a:r>
+            <a:r>
+              <a:rPr lang="pt-BR" i="1" dirty="0"/>
+              <a:t>Metropolitan Area Networks</a:t>
+            </a:r>
+            <a:r>
+              <a:rPr lang="pt-BR" dirty="0"/>
+              <a:t>),	</a:t>
+            </a:r>
+          </a:p>
+          <a:p>
+            <a:r>
+              <a:rPr lang="pt-BR" dirty="0"/>
+              <a:t>Podem ser entendidas como aquelas que proveem a interligação das redes locais em uma área metropolitana de uma determinada região: rede de TV a cabo</a:t>
+            </a:r>
+          </a:p>
+          <a:p>
+            <a:r>
+              <a:rPr lang="pt-BR" dirty="0"/>
+              <a:t>São administradas por empresas que oferecem o serviço ao usuário</a:t>
+            </a:r>
+          </a:p>
+          <a:p>
+            <a:r>
+              <a:rPr lang="pt-BR" dirty="0"/>
+              <a:t>Esses tipos de rede cobrem uma extensão de centenas de quilômetros e sua velocidade de transmissão de informação varia de 155 Mbps até 10 Gbps</a:t>
+            </a:r>
+          </a:p>
+          <a:p>
+            <a:r>
+              <a:rPr lang="pt-BR" dirty="0"/>
+              <a:t>O meio utilizado para a transmissão normalmente são os cabos de fibra óptica e canais de radiofrequência. </a:t>
+            </a:r>
+          </a:p>
+        </p:txBody>
+      </p:sp>
+      <p:pic>
+        <p:nvPicPr>
+          <p:cNvPr id="6" name="Imagem 5">
+            <a:extLst>
+              <a:ext uri="{FF2B5EF4-FFF2-40B4-BE49-F238E27FC236}">
+                <a16:creationId xmlns:a16="http://schemas.microsoft.com/office/drawing/2014/main" id="{277C92C9-5894-FEF4-B437-3F0FAE7C2E2B}"/>
+              </a:ext>
+            </a:extLst>
+          </p:cNvPr>
+          <p:cNvPicPr>
+            <a:picLocks noChangeAspect="1"/>
+          </p:cNvPicPr>
+          <p:nvPr/>
+        </p:nvPicPr>
+        <p:blipFill>
+          <a:blip r:embed="rId2"/>
+          <a:stretch>
+            <a:fillRect/>
+          </a:stretch>
+        </p:blipFill>
+        <p:spPr>
+          <a:xfrm>
+            <a:off x="6241351" y="2180496"/>
+            <a:ext cx="5140092" cy="3960000"/>
+          </a:xfrm>
+          <a:prstGeom prst="rect">
+            <a:avLst/>
+          </a:prstGeom>
+        </p:spPr>
+      </p:pic>
+    </p:spTree>
+    <p:extLst>
+      <p:ext uri="{BB962C8B-B14F-4D97-AF65-F5344CB8AC3E}">
+        <p14:creationId xmlns:p14="http://schemas.microsoft.com/office/powerpoint/2010/main" val="2680548119"/>
+      </p:ext>
+    </p:extLst>
+  </p:cSld>
+  <p:clrMapOvr>
+    <a:masterClrMapping/>
+  </p:clrMapOvr>
+</p:sld>
+</file>
+
+<file path=ppt/slides/slide28.xml><?xml version="1.0" encoding="utf-8"?>
+<p:sld xmlns:a="http://schemas.openxmlformats.org/drawingml/2006/main" xmlns:r="http://schemas.openxmlformats.org/officeDocument/2006/relationships" xmlns:p="http://schemas.openxmlformats.org/presentationml/2006/main">
+  <p:cSld>
+    <p:spTree>
+      <p:nvGrpSpPr>
+        <p:cNvPr id="1" name="">
+          <a:extLst>
+            <a:ext uri="{FF2B5EF4-FFF2-40B4-BE49-F238E27FC236}">
+              <a16:creationId xmlns:a16="http://schemas.microsoft.com/office/drawing/2014/main" id="{0AF7E29F-07E8-9E8C-68EC-B4BA09095D21}"/>
+            </a:ext>
+          </a:extLst>
+        </p:cNvPr>
+        <p:cNvGrpSpPr/>
+        <p:nvPr/>
+      </p:nvGrpSpPr>
+      <p:grpSpPr>
+        <a:xfrm>
+          <a:off x="0" y="0"/>
+          <a:ext cx="0" cy="0"/>
+          <a:chOff x="0" y="0"/>
+          <a:chExt cx="0" cy="0"/>
+        </a:xfrm>
+      </p:grpSpPr>
+      <p:sp>
+        <p:nvSpPr>
+          <p:cNvPr id="2" name="Título 1">
+            <a:extLst>
+              <a:ext uri="{FF2B5EF4-FFF2-40B4-BE49-F238E27FC236}">
+                <a16:creationId xmlns:a16="http://schemas.microsoft.com/office/drawing/2014/main" id="{658E2EA8-F303-FA6D-F76A-5766A9ED266E}"/>
+              </a:ext>
+            </a:extLst>
+          </p:cNvPr>
+          <p:cNvSpPr>
+            <a:spLocks noGrp="1"/>
+          </p:cNvSpPr>
+          <p:nvPr>
+            <p:ph type="title"/>
+          </p:nvPr>
+        </p:nvSpPr>
+        <p:spPr/>
+        <p:txBody>
+          <a:bodyPr/>
+          <a:lstStyle/>
+          <a:p>
+            <a:r>
+              <a:rPr lang="pt-BR" dirty="0"/>
+              <a:t>CLASSIFICAÇÃO DAS REDES</a:t>
+            </a:r>
+          </a:p>
+        </p:txBody>
+      </p:sp>
+      <p:sp>
+        <p:nvSpPr>
+          <p:cNvPr id="3" name="Espaço Reservado para Conteúdo 2">
+            <a:extLst>
+              <a:ext uri="{FF2B5EF4-FFF2-40B4-BE49-F238E27FC236}">
+                <a16:creationId xmlns:a16="http://schemas.microsoft.com/office/drawing/2014/main" id="{0F80DB16-F3D0-E48E-68EB-03E09E80CC02}"/>
+              </a:ext>
+            </a:extLst>
+          </p:cNvPr>
+          <p:cNvSpPr>
+            <a:spLocks noGrp="1"/>
+          </p:cNvSpPr>
+          <p:nvPr>
+            <p:ph idx="1"/>
+          </p:nvPr>
+        </p:nvSpPr>
+        <p:spPr>
+          <a:xfrm>
+            <a:off x="581193" y="2180496"/>
+            <a:ext cx="5033224" cy="3678303"/>
+          </a:xfrm>
+        </p:spPr>
+        <p:txBody>
+          <a:bodyPr/>
+          <a:lstStyle/>
+          <a:p>
+            <a:r>
+              <a:rPr lang="pt-BR" dirty="0"/>
+              <a:t>WAN (</a:t>
+            </a:r>
+            <a:r>
+              <a:rPr lang="pt-BR" i="1" dirty="0" err="1"/>
+              <a:t>Wide</a:t>
+            </a:r>
+            <a:r>
+              <a:rPr lang="pt-BR" i="1" dirty="0"/>
+              <a:t> Area Networks</a:t>
+            </a:r>
+            <a:r>
+              <a:rPr lang="pt-BR" dirty="0"/>
+              <a:t>),	</a:t>
+            </a:r>
+          </a:p>
+          <a:p>
+            <a:r>
+              <a:rPr lang="pt-BR" dirty="0"/>
+              <a:t>Quando as distâncias envolvidas na interligação dos computadores são superiores a uma região metropolitana, podendo ser a dispersão geográfica tão grande quanto a distância entre continentes, a abordagem correta é a rede geograficamente distribuída (WAN</a:t>
+            </a:r>
+            <a:r>
+              <a:rPr lang="pt-BR"/>
+              <a:t>) </a:t>
+            </a:r>
+            <a:endParaRPr lang="pt-BR" dirty="0"/>
+          </a:p>
+        </p:txBody>
+      </p:sp>
+      <p:pic>
+        <p:nvPicPr>
+          <p:cNvPr id="4098" name="Picture 2" descr="Wide Area Network Images – Browse 45,529 Stock Photos, Vectors, and Video |  Adobe Stock">
+            <a:extLst>
+              <a:ext uri="{FF2B5EF4-FFF2-40B4-BE49-F238E27FC236}">
+                <a16:creationId xmlns:a16="http://schemas.microsoft.com/office/drawing/2014/main" id="{8FBDE4FD-C3A4-3AE8-D589-14B41108B690}"/>
+              </a:ext>
+            </a:extLst>
+          </p:cNvPr>
+          <p:cNvPicPr>
+            <a:picLocks noChangeAspect="1" noChangeArrowheads="1"/>
+          </p:cNvPicPr>
+          <p:nvPr/>
+        </p:nvPicPr>
+        <p:blipFill>
+          <a:blip r:embed="rId2">
+            <a:extLst>
+              <a:ext uri="{28A0092B-C50C-407E-A947-70E740481C1C}">
+                <a14:useLocalDpi xmlns:a14="http://schemas.microsoft.com/office/drawing/2010/main" val="0"/>
+              </a:ext>
+            </a:extLst>
+          </a:blip>
+          <a:srcRect/>
+          <a:stretch>
+            <a:fillRect/>
+          </a:stretch>
+        </p:blipFill>
+        <p:spPr bwMode="auto">
+          <a:xfrm>
+            <a:off x="5791772" y="2305147"/>
+            <a:ext cx="5381625" cy="3429000"/>
+          </a:xfrm>
+          <a:prstGeom prst="rect">
+            <a:avLst/>
+          </a:prstGeom>
+          <a:noFill/>
+          <a:extLst>
+            <a:ext uri="{909E8E84-426E-40DD-AFC4-6F175D3DCCD1}">
+              <a14:hiddenFill xmlns:a14="http://schemas.microsoft.com/office/drawing/2010/main">
+                <a:solidFill>
+                  <a:srgbClr val="FFFFFF"/>
+                </a:solidFill>
+              </a14:hiddenFill>
+            </a:ext>
+          </a:extLst>
+        </p:spPr>
+      </p:pic>
+    </p:spTree>
+    <p:extLst>
+      <p:ext uri="{BB962C8B-B14F-4D97-AF65-F5344CB8AC3E}">
+        <p14:creationId xmlns:p14="http://schemas.microsoft.com/office/powerpoint/2010/main" val="1134796677"/>
+      </p:ext>
+    </p:extLst>
+  </p:cSld>
+  <p:clrMapOvr>
+    <a:masterClrMapping/>
+  </p:clrMapOvr>
+</p:sld>
+</file>
+
+<file path=ppt/slides/slide29.xml><?xml version="1.0" encoding="utf-8"?>
+<p:sld xmlns:a="http://schemas.openxmlformats.org/drawingml/2006/main" xmlns:r="http://schemas.openxmlformats.org/officeDocument/2006/relationships" xmlns:p="http://schemas.openxmlformats.org/presentationml/2006/main">
+  <p:cSld>
+    <p:spTree>
+      <p:nvGrpSpPr>
+        <p:cNvPr id="1" name=""/>
+        <p:cNvGrpSpPr/>
+        <p:nvPr/>
+      </p:nvGrpSpPr>
+      <p:grpSpPr>
+        <a:xfrm>
+          <a:off x="0" y="0"/>
+          <a:ext cx="0" cy="0"/>
+          <a:chOff x="0" y="0"/>
+          <a:chExt cx="0" cy="0"/>
+        </a:xfrm>
+      </p:grpSpPr>
+      <p:sp>
+        <p:nvSpPr>
+          <p:cNvPr id="2" name="Título 1">
+            <a:extLst>
+              <a:ext uri="{FF2B5EF4-FFF2-40B4-BE49-F238E27FC236}">
+                <a16:creationId xmlns:a16="http://schemas.microsoft.com/office/drawing/2014/main" id="{74AB2FC4-B32E-AB2F-F56E-49D6EC5ED820}"/>
+              </a:ext>
+            </a:extLst>
+          </p:cNvPr>
+          <p:cNvSpPr>
+            <a:spLocks noGrp="1"/>
+          </p:cNvSpPr>
+          <p:nvPr>
+            <p:ph type="title"/>
+          </p:nvPr>
+        </p:nvSpPr>
+        <p:spPr/>
+        <p:txBody>
+          <a:bodyPr/>
+          <a:lstStyle/>
+          <a:p>
+            <a:r>
+              <a:rPr lang="pt-BR" dirty="0"/>
+              <a:t>Topologia de redes</a:t>
+            </a:r>
+          </a:p>
+        </p:txBody>
+      </p:sp>
+      <p:sp>
+        <p:nvSpPr>
+          <p:cNvPr id="3" name="Espaço Reservado para Conteúdo 2">
+            <a:extLst>
+              <a:ext uri="{FF2B5EF4-FFF2-40B4-BE49-F238E27FC236}">
+                <a16:creationId xmlns:a16="http://schemas.microsoft.com/office/drawing/2014/main" id="{2F6B353C-1A5B-7BB5-0A90-A4B31FB88685}"/>
+              </a:ext>
+            </a:extLst>
+          </p:cNvPr>
+          <p:cNvSpPr>
+            <a:spLocks noGrp="1"/>
+          </p:cNvSpPr>
+          <p:nvPr>
+            <p:ph idx="1"/>
+          </p:nvPr>
+        </p:nvSpPr>
+        <p:spPr/>
+        <p:txBody>
+          <a:bodyPr>
+            <a:normAutofit/>
+          </a:bodyPr>
+          <a:lstStyle/>
+          <a:p>
+            <a:r>
+              <a:rPr lang="pt-BR" dirty="0"/>
+              <a:t>A topologia </a:t>
+            </a:r>
+            <a:r>
+              <a:rPr lang="pt-BR" u="sng" dirty="0"/>
+              <a:t>refere-se à disposição dos componentes físicos e ao meio de conexão dos dispositivos na rede, ou seja, como estes estão conectados</a:t>
+            </a:r>
+            <a:r>
+              <a:rPr lang="pt-BR" dirty="0"/>
+              <a:t>.</a:t>
+            </a:r>
+          </a:p>
+          <a:p>
+            <a:r>
+              <a:rPr lang="pt-BR" dirty="0"/>
+              <a:t>A topologia de uma rede </a:t>
+            </a:r>
+            <a:r>
+              <a:rPr lang="pt-BR" u="sng" dirty="0"/>
+              <a:t>depende do projeto das operações, da confiabilidade e do seu custo operacional</a:t>
+            </a:r>
+            <a:r>
+              <a:rPr lang="pt-BR" dirty="0"/>
+              <a:t>.</a:t>
+            </a:r>
+          </a:p>
+          <a:p>
+            <a:r>
+              <a:rPr lang="pt-BR" dirty="0"/>
+              <a:t>Ao se projetar uma rede, muitos fatores devem ser considerados, mas </a:t>
+            </a:r>
+            <a:r>
+              <a:rPr lang="pt-BR" u="sng" dirty="0"/>
+              <a:t>a topologia a ser empregada é de total importância para o bom desempenho e retorno do investimento de uma rede</a:t>
+            </a:r>
+            <a:r>
+              <a:rPr lang="pt-BR" dirty="0"/>
+              <a:t>.</a:t>
+            </a:r>
+          </a:p>
+          <a:p>
+            <a:r>
+              <a:rPr lang="pt-BR" u="sng" dirty="0"/>
+              <a:t>Cada topologia possui suas características, com diferentes implicações quanto ao desenvolvimento, operação e manutenção da rede</a:t>
+            </a:r>
+            <a:r>
+              <a:rPr lang="pt-BR" dirty="0"/>
+              <a:t>, além disso, cada topologia apresenta duas formas, </a:t>
+            </a:r>
+            <a:r>
+              <a:rPr lang="pt-BR" u="sng" dirty="0"/>
+              <a:t>a forma física e a lógica</a:t>
+            </a:r>
+            <a:r>
+              <a:rPr lang="pt-BR" dirty="0"/>
+              <a:t>. A topologia em </a:t>
+            </a:r>
+            <a:r>
+              <a:rPr lang="pt-BR" u="sng" dirty="0"/>
+              <a:t>sua forma física identifica como os nós estão interconectados uns nos outros</a:t>
+            </a:r>
+            <a:r>
+              <a:rPr lang="pt-BR" dirty="0"/>
+              <a:t>. </a:t>
+            </a:r>
+            <a:br>
+              <a:rPr lang="pt-BR" dirty="0"/>
+            </a:br>
+            <a:endParaRPr lang="pt-BR" dirty="0"/>
+          </a:p>
+        </p:txBody>
+      </p:sp>
+    </p:spTree>
+    <p:extLst>
+      <p:ext uri="{BB962C8B-B14F-4D97-AF65-F5344CB8AC3E}">
+        <p14:creationId xmlns:p14="http://schemas.microsoft.com/office/powerpoint/2010/main" val="2448624542"/>
+      </p:ext>
+    </p:extLst>
+  </p:cSld>
+  <p:clrMapOvr>
+    <a:masterClrMapping/>
+  </p:clrMapOvr>
+</p:sld>
+</file>
+
+<file path=ppt/slides/slide3.xml><?xml version="1.0" encoding="utf-8"?>
+<p:sld xmlns:a="http://schemas.openxmlformats.org/drawingml/2006/main" xmlns:r="http://schemas.openxmlformats.org/officeDocument/2006/relationships" xmlns:p="http://schemas.openxmlformats.org/presentationml/2006/main">
+  <p:cSld>
+    <p:spTree>
+      <p:nvGrpSpPr>
+        <p:cNvPr id="1" name=""/>
+        <p:cNvGrpSpPr/>
+        <p:nvPr/>
+      </p:nvGrpSpPr>
+      <p:grpSpPr>
+        <a:xfrm>
+          <a:off x="0" y="0"/>
+          <a:ext cx="0" cy="0"/>
+          <a:chOff x="0" y="0"/>
+          <a:chExt cx="0" cy="0"/>
+        </a:xfrm>
+      </p:grpSpPr>
+      <p:sp>
+        <p:nvSpPr>
+          <p:cNvPr id="2" name="Título 1">
+            <a:extLst>
+              <a:ext uri="{FF2B5EF4-FFF2-40B4-BE49-F238E27FC236}">
+                <a16:creationId xmlns:a16="http://schemas.microsoft.com/office/drawing/2014/main" id="{EE0620E7-5BAC-CDE7-C13E-FF14FABE3865}"/>
+              </a:ext>
+            </a:extLst>
+          </p:cNvPr>
+          <p:cNvSpPr>
+            <a:spLocks noGrp="1"/>
+          </p:cNvSpPr>
+          <p:nvPr>
+            <p:ph type="title"/>
+          </p:nvPr>
+        </p:nvSpPr>
+        <p:spPr/>
+        <p:txBody>
+          <a:bodyPr/>
+          <a:lstStyle/>
+          <a:p>
+            <a:r>
+              <a:rPr lang="pt-BR" dirty="0"/>
+              <a:t>O QUE SÃO REDES</a:t>
+            </a:r>
+          </a:p>
+        </p:txBody>
+      </p:sp>
+      <p:sp>
+        <p:nvSpPr>
+          <p:cNvPr id="3" name="Espaço Reservado para Conteúdo 2">
+            <a:extLst>
+              <a:ext uri="{FF2B5EF4-FFF2-40B4-BE49-F238E27FC236}">
+                <a16:creationId xmlns:a16="http://schemas.microsoft.com/office/drawing/2014/main" id="{77E062BC-B745-85DD-C631-2AFFE9455B0D}"/>
+              </a:ext>
+            </a:extLst>
+          </p:cNvPr>
+          <p:cNvSpPr>
+            <a:spLocks noGrp="1"/>
+          </p:cNvSpPr>
+          <p:nvPr>
+            <p:ph idx="1"/>
+          </p:nvPr>
+        </p:nvSpPr>
+        <p:spPr>
+          <a:xfrm>
+            <a:off x="1395663" y="2180496"/>
+            <a:ext cx="10215144" cy="3678303"/>
+          </a:xfrm>
+        </p:spPr>
+        <p:txBody>
+          <a:bodyPr>
+            <a:normAutofit/>
+          </a:bodyPr>
+          <a:lstStyle/>
+          <a:p>
+            <a:r>
+              <a:rPr lang="pt-BR" sz="2400" dirty="0"/>
+              <a:t>Uma rede de computadores é a forma de conectarmos equipamentos a fim de que possamos estabelecer uma comunicação entre os mesmos fazendo com que eles troquem dados, informações e serviços. </a:t>
+            </a:r>
+          </a:p>
+        </p:txBody>
+      </p:sp>
+    </p:spTree>
+    <p:extLst>
+      <p:ext uri="{BB962C8B-B14F-4D97-AF65-F5344CB8AC3E}">
+        <p14:creationId xmlns:p14="http://schemas.microsoft.com/office/powerpoint/2010/main" val="2869987137"/>
+      </p:ext>
+    </p:extLst>
+  </p:cSld>
+  <p:clrMapOvr>
+    <a:masterClrMapping/>
+  </p:clrMapOvr>
+</p:sld>
+</file>
+
+<file path=ppt/slides/slide30.xml><?xml version="1.0" encoding="utf-8"?>
+<p:sld xmlns:a="http://schemas.openxmlformats.org/drawingml/2006/main" xmlns:r="http://schemas.openxmlformats.org/officeDocument/2006/relationships" xmlns:p="http://schemas.openxmlformats.org/presentationml/2006/main">
+  <p:cSld>
     <p:bg>
       <p:bgPr>
         <a:solidFill>
@@ -7271,99 +8882,6 @@
     <p:extLst>
       <p:ext uri="{BB962C8B-B14F-4D97-AF65-F5344CB8AC3E}">
         <p14:creationId xmlns:p14="http://schemas.microsoft.com/office/powerpoint/2010/main" val="3501347425"/>
-      </p:ext>
-    </p:extLst>
-  </p:cSld>
-  <p:clrMapOvr>
-    <a:masterClrMapping/>
-  </p:clrMapOvr>
-</p:sld>
-</file>
-
-<file path=ppt/slides/slide3.xml><?xml version="1.0" encoding="utf-8"?>
-<p:sld xmlns:a="http://schemas.openxmlformats.org/drawingml/2006/main" xmlns:r="http://schemas.openxmlformats.org/officeDocument/2006/relationships" xmlns:p="http://schemas.openxmlformats.org/presentationml/2006/main">
-  <p:cSld>
-    <p:spTree>
-      <p:nvGrpSpPr>
-        <p:cNvPr id="1" name=""/>
-        <p:cNvGrpSpPr/>
-        <p:nvPr/>
-      </p:nvGrpSpPr>
-      <p:grpSpPr>
-        <a:xfrm>
-          <a:off x="0" y="0"/>
-          <a:ext cx="0" cy="0"/>
-          <a:chOff x="0" y="0"/>
-          <a:chExt cx="0" cy="0"/>
-        </a:xfrm>
-      </p:grpSpPr>
-      <p:sp>
-        <p:nvSpPr>
-          <p:cNvPr id="2" name="Título 1">
-            <a:extLst>
-              <a:ext uri="{FF2B5EF4-FFF2-40B4-BE49-F238E27FC236}">
-                <a16:creationId xmlns:a16="http://schemas.microsoft.com/office/drawing/2014/main" id="{EE0620E7-5BAC-CDE7-C13E-FF14FABE3865}"/>
-              </a:ext>
-            </a:extLst>
-          </p:cNvPr>
-          <p:cNvSpPr>
-            <a:spLocks noGrp="1"/>
-          </p:cNvSpPr>
-          <p:nvPr>
-            <p:ph type="title"/>
-          </p:nvPr>
-        </p:nvSpPr>
-        <p:spPr/>
-        <p:txBody>
-          <a:bodyPr/>
-          <a:lstStyle/>
-          <a:p>
-            <a:r>
-              <a:rPr lang="pt-BR" dirty="0"/>
-              <a:t>O QUE SÃO REDES</a:t>
-            </a:r>
-          </a:p>
-        </p:txBody>
-      </p:sp>
-      <p:sp>
-        <p:nvSpPr>
-          <p:cNvPr id="3" name="Espaço Reservado para Conteúdo 2">
-            <a:extLst>
-              <a:ext uri="{FF2B5EF4-FFF2-40B4-BE49-F238E27FC236}">
-                <a16:creationId xmlns:a16="http://schemas.microsoft.com/office/drawing/2014/main" id="{77E062BC-B745-85DD-C631-2AFFE9455B0D}"/>
-              </a:ext>
-            </a:extLst>
-          </p:cNvPr>
-          <p:cNvSpPr>
-            <a:spLocks noGrp="1"/>
-          </p:cNvSpPr>
-          <p:nvPr>
-            <p:ph idx="1"/>
-          </p:nvPr>
-        </p:nvSpPr>
-        <p:spPr>
-          <a:xfrm>
-            <a:off x="1395663" y="2180496"/>
-            <a:ext cx="10215144" cy="3678303"/>
-          </a:xfrm>
-        </p:spPr>
-        <p:txBody>
-          <a:bodyPr>
-            <a:normAutofit/>
-          </a:bodyPr>
-          <a:lstStyle/>
-          <a:p>
-            <a:r>
-              <a:rPr lang="pt-BR" sz="2400" dirty="0"/>
-              <a:t>Uma rede de computadores é a forma de conectarmos equipamentos a fim de que possamos estabelecer uma comunicação entre os mesmos fazendo com que eles troquem dados, informações e serviços. </a:t>
-            </a:r>
-          </a:p>
-        </p:txBody>
-      </p:sp>
-    </p:spTree>
-    <p:extLst>
-      <p:ext uri="{BB962C8B-B14F-4D97-AF65-F5344CB8AC3E}">
-        <p14:creationId xmlns:p14="http://schemas.microsoft.com/office/powerpoint/2010/main" val="2869987137"/>
       </p:ext>
     </p:extLst>
   </p:cSld>

--- a/Redes/REDES DE COMPUTADORES.pptx
+++ b/Redes/REDES DE COMPUTADORES.pptx
@@ -5,10 +5,10 @@
     <p:sldMasterId id="2147483672" r:id="rId1"/>
   </p:sldMasterIdLst>
   <p:notesMasterIdLst>
-    <p:notesMasterId r:id="rId32"/>
+    <p:notesMasterId r:id="rId36"/>
   </p:notesMasterIdLst>
   <p:handoutMasterIdLst>
-    <p:handoutMasterId r:id="rId33"/>
+    <p:handoutMasterId r:id="rId37"/>
   </p:handoutMasterIdLst>
   <p:sldIdLst>
     <p:sldId id="256" r:id="rId2"/>
@@ -40,7 +40,11 @@
     <p:sldId id="288" r:id="rId28"/>
     <p:sldId id="289" r:id="rId29"/>
     <p:sldId id="285" r:id="rId30"/>
-    <p:sldId id="260" r:id="rId31"/>
+    <p:sldId id="292" r:id="rId31"/>
+    <p:sldId id="293" r:id="rId32"/>
+    <p:sldId id="294" r:id="rId33"/>
+    <p:sldId id="295" r:id="rId34"/>
+    <p:sldId id="260" r:id="rId35"/>
   </p:sldIdLst>
   <p:sldSz cx="12192000" cy="6858000"/>
   <p:notesSz cx="6858000" cy="9144000"/>
@@ -150,6 +154,143 @@
 </p:presentation>
 </file>
 
+<file path=ppt/changesInfos/changesInfo1.xml><?xml version="1.0" encoding="utf-8"?>
+<pc:chgInfo xmlns:a="http://schemas.openxmlformats.org/drawingml/2006/main" xmlns:r="http://schemas.openxmlformats.org/officeDocument/2006/relationships" xmlns:ac="http://schemas.microsoft.com/office/drawing/2013/main/command" xmlns:pc="http://schemas.microsoft.com/office/powerpoint/2013/main/command">
+  <pc:docChgLst>
+    <pc:chgData name="Joel Teixeira Cunha" userId="195451ac3a5e8dfd" providerId="LiveId" clId="{9D99295D-09A0-459E-AFDA-61FAD528DEBC}"/>
+    <pc:docChg chg="undo custSel addSld modSld">
+      <pc:chgData name="Joel Teixeira Cunha" userId="195451ac3a5e8dfd" providerId="LiveId" clId="{9D99295D-09A0-459E-AFDA-61FAD528DEBC}" dt="2026-05-18T22:17:41.072" v="1703" actId="1076"/>
+      <pc:docMkLst>
+        <pc:docMk/>
+      </pc:docMkLst>
+      <pc:sldChg chg="modSp mod">
+        <pc:chgData name="Joel Teixeira Cunha" userId="195451ac3a5e8dfd" providerId="LiveId" clId="{9D99295D-09A0-459E-AFDA-61FAD528DEBC}" dt="2026-05-18T22:03:22.235" v="91" actId="20577"/>
+        <pc:sldMkLst>
+          <pc:docMk/>
+          <pc:sldMk cId="2448624542" sldId="285"/>
+        </pc:sldMkLst>
+        <pc:spChg chg="mod">
+          <ac:chgData name="Joel Teixeira Cunha" userId="195451ac3a5e8dfd" providerId="LiveId" clId="{9D99295D-09A0-459E-AFDA-61FAD528DEBC}" dt="2026-05-18T22:03:22.235" v="91" actId="20577"/>
+          <ac:spMkLst>
+            <pc:docMk/>
+            <pc:sldMk cId="2448624542" sldId="285"/>
+            <ac:spMk id="3" creationId="{2F6B353C-1A5B-7BB5-0A90-A4B31FB88685}"/>
+          </ac:spMkLst>
+        </pc:spChg>
+      </pc:sldChg>
+      <pc:sldChg chg="modSp add mod">
+        <pc:chgData name="Joel Teixeira Cunha" userId="195451ac3a5e8dfd" providerId="LiveId" clId="{9D99295D-09A0-459E-AFDA-61FAD528DEBC}" dt="2026-05-18T22:05:24.277" v="266" actId="554"/>
+        <pc:sldMkLst>
+          <pc:docMk/>
+          <pc:sldMk cId="974116489" sldId="292"/>
+        </pc:sldMkLst>
+        <pc:spChg chg="mod">
+          <ac:chgData name="Joel Teixeira Cunha" userId="195451ac3a5e8dfd" providerId="LiveId" clId="{9D99295D-09A0-459E-AFDA-61FAD528DEBC}" dt="2026-05-18T22:03:55.144" v="98" actId="20577"/>
+          <ac:spMkLst>
+            <pc:docMk/>
+            <pc:sldMk cId="974116489" sldId="292"/>
+            <ac:spMk id="2" creationId="{58FAE4EB-9A9A-0E8C-90BA-FF66FE521155}"/>
+          </ac:spMkLst>
+        </pc:spChg>
+        <pc:spChg chg="mod">
+          <ac:chgData name="Joel Teixeira Cunha" userId="195451ac3a5e8dfd" providerId="LiveId" clId="{9D99295D-09A0-459E-AFDA-61FAD528DEBC}" dt="2026-05-18T22:05:24.277" v="266" actId="554"/>
+          <ac:spMkLst>
+            <pc:docMk/>
+            <pc:sldMk cId="974116489" sldId="292"/>
+            <ac:spMk id="3" creationId="{C461B287-8D69-4803-7D99-DF13F17B46F0}"/>
+          </ac:spMkLst>
+        </pc:spChg>
+      </pc:sldChg>
+      <pc:sldChg chg="modSp add mod">
+        <pc:chgData name="Joel Teixeira Cunha" userId="195451ac3a5e8dfd" providerId="LiveId" clId="{9D99295D-09A0-459E-AFDA-61FAD528DEBC}" dt="2026-05-18T22:09:05.343" v="728" actId="20577"/>
+        <pc:sldMkLst>
+          <pc:docMk/>
+          <pc:sldMk cId="3005095367" sldId="293"/>
+        </pc:sldMkLst>
+        <pc:spChg chg="mod">
+          <ac:chgData name="Joel Teixeira Cunha" userId="195451ac3a5e8dfd" providerId="LiveId" clId="{9D99295D-09A0-459E-AFDA-61FAD528DEBC}" dt="2026-05-18T22:05:43.550" v="273" actId="20577"/>
+          <ac:spMkLst>
+            <pc:docMk/>
+            <pc:sldMk cId="3005095367" sldId="293"/>
+            <ac:spMk id="2" creationId="{694774B9-2FB8-E757-C082-1A6174050E85}"/>
+          </ac:spMkLst>
+        </pc:spChg>
+        <pc:spChg chg="mod">
+          <ac:chgData name="Joel Teixeira Cunha" userId="195451ac3a5e8dfd" providerId="LiveId" clId="{9D99295D-09A0-459E-AFDA-61FAD528DEBC}" dt="2026-05-18T22:09:05.343" v="728" actId="20577"/>
+          <ac:spMkLst>
+            <pc:docMk/>
+            <pc:sldMk cId="3005095367" sldId="293"/>
+            <ac:spMk id="3" creationId="{851A2B76-16C4-98C1-5F09-BCA403C9BBBC}"/>
+          </ac:spMkLst>
+        </pc:spChg>
+      </pc:sldChg>
+      <pc:sldChg chg="addSp modSp new mod">
+        <pc:chgData name="Joel Teixeira Cunha" userId="195451ac3a5e8dfd" providerId="LiveId" clId="{9D99295D-09A0-459E-AFDA-61FAD528DEBC}" dt="2026-05-18T22:12:16.062" v="1065"/>
+        <pc:sldMkLst>
+          <pc:docMk/>
+          <pc:sldMk cId="1562692267" sldId="294"/>
+        </pc:sldMkLst>
+        <pc:spChg chg="mod">
+          <ac:chgData name="Joel Teixeira Cunha" userId="195451ac3a5e8dfd" providerId="LiveId" clId="{9D99295D-09A0-459E-AFDA-61FAD528DEBC}" dt="2026-05-18T22:09:35.052" v="755" actId="20577"/>
+          <ac:spMkLst>
+            <pc:docMk/>
+            <pc:sldMk cId="1562692267" sldId="294"/>
+            <ac:spMk id="2" creationId="{D78B2961-D3CA-6F04-431E-CF12565BF917}"/>
+          </ac:spMkLst>
+        </pc:spChg>
+        <pc:spChg chg="mod">
+          <ac:chgData name="Joel Teixeira Cunha" userId="195451ac3a5e8dfd" providerId="LiveId" clId="{9D99295D-09A0-459E-AFDA-61FAD528DEBC}" dt="2026-05-18T22:11:44.767" v="1062" actId="20577"/>
+          <ac:spMkLst>
+            <pc:docMk/>
+            <pc:sldMk cId="1562692267" sldId="294"/>
+            <ac:spMk id="3" creationId="{913FE5D2-5D23-4117-BBB6-08A07C8BCDD8}"/>
+          </ac:spMkLst>
+        </pc:spChg>
+        <pc:picChg chg="add mod">
+          <ac:chgData name="Joel Teixeira Cunha" userId="195451ac3a5e8dfd" providerId="LiveId" clId="{9D99295D-09A0-459E-AFDA-61FAD528DEBC}" dt="2026-05-18T22:12:16.062" v="1065"/>
+          <ac:picMkLst>
+            <pc:docMk/>
+            <pc:sldMk cId="1562692267" sldId="294"/>
+            <ac:picMk id="5" creationId="{80A4EC3A-4951-3982-7D01-F52572EC161D}"/>
+          </ac:picMkLst>
+        </pc:picChg>
+      </pc:sldChg>
+      <pc:sldChg chg="addSp modSp new mod">
+        <pc:chgData name="Joel Teixeira Cunha" userId="195451ac3a5e8dfd" providerId="LiveId" clId="{9D99295D-09A0-459E-AFDA-61FAD528DEBC}" dt="2026-05-18T22:17:41.072" v="1703" actId="1076"/>
+        <pc:sldMkLst>
+          <pc:docMk/>
+          <pc:sldMk cId="3020158856" sldId="295"/>
+        </pc:sldMkLst>
+        <pc:spChg chg="mod">
+          <ac:chgData name="Joel Teixeira Cunha" userId="195451ac3a5e8dfd" providerId="LiveId" clId="{9D99295D-09A0-459E-AFDA-61FAD528DEBC}" dt="2026-05-18T22:12:31.977" v="1090" actId="20577"/>
+          <ac:spMkLst>
+            <pc:docMk/>
+            <pc:sldMk cId="3020158856" sldId="295"/>
+            <ac:spMk id="2" creationId="{B4DE5FC7-2398-B711-7D42-57D885652DDD}"/>
+          </ac:spMkLst>
+        </pc:spChg>
+        <pc:spChg chg="mod">
+          <ac:chgData name="Joel Teixeira Cunha" userId="195451ac3a5e8dfd" providerId="LiveId" clId="{9D99295D-09A0-459E-AFDA-61FAD528DEBC}" dt="2026-05-18T22:17:36.390" v="1702" actId="27636"/>
+          <ac:spMkLst>
+            <pc:docMk/>
+            <pc:sldMk cId="3020158856" sldId="295"/>
+            <ac:spMk id="3" creationId="{281169CA-396E-FD21-629D-8F37D856FF38}"/>
+          </ac:spMkLst>
+        </pc:spChg>
+        <pc:picChg chg="add mod">
+          <ac:chgData name="Joel Teixeira Cunha" userId="195451ac3a5e8dfd" providerId="LiveId" clId="{9D99295D-09A0-459E-AFDA-61FAD528DEBC}" dt="2026-05-18T22:17:41.072" v="1703" actId="1076"/>
+          <ac:picMkLst>
+            <pc:docMk/>
+            <pc:sldMk cId="3020158856" sldId="295"/>
+            <ac:picMk id="5" creationId="{4F68931B-8F48-94FC-507E-33882CBCEEA2}"/>
+          </ac:picMkLst>
+        </pc:picChg>
+      </pc:sldChg>
+    </pc:docChg>
+  </pc:docChgLst>
+</pc:chgInfo>
+</file>
+
 <file path=ppt/handoutMasters/handoutMaster1.xml><?xml version="1.0" encoding="utf-8"?>
 <p:handoutMaster xmlns:a="http://schemas.openxmlformats.org/drawingml/2006/main" xmlns:r="http://schemas.openxmlformats.org/officeDocument/2006/relationships" xmlns:p="http://schemas.openxmlformats.org/presentationml/2006/main">
   <p:cSld>
@@ -246,7 +387,7 @@
             <a:pPr rtl="0"/>
             <a:fld id="{A517C7B7-34F5-4531-9889-28687F60FAC8}" type="datetime1">
               <a:rPr lang="pt-BR" smtClean="0"/>
-              <a:t>06/04/2026</a:t>
+              <a:t>18/05/2026</a:t>
             </a:fld>
             <a:endParaRPr lang="pt-BR" dirty="0"/>
           </a:p>
@@ -427,7 +568,7 @@
             <a:fld id="{40C3EC75-555C-481D-9088-738CE6DDFC83}" type="datetime1">
               <a:rPr lang="pt-BR" smtClean="0"/>
               <a:pPr/>
-              <a:t>06/04/2026</a:t>
+              <a:t>18/05/2026</a:t>
             </a:fld>
             <a:endParaRPr lang="pt-BR" dirty="0"/>
           </a:p>
@@ -850,7 +991,7 @@
             <a:pPr rtl="0"/>
             <a:fld id="{C6B3AB32-59DF-41F1-9618-EDFBF5049629}" type="slidenum">
               <a:rPr lang="pt-BR" smtClean="0"/>
-              <a:t>30</a:t>
+              <a:t>34</a:t>
             </a:fld>
             <a:endParaRPr lang="pt-BR"/>
           </a:p>
@@ -1115,7 +1256,7 @@
             <a:pPr rtl="0"/>
             <a:fld id="{2AF5B136-74F1-42D3-987D-A097EEF8F2FE}" type="datetime1">
               <a:rPr lang="pt-BR" noProof="0" smtClean="0"/>
-              <a:t>06/04/2026</a:t>
+              <a:t>18/05/2026</a:t>
             </a:fld>
             <a:endParaRPr lang="pt-BR" noProof="0"/>
           </a:p>
@@ -1380,7 +1521,7 @@
             <a:pPr rtl="0"/>
             <a:fld id="{0229B074-15EB-43FB-8347-3A734D799093}" type="datetime1">
               <a:rPr lang="pt-BR" noProof="0" smtClean="0"/>
-              <a:t>06/04/2026</a:t>
+              <a:t>18/05/2026</a:t>
             </a:fld>
             <a:endParaRPr lang="pt-BR" noProof="0"/>
           </a:p>
@@ -1618,7 +1759,7 @@
             <a:pPr rtl="0"/>
             <a:fld id="{036303E3-8DE9-4C2D-91EE-6F377AE582A8}" type="datetime1">
               <a:rPr lang="pt-BR" noProof="0" smtClean="0"/>
-              <a:t>06/04/2026</a:t>
+              <a:t>18/05/2026</a:t>
             </a:fld>
             <a:endParaRPr lang="pt-BR" noProof="0"/>
           </a:p>
@@ -1861,7 +2002,7 @@
             <a:pPr rtl="0"/>
             <a:fld id="{B04AF3F4-81C7-4F15-8991-6D0E8D06651A}" type="datetime1">
               <a:rPr lang="pt-BR" noProof="0" smtClean="0"/>
-              <a:t>06/04/2026</a:t>
+              <a:t>18/05/2026</a:t>
             </a:fld>
             <a:endParaRPr lang="pt-BR" noProof="0"/>
           </a:p>
@@ -2172,7 +2313,7 @@
             <a:pPr rtl="0"/>
             <a:fld id="{6E2946E4-8964-43BF-B1D5-4261B83248E5}" type="datetime1">
               <a:rPr lang="pt-BR" noProof="0" smtClean="0"/>
-              <a:t>06/04/2026</a:t>
+              <a:t>18/05/2026</a:t>
             </a:fld>
             <a:endParaRPr lang="pt-BR" noProof="0"/>
           </a:p>
@@ -2476,7 +2617,7 @@
             <a:pPr rtl="0"/>
             <a:fld id="{97C9F420-083C-437A-9265-7F13EB97C6A2}" type="datetime1">
               <a:rPr lang="pt-BR" noProof="0" smtClean="0"/>
-              <a:t>06/04/2026</a:t>
+              <a:t>18/05/2026</a:t>
             </a:fld>
             <a:endParaRPr lang="pt-BR" noProof="0"/>
           </a:p>
@@ -2900,7 +3041,7 @@
             <a:pPr rtl="0"/>
             <a:fld id="{BE07AF20-ED70-4B21-B799-75BB5818AB43}" type="datetime1">
               <a:rPr lang="pt-BR" noProof="0" smtClean="0"/>
-              <a:t>06/04/2026</a:t>
+              <a:t>18/05/2026</a:t>
             </a:fld>
             <a:endParaRPr lang="pt-BR" noProof="0"/>
           </a:p>
@@ -2999,7 +3140,7 @@
             <a:pPr rtl="0"/>
             <a:fld id="{0D33D876-8C34-42FC-BFF7-457557B97BB7}" type="datetime1">
               <a:rPr lang="pt-BR" noProof="0" smtClean="0"/>
-              <a:t>06/04/2026</a:t>
+              <a:t>18/05/2026</a:t>
             </a:fld>
             <a:endParaRPr lang="pt-BR" noProof="0"/>
           </a:p>
@@ -3165,7 +3306,7 @@
             <a:pPr rtl="0"/>
             <a:fld id="{4592437E-206F-4A1C-947F-806A50A40B88}" type="datetime1">
               <a:rPr lang="pt-BR" noProof="0" smtClean="0"/>
-              <a:t>06/04/2026</a:t>
+              <a:t>18/05/2026</a:t>
             </a:fld>
             <a:endParaRPr lang="pt-BR" noProof="0"/>
           </a:p>
@@ -3546,7 +3687,7 @@
             <a:pPr rtl="0"/>
             <a:fld id="{B036DDBC-F1EF-4D09-A533-5995BC167053}" type="datetime1">
               <a:rPr lang="pt-BR" noProof="0" smtClean="0"/>
-              <a:t>06/04/2026</a:t>
+              <a:t>18/05/2026</a:t>
             </a:fld>
             <a:endParaRPr lang="pt-BR" noProof="0"/>
           </a:p>
@@ -3839,7 +3980,7 @@
             <a:pPr rtl="0"/>
             <a:fld id="{DFFDDC01-A1CF-4C3A-BE96-FBC60101324D}" type="datetime1">
               <a:rPr lang="pt-BR" noProof="0" smtClean="0"/>
-              <a:t>06/04/2026</a:t>
+              <a:t>18/05/2026</a:t>
             </a:fld>
             <a:endParaRPr lang="pt-BR" noProof="0"/>
           </a:p>
@@ -4053,7 +4194,7 @@
             <a:pPr rtl="0"/>
             <a:fld id="{52266794-2CD5-4ED3-94F8-8B8DC65FDDE3}" type="datetime1">
               <a:rPr lang="pt-BR" noProof="0" smtClean="0"/>
-              <a:t>06/04/2026</a:t>
+              <a:t>18/05/2026</a:t>
             </a:fld>
             <a:endParaRPr lang="pt-BR" noProof="0"/>
           </a:p>
@@ -8328,7 +8469,13 @@
             </a:r>
             <a:r>
               <a:rPr lang="pt-BR" dirty="0"/>
-              <a:t>. A topologia em </a:t>
+              <a:t>. </a:t>
+            </a:r>
+          </a:p>
+          <a:p>
+            <a:r>
+              <a:rPr lang="pt-BR" dirty="0"/>
+              <a:t>A topologia em </a:t>
             </a:r>
             <a:r>
               <a:rPr lang="pt-BR" u="sng" dirty="0"/>
@@ -8337,6 +8484,12 @@
             <a:r>
               <a:rPr lang="pt-BR" dirty="0"/>
               <a:t>. </a:t>
+            </a:r>
+          </a:p>
+          <a:p>
+            <a:r>
+              <a:rPr lang="pt-BR" dirty="0"/>
+              <a:t>A topologia lógica é o protocolo de comunicação composto por hardwares e softwares</a:t>
             </a:r>
             <a:br>
               <a:rPr lang="pt-BR" dirty="0"/>
@@ -8452,6 +8605,610 @@
 </file>
 
 <file path=ppt/slides/slide30.xml><?xml version="1.0" encoding="utf-8"?>
+<p:sld xmlns:a="http://schemas.openxmlformats.org/drawingml/2006/main" xmlns:r="http://schemas.openxmlformats.org/officeDocument/2006/relationships" xmlns:p="http://schemas.openxmlformats.org/presentationml/2006/main">
+  <p:cSld>
+    <p:spTree>
+      <p:nvGrpSpPr>
+        <p:cNvPr id="1" name="">
+          <a:extLst>
+            <a:ext uri="{FF2B5EF4-FFF2-40B4-BE49-F238E27FC236}">
+              <a16:creationId xmlns:a16="http://schemas.microsoft.com/office/drawing/2014/main" id="{076CE557-9592-6460-02A8-BEE29FB2A6AE}"/>
+            </a:ext>
+          </a:extLst>
+        </p:cNvPr>
+        <p:cNvGrpSpPr/>
+        <p:nvPr/>
+      </p:nvGrpSpPr>
+      <p:grpSpPr>
+        <a:xfrm>
+          <a:off x="0" y="0"/>
+          <a:ext cx="0" cy="0"/>
+          <a:chOff x="0" y="0"/>
+          <a:chExt cx="0" cy="0"/>
+        </a:xfrm>
+      </p:grpSpPr>
+      <p:sp>
+        <p:nvSpPr>
+          <p:cNvPr id="2" name="Título 1">
+            <a:extLst>
+              <a:ext uri="{FF2B5EF4-FFF2-40B4-BE49-F238E27FC236}">
+                <a16:creationId xmlns:a16="http://schemas.microsoft.com/office/drawing/2014/main" id="{58FAE4EB-9A9A-0E8C-90BA-FF66FE521155}"/>
+              </a:ext>
+            </a:extLst>
+          </p:cNvPr>
+          <p:cNvSpPr>
+            <a:spLocks noGrp="1"/>
+          </p:cNvSpPr>
+          <p:nvPr>
+            <p:ph type="title"/>
+          </p:nvPr>
+        </p:nvSpPr>
+        <p:spPr/>
+        <p:txBody>
+          <a:bodyPr/>
+          <a:lstStyle/>
+          <a:p>
+            <a:r>
+              <a:rPr lang="pt-BR" dirty="0"/>
+              <a:t>Topologia lógica</a:t>
+            </a:r>
+          </a:p>
+        </p:txBody>
+      </p:sp>
+      <p:sp>
+        <p:nvSpPr>
+          <p:cNvPr id="3" name="Espaço Reservado para Conteúdo 2">
+            <a:extLst>
+              <a:ext uri="{FF2B5EF4-FFF2-40B4-BE49-F238E27FC236}">
+                <a16:creationId xmlns:a16="http://schemas.microsoft.com/office/drawing/2014/main" id="{C461B287-8D69-4803-7D99-DF13F17B46F0}"/>
+              </a:ext>
+            </a:extLst>
+          </p:cNvPr>
+          <p:cNvSpPr>
+            <a:spLocks noGrp="1"/>
+          </p:cNvSpPr>
+          <p:nvPr>
+            <p:ph idx="1"/>
+          </p:nvPr>
+        </p:nvSpPr>
+        <p:spPr/>
+        <p:txBody>
+          <a:bodyPr>
+            <a:normAutofit/>
+          </a:bodyPr>
+          <a:lstStyle/>
+          <a:p>
+            <a:r>
+              <a:rPr lang="pt-BR" dirty="0"/>
+              <a:t>A topologia lógica é o protocolo de comunicação composto por hardwares e softwares</a:t>
+            </a:r>
+          </a:p>
+          <a:p>
+            <a:r>
+              <a:rPr lang="pt-BR" dirty="0"/>
+              <a:t>Determina qual é a melhor maneira de conectar computadores</a:t>
+            </a:r>
+          </a:p>
+          <a:p>
+            <a:r>
+              <a:rPr lang="pt-BR" dirty="0"/>
+              <a:t>Tipo de dado que será utilizado nas transmissões, modo de transmissão e</a:t>
+            </a:r>
+          </a:p>
+          <a:p>
+            <a:r>
+              <a:rPr lang="pt-BR" dirty="0"/>
+              <a:t>Tipo de placa de rede</a:t>
+            </a:r>
+            <a:br>
+              <a:rPr lang="pt-BR" dirty="0"/>
+            </a:br>
+            <a:endParaRPr lang="pt-BR" dirty="0"/>
+          </a:p>
+        </p:txBody>
+      </p:sp>
+    </p:spTree>
+    <p:extLst>
+      <p:ext uri="{BB962C8B-B14F-4D97-AF65-F5344CB8AC3E}">
+        <p14:creationId xmlns:p14="http://schemas.microsoft.com/office/powerpoint/2010/main" val="974116489"/>
+      </p:ext>
+    </p:extLst>
+  </p:cSld>
+  <p:clrMapOvr>
+    <a:masterClrMapping/>
+  </p:clrMapOvr>
+</p:sld>
+</file>
+
+<file path=ppt/slides/slide31.xml><?xml version="1.0" encoding="utf-8"?>
+<p:sld xmlns:a="http://schemas.openxmlformats.org/drawingml/2006/main" xmlns:r="http://schemas.openxmlformats.org/officeDocument/2006/relationships" xmlns:p="http://schemas.openxmlformats.org/presentationml/2006/main">
+  <p:cSld>
+    <p:spTree>
+      <p:nvGrpSpPr>
+        <p:cNvPr id="1" name="">
+          <a:extLst>
+            <a:ext uri="{FF2B5EF4-FFF2-40B4-BE49-F238E27FC236}">
+              <a16:creationId xmlns:a16="http://schemas.microsoft.com/office/drawing/2014/main" id="{F0D9D2C4-8FE6-1A10-7974-BB0128865B08}"/>
+            </a:ext>
+          </a:extLst>
+        </p:cNvPr>
+        <p:cNvGrpSpPr/>
+        <p:nvPr/>
+      </p:nvGrpSpPr>
+      <p:grpSpPr>
+        <a:xfrm>
+          <a:off x="0" y="0"/>
+          <a:ext cx="0" cy="0"/>
+          <a:chOff x="0" y="0"/>
+          <a:chExt cx="0" cy="0"/>
+        </a:xfrm>
+      </p:grpSpPr>
+      <p:sp>
+        <p:nvSpPr>
+          <p:cNvPr id="2" name="Título 1">
+            <a:extLst>
+              <a:ext uri="{FF2B5EF4-FFF2-40B4-BE49-F238E27FC236}">
+                <a16:creationId xmlns:a16="http://schemas.microsoft.com/office/drawing/2014/main" id="{694774B9-2FB8-E757-C082-1A6174050E85}"/>
+              </a:ext>
+            </a:extLst>
+          </p:cNvPr>
+          <p:cNvSpPr>
+            <a:spLocks noGrp="1"/>
+          </p:cNvSpPr>
+          <p:nvPr>
+            <p:ph type="title"/>
+          </p:nvPr>
+        </p:nvSpPr>
+        <p:spPr/>
+        <p:txBody>
+          <a:bodyPr/>
+          <a:lstStyle/>
+          <a:p>
+            <a:r>
+              <a:rPr lang="pt-BR" dirty="0"/>
+              <a:t>Topologia física</a:t>
+            </a:r>
+          </a:p>
+        </p:txBody>
+      </p:sp>
+      <p:sp>
+        <p:nvSpPr>
+          <p:cNvPr id="3" name="Espaço Reservado para Conteúdo 2">
+            <a:extLst>
+              <a:ext uri="{FF2B5EF4-FFF2-40B4-BE49-F238E27FC236}">
+                <a16:creationId xmlns:a16="http://schemas.microsoft.com/office/drawing/2014/main" id="{851A2B76-16C4-98C1-5F09-BCA403C9BBBC}"/>
+              </a:ext>
+            </a:extLst>
+          </p:cNvPr>
+          <p:cNvSpPr>
+            <a:spLocks noGrp="1"/>
+          </p:cNvSpPr>
+          <p:nvPr>
+            <p:ph idx="1"/>
+          </p:nvPr>
+        </p:nvSpPr>
+        <p:spPr/>
+        <p:txBody>
+          <a:bodyPr>
+            <a:normAutofit/>
+          </a:bodyPr>
+          <a:lstStyle/>
+          <a:p>
+            <a:r>
+              <a:rPr lang="pt-BR" dirty="0"/>
+              <a:t>Forma de distribuição dos cabos e dispositivos na rede</a:t>
+            </a:r>
+          </a:p>
+          <a:p>
+            <a:r>
+              <a:rPr lang="pt-BR" dirty="0"/>
+              <a:t>Influencia em como será o fluxo da informação</a:t>
+            </a:r>
+          </a:p>
+          <a:p>
+            <a:r>
+              <a:rPr lang="pt-BR" dirty="0"/>
+              <a:t>Determina os caminhos físicos</a:t>
+            </a:r>
+          </a:p>
+          <a:p>
+            <a:r>
+              <a:rPr lang="pt-BR" dirty="0"/>
+              <a:t>Busca atender às necessidades específicas de cada local levando em consideração os seguintes critérios</a:t>
+            </a:r>
+          </a:p>
+          <a:p>
+            <a:pPr lvl="1"/>
+            <a:r>
+              <a:rPr lang="pt-BR" dirty="0"/>
+              <a:t>Confiabilidade: garante aos usuários o funcionamento da rede de forma confiável;</a:t>
+            </a:r>
+          </a:p>
+          <a:p>
+            <a:pPr lvl="1"/>
+            <a:r>
+              <a:rPr lang="pt-BR" dirty="0"/>
+              <a:t>Capacidade de desempenho: a rede deve ter um desempenho aceitável</a:t>
+            </a:r>
+          </a:p>
+          <a:p>
+            <a:pPr lvl="1"/>
+            <a:r>
+              <a:rPr lang="pt-BR" dirty="0"/>
+              <a:t>Custo operacional e possibilidades de expansão: planejamento anterior</a:t>
+            </a:r>
+          </a:p>
+        </p:txBody>
+      </p:sp>
+    </p:spTree>
+    <p:extLst>
+      <p:ext uri="{BB962C8B-B14F-4D97-AF65-F5344CB8AC3E}">
+        <p14:creationId xmlns:p14="http://schemas.microsoft.com/office/powerpoint/2010/main" val="3005095367"/>
+      </p:ext>
+    </p:extLst>
+  </p:cSld>
+  <p:clrMapOvr>
+    <a:masterClrMapping/>
+  </p:clrMapOvr>
+</p:sld>
+</file>
+
+<file path=ppt/slides/slide32.xml><?xml version="1.0" encoding="utf-8"?>
+<p:sld xmlns:a="http://schemas.openxmlformats.org/drawingml/2006/main" xmlns:r="http://schemas.openxmlformats.org/officeDocument/2006/relationships" xmlns:p="http://schemas.openxmlformats.org/presentationml/2006/main">
+  <p:cSld>
+    <p:spTree>
+      <p:nvGrpSpPr>
+        <p:cNvPr id="1" name=""/>
+        <p:cNvGrpSpPr/>
+        <p:nvPr/>
+      </p:nvGrpSpPr>
+      <p:grpSpPr>
+        <a:xfrm>
+          <a:off x="0" y="0"/>
+          <a:ext cx="0" cy="0"/>
+          <a:chOff x="0" y="0"/>
+          <a:chExt cx="0" cy="0"/>
+        </a:xfrm>
+      </p:grpSpPr>
+      <p:sp>
+        <p:nvSpPr>
+          <p:cNvPr id="2" name="Título 1">
+            <a:extLst>
+              <a:ext uri="{FF2B5EF4-FFF2-40B4-BE49-F238E27FC236}">
+                <a16:creationId xmlns:a16="http://schemas.microsoft.com/office/drawing/2014/main" id="{D78B2961-D3CA-6F04-431E-CF12565BF917}"/>
+              </a:ext>
+            </a:extLst>
+          </p:cNvPr>
+          <p:cNvSpPr>
+            <a:spLocks noGrp="1"/>
+          </p:cNvSpPr>
+          <p:nvPr>
+            <p:ph type="title"/>
+          </p:nvPr>
+        </p:nvSpPr>
+        <p:spPr/>
+        <p:txBody>
+          <a:bodyPr/>
+          <a:lstStyle/>
+          <a:p>
+            <a:r>
+              <a:rPr lang="pt-BR" dirty="0"/>
+              <a:t>Topologia ponto-a-ponto</a:t>
+            </a:r>
+          </a:p>
+        </p:txBody>
+      </p:sp>
+      <p:sp>
+        <p:nvSpPr>
+          <p:cNvPr id="3" name="Espaço Reservado para Conteúdo 2">
+            <a:extLst>
+              <a:ext uri="{FF2B5EF4-FFF2-40B4-BE49-F238E27FC236}">
+                <a16:creationId xmlns:a16="http://schemas.microsoft.com/office/drawing/2014/main" id="{913FE5D2-5D23-4117-BBB6-08A07C8BCDD8}"/>
+              </a:ext>
+            </a:extLst>
+          </p:cNvPr>
+          <p:cNvSpPr>
+            <a:spLocks noGrp="1"/>
+          </p:cNvSpPr>
+          <p:nvPr>
+            <p:ph idx="1"/>
+          </p:nvPr>
+        </p:nvSpPr>
+        <p:spPr/>
+        <p:txBody>
+          <a:bodyPr/>
+          <a:lstStyle/>
+          <a:p>
+            <a:r>
+              <a:rPr lang="pt-BR" dirty="0"/>
+              <a:t>Forma de topologia mais simples.</a:t>
+            </a:r>
+          </a:p>
+          <a:p>
+            <a:r>
+              <a:rPr lang="pt-BR" dirty="0"/>
+              <a:t>Conexão entre dois computadores</a:t>
+            </a:r>
+          </a:p>
+          <a:p>
+            <a:r>
+              <a:rPr lang="pt-BR" dirty="0"/>
+              <a:t>Características:</a:t>
+            </a:r>
+          </a:p>
+          <a:p>
+            <a:pPr lvl="1"/>
+            <a:r>
+              <a:rPr lang="pt-BR" dirty="0"/>
+              <a:t>Cada uma pode ter características próprias que independem de outras conexões na mesma rede;</a:t>
+            </a:r>
+          </a:p>
+          <a:p>
+            <a:pPr lvl="1"/>
+            <a:r>
+              <a:rPr lang="pt-BR" dirty="0"/>
+              <a:t>Facilidade para implantar medidas de segurança e privacidade;</a:t>
+            </a:r>
+          </a:p>
+          <a:p>
+            <a:pPr lvl="1"/>
+            <a:r>
+              <a:rPr lang="pt-BR" dirty="0"/>
+              <a:t>Não existe necessidade de dar nomes (endereçar) aos participantes</a:t>
+            </a:r>
+          </a:p>
+        </p:txBody>
+      </p:sp>
+      <p:pic>
+        <p:nvPicPr>
+          <p:cNvPr id="5" name="Imagem 4">
+            <a:extLst>
+              <a:ext uri="{FF2B5EF4-FFF2-40B4-BE49-F238E27FC236}">
+                <a16:creationId xmlns:a16="http://schemas.microsoft.com/office/drawing/2014/main" id="{80A4EC3A-4951-3982-7D01-F52572EC161D}"/>
+              </a:ext>
+            </a:extLst>
+          </p:cNvPr>
+          <p:cNvPicPr>
+            <a:picLocks noChangeAspect="1"/>
+          </p:cNvPicPr>
+          <p:nvPr/>
+        </p:nvPicPr>
+        <p:blipFill>
+          <a:blip r:embed="rId2">
+            <a:clrChange>
+              <a:clrFrom>
+                <a:srgbClr val="FFFFFF"/>
+              </a:clrFrom>
+              <a:clrTo>
+                <a:srgbClr val="FFFFFF">
+                  <a:alpha val="0"/>
+                </a:srgbClr>
+              </a:clrTo>
+            </a:clrChange>
+          </a:blip>
+          <a:stretch>
+            <a:fillRect/>
+          </a:stretch>
+        </p:blipFill>
+        <p:spPr>
+          <a:xfrm>
+            <a:off x="5733859" y="2180496"/>
+            <a:ext cx="5534025" cy="1600200"/>
+          </a:xfrm>
+          <a:prstGeom prst="rect">
+            <a:avLst/>
+          </a:prstGeom>
+        </p:spPr>
+      </p:pic>
+    </p:spTree>
+    <p:extLst>
+      <p:ext uri="{BB962C8B-B14F-4D97-AF65-F5344CB8AC3E}">
+        <p14:creationId xmlns:p14="http://schemas.microsoft.com/office/powerpoint/2010/main" val="1562692267"/>
+      </p:ext>
+    </p:extLst>
+  </p:cSld>
+  <p:clrMapOvr>
+    <a:masterClrMapping/>
+  </p:clrMapOvr>
+</p:sld>
+</file>
+
+<file path=ppt/slides/slide33.xml><?xml version="1.0" encoding="utf-8"?>
+<p:sld xmlns:a="http://schemas.openxmlformats.org/drawingml/2006/main" xmlns:r="http://schemas.openxmlformats.org/officeDocument/2006/relationships" xmlns:p="http://schemas.openxmlformats.org/presentationml/2006/main">
+  <p:cSld>
+    <p:spTree>
+      <p:nvGrpSpPr>
+        <p:cNvPr id="1" name=""/>
+        <p:cNvGrpSpPr/>
+        <p:nvPr/>
+      </p:nvGrpSpPr>
+      <p:grpSpPr>
+        <a:xfrm>
+          <a:off x="0" y="0"/>
+          <a:ext cx="0" cy="0"/>
+          <a:chOff x="0" y="0"/>
+          <a:chExt cx="0" cy="0"/>
+        </a:xfrm>
+      </p:grpSpPr>
+      <p:sp>
+        <p:nvSpPr>
+          <p:cNvPr id="2" name="Título 1">
+            <a:extLst>
+              <a:ext uri="{FF2B5EF4-FFF2-40B4-BE49-F238E27FC236}">
+                <a16:creationId xmlns:a16="http://schemas.microsoft.com/office/drawing/2014/main" id="{B4DE5FC7-2398-B711-7D42-57D885652DDD}"/>
+              </a:ext>
+            </a:extLst>
+          </p:cNvPr>
+          <p:cNvSpPr>
+            <a:spLocks noGrp="1"/>
+          </p:cNvSpPr>
+          <p:nvPr>
+            <p:ph type="title"/>
+          </p:nvPr>
+        </p:nvSpPr>
+        <p:spPr/>
+        <p:txBody>
+          <a:bodyPr/>
+          <a:lstStyle/>
+          <a:p>
+            <a:r>
+              <a:rPr lang="pt-BR" dirty="0"/>
+              <a:t>Topologia em barramento</a:t>
+            </a:r>
+          </a:p>
+        </p:txBody>
+      </p:sp>
+      <p:sp>
+        <p:nvSpPr>
+          <p:cNvPr id="3" name="Espaço Reservado para Conteúdo 2">
+            <a:extLst>
+              <a:ext uri="{FF2B5EF4-FFF2-40B4-BE49-F238E27FC236}">
+                <a16:creationId xmlns:a16="http://schemas.microsoft.com/office/drawing/2014/main" id="{281169CA-396E-FD21-629D-8F37D856FF38}"/>
+              </a:ext>
+            </a:extLst>
+          </p:cNvPr>
+          <p:cNvSpPr>
+            <a:spLocks noGrp="1"/>
+          </p:cNvSpPr>
+          <p:nvPr>
+            <p:ph idx="1"/>
+          </p:nvPr>
+        </p:nvSpPr>
+        <p:spPr>
+          <a:xfrm>
+            <a:off x="581193" y="2180496"/>
+            <a:ext cx="7328368" cy="3678303"/>
+          </a:xfrm>
+        </p:spPr>
+        <p:txBody>
+          <a:bodyPr>
+            <a:normAutofit fontScale="92500" lnSpcReduction="20000"/>
+          </a:bodyPr>
+          <a:lstStyle/>
+          <a:p>
+            <a:r>
+              <a:rPr lang="pt-BR" dirty="0"/>
+              <a:t>Todos os computadores são conectados diretamente em um mesmo cabo;</a:t>
+            </a:r>
+          </a:p>
+          <a:p>
+            <a:r>
+              <a:rPr lang="pt-BR" dirty="0"/>
+              <a:t>Quando uma mensagem é enviada pela rede, ela passa por todos os computadores conectados ao barramento</a:t>
+            </a:r>
+          </a:p>
+          <a:p>
+            <a:r>
+              <a:rPr lang="pt-BR" dirty="0"/>
+              <a:t>Características:</a:t>
+            </a:r>
+          </a:p>
+          <a:p>
+            <a:pPr lvl="1"/>
+            <a:r>
+              <a:rPr lang="pt-BR" dirty="0"/>
+              <a:t>Facilidade para o acréscimo de novos computadores à rede;</a:t>
+            </a:r>
+          </a:p>
+          <a:p>
+            <a:pPr lvl="1"/>
+            <a:r>
+              <a:rPr lang="pt-BR" dirty="0"/>
+              <a:t>Fluxo da informação descentralizado;</a:t>
+            </a:r>
+          </a:p>
+          <a:p>
+            <a:pPr lvl="1"/>
+            <a:r>
+              <a:rPr lang="pt-BR" dirty="0"/>
+              <a:t>Um problema em um computador pode causar uma queda em toda a rede;</a:t>
+            </a:r>
+          </a:p>
+          <a:p>
+            <a:pPr lvl="1"/>
+            <a:r>
+              <a:rPr lang="pt-BR" dirty="0"/>
+              <a:t>A extensão da rede é limitada pelo tamanho do cabo;</a:t>
+            </a:r>
+          </a:p>
+          <a:p>
+            <a:pPr lvl="1"/>
+            <a:r>
+              <a:rPr lang="pt-BR" dirty="0"/>
+              <a:t>Exige mecanismos especiais de controle de acesso;</a:t>
+            </a:r>
+          </a:p>
+          <a:p>
+            <a:pPr lvl="1"/>
+            <a:r>
+              <a:rPr lang="pt-BR" dirty="0"/>
+              <a:t>Necessidade de haver endereço para cada par (nomes) permitindo a comunicação par-a-par</a:t>
+            </a:r>
+          </a:p>
+          <a:p>
+            <a:pPr lvl="1"/>
+            <a:r>
+              <a:rPr lang="pt-BR" dirty="0"/>
+              <a:t>Simplicidade, baixo custo, fácil instalação e expansão</a:t>
+            </a:r>
+          </a:p>
+        </p:txBody>
+      </p:sp>
+      <p:pic>
+        <p:nvPicPr>
+          <p:cNvPr id="5" name="Imagem 4">
+            <a:extLst>
+              <a:ext uri="{FF2B5EF4-FFF2-40B4-BE49-F238E27FC236}">
+                <a16:creationId xmlns:a16="http://schemas.microsoft.com/office/drawing/2014/main" id="{4F68931B-8F48-94FC-507E-33882CBCEEA2}"/>
+              </a:ext>
+            </a:extLst>
+          </p:cNvPr>
+          <p:cNvPicPr>
+            <a:picLocks noChangeAspect="1"/>
+          </p:cNvPicPr>
+          <p:nvPr/>
+        </p:nvPicPr>
+        <p:blipFill>
+          <a:blip r:embed="rId2">
+            <a:clrChange>
+              <a:clrFrom>
+                <a:srgbClr val="FFFFFF"/>
+              </a:clrFrom>
+              <a:clrTo>
+                <a:srgbClr val="FFFFFF">
+                  <a:alpha val="0"/>
+                </a:srgbClr>
+              </a:clrTo>
+            </a:clrChange>
+          </a:blip>
+          <a:stretch>
+            <a:fillRect/>
+          </a:stretch>
+        </p:blipFill>
+        <p:spPr>
+          <a:xfrm>
+            <a:off x="6935606" y="1911096"/>
+            <a:ext cx="5364598" cy="2289620"/>
+          </a:xfrm>
+          <a:prstGeom prst="rect">
+            <a:avLst/>
+          </a:prstGeom>
+        </p:spPr>
+      </p:pic>
+    </p:spTree>
+    <p:extLst>
+      <p:ext uri="{BB962C8B-B14F-4D97-AF65-F5344CB8AC3E}">
+        <p14:creationId xmlns:p14="http://schemas.microsoft.com/office/powerpoint/2010/main" val="3020158856"/>
+      </p:ext>
+    </p:extLst>
+  </p:cSld>
+  <p:clrMapOvr>
+    <a:masterClrMapping/>
+  </p:clrMapOvr>
+</p:sld>
+</file>
+
+<file path=ppt/slides/slide34.xml><?xml version="1.0" encoding="utf-8"?>
 <p:sld xmlns:a="http://schemas.openxmlformats.org/drawingml/2006/main" xmlns:r="http://schemas.openxmlformats.org/officeDocument/2006/relationships" xmlns:p="http://schemas.openxmlformats.org/presentationml/2006/main">
   <p:cSld>
     <p:bg>

--- a/Redes/REDES DE COMPUTADORES.pptx
+++ b/Redes/REDES DE COMPUTADORES.pptx
@@ -5,10 +5,10 @@
     <p:sldMasterId id="2147483672" r:id="rId1"/>
   </p:sldMasterIdLst>
   <p:notesMasterIdLst>
-    <p:notesMasterId r:id="rId36"/>
+    <p:notesMasterId r:id="rId39"/>
   </p:notesMasterIdLst>
   <p:handoutMasterIdLst>
-    <p:handoutMasterId r:id="rId37"/>
+    <p:handoutMasterId r:id="rId40"/>
   </p:handoutMasterIdLst>
   <p:sldIdLst>
     <p:sldId id="256" r:id="rId2"/>
@@ -44,7 +44,10 @@
     <p:sldId id="293" r:id="rId32"/>
     <p:sldId id="294" r:id="rId33"/>
     <p:sldId id="295" r:id="rId34"/>
-    <p:sldId id="260" r:id="rId35"/>
+    <p:sldId id="296" r:id="rId35"/>
+    <p:sldId id="297" r:id="rId36"/>
+    <p:sldId id="298" r:id="rId37"/>
+    <p:sldId id="260" r:id="rId38"/>
   </p:sldIdLst>
   <p:sldSz cx="12192000" cy="6858000"/>
   <p:notesSz cx="6858000" cy="9144000"/>
@@ -159,7 +162,7 @@
   <pc:docChgLst>
     <pc:chgData name="Joel Teixeira Cunha" userId="195451ac3a5e8dfd" providerId="LiveId" clId="{9D99295D-09A0-459E-AFDA-61FAD528DEBC}"/>
     <pc:docChg chg="undo custSel addSld modSld">
-      <pc:chgData name="Joel Teixeira Cunha" userId="195451ac3a5e8dfd" providerId="LiveId" clId="{9D99295D-09A0-459E-AFDA-61FAD528DEBC}" dt="2026-05-18T22:17:41.072" v="1703" actId="1076"/>
+      <pc:chgData name="Joel Teixeira Cunha" userId="195451ac3a5e8dfd" providerId="LiveId" clId="{9D99295D-09A0-459E-AFDA-61FAD528DEBC}" dt="2026-05-20T00:24:32.639" v="2491" actId="1076"/>
       <pc:docMkLst>
         <pc:docMk/>
       </pc:docMkLst>
@@ -286,6 +289,99 @@
           </ac:picMkLst>
         </pc:picChg>
       </pc:sldChg>
+      <pc:sldChg chg="addSp modSp new mod">
+        <pc:chgData name="Joel Teixeira Cunha" userId="195451ac3a5e8dfd" providerId="LiveId" clId="{9D99295D-09A0-459E-AFDA-61FAD528DEBC}" dt="2026-05-20T00:14:12.908" v="2032" actId="20577"/>
+        <pc:sldMkLst>
+          <pc:docMk/>
+          <pc:sldMk cId="4066461457" sldId="296"/>
+        </pc:sldMkLst>
+        <pc:spChg chg="mod">
+          <ac:chgData name="Joel Teixeira Cunha" userId="195451ac3a5e8dfd" providerId="LiveId" clId="{9D99295D-09A0-459E-AFDA-61FAD528DEBC}" dt="2026-05-20T00:10:43.788" v="1722" actId="20577"/>
+          <ac:spMkLst>
+            <pc:docMk/>
+            <pc:sldMk cId="4066461457" sldId="296"/>
+            <ac:spMk id="2" creationId="{62003A4D-7D3F-89DD-B866-6700531E47C6}"/>
+          </ac:spMkLst>
+        </pc:spChg>
+        <pc:spChg chg="mod">
+          <ac:chgData name="Joel Teixeira Cunha" userId="195451ac3a5e8dfd" providerId="LiveId" clId="{9D99295D-09A0-459E-AFDA-61FAD528DEBC}" dt="2026-05-20T00:14:12.908" v="2032" actId="20577"/>
+          <ac:spMkLst>
+            <pc:docMk/>
+            <pc:sldMk cId="4066461457" sldId="296"/>
+            <ac:spMk id="3" creationId="{98A48964-43B1-6C3F-8E72-F17651638038}"/>
+          </ac:spMkLst>
+        </pc:spChg>
+        <pc:picChg chg="add mod">
+          <ac:chgData name="Joel Teixeira Cunha" userId="195451ac3a5e8dfd" providerId="LiveId" clId="{9D99295D-09A0-459E-AFDA-61FAD528DEBC}" dt="2026-05-20T00:11:17.631" v="1726" actId="1076"/>
+          <ac:picMkLst>
+            <pc:docMk/>
+            <pc:sldMk cId="4066461457" sldId="296"/>
+            <ac:picMk id="5" creationId="{99DBD094-3E09-E431-8738-925F31396DFA}"/>
+          </ac:picMkLst>
+        </pc:picChg>
+      </pc:sldChg>
+      <pc:sldChg chg="addSp modSp new mod">
+        <pc:chgData name="Joel Teixeira Cunha" userId="195451ac3a5e8dfd" providerId="LiveId" clId="{9D99295D-09A0-459E-AFDA-61FAD528DEBC}" dt="2026-05-20T00:24:32.639" v="2491" actId="1076"/>
+        <pc:sldMkLst>
+          <pc:docMk/>
+          <pc:sldMk cId="686788975" sldId="297"/>
+        </pc:sldMkLst>
+        <pc:spChg chg="mod">
+          <ac:chgData name="Joel Teixeira Cunha" userId="195451ac3a5e8dfd" providerId="LiveId" clId="{9D99295D-09A0-459E-AFDA-61FAD528DEBC}" dt="2026-05-20T00:15:30.607" v="2054" actId="20577"/>
+          <ac:spMkLst>
+            <pc:docMk/>
+            <pc:sldMk cId="686788975" sldId="297"/>
+            <ac:spMk id="2" creationId="{10026B57-3FDA-8018-B938-9FCFE14269E0}"/>
+          </ac:spMkLst>
+        </pc:spChg>
+        <pc:spChg chg="mod">
+          <ac:chgData name="Joel Teixeira Cunha" userId="195451ac3a5e8dfd" providerId="LiveId" clId="{9D99295D-09A0-459E-AFDA-61FAD528DEBC}" dt="2026-05-20T00:24:20.494" v="2490" actId="14100"/>
+          <ac:spMkLst>
+            <pc:docMk/>
+            <pc:sldMk cId="686788975" sldId="297"/>
+            <ac:spMk id="3" creationId="{B12B03D7-AD6D-38F8-2783-E2DFCB32EB20}"/>
+          </ac:spMkLst>
+        </pc:spChg>
+        <pc:picChg chg="add mod">
+          <ac:chgData name="Joel Teixeira Cunha" userId="195451ac3a5e8dfd" providerId="LiveId" clId="{9D99295D-09A0-459E-AFDA-61FAD528DEBC}" dt="2026-05-20T00:24:32.639" v="2491" actId="1076"/>
+          <ac:picMkLst>
+            <pc:docMk/>
+            <pc:sldMk cId="686788975" sldId="297"/>
+            <ac:picMk id="1026" creationId="{D33A01CD-B865-5F9A-3649-D227B2530138}"/>
+          </ac:picMkLst>
+        </pc:picChg>
+      </pc:sldChg>
+      <pc:sldChg chg="addSp delSp modSp new mod">
+        <pc:chgData name="Joel Teixeira Cunha" userId="195451ac3a5e8dfd" providerId="LiveId" clId="{9D99295D-09A0-459E-AFDA-61FAD528DEBC}" dt="2026-05-20T00:21:51.129" v="2484" actId="1076"/>
+        <pc:sldMkLst>
+          <pc:docMk/>
+          <pc:sldMk cId="2555171411" sldId="298"/>
+        </pc:sldMkLst>
+        <pc:spChg chg="mod">
+          <ac:chgData name="Joel Teixeira Cunha" userId="195451ac3a5e8dfd" providerId="LiveId" clId="{9D99295D-09A0-459E-AFDA-61FAD528DEBC}" dt="2026-05-20T00:21:13.447" v="2480" actId="20577"/>
+          <ac:spMkLst>
+            <pc:docMk/>
+            <pc:sldMk cId="2555171411" sldId="298"/>
+            <ac:spMk id="2" creationId="{8EAC57A4-583D-6ABF-6570-2509B3FA99F1}"/>
+          </ac:spMkLst>
+        </pc:spChg>
+        <pc:spChg chg="del">
+          <ac:chgData name="Joel Teixeira Cunha" userId="195451ac3a5e8dfd" providerId="LiveId" clId="{9D99295D-09A0-459E-AFDA-61FAD528DEBC}" dt="2026-05-20T00:21:43.207" v="2481" actId="478"/>
+          <ac:spMkLst>
+            <pc:docMk/>
+            <pc:sldMk cId="2555171411" sldId="298"/>
+            <ac:spMk id="3" creationId="{526832C5-D382-5475-53FA-C2C9FB7E9D4B}"/>
+          </ac:spMkLst>
+        </pc:spChg>
+        <pc:picChg chg="add mod">
+          <ac:chgData name="Joel Teixeira Cunha" userId="195451ac3a5e8dfd" providerId="LiveId" clId="{9D99295D-09A0-459E-AFDA-61FAD528DEBC}" dt="2026-05-20T00:21:51.129" v="2484" actId="1076"/>
+          <ac:picMkLst>
+            <pc:docMk/>
+            <pc:sldMk cId="2555171411" sldId="298"/>
+            <ac:picMk id="5" creationId="{8F73ABFA-E65C-04C7-6F94-A69BA969B5A5}"/>
+          </ac:picMkLst>
+        </pc:picChg>
+      </pc:sldChg>
     </pc:docChg>
   </pc:docChgLst>
 </pc:chgInfo>
@@ -387,7 +483,7 @@
             <a:pPr rtl="0"/>
             <a:fld id="{A517C7B7-34F5-4531-9889-28687F60FAC8}" type="datetime1">
               <a:rPr lang="pt-BR" smtClean="0"/>
-              <a:t>18/05/2026</a:t>
+              <a:t>19/05/2026</a:t>
             </a:fld>
             <a:endParaRPr lang="pt-BR" dirty="0"/>
           </a:p>
@@ -568,7 +664,7 @@
             <a:fld id="{40C3EC75-555C-481D-9088-738CE6DDFC83}" type="datetime1">
               <a:rPr lang="pt-BR" smtClean="0"/>
               <a:pPr/>
-              <a:t>18/05/2026</a:t>
+              <a:t>19/05/2026</a:t>
             </a:fld>
             <a:endParaRPr lang="pt-BR" dirty="0"/>
           </a:p>
@@ -991,7 +1087,7 @@
             <a:pPr rtl="0"/>
             <a:fld id="{C6B3AB32-59DF-41F1-9618-EDFBF5049629}" type="slidenum">
               <a:rPr lang="pt-BR" smtClean="0"/>
-              <a:t>34</a:t>
+              <a:t>37</a:t>
             </a:fld>
             <a:endParaRPr lang="pt-BR"/>
           </a:p>
@@ -1256,7 +1352,7 @@
             <a:pPr rtl="0"/>
             <a:fld id="{2AF5B136-74F1-42D3-987D-A097EEF8F2FE}" type="datetime1">
               <a:rPr lang="pt-BR" noProof="0" smtClean="0"/>
-              <a:t>18/05/2026</a:t>
+              <a:t>19/05/2026</a:t>
             </a:fld>
             <a:endParaRPr lang="pt-BR" noProof="0"/>
           </a:p>
@@ -1521,7 +1617,7 @@
             <a:pPr rtl="0"/>
             <a:fld id="{0229B074-15EB-43FB-8347-3A734D799093}" type="datetime1">
               <a:rPr lang="pt-BR" noProof="0" smtClean="0"/>
-              <a:t>18/05/2026</a:t>
+              <a:t>19/05/2026</a:t>
             </a:fld>
             <a:endParaRPr lang="pt-BR" noProof="0"/>
           </a:p>
@@ -1759,7 +1855,7 @@
             <a:pPr rtl="0"/>
             <a:fld id="{036303E3-8DE9-4C2D-91EE-6F377AE582A8}" type="datetime1">
               <a:rPr lang="pt-BR" noProof="0" smtClean="0"/>
-              <a:t>18/05/2026</a:t>
+              <a:t>19/05/2026</a:t>
             </a:fld>
             <a:endParaRPr lang="pt-BR" noProof="0"/>
           </a:p>
@@ -2002,7 +2098,7 @@
             <a:pPr rtl="0"/>
             <a:fld id="{B04AF3F4-81C7-4F15-8991-6D0E8D06651A}" type="datetime1">
               <a:rPr lang="pt-BR" noProof="0" smtClean="0"/>
-              <a:t>18/05/2026</a:t>
+              <a:t>19/05/2026</a:t>
             </a:fld>
             <a:endParaRPr lang="pt-BR" noProof="0"/>
           </a:p>
@@ -2313,7 +2409,7 @@
             <a:pPr rtl="0"/>
             <a:fld id="{6E2946E4-8964-43BF-B1D5-4261B83248E5}" type="datetime1">
               <a:rPr lang="pt-BR" noProof="0" smtClean="0"/>
-              <a:t>18/05/2026</a:t>
+              <a:t>19/05/2026</a:t>
             </a:fld>
             <a:endParaRPr lang="pt-BR" noProof="0"/>
           </a:p>
@@ -2617,7 +2713,7 @@
             <a:pPr rtl="0"/>
             <a:fld id="{97C9F420-083C-437A-9265-7F13EB97C6A2}" type="datetime1">
               <a:rPr lang="pt-BR" noProof="0" smtClean="0"/>
-              <a:t>18/05/2026</a:t>
+              <a:t>19/05/2026</a:t>
             </a:fld>
             <a:endParaRPr lang="pt-BR" noProof="0"/>
           </a:p>
@@ -3041,7 +3137,7 @@
             <a:pPr rtl="0"/>
             <a:fld id="{BE07AF20-ED70-4B21-B799-75BB5818AB43}" type="datetime1">
               <a:rPr lang="pt-BR" noProof="0" smtClean="0"/>
-              <a:t>18/05/2026</a:t>
+              <a:t>19/05/2026</a:t>
             </a:fld>
             <a:endParaRPr lang="pt-BR" noProof="0"/>
           </a:p>
@@ -3140,7 +3236,7 @@
             <a:pPr rtl="0"/>
             <a:fld id="{0D33D876-8C34-42FC-BFF7-457557B97BB7}" type="datetime1">
               <a:rPr lang="pt-BR" noProof="0" smtClean="0"/>
-              <a:t>18/05/2026</a:t>
+              <a:t>19/05/2026</a:t>
             </a:fld>
             <a:endParaRPr lang="pt-BR" noProof="0"/>
           </a:p>
@@ -3306,7 +3402,7 @@
             <a:pPr rtl="0"/>
             <a:fld id="{4592437E-206F-4A1C-947F-806A50A40B88}" type="datetime1">
               <a:rPr lang="pt-BR" noProof="0" smtClean="0"/>
-              <a:t>18/05/2026</a:t>
+              <a:t>19/05/2026</a:t>
             </a:fld>
             <a:endParaRPr lang="pt-BR" noProof="0"/>
           </a:p>
@@ -3687,7 +3783,7 @@
             <a:pPr rtl="0"/>
             <a:fld id="{B036DDBC-F1EF-4D09-A533-5995BC167053}" type="datetime1">
               <a:rPr lang="pt-BR" noProof="0" smtClean="0"/>
-              <a:t>18/05/2026</a:t>
+              <a:t>19/05/2026</a:t>
             </a:fld>
             <a:endParaRPr lang="pt-BR" noProof="0"/>
           </a:p>
@@ -3980,7 +4076,7 @@
             <a:pPr rtl="0"/>
             <a:fld id="{DFFDDC01-A1CF-4C3A-BE96-FBC60101324D}" type="datetime1">
               <a:rPr lang="pt-BR" noProof="0" smtClean="0"/>
-              <a:t>18/05/2026</a:t>
+              <a:t>19/05/2026</a:t>
             </a:fld>
             <a:endParaRPr lang="pt-BR" noProof="0"/>
           </a:p>
@@ -4194,7 +4290,7 @@
             <a:pPr rtl="0"/>
             <a:fld id="{52266794-2CD5-4ED3-94F8-8B8DC65FDDE3}" type="datetime1">
               <a:rPr lang="pt-BR" noProof="0" smtClean="0"/>
-              <a:t>18/05/2026</a:t>
+              <a:t>19/05/2026</a:t>
             </a:fld>
             <a:endParaRPr lang="pt-BR" noProof="0"/>
           </a:p>
@@ -9209,6 +9305,445 @@
 </file>
 
 <file path=ppt/slides/slide34.xml><?xml version="1.0" encoding="utf-8"?>
+<p:sld xmlns:a="http://schemas.openxmlformats.org/drawingml/2006/main" xmlns:r="http://schemas.openxmlformats.org/officeDocument/2006/relationships" xmlns:p="http://schemas.openxmlformats.org/presentationml/2006/main">
+  <p:cSld>
+    <p:spTree>
+      <p:nvGrpSpPr>
+        <p:cNvPr id="1" name=""/>
+        <p:cNvGrpSpPr/>
+        <p:nvPr/>
+      </p:nvGrpSpPr>
+      <p:grpSpPr>
+        <a:xfrm>
+          <a:off x="0" y="0"/>
+          <a:ext cx="0" cy="0"/>
+          <a:chOff x="0" y="0"/>
+          <a:chExt cx="0" cy="0"/>
+        </a:xfrm>
+      </p:grpSpPr>
+      <p:sp>
+        <p:nvSpPr>
+          <p:cNvPr id="2" name="Título 1">
+            <a:extLst>
+              <a:ext uri="{FF2B5EF4-FFF2-40B4-BE49-F238E27FC236}">
+                <a16:creationId xmlns:a16="http://schemas.microsoft.com/office/drawing/2014/main" id="{62003A4D-7D3F-89DD-B866-6700531E47C6}"/>
+              </a:ext>
+            </a:extLst>
+          </p:cNvPr>
+          <p:cNvSpPr>
+            <a:spLocks noGrp="1"/>
+          </p:cNvSpPr>
+          <p:nvPr>
+            <p:ph type="title"/>
+          </p:nvPr>
+        </p:nvSpPr>
+        <p:spPr/>
+        <p:txBody>
+          <a:bodyPr/>
+          <a:lstStyle/>
+          <a:p>
+            <a:r>
+              <a:rPr lang="pt-BR" dirty="0"/>
+              <a:t>Topologia em anel</a:t>
+            </a:r>
+          </a:p>
+        </p:txBody>
+      </p:sp>
+      <p:sp>
+        <p:nvSpPr>
+          <p:cNvPr id="3" name="Espaço Reservado para Conteúdo 2">
+            <a:extLst>
+              <a:ext uri="{FF2B5EF4-FFF2-40B4-BE49-F238E27FC236}">
+                <a16:creationId xmlns:a16="http://schemas.microsoft.com/office/drawing/2014/main" id="{98A48964-43B1-6C3F-8E72-F17651638038}"/>
+              </a:ext>
+            </a:extLst>
+          </p:cNvPr>
+          <p:cNvSpPr>
+            <a:spLocks noGrp="1"/>
+          </p:cNvSpPr>
+          <p:nvPr>
+            <p:ph idx="1"/>
+          </p:nvPr>
+        </p:nvSpPr>
+        <p:spPr>
+          <a:xfrm>
+            <a:off x="581193" y="2180496"/>
+            <a:ext cx="6999184" cy="3678303"/>
+          </a:xfrm>
+        </p:spPr>
+        <p:txBody>
+          <a:bodyPr/>
+          <a:lstStyle/>
+          <a:p>
+            <a:r>
+              <a:rPr lang="pt-BR" dirty="0"/>
+              <a:t>A informação circula em um único cabo</a:t>
+            </a:r>
+          </a:p>
+          <a:p>
+            <a:r>
+              <a:rPr lang="pt-BR" dirty="0"/>
+              <a:t>A configuração mais comum é unidirecional e conecta todas as estações de trabalho</a:t>
+            </a:r>
+          </a:p>
+          <a:p>
+            <a:r>
+              <a:rPr lang="pt-BR" dirty="0"/>
+              <a:t>Fluxo de mensagens descentralizado</a:t>
+            </a:r>
+          </a:p>
+          <a:p>
+            <a:r>
+              <a:rPr lang="pt-BR" dirty="0"/>
+              <a:t>As mensagens são retransmitidas de nó em nó</a:t>
+            </a:r>
+          </a:p>
+          <a:p>
+            <a:r>
+              <a:rPr lang="pt-BR" dirty="0"/>
+              <a:t>Boa performance em redes de muito tráfego</a:t>
+            </a:r>
+          </a:p>
+        </p:txBody>
+      </p:sp>
+      <p:pic>
+        <p:nvPicPr>
+          <p:cNvPr id="5" name="Imagem 4">
+            <a:extLst>
+              <a:ext uri="{FF2B5EF4-FFF2-40B4-BE49-F238E27FC236}">
+                <a16:creationId xmlns:a16="http://schemas.microsoft.com/office/drawing/2014/main" id="{99DBD094-3E09-E431-8738-925F31396DFA}"/>
+              </a:ext>
+            </a:extLst>
+          </p:cNvPr>
+          <p:cNvPicPr>
+            <a:picLocks noChangeAspect="1"/>
+          </p:cNvPicPr>
+          <p:nvPr/>
+        </p:nvPicPr>
+        <p:blipFill>
+          <a:blip r:embed="rId2">
+            <a:clrChange>
+              <a:clrFrom>
+                <a:srgbClr val="FFFFFF"/>
+              </a:clrFrom>
+              <a:clrTo>
+                <a:srgbClr val="FFFFFF">
+                  <a:alpha val="0"/>
+                </a:srgbClr>
+              </a:clrTo>
+            </a:clrChange>
+          </a:blip>
+          <a:stretch>
+            <a:fillRect/>
+          </a:stretch>
+        </p:blipFill>
+        <p:spPr>
+          <a:xfrm>
+            <a:off x="6934009" y="916114"/>
+            <a:ext cx="5419725" cy="5172075"/>
+          </a:xfrm>
+          <a:prstGeom prst="rect">
+            <a:avLst/>
+          </a:prstGeom>
+        </p:spPr>
+      </p:pic>
+    </p:spTree>
+    <p:extLst>
+      <p:ext uri="{BB962C8B-B14F-4D97-AF65-F5344CB8AC3E}">
+        <p14:creationId xmlns:p14="http://schemas.microsoft.com/office/powerpoint/2010/main" val="4066461457"/>
+      </p:ext>
+    </p:extLst>
+  </p:cSld>
+  <p:clrMapOvr>
+    <a:masterClrMapping/>
+  </p:clrMapOvr>
+</p:sld>
+</file>
+
+<file path=ppt/slides/slide35.xml><?xml version="1.0" encoding="utf-8"?>
+<p:sld xmlns:a="http://schemas.openxmlformats.org/drawingml/2006/main" xmlns:r="http://schemas.openxmlformats.org/officeDocument/2006/relationships" xmlns:p="http://schemas.openxmlformats.org/presentationml/2006/main">
+  <p:cSld>
+    <p:spTree>
+      <p:nvGrpSpPr>
+        <p:cNvPr id="1" name=""/>
+        <p:cNvGrpSpPr/>
+        <p:nvPr/>
+      </p:nvGrpSpPr>
+      <p:grpSpPr>
+        <a:xfrm>
+          <a:off x="0" y="0"/>
+          <a:ext cx="0" cy="0"/>
+          <a:chOff x="0" y="0"/>
+          <a:chExt cx="0" cy="0"/>
+        </a:xfrm>
+      </p:grpSpPr>
+      <p:sp>
+        <p:nvSpPr>
+          <p:cNvPr id="2" name="Título 1">
+            <a:extLst>
+              <a:ext uri="{FF2B5EF4-FFF2-40B4-BE49-F238E27FC236}">
+                <a16:creationId xmlns:a16="http://schemas.microsoft.com/office/drawing/2014/main" id="{10026B57-3FDA-8018-B938-9FCFE14269E0}"/>
+              </a:ext>
+            </a:extLst>
+          </p:cNvPr>
+          <p:cNvSpPr>
+            <a:spLocks noGrp="1"/>
+          </p:cNvSpPr>
+          <p:nvPr>
+            <p:ph type="title"/>
+          </p:nvPr>
+        </p:nvSpPr>
+        <p:spPr/>
+        <p:txBody>
+          <a:bodyPr/>
+          <a:lstStyle/>
+          <a:p>
+            <a:r>
+              <a:rPr lang="pt-BR" dirty="0"/>
+              <a:t>Topologia em estrela</a:t>
+            </a:r>
+          </a:p>
+        </p:txBody>
+      </p:sp>
+      <p:sp>
+        <p:nvSpPr>
+          <p:cNvPr id="3" name="Espaço Reservado para Conteúdo 2">
+            <a:extLst>
+              <a:ext uri="{FF2B5EF4-FFF2-40B4-BE49-F238E27FC236}">
+                <a16:creationId xmlns:a16="http://schemas.microsoft.com/office/drawing/2014/main" id="{B12B03D7-AD6D-38F8-2783-E2DFCB32EB20}"/>
+              </a:ext>
+            </a:extLst>
+          </p:cNvPr>
+          <p:cNvSpPr>
+            <a:spLocks noGrp="1"/>
+          </p:cNvSpPr>
+          <p:nvPr>
+            <p:ph idx="1"/>
+          </p:nvPr>
+        </p:nvSpPr>
+        <p:spPr>
+          <a:xfrm>
+            <a:off x="581193" y="2180496"/>
+            <a:ext cx="6569416" cy="3678303"/>
+          </a:xfrm>
+        </p:spPr>
+        <p:txBody>
+          <a:bodyPr/>
+          <a:lstStyle/>
+          <a:p>
+            <a:r>
+              <a:rPr lang="pt-BR" dirty="0"/>
+              <a:t>Há necessidades de decisões de roteamento. </a:t>
+            </a:r>
+          </a:p>
+          <a:p>
+            <a:r>
+              <a:rPr lang="pt-BR" dirty="0"/>
+              <a:t>A estrutura é voltada a um nó concentrador. Há necessidade de equipamento central. Caso falhe toda a rede fica fora do ar.</a:t>
+            </a:r>
+          </a:p>
+          <a:p>
+            <a:r>
+              <a:rPr lang="pt-BR" dirty="0"/>
+              <a:t>Responsável pela retransmissão de todos os dados para todas as estações</a:t>
+            </a:r>
+          </a:p>
+          <a:p>
+            <a:r>
+              <a:rPr lang="pt-BR" dirty="0"/>
+              <a:t>Ligações ponto-a-ponto</a:t>
+            </a:r>
+          </a:p>
+          <a:p>
+            <a:r>
+              <a:rPr lang="pt-BR" dirty="0"/>
+              <a:t>Modificações ou adição de novas estações são simples</a:t>
+            </a:r>
+          </a:p>
+          <a:p>
+            <a:r>
+              <a:rPr lang="pt-BR" dirty="0"/>
+              <a:t>Gerenciamento centralizado</a:t>
+            </a:r>
+          </a:p>
+          <a:p>
+            <a:r>
+              <a:rPr lang="pt-BR" dirty="0"/>
+              <a:t>Desempenho de rede depende do nó central</a:t>
+            </a:r>
+          </a:p>
+        </p:txBody>
+      </p:sp>
+      <p:pic>
+        <p:nvPicPr>
+          <p:cNvPr id="1026" name="Picture 2" descr="Sobre a topologia de rede física. O que é a topologia de rede física? | by  luiz arthur | Medium">
+            <a:extLst>
+              <a:ext uri="{FF2B5EF4-FFF2-40B4-BE49-F238E27FC236}">
+                <a16:creationId xmlns:a16="http://schemas.microsoft.com/office/drawing/2014/main" id="{D33A01CD-B865-5F9A-3649-D227B2530138}"/>
+              </a:ext>
+            </a:extLst>
+          </p:cNvPr>
+          <p:cNvPicPr>
+            <a:picLocks noChangeAspect="1" noChangeArrowheads="1"/>
+          </p:cNvPicPr>
+          <p:nvPr/>
+        </p:nvPicPr>
+        <p:blipFill>
+          <a:blip r:embed="rId2">
+            <a:clrChange>
+              <a:clrFrom>
+                <a:srgbClr val="FFFFFF"/>
+              </a:clrFrom>
+              <a:clrTo>
+                <a:srgbClr val="FFFFFF">
+                  <a:alpha val="0"/>
+                </a:srgbClr>
+              </a:clrTo>
+            </a:clrChange>
+            <a:extLst>
+              <a:ext uri="{28A0092B-C50C-407E-A947-70E740481C1C}">
+                <a14:useLocalDpi xmlns:a14="http://schemas.microsoft.com/office/drawing/2010/main" val="0"/>
+              </a:ext>
+            </a:extLst>
+          </a:blip>
+          <a:srcRect/>
+          <a:stretch>
+            <a:fillRect/>
+          </a:stretch>
+        </p:blipFill>
+        <p:spPr bwMode="auto">
+          <a:xfrm>
+            <a:off x="6439281" y="2538116"/>
+            <a:ext cx="5283327" cy="3243939"/>
+          </a:xfrm>
+          <a:prstGeom prst="rect">
+            <a:avLst/>
+          </a:prstGeom>
+          <a:noFill/>
+          <a:extLst>
+            <a:ext uri="{909E8E84-426E-40DD-AFC4-6F175D3DCCD1}">
+              <a14:hiddenFill xmlns:a14="http://schemas.microsoft.com/office/drawing/2010/main">
+                <a:solidFill>
+                  <a:srgbClr val="FFFFFF"/>
+                </a:solidFill>
+              </a14:hiddenFill>
+            </a:ext>
+          </a:extLst>
+        </p:spPr>
+      </p:pic>
+    </p:spTree>
+    <p:extLst>
+      <p:ext uri="{BB962C8B-B14F-4D97-AF65-F5344CB8AC3E}">
+        <p14:creationId xmlns:p14="http://schemas.microsoft.com/office/powerpoint/2010/main" val="686788975"/>
+      </p:ext>
+    </p:extLst>
+  </p:cSld>
+  <p:clrMapOvr>
+    <a:masterClrMapping/>
+  </p:clrMapOvr>
+</p:sld>
+</file>
+
+<file path=ppt/slides/slide36.xml><?xml version="1.0" encoding="utf-8"?>
+<p:sld xmlns:a="http://schemas.openxmlformats.org/drawingml/2006/main" xmlns:r="http://schemas.openxmlformats.org/officeDocument/2006/relationships" xmlns:p="http://schemas.openxmlformats.org/presentationml/2006/main">
+  <p:cSld>
+    <p:spTree>
+      <p:nvGrpSpPr>
+        <p:cNvPr id="1" name=""/>
+        <p:cNvGrpSpPr/>
+        <p:nvPr/>
+      </p:nvGrpSpPr>
+      <p:grpSpPr>
+        <a:xfrm>
+          <a:off x="0" y="0"/>
+          <a:ext cx="0" cy="0"/>
+          <a:chOff x="0" y="0"/>
+          <a:chExt cx="0" cy="0"/>
+        </a:xfrm>
+      </p:grpSpPr>
+      <p:sp>
+        <p:nvSpPr>
+          <p:cNvPr id="2" name="Título 1">
+            <a:extLst>
+              <a:ext uri="{FF2B5EF4-FFF2-40B4-BE49-F238E27FC236}">
+                <a16:creationId xmlns:a16="http://schemas.microsoft.com/office/drawing/2014/main" id="{8EAC57A4-583D-6ABF-6570-2509B3FA99F1}"/>
+              </a:ext>
+            </a:extLst>
+          </p:cNvPr>
+          <p:cNvSpPr>
+            <a:spLocks noGrp="1"/>
+          </p:cNvSpPr>
+          <p:nvPr>
+            <p:ph type="title"/>
+          </p:nvPr>
+        </p:nvSpPr>
+        <p:spPr/>
+        <p:txBody>
+          <a:bodyPr/>
+          <a:lstStyle/>
+          <a:p>
+            <a:r>
+              <a:rPr lang="pt-BR" dirty="0"/>
+              <a:t>Topologia híbrida ou mista</a:t>
+            </a:r>
+          </a:p>
+        </p:txBody>
+      </p:sp>
+      <p:pic>
+        <p:nvPicPr>
+          <p:cNvPr id="5" name="Imagem 4">
+            <a:extLst>
+              <a:ext uri="{FF2B5EF4-FFF2-40B4-BE49-F238E27FC236}">
+                <a16:creationId xmlns:a16="http://schemas.microsoft.com/office/drawing/2014/main" id="{8F73ABFA-E65C-04C7-6F94-A69BA969B5A5}"/>
+              </a:ext>
+            </a:extLst>
+          </p:cNvPr>
+          <p:cNvPicPr>
+            <a:picLocks noChangeAspect="1"/>
+          </p:cNvPicPr>
+          <p:nvPr/>
+        </p:nvPicPr>
+        <p:blipFill>
+          <a:blip r:embed="rId2">
+            <a:clrChange>
+              <a:clrFrom>
+                <a:srgbClr val="FFFFFF"/>
+              </a:clrFrom>
+              <a:clrTo>
+                <a:srgbClr val="FFFFFF">
+                  <a:alpha val="0"/>
+                </a:srgbClr>
+              </a:clrTo>
+            </a:clrChange>
+          </a:blip>
+          <a:stretch>
+            <a:fillRect/>
+          </a:stretch>
+        </p:blipFill>
+        <p:spPr>
+          <a:xfrm>
+            <a:off x="1642872" y="1627822"/>
+            <a:ext cx="9144000" cy="4333875"/>
+          </a:xfrm>
+          <a:prstGeom prst="rect">
+            <a:avLst/>
+          </a:prstGeom>
+        </p:spPr>
+      </p:pic>
+    </p:spTree>
+    <p:extLst>
+      <p:ext uri="{BB962C8B-B14F-4D97-AF65-F5344CB8AC3E}">
+        <p14:creationId xmlns:p14="http://schemas.microsoft.com/office/powerpoint/2010/main" val="2555171411"/>
+      </p:ext>
+    </p:extLst>
+  </p:cSld>
+  <p:clrMapOvr>
+    <a:masterClrMapping/>
+  </p:clrMapOvr>
+</p:sld>
+</file>
+
+<file path=ppt/slides/slide37.xml><?xml version="1.0" encoding="utf-8"?>
 <p:sld xmlns:a="http://schemas.openxmlformats.org/drawingml/2006/main" xmlns:r="http://schemas.openxmlformats.org/officeDocument/2006/relationships" xmlns:p="http://schemas.openxmlformats.org/presentationml/2006/main">
   <p:cSld>
     <p:bg>

--- a/Redes/REDES DE COMPUTADORES.pptx
+++ b/Redes/REDES DE COMPUTADORES.pptx
@@ -5,10 +5,10 @@
     <p:sldMasterId id="2147483672" r:id="rId1"/>
   </p:sldMasterIdLst>
   <p:notesMasterIdLst>
-    <p:notesMasterId r:id="rId39"/>
+    <p:notesMasterId r:id="rId44"/>
   </p:notesMasterIdLst>
   <p:handoutMasterIdLst>
-    <p:handoutMasterId r:id="rId40"/>
+    <p:handoutMasterId r:id="rId45"/>
   </p:handoutMasterIdLst>
   <p:sldIdLst>
     <p:sldId id="256" r:id="rId2"/>
@@ -47,7 +47,12 @@
     <p:sldId id="296" r:id="rId35"/>
     <p:sldId id="297" r:id="rId36"/>
     <p:sldId id="298" r:id="rId37"/>
-    <p:sldId id="260" r:id="rId38"/>
+    <p:sldId id="300" r:id="rId38"/>
+    <p:sldId id="301" r:id="rId39"/>
+    <p:sldId id="302" r:id="rId40"/>
+    <p:sldId id="303" r:id="rId41"/>
+    <p:sldId id="304" r:id="rId42"/>
+    <p:sldId id="260" r:id="rId43"/>
   </p:sldIdLst>
   <p:sldSz cx="12192000" cy="6858000"/>
   <p:notesSz cx="6858000" cy="9144000"/>
@@ -365,14 +370,6 @@
             <ac:spMk id="2" creationId="{8EAC57A4-583D-6ABF-6570-2509B3FA99F1}"/>
           </ac:spMkLst>
         </pc:spChg>
-        <pc:spChg chg="del">
-          <ac:chgData name="Joel Teixeira Cunha" userId="195451ac3a5e8dfd" providerId="LiveId" clId="{9D99295D-09A0-459E-AFDA-61FAD528DEBC}" dt="2026-05-20T00:21:43.207" v="2481" actId="478"/>
-          <ac:spMkLst>
-            <pc:docMk/>
-            <pc:sldMk cId="2555171411" sldId="298"/>
-            <ac:spMk id="3" creationId="{526832C5-D382-5475-53FA-C2C9FB7E9D4B}"/>
-          </ac:spMkLst>
-        </pc:spChg>
         <pc:picChg chg="add mod">
           <ac:chgData name="Joel Teixeira Cunha" userId="195451ac3a5e8dfd" providerId="LiveId" clId="{9D99295D-09A0-459E-AFDA-61FAD528DEBC}" dt="2026-05-20T00:21:51.129" v="2484" actId="1076"/>
           <ac:picMkLst>
@@ -382,6 +379,177 @@
           </ac:picMkLst>
         </pc:picChg>
       </pc:sldChg>
+    </pc:docChg>
+  </pc:docChgLst>
+  <pc:docChgLst>
+    <pc:chgData name="Joel Teixeira Cunha" userId="195451ac3a5e8dfd" providerId="LiveId" clId="{2A4D4AF3-9DC9-4CE5-AE1A-E96DDBF3EED9}"/>
+    <pc:docChg chg="undo custSel addSld delSld modSld modMainMaster">
+      <pc:chgData name="Joel Teixeira Cunha" userId="195451ac3a5e8dfd" providerId="LiveId" clId="{2A4D4AF3-9DC9-4CE5-AE1A-E96DDBF3EED9}" dt="2026-06-03T11:22:01.766" v="1026" actId="1076"/>
+      <pc:docMkLst>
+        <pc:docMk/>
+      </pc:docMkLst>
+      <pc:sldChg chg="modSp mod">
+        <pc:chgData name="Joel Teixeira Cunha" userId="195451ac3a5e8dfd" providerId="LiveId" clId="{2A4D4AF3-9DC9-4CE5-AE1A-E96DDBF3EED9}" dt="2026-06-03T11:22:01.766" v="1026" actId="1076"/>
+        <pc:sldMkLst>
+          <pc:docMk/>
+          <pc:sldMk cId="1562692267" sldId="294"/>
+        </pc:sldMkLst>
+        <pc:picChg chg="mod">
+          <ac:chgData name="Joel Teixeira Cunha" userId="195451ac3a5e8dfd" providerId="LiveId" clId="{2A4D4AF3-9DC9-4CE5-AE1A-E96DDBF3EED9}" dt="2026-06-03T11:22:01.766" v="1026" actId="1076"/>
+          <ac:picMkLst>
+            <pc:docMk/>
+            <pc:sldMk cId="1562692267" sldId="294"/>
+            <ac:picMk id="5" creationId="{80A4EC3A-4951-3982-7D01-F52572EC161D}"/>
+          </ac:picMkLst>
+        </pc:picChg>
+      </pc:sldChg>
+      <pc:sldChg chg="new del">
+        <pc:chgData name="Joel Teixeira Cunha" userId="195451ac3a5e8dfd" providerId="LiveId" clId="{2A4D4AF3-9DC9-4CE5-AE1A-E96DDBF3EED9}" dt="2026-06-02T13:59:26.216" v="2" actId="47"/>
+        <pc:sldMkLst>
+          <pc:docMk/>
+          <pc:sldMk cId="3916626868" sldId="299"/>
+        </pc:sldMkLst>
+      </pc:sldChg>
+      <pc:sldChg chg="addSp modSp new mod modClrScheme chgLayout">
+        <pc:chgData name="Joel Teixeira Cunha" userId="195451ac3a5e8dfd" providerId="LiveId" clId="{2A4D4AF3-9DC9-4CE5-AE1A-E96DDBF3EED9}" dt="2026-06-02T13:59:51.330" v="6" actId="26606"/>
+        <pc:sldMkLst>
+          <pc:docMk/>
+          <pc:sldMk cId="1396634947" sldId="300"/>
+        </pc:sldMkLst>
+        <pc:picChg chg="add mod">
+          <ac:chgData name="Joel Teixeira Cunha" userId="195451ac3a5e8dfd" providerId="LiveId" clId="{2A4D4AF3-9DC9-4CE5-AE1A-E96DDBF3EED9}" dt="2026-06-02T13:59:51.330" v="6" actId="26606"/>
+          <ac:picMkLst>
+            <pc:docMk/>
+            <pc:sldMk cId="1396634947" sldId="300"/>
+            <ac:picMk id="3" creationId="{748CC09D-9B0C-2949-DB27-1621A15D751E}"/>
+          </ac:picMkLst>
+        </pc:picChg>
+      </pc:sldChg>
+      <pc:sldChg chg="modSp new mod">
+        <pc:chgData name="Joel Teixeira Cunha" userId="195451ac3a5e8dfd" providerId="LiveId" clId="{2A4D4AF3-9DC9-4CE5-AE1A-E96DDBF3EED9}" dt="2026-06-02T14:01:55.757" v="216" actId="20577"/>
+        <pc:sldMkLst>
+          <pc:docMk/>
+          <pc:sldMk cId="2228430991" sldId="301"/>
+        </pc:sldMkLst>
+        <pc:spChg chg="mod">
+          <ac:chgData name="Joel Teixeira Cunha" userId="195451ac3a5e8dfd" providerId="LiveId" clId="{2A4D4AF3-9DC9-4CE5-AE1A-E96DDBF3EED9}" dt="2026-06-02T14:00:29.905" v="35" actId="20577"/>
+          <ac:spMkLst>
+            <pc:docMk/>
+            <pc:sldMk cId="2228430991" sldId="301"/>
+            <ac:spMk id="2" creationId="{8856C33B-2C26-F485-A7D2-39C601A67615}"/>
+          </ac:spMkLst>
+        </pc:spChg>
+        <pc:spChg chg="mod">
+          <ac:chgData name="Joel Teixeira Cunha" userId="195451ac3a5e8dfd" providerId="LiveId" clId="{2A4D4AF3-9DC9-4CE5-AE1A-E96DDBF3EED9}" dt="2026-06-02T14:01:55.757" v="216" actId="20577"/>
+          <ac:spMkLst>
+            <pc:docMk/>
+            <pc:sldMk cId="2228430991" sldId="301"/>
+            <ac:spMk id="3" creationId="{A13842A8-2417-E583-8B33-0FCFAB6EE58E}"/>
+          </ac:spMkLst>
+        </pc:spChg>
+      </pc:sldChg>
+      <pc:sldChg chg="addSp delSp modSp add mod modClrScheme chgLayout">
+        <pc:chgData name="Joel Teixeira Cunha" userId="195451ac3a5e8dfd" providerId="LiveId" clId="{2A4D4AF3-9DC9-4CE5-AE1A-E96DDBF3EED9}" dt="2026-06-02T14:11:11.776" v="503" actId="3064"/>
+        <pc:sldMkLst>
+          <pc:docMk/>
+          <pc:sldMk cId="1137056065" sldId="302"/>
+        </pc:sldMkLst>
+        <pc:spChg chg="mod">
+          <ac:chgData name="Joel Teixeira Cunha" userId="195451ac3a5e8dfd" providerId="LiveId" clId="{2A4D4AF3-9DC9-4CE5-AE1A-E96DDBF3EED9}" dt="2026-06-02T14:10:30.862" v="500" actId="26606"/>
+          <ac:spMkLst>
+            <pc:docMk/>
+            <pc:sldMk cId="1137056065" sldId="302"/>
+            <ac:spMk id="2" creationId="{7AD21C45-6F07-B69F-59CC-ED7E4E0C5758}"/>
+          </ac:spMkLst>
+        </pc:spChg>
+        <pc:spChg chg="mod">
+          <ac:chgData name="Joel Teixeira Cunha" userId="195451ac3a5e8dfd" providerId="LiveId" clId="{2A4D4AF3-9DC9-4CE5-AE1A-E96DDBF3EED9}" dt="2026-06-02T14:11:11.776" v="503" actId="3064"/>
+          <ac:spMkLst>
+            <pc:docMk/>
+            <pc:sldMk cId="1137056065" sldId="302"/>
+            <ac:spMk id="3" creationId="{F5D8BB43-49E0-6ACE-CF0C-F2BB7C6A2104}"/>
+          </ac:spMkLst>
+        </pc:spChg>
+        <pc:picChg chg="add del mod">
+          <ac:chgData name="Joel Teixeira Cunha" userId="195451ac3a5e8dfd" providerId="LiveId" clId="{2A4D4AF3-9DC9-4CE5-AE1A-E96DDBF3EED9}" dt="2026-06-02T14:10:45.921" v="501" actId="21"/>
+          <ac:picMkLst>
+            <pc:docMk/>
+            <pc:sldMk cId="1137056065" sldId="302"/>
+            <ac:picMk id="5" creationId="{10752C78-3FAC-2CC2-65C2-028D53743F39}"/>
+          </ac:picMkLst>
+        </pc:picChg>
+      </pc:sldChg>
+      <pc:sldChg chg="addSp modSp add mod">
+        <pc:chgData name="Joel Teixeira Cunha" userId="195451ac3a5e8dfd" providerId="LiveId" clId="{2A4D4AF3-9DC9-4CE5-AE1A-E96DDBF3EED9}" dt="2026-06-02T14:16:58.847" v="1009" actId="27636"/>
+        <pc:sldMkLst>
+          <pc:docMk/>
+          <pc:sldMk cId="3752736611" sldId="303"/>
+        </pc:sldMkLst>
+        <pc:spChg chg="mod">
+          <ac:chgData name="Joel Teixeira Cunha" userId="195451ac3a5e8dfd" providerId="LiveId" clId="{2A4D4AF3-9DC9-4CE5-AE1A-E96DDBF3EED9}" dt="2026-06-02T14:16:58.847" v="1009" actId="27636"/>
+          <ac:spMkLst>
+            <pc:docMk/>
+            <pc:sldMk cId="3752736611" sldId="303"/>
+            <ac:spMk id="3" creationId="{0608DF11-7331-AADB-7A61-CB6D86DA7772}"/>
+          </ac:spMkLst>
+        </pc:spChg>
+        <pc:picChg chg="add mod">
+          <ac:chgData name="Joel Teixeira Cunha" userId="195451ac3a5e8dfd" providerId="LiveId" clId="{2A4D4AF3-9DC9-4CE5-AE1A-E96DDBF3EED9}" dt="2026-06-02T14:14:33.520" v="896"/>
+          <ac:picMkLst>
+            <pc:docMk/>
+            <pc:sldMk cId="3752736611" sldId="303"/>
+            <ac:picMk id="5" creationId="{10752C78-3FAC-2CC2-65C2-028D53743F39}"/>
+          </ac:picMkLst>
+        </pc:picChg>
+      </pc:sldChg>
+      <pc:sldChg chg="modSp add mod">
+        <pc:chgData name="Joel Teixeira Cunha" userId="195451ac3a5e8dfd" providerId="LiveId" clId="{2A4D4AF3-9DC9-4CE5-AE1A-E96DDBF3EED9}" dt="2026-06-02T14:17:28.739" v="1025" actId="5793"/>
+        <pc:sldMkLst>
+          <pc:docMk/>
+          <pc:sldMk cId="2415727671" sldId="304"/>
+        </pc:sldMkLst>
+        <pc:spChg chg="mod">
+          <ac:chgData name="Joel Teixeira Cunha" userId="195451ac3a5e8dfd" providerId="LiveId" clId="{2A4D4AF3-9DC9-4CE5-AE1A-E96DDBF3EED9}" dt="2026-06-02T14:17:28.739" v="1025" actId="5793"/>
+          <ac:spMkLst>
+            <pc:docMk/>
+            <pc:sldMk cId="2415727671" sldId="304"/>
+            <ac:spMk id="3" creationId="{65C59513-9337-0F05-DF5D-F551BECE94F1}"/>
+          </ac:spMkLst>
+        </pc:spChg>
+      </pc:sldChg>
+      <pc:sldMasterChg chg="modSldLayout">
+        <pc:chgData name="Joel Teixeira Cunha" userId="195451ac3a5e8dfd" providerId="LiveId" clId="{2A4D4AF3-9DC9-4CE5-AE1A-E96DDBF3EED9}" dt="2026-06-02T14:09:52.376" v="498"/>
+        <pc:sldMasterMkLst>
+          <pc:docMk/>
+          <pc:sldMasterMk cId="82855549" sldId="2147483672"/>
+        </pc:sldMasterMkLst>
+        <pc:sldLayoutChg chg="addSp delSp modSp mod">
+          <pc:chgData name="Joel Teixeira Cunha" userId="195451ac3a5e8dfd" providerId="LiveId" clId="{2A4D4AF3-9DC9-4CE5-AE1A-E96DDBF3EED9}" dt="2026-06-02T14:09:52.376" v="498"/>
+          <pc:sldLayoutMkLst>
+            <pc:docMk/>
+            <pc:sldMasterMk cId="82855549" sldId="2147483672"/>
+            <pc:sldLayoutMk cId="2739981630" sldId="2147483674"/>
+          </pc:sldLayoutMkLst>
+          <pc:spChg chg="mod">
+            <ac:chgData name="Joel Teixeira Cunha" userId="195451ac3a5e8dfd" providerId="LiveId" clId="{2A4D4AF3-9DC9-4CE5-AE1A-E96DDBF3EED9}" dt="2026-06-02T14:09:41.774" v="496" actId="3064"/>
+            <ac:spMkLst>
+              <pc:docMk/>
+              <pc:sldMasterMk cId="82855549" sldId="2147483672"/>
+              <pc:sldLayoutMk cId="2739981630" sldId="2147483674"/>
+              <ac:spMk id="3" creationId="{00000000-0000-0000-0000-000000000000}"/>
+            </ac:spMkLst>
+          </pc:spChg>
+          <pc:spChg chg="add del mod">
+            <ac:chgData name="Joel Teixeira Cunha" userId="195451ac3a5e8dfd" providerId="LiveId" clId="{2A4D4AF3-9DC9-4CE5-AE1A-E96DDBF3EED9}" dt="2026-06-02T14:09:52.376" v="498"/>
+            <ac:spMkLst>
+              <pc:docMk/>
+              <pc:sldMasterMk cId="82855549" sldId="2147483672"/>
+              <pc:sldLayoutMk cId="2739981630" sldId="2147483674"/>
+              <ac:spMk id="8" creationId="{D5E52AA8-9517-C3C6-656B-8B8AFCA0FC34}"/>
+            </ac:spMkLst>
+          </pc:spChg>
+        </pc:sldLayoutChg>
+      </pc:sldMasterChg>
     </pc:docChg>
   </pc:docChgLst>
 </pc:chgInfo>
@@ -483,7 +651,7 @@
             <a:pPr rtl="0"/>
             <a:fld id="{A517C7B7-34F5-4531-9889-28687F60FAC8}" type="datetime1">
               <a:rPr lang="pt-BR" smtClean="0"/>
-              <a:t>19/05/2026</a:t>
+              <a:t>03/06/2026</a:t>
             </a:fld>
             <a:endParaRPr lang="pt-BR" dirty="0"/>
           </a:p>
@@ -664,7 +832,7 @@
             <a:fld id="{40C3EC75-555C-481D-9088-738CE6DDFC83}" type="datetime1">
               <a:rPr lang="pt-BR" smtClean="0"/>
               <a:pPr/>
-              <a:t>19/05/2026</a:t>
+              <a:t>03/06/2026</a:t>
             </a:fld>
             <a:endParaRPr lang="pt-BR" dirty="0"/>
           </a:p>
@@ -1087,7 +1255,7 @@
             <a:pPr rtl="0"/>
             <a:fld id="{C6B3AB32-59DF-41F1-9618-EDFBF5049629}" type="slidenum">
               <a:rPr lang="pt-BR" smtClean="0"/>
-              <a:t>37</a:t>
+              <a:t>42</a:t>
             </a:fld>
             <a:endParaRPr lang="pt-BR"/>
           </a:p>
@@ -1352,7 +1520,7 @@
             <a:pPr rtl="0"/>
             <a:fld id="{2AF5B136-74F1-42D3-987D-A097EEF8F2FE}" type="datetime1">
               <a:rPr lang="pt-BR" noProof="0" smtClean="0"/>
-              <a:t>19/05/2026</a:t>
+              <a:t>03/06/2026</a:t>
             </a:fld>
             <a:endParaRPr lang="pt-BR" noProof="0"/>
           </a:p>
@@ -1617,7 +1785,7 @@
             <a:pPr rtl="0"/>
             <a:fld id="{0229B074-15EB-43FB-8347-3A734D799093}" type="datetime1">
               <a:rPr lang="pt-BR" noProof="0" smtClean="0"/>
-              <a:t>19/05/2026</a:t>
+              <a:t>03/06/2026</a:t>
             </a:fld>
             <a:endParaRPr lang="pt-BR" noProof="0"/>
           </a:p>
@@ -1855,7 +2023,7 @@
             <a:pPr rtl="0"/>
             <a:fld id="{036303E3-8DE9-4C2D-91EE-6F377AE582A8}" type="datetime1">
               <a:rPr lang="pt-BR" noProof="0" smtClean="0"/>
-              <a:t>19/05/2026</a:t>
+              <a:t>03/06/2026</a:t>
             </a:fld>
             <a:endParaRPr lang="pt-BR" noProof="0"/>
           </a:p>
@@ -2041,7 +2209,7 @@
           </a:xfrm>
         </p:spPr>
         <p:txBody>
-          <a:bodyPr rtlCol="0"/>
+          <a:bodyPr rtlCol="0" anchor="t" anchorCtr="0"/>
           <a:lstStyle/>
           <a:p>
             <a:pPr lvl="0" rtl="0"/>
@@ -2098,7 +2266,7 @@
             <a:pPr rtl="0"/>
             <a:fld id="{B04AF3F4-81C7-4F15-8991-6D0E8D06651A}" type="datetime1">
               <a:rPr lang="pt-BR" noProof="0" smtClean="0"/>
-              <a:t>19/05/2026</a:t>
+              <a:t>03/06/2026</a:t>
             </a:fld>
             <a:endParaRPr lang="pt-BR" noProof="0"/>
           </a:p>
@@ -2409,7 +2577,7 @@
             <a:pPr rtl="0"/>
             <a:fld id="{6E2946E4-8964-43BF-B1D5-4261B83248E5}" type="datetime1">
               <a:rPr lang="pt-BR" noProof="0" smtClean="0"/>
-              <a:t>19/05/2026</a:t>
+              <a:t>03/06/2026</a:t>
             </a:fld>
             <a:endParaRPr lang="pt-BR" noProof="0"/>
           </a:p>
@@ -2713,7 +2881,7 @@
             <a:pPr rtl="0"/>
             <a:fld id="{97C9F420-083C-437A-9265-7F13EB97C6A2}" type="datetime1">
               <a:rPr lang="pt-BR" noProof="0" smtClean="0"/>
-              <a:t>19/05/2026</a:t>
+              <a:t>03/06/2026</a:t>
             </a:fld>
             <a:endParaRPr lang="pt-BR" noProof="0"/>
           </a:p>
@@ -3137,7 +3305,7 @@
             <a:pPr rtl="0"/>
             <a:fld id="{BE07AF20-ED70-4B21-B799-75BB5818AB43}" type="datetime1">
               <a:rPr lang="pt-BR" noProof="0" smtClean="0"/>
-              <a:t>19/05/2026</a:t>
+              <a:t>03/06/2026</a:t>
             </a:fld>
             <a:endParaRPr lang="pt-BR" noProof="0"/>
           </a:p>
@@ -3236,7 +3404,7 @@
             <a:pPr rtl="0"/>
             <a:fld id="{0D33D876-8C34-42FC-BFF7-457557B97BB7}" type="datetime1">
               <a:rPr lang="pt-BR" noProof="0" smtClean="0"/>
-              <a:t>19/05/2026</a:t>
+              <a:t>03/06/2026</a:t>
             </a:fld>
             <a:endParaRPr lang="pt-BR" noProof="0"/>
           </a:p>
@@ -3402,7 +3570,7 @@
             <a:pPr rtl="0"/>
             <a:fld id="{4592437E-206F-4A1C-947F-806A50A40B88}" type="datetime1">
               <a:rPr lang="pt-BR" noProof="0" smtClean="0"/>
-              <a:t>19/05/2026</a:t>
+              <a:t>03/06/2026</a:t>
             </a:fld>
             <a:endParaRPr lang="pt-BR" noProof="0"/>
           </a:p>
@@ -3783,7 +3951,7 @@
             <a:pPr rtl="0"/>
             <a:fld id="{B036DDBC-F1EF-4D09-A533-5995BC167053}" type="datetime1">
               <a:rPr lang="pt-BR" noProof="0" smtClean="0"/>
-              <a:t>19/05/2026</a:t>
+              <a:t>03/06/2026</a:t>
             </a:fld>
             <a:endParaRPr lang="pt-BR" noProof="0"/>
           </a:p>
@@ -4076,7 +4244,7 @@
             <a:pPr rtl="0"/>
             <a:fld id="{DFFDDC01-A1CF-4C3A-BE96-FBC60101324D}" type="datetime1">
               <a:rPr lang="pt-BR" noProof="0" smtClean="0"/>
-              <a:t>19/05/2026</a:t>
+              <a:t>03/06/2026</a:t>
             </a:fld>
             <a:endParaRPr lang="pt-BR" noProof="0"/>
           </a:p>
@@ -4290,7 +4458,7 @@
             <a:pPr rtl="0"/>
             <a:fld id="{52266794-2CD5-4ED3-94F8-8B8DC65FDDE3}" type="datetime1">
               <a:rPr lang="pt-BR" noProof="0" smtClean="0"/>
-              <a:t>19/05/2026</a:t>
+              <a:t>03/06/2026</a:t>
             </a:fld>
             <a:endParaRPr lang="pt-BR" noProof="0"/>
           </a:p>
@@ -9088,7 +9256,7 @@
         </p:blipFill>
         <p:spPr>
           <a:xfrm>
-            <a:off x="5733859" y="2180496"/>
+            <a:off x="5694530" y="1828800"/>
             <a:ext cx="5534025" cy="1600200"/>
           </a:xfrm>
           <a:prstGeom prst="rect">
@@ -9744,6 +9912,808 @@
 </file>
 
 <file path=ppt/slides/slide37.xml><?xml version="1.0" encoding="utf-8"?>
+<p:sld xmlns:a="http://schemas.openxmlformats.org/drawingml/2006/main" xmlns:r="http://schemas.openxmlformats.org/officeDocument/2006/relationships" xmlns:p="http://schemas.openxmlformats.org/presentationml/2006/main">
+  <p:cSld>
+    <p:spTree>
+      <p:nvGrpSpPr>
+        <p:cNvPr id="1" name=""/>
+        <p:cNvGrpSpPr/>
+        <p:nvPr/>
+      </p:nvGrpSpPr>
+      <p:grpSpPr>
+        <a:xfrm>
+          <a:off x="0" y="0"/>
+          <a:ext cx="0" cy="0"/>
+          <a:chOff x="0" y="0"/>
+          <a:chExt cx="0" cy="0"/>
+        </a:xfrm>
+      </p:grpSpPr>
+      <p:pic>
+        <p:nvPicPr>
+          <p:cNvPr id="3" name="Imagem 2">
+            <a:extLst>
+              <a:ext uri="{FF2B5EF4-FFF2-40B4-BE49-F238E27FC236}">
+                <a16:creationId xmlns:a16="http://schemas.microsoft.com/office/drawing/2014/main" id="{748CC09D-9B0C-2949-DB27-1621A15D751E}"/>
+              </a:ext>
+            </a:extLst>
+          </p:cNvPr>
+          <p:cNvPicPr>
+            <a:picLocks noChangeAspect="1"/>
+          </p:cNvPicPr>
+          <p:nvPr/>
+        </p:nvPicPr>
+        <p:blipFill>
+          <a:blip r:embed="rId2"/>
+          <a:srcRect l="444"/>
+          <a:stretch>
+            <a:fillRect/>
+          </a:stretch>
+        </p:blipFill>
+        <p:spPr>
+          <a:xfrm>
+            <a:off x="20" y="10"/>
+            <a:ext cx="12191980" cy="6857990"/>
+          </a:xfrm>
+          <a:prstGeom prst="rect">
+            <a:avLst/>
+          </a:prstGeom>
+          <a:noFill/>
+        </p:spPr>
+      </p:pic>
+    </p:spTree>
+    <p:extLst>
+      <p:ext uri="{BB962C8B-B14F-4D97-AF65-F5344CB8AC3E}">
+        <p14:creationId xmlns:p14="http://schemas.microsoft.com/office/powerpoint/2010/main" val="1396634947"/>
+      </p:ext>
+    </p:extLst>
+  </p:cSld>
+  <p:clrMapOvr>
+    <a:masterClrMapping/>
+  </p:clrMapOvr>
+</p:sld>
+</file>
+
+<file path=ppt/slides/slide38.xml><?xml version="1.0" encoding="utf-8"?>
+<p:sld xmlns:a="http://schemas.openxmlformats.org/drawingml/2006/main" xmlns:r="http://schemas.openxmlformats.org/officeDocument/2006/relationships" xmlns:p="http://schemas.openxmlformats.org/presentationml/2006/main">
+  <p:cSld>
+    <p:spTree>
+      <p:nvGrpSpPr>
+        <p:cNvPr id="1" name=""/>
+        <p:cNvGrpSpPr/>
+        <p:nvPr/>
+      </p:nvGrpSpPr>
+      <p:grpSpPr>
+        <a:xfrm>
+          <a:off x="0" y="0"/>
+          <a:ext cx="0" cy="0"/>
+          <a:chOff x="0" y="0"/>
+          <a:chExt cx="0" cy="0"/>
+        </a:xfrm>
+      </p:grpSpPr>
+      <p:sp>
+        <p:nvSpPr>
+          <p:cNvPr id="2" name="Título 1">
+            <a:extLst>
+              <a:ext uri="{FF2B5EF4-FFF2-40B4-BE49-F238E27FC236}">
+                <a16:creationId xmlns:a16="http://schemas.microsoft.com/office/drawing/2014/main" id="{8856C33B-2C26-F485-A7D2-39C601A67615}"/>
+              </a:ext>
+            </a:extLst>
+          </p:cNvPr>
+          <p:cNvSpPr>
+            <a:spLocks noGrp="1"/>
+          </p:cNvSpPr>
+          <p:nvPr>
+            <p:ph type="title"/>
+          </p:nvPr>
+        </p:nvSpPr>
+        <p:spPr/>
+        <p:txBody>
+          <a:bodyPr/>
+          <a:lstStyle/>
+          <a:p>
+            <a:r>
+              <a:rPr lang="pt-BR" dirty="0"/>
+              <a:t>Sistema de Telefonia móvel</a:t>
+            </a:r>
+          </a:p>
+        </p:txBody>
+      </p:sp>
+      <p:sp>
+        <p:nvSpPr>
+          <p:cNvPr id="3" name="Espaço Reservado para Conteúdo 2">
+            <a:extLst>
+              <a:ext uri="{FF2B5EF4-FFF2-40B4-BE49-F238E27FC236}">
+                <a16:creationId xmlns:a16="http://schemas.microsoft.com/office/drawing/2014/main" id="{A13842A8-2417-E583-8B33-0FCFAB6EE58E}"/>
+              </a:ext>
+            </a:extLst>
+          </p:cNvPr>
+          <p:cNvSpPr>
+            <a:spLocks noGrp="1"/>
+          </p:cNvSpPr>
+          <p:nvPr>
+            <p:ph idx="1"/>
+          </p:nvPr>
+        </p:nvSpPr>
+        <p:spPr/>
+        <p:txBody>
+          <a:bodyPr/>
+          <a:lstStyle/>
+          <a:p>
+            <a:r>
+              <a:rPr lang="pt-BR" dirty="0"/>
+              <a:t>Os telefones possuem três gerações distintas</a:t>
+            </a:r>
+          </a:p>
+          <a:p>
+            <a:pPr marL="342900" indent="-342900">
+              <a:buFont typeface="+mj-lt"/>
+              <a:buAutoNum type="alphaLcParenR"/>
+            </a:pPr>
+            <a:r>
+              <a:rPr lang="pt-BR" dirty="0"/>
+              <a:t>Primeira geração: voz analógica;</a:t>
+            </a:r>
+          </a:p>
+          <a:p>
+            <a:pPr marL="342900" indent="-342900">
+              <a:buFont typeface="+mj-lt"/>
+              <a:buAutoNum type="alphaLcParenR"/>
+            </a:pPr>
+            <a:r>
+              <a:rPr lang="pt-BR" dirty="0"/>
+              <a:t>Segunda geração: voz digital;</a:t>
+            </a:r>
+          </a:p>
+          <a:p>
+            <a:pPr marL="342900" indent="-342900">
+              <a:buFont typeface="+mj-lt"/>
+              <a:buAutoNum type="alphaLcParenR"/>
+            </a:pPr>
+            <a:r>
+              <a:rPr lang="pt-BR" dirty="0"/>
+              <a:t>Terceira geração: voz digital e dados (internet, correio eletrônico </a:t>
+            </a:r>
+            <a:r>
+              <a:rPr lang="pt-BR" dirty="0" err="1"/>
+              <a:t>etc</a:t>
+            </a:r>
+            <a:r>
+              <a:rPr lang="pt-BR" dirty="0"/>
+              <a:t>)</a:t>
+            </a:r>
+          </a:p>
+        </p:txBody>
+      </p:sp>
+    </p:spTree>
+    <p:extLst>
+      <p:ext uri="{BB962C8B-B14F-4D97-AF65-F5344CB8AC3E}">
+        <p14:creationId xmlns:p14="http://schemas.microsoft.com/office/powerpoint/2010/main" val="2228430991"/>
+      </p:ext>
+    </p:extLst>
+  </p:cSld>
+  <p:clrMapOvr>
+    <a:masterClrMapping/>
+  </p:clrMapOvr>
+</p:sld>
+</file>
+
+<file path=ppt/slides/slide39.xml><?xml version="1.0" encoding="utf-8"?>
+<p:sld xmlns:a="http://schemas.openxmlformats.org/drawingml/2006/main" xmlns:r="http://schemas.openxmlformats.org/officeDocument/2006/relationships" xmlns:p="http://schemas.openxmlformats.org/presentationml/2006/main">
+  <p:cSld>
+    <p:spTree>
+      <p:nvGrpSpPr>
+        <p:cNvPr id="1" name="">
+          <a:extLst>
+            <a:ext uri="{FF2B5EF4-FFF2-40B4-BE49-F238E27FC236}">
+              <a16:creationId xmlns:a16="http://schemas.microsoft.com/office/drawing/2014/main" id="{F1C3E196-4B96-334E-E982-8501ADD26032}"/>
+            </a:ext>
+          </a:extLst>
+        </p:cNvPr>
+        <p:cNvGrpSpPr/>
+        <p:nvPr/>
+      </p:nvGrpSpPr>
+      <p:grpSpPr>
+        <a:xfrm>
+          <a:off x="0" y="0"/>
+          <a:ext cx="0" cy="0"/>
+          <a:chOff x="0" y="0"/>
+          <a:chExt cx="0" cy="0"/>
+        </a:xfrm>
+      </p:grpSpPr>
+      <p:sp>
+        <p:nvSpPr>
+          <p:cNvPr id="2" name="Título 1">
+            <a:extLst>
+              <a:ext uri="{FF2B5EF4-FFF2-40B4-BE49-F238E27FC236}">
+                <a16:creationId xmlns:a16="http://schemas.microsoft.com/office/drawing/2014/main" id="{7AD21C45-6F07-B69F-59CC-ED7E4E0C5758}"/>
+              </a:ext>
+            </a:extLst>
+          </p:cNvPr>
+          <p:cNvSpPr>
+            <a:spLocks noGrp="1"/>
+          </p:cNvSpPr>
+          <p:nvPr>
+            <p:ph type="title"/>
+          </p:nvPr>
+        </p:nvSpPr>
+        <p:spPr>
+          <a:xfrm>
+            <a:off x="581193" y="729658"/>
+            <a:ext cx="11029616" cy="988332"/>
+          </a:xfrm>
+        </p:spPr>
+        <p:txBody>
+          <a:bodyPr anchor="b">
+            <a:normAutofit/>
+          </a:bodyPr>
+          <a:lstStyle/>
+          <a:p>
+            <a:r>
+              <a:rPr lang="pt-BR" dirty="0"/>
+              <a:t>Sistema de Telefonia móvel</a:t>
+            </a:r>
+          </a:p>
+        </p:txBody>
+      </p:sp>
+      <p:sp>
+        <p:nvSpPr>
+          <p:cNvPr id="3" name="Espaço Reservado para Conteúdo 2">
+            <a:extLst>
+              <a:ext uri="{FF2B5EF4-FFF2-40B4-BE49-F238E27FC236}">
+                <a16:creationId xmlns:a16="http://schemas.microsoft.com/office/drawing/2014/main" id="{F5D8BB43-49E0-6ACE-CF0C-F2BB7C6A2104}"/>
+              </a:ext>
+            </a:extLst>
+          </p:cNvPr>
+          <p:cNvSpPr>
+            <a:spLocks noGrp="1"/>
+          </p:cNvSpPr>
+          <p:nvPr>
+            <p:ph sz="half" idx="1"/>
+          </p:nvPr>
+        </p:nvSpPr>
+        <p:spPr>
+          <a:xfrm>
+            <a:off x="581193" y="2228003"/>
+            <a:ext cx="10701850" cy="3633047"/>
+          </a:xfrm>
+        </p:spPr>
+        <p:txBody>
+          <a:bodyPr anchor="t" anchorCtr="0">
+            <a:normAutofit/>
+          </a:bodyPr>
+          <a:lstStyle/>
+          <a:p>
+            <a:r>
+              <a:rPr lang="pt-BR" dirty="0"/>
+              <a:t>Primeira geração</a:t>
+            </a:r>
+          </a:p>
+          <a:p>
+            <a:r>
+              <a:rPr lang="pt-BR" dirty="0"/>
+              <a:t>Conceito de células</a:t>
+            </a:r>
+          </a:p>
+          <a:p>
+            <a:pPr lvl="1"/>
+            <a:r>
+              <a:rPr lang="pt-BR" sz="1800" dirty="0"/>
+              <a:t>Substituição de um único transmissor de alta potência cobrindo toda a região geográfica </a:t>
+            </a:r>
+          </a:p>
+          <a:p>
+            <a:pPr lvl="1"/>
+            <a:r>
+              <a:rPr lang="pt-BR" sz="1800" dirty="0"/>
+              <a:t>por vários transmissores de baixa potência cobrindo uma pequena região geográfica</a:t>
+            </a:r>
+          </a:p>
+          <a:p>
+            <a:r>
+              <a:rPr lang="pt-BR" dirty="0"/>
+              <a:t>Desenvolvido pelos laboratórios Bell, da empresa AT&amp;T</a:t>
+            </a:r>
+          </a:p>
+        </p:txBody>
+      </p:sp>
+    </p:spTree>
+    <p:extLst>
+      <p:ext uri="{BB962C8B-B14F-4D97-AF65-F5344CB8AC3E}">
+        <p14:creationId xmlns:p14="http://schemas.microsoft.com/office/powerpoint/2010/main" val="1137056065"/>
+      </p:ext>
+    </p:extLst>
+  </p:cSld>
+  <p:clrMapOvr>
+    <a:masterClrMapping/>
+  </p:clrMapOvr>
+</p:sld>
+</file>
+
+<file path=ppt/slides/slide4.xml><?xml version="1.0" encoding="utf-8"?>
+<p:sld xmlns:a="http://schemas.openxmlformats.org/drawingml/2006/main" xmlns:r="http://schemas.openxmlformats.org/officeDocument/2006/relationships" xmlns:p="http://schemas.openxmlformats.org/presentationml/2006/main">
+  <p:cSld>
+    <p:spTree>
+      <p:nvGrpSpPr>
+        <p:cNvPr id="1" name="">
+          <a:extLst>
+            <a:ext uri="{FF2B5EF4-FFF2-40B4-BE49-F238E27FC236}">
+              <a16:creationId xmlns:a16="http://schemas.microsoft.com/office/drawing/2014/main" id="{CF90DD28-17D0-3AF8-DFDC-ABCEB511F431}"/>
+            </a:ext>
+          </a:extLst>
+        </p:cNvPr>
+        <p:cNvGrpSpPr/>
+        <p:nvPr/>
+      </p:nvGrpSpPr>
+      <p:grpSpPr>
+        <a:xfrm>
+          <a:off x="0" y="0"/>
+          <a:ext cx="0" cy="0"/>
+          <a:chOff x="0" y="0"/>
+          <a:chExt cx="0" cy="0"/>
+        </a:xfrm>
+      </p:grpSpPr>
+      <p:sp>
+        <p:nvSpPr>
+          <p:cNvPr id="2" name="Título 1">
+            <a:extLst>
+              <a:ext uri="{FF2B5EF4-FFF2-40B4-BE49-F238E27FC236}">
+                <a16:creationId xmlns:a16="http://schemas.microsoft.com/office/drawing/2014/main" id="{9B52FF03-3523-D6EF-B33B-18B2652FB42F}"/>
+              </a:ext>
+            </a:extLst>
+          </p:cNvPr>
+          <p:cNvSpPr>
+            <a:spLocks noGrp="1"/>
+          </p:cNvSpPr>
+          <p:nvPr>
+            <p:ph type="title"/>
+          </p:nvPr>
+        </p:nvSpPr>
+        <p:spPr/>
+        <p:txBody>
+          <a:bodyPr/>
+          <a:lstStyle/>
+          <a:p>
+            <a:r>
+              <a:rPr lang="pt-BR" dirty="0"/>
+              <a:t>O QUE SÃO REDES</a:t>
+            </a:r>
+          </a:p>
+        </p:txBody>
+      </p:sp>
+      <p:sp>
+        <p:nvSpPr>
+          <p:cNvPr id="3" name="Espaço Reservado para Conteúdo 2">
+            <a:extLst>
+              <a:ext uri="{FF2B5EF4-FFF2-40B4-BE49-F238E27FC236}">
+                <a16:creationId xmlns:a16="http://schemas.microsoft.com/office/drawing/2014/main" id="{16BAFA4B-6303-BCD8-22DB-7A17F6C79B3F}"/>
+              </a:ext>
+            </a:extLst>
+          </p:cNvPr>
+          <p:cNvSpPr>
+            <a:spLocks noGrp="1"/>
+          </p:cNvSpPr>
+          <p:nvPr>
+            <p:ph idx="1"/>
+          </p:nvPr>
+        </p:nvSpPr>
+        <p:spPr>
+          <a:xfrm>
+            <a:off x="1395663" y="2180496"/>
+            <a:ext cx="10215144" cy="3678303"/>
+          </a:xfrm>
+        </p:spPr>
+        <p:txBody>
+          <a:bodyPr>
+            <a:normAutofit/>
+          </a:bodyPr>
+          <a:lstStyle/>
+          <a:p>
+            <a:r>
+              <a:rPr lang="pt-BR" dirty="0"/>
+              <a:t>As redes de computadores, apesar do nome, envolvem muito mais que apenas computadores, mas abrangem uma gama de dispositivos e equipamentos</a:t>
+            </a:r>
+            <a:r>
+              <a:rPr lang="pt-BR" sz="2400" dirty="0"/>
+              <a:t> </a:t>
+            </a:r>
+            <a:r>
+              <a:rPr lang="pt-BR" dirty="0"/>
+              <a:t>como celulares, tablets, impressoras, TVs, carros, videogames e até eletrodomésticos.</a:t>
+            </a:r>
+            <a:r>
+              <a:rPr lang="pt-BR" sz="2400" dirty="0"/>
+              <a:t> </a:t>
+            </a:r>
+            <a:br>
+              <a:rPr lang="pt-BR" sz="2400" dirty="0"/>
+            </a:br>
+            <a:endParaRPr lang="pt-BR" sz="2400" dirty="0"/>
+          </a:p>
+        </p:txBody>
+      </p:sp>
+    </p:spTree>
+    <p:extLst>
+      <p:ext uri="{BB962C8B-B14F-4D97-AF65-F5344CB8AC3E}">
+        <p14:creationId xmlns:p14="http://schemas.microsoft.com/office/powerpoint/2010/main" val="726247592"/>
+      </p:ext>
+    </p:extLst>
+  </p:cSld>
+  <p:clrMapOvr>
+    <a:masterClrMapping/>
+  </p:clrMapOvr>
+</p:sld>
+</file>
+
+<file path=ppt/slides/slide40.xml><?xml version="1.0" encoding="utf-8"?>
+<p:sld xmlns:a="http://schemas.openxmlformats.org/drawingml/2006/main" xmlns:r="http://schemas.openxmlformats.org/officeDocument/2006/relationships" xmlns:p="http://schemas.openxmlformats.org/presentationml/2006/main">
+  <p:cSld>
+    <p:spTree>
+      <p:nvGrpSpPr>
+        <p:cNvPr id="1" name="">
+          <a:extLst>
+            <a:ext uri="{FF2B5EF4-FFF2-40B4-BE49-F238E27FC236}">
+              <a16:creationId xmlns:a16="http://schemas.microsoft.com/office/drawing/2014/main" id="{24969301-FDFC-F0E2-5B12-7A830357D547}"/>
+            </a:ext>
+          </a:extLst>
+        </p:cNvPr>
+        <p:cNvGrpSpPr/>
+        <p:nvPr/>
+      </p:nvGrpSpPr>
+      <p:grpSpPr>
+        <a:xfrm>
+          <a:off x="0" y="0"/>
+          <a:ext cx="0" cy="0"/>
+          <a:chOff x="0" y="0"/>
+          <a:chExt cx="0" cy="0"/>
+        </a:xfrm>
+      </p:grpSpPr>
+      <p:sp>
+        <p:nvSpPr>
+          <p:cNvPr id="2" name="Título 1">
+            <a:extLst>
+              <a:ext uri="{FF2B5EF4-FFF2-40B4-BE49-F238E27FC236}">
+                <a16:creationId xmlns:a16="http://schemas.microsoft.com/office/drawing/2014/main" id="{1D5E78A5-C1CD-4521-E438-726B2676B78D}"/>
+              </a:ext>
+            </a:extLst>
+          </p:cNvPr>
+          <p:cNvSpPr>
+            <a:spLocks noGrp="1"/>
+          </p:cNvSpPr>
+          <p:nvPr>
+            <p:ph type="title"/>
+          </p:nvPr>
+        </p:nvSpPr>
+        <p:spPr>
+          <a:xfrm>
+            <a:off x="581193" y="729658"/>
+            <a:ext cx="11029616" cy="988332"/>
+          </a:xfrm>
+        </p:spPr>
+        <p:txBody>
+          <a:bodyPr anchor="b">
+            <a:normAutofit/>
+          </a:bodyPr>
+          <a:lstStyle/>
+          <a:p>
+            <a:r>
+              <a:rPr lang="pt-BR" dirty="0"/>
+              <a:t>Sistema de Telefonia móvel</a:t>
+            </a:r>
+          </a:p>
+        </p:txBody>
+      </p:sp>
+      <p:sp>
+        <p:nvSpPr>
+          <p:cNvPr id="3" name="Espaço Reservado para Conteúdo 2">
+            <a:extLst>
+              <a:ext uri="{FF2B5EF4-FFF2-40B4-BE49-F238E27FC236}">
+                <a16:creationId xmlns:a16="http://schemas.microsoft.com/office/drawing/2014/main" id="{0608DF11-7331-AADB-7A61-CB6D86DA7772}"/>
+              </a:ext>
+            </a:extLst>
+          </p:cNvPr>
+          <p:cNvSpPr>
+            <a:spLocks noGrp="1"/>
+          </p:cNvSpPr>
+          <p:nvPr>
+            <p:ph sz="half" idx="1"/>
+          </p:nvPr>
+        </p:nvSpPr>
+        <p:spPr>
+          <a:xfrm>
+            <a:off x="581193" y="2228003"/>
+            <a:ext cx="5422390" cy="4385068"/>
+          </a:xfrm>
+        </p:spPr>
+        <p:txBody>
+          <a:bodyPr anchor="ctr" anchorCtr="0">
+            <a:normAutofit lnSpcReduction="10000"/>
+          </a:bodyPr>
+          <a:lstStyle/>
+          <a:p>
+            <a:r>
+              <a:rPr lang="pt-BR" dirty="0"/>
+              <a:t>Primeira geração</a:t>
+            </a:r>
+          </a:p>
+          <a:p>
+            <a:r>
+              <a:rPr lang="pt-BR" dirty="0"/>
+              <a:t>Conceito de células:</a:t>
+            </a:r>
+          </a:p>
+          <a:p>
+            <a:pPr lvl="1"/>
+            <a:r>
+              <a:rPr lang="pt-BR" sz="1800" dirty="0"/>
+              <a:t>Cada ERB (Estação de Rádio Base) está conectada a uma Central de Comutação e Controle (CCC), que está conectada a rede pública de telefonia</a:t>
+            </a:r>
+          </a:p>
+          <a:p>
+            <a:pPr lvl="1"/>
+            <a:r>
+              <a:rPr lang="pt-BR" sz="1800" dirty="0"/>
+              <a:t>A CCC é responsável pela interligação e controle de várias </a:t>
+            </a:r>
+            <a:r>
+              <a:rPr lang="pt-BR" sz="1800" dirty="0" err="1"/>
+              <a:t>ERBs</a:t>
+            </a:r>
+            <a:r>
+              <a:rPr lang="pt-BR" sz="1800" dirty="0"/>
+              <a:t>, pela monitoração de </a:t>
+            </a:r>
+            <a:r>
+              <a:rPr lang="pt-BR" sz="1800" i="1" dirty="0" err="1"/>
+              <a:t>handoff</a:t>
+            </a:r>
+            <a:r>
+              <a:rPr lang="pt-BR" sz="1800" dirty="0"/>
+              <a:t>(quando um usuário muda de uma ERB para outra à medida que se desloca) e pelo redirecionamento de chamada via </a:t>
+            </a:r>
+            <a:r>
+              <a:rPr lang="pt-BR" sz="1800" i="1" dirty="0"/>
+              <a:t>roaming</a:t>
+            </a:r>
+          </a:p>
+          <a:p>
+            <a:pPr lvl="1"/>
+            <a:r>
+              <a:rPr lang="pt-BR" sz="1800" dirty="0"/>
+              <a:t>Tecnologias analógicas: banda de transmissão limitada e facilidade na interceptação das conversações.</a:t>
+            </a:r>
+          </a:p>
+        </p:txBody>
+      </p:sp>
+      <p:pic>
+        <p:nvPicPr>
+          <p:cNvPr id="5" name="Imagem 4">
+            <a:extLst>
+              <a:ext uri="{FF2B5EF4-FFF2-40B4-BE49-F238E27FC236}">
+                <a16:creationId xmlns:a16="http://schemas.microsoft.com/office/drawing/2014/main" id="{10752C78-3FAC-2CC2-65C2-028D53743F39}"/>
+              </a:ext>
+            </a:extLst>
+          </p:cNvPr>
+          <p:cNvPicPr>
+            <a:picLocks noChangeAspect="1"/>
+          </p:cNvPicPr>
+          <p:nvPr/>
+        </p:nvPicPr>
+        <p:blipFill>
+          <a:blip r:embed="rId2"/>
+          <a:stretch>
+            <a:fillRect/>
+          </a:stretch>
+        </p:blipFill>
+        <p:spPr>
+          <a:xfrm>
+            <a:off x="6188417" y="2777042"/>
+            <a:ext cx="5422392" cy="2534968"/>
+          </a:xfrm>
+          <a:prstGeom prst="rect">
+            <a:avLst/>
+          </a:prstGeom>
+          <a:noFill/>
+        </p:spPr>
+      </p:pic>
+    </p:spTree>
+    <p:extLst>
+      <p:ext uri="{BB962C8B-B14F-4D97-AF65-F5344CB8AC3E}">
+        <p14:creationId xmlns:p14="http://schemas.microsoft.com/office/powerpoint/2010/main" val="3752736611"/>
+      </p:ext>
+    </p:extLst>
+  </p:cSld>
+  <p:clrMapOvr>
+    <a:masterClrMapping/>
+  </p:clrMapOvr>
+</p:sld>
+</file>
+
+<file path=ppt/slides/slide41.xml><?xml version="1.0" encoding="utf-8"?>
+<p:sld xmlns:a="http://schemas.openxmlformats.org/drawingml/2006/main" xmlns:r="http://schemas.openxmlformats.org/officeDocument/2006/relationships" xmlns:p="http://schemas.openxmlformats.org/presentationml/2006/main">
+  <p:cSld>
+    <p:spTree>
+      <p:nvGrpSpPr>
+        <p:cNvPr id="1" name="">
+          <a:extLst>
+            <a:ext uri="{FF2B5EF4-FFF2-40B4-BE49-F238E27FC236}">
+              <a16:creationId xmlns:a16="http://schemas.microsoft.com/office/drawing/2014/main" id="{DE7189B2-FFF7-0C5B-FAA0-5EFF8EBE5B11}"/>
+            </a:ext>
+          </a:extLst>
+        </p:cNvPr>
+        <p:cNvGrpSpPr/>
+        <p:nvPr/>
+      </p:nvGrpSpPr>
+      <p:grpSpPr>
+        <a:xfrm>
+          <a:off x="0" y="0"/>
+          <a:ext cx="0" cy="0"/>
+          <a:chOff x="0" y="0"/>
+          <a:chExt cx="0" cy="0"/>
+        </a:xfrm>
+      </p:grpSpPr>
+      <p:sp>
+        <p:nvSpPr>
+          <p:cNvPr id="2" name="Título 1">
+            <a:extLst>
+              <a:ext uri="{FF2B5EF4-FFF2-40B4-BE49-F238E27FC236}">
+                <a16:creationId xmlns:a16="http://schemas.microsoft.com/office/drawing/2014/main" id="{1E422106-03EF-724F-E15C-65B13C746323}"/>
+              </a:ext>
+            </a:extLst>
+          </p:cNvPr>
+          <p:cNvSpPr>
+            <a:spLocks noGrp="1"/>
+          </p:cNvSpPr>
+          <p:nvPr>
+            <p:ph type="title"/>
+          </p:nvPr>
+        </p:nvSpPr>
+        <p:spPr>
+          <a:xfrm>
+            <a:off x="581193" y="729658"/>
+            <a:ext cx="11029616" cy="988332"/>
+          </a:xfrm>
+        </p:spPr>
+        <p:txBody>
+          <a:bodyPr anchor="b">
+            <a:normAutofit/>
+          </a:bodyPr>
+          <a:lstStyle/>
+          <a:p>
+            <a:r>
+              <a:rPr lang="pt-BR" dirty="0"/>
+              <a:t>Sistema de Telefonia móvel</a:t>
+            </a:r>
+          </a:p>
+        </p:txBody>
+      </p:sp>
+      <p:sp>
+        <p:nvSpPr>
+          <p:cNvPr id="3" name="Espaço Reservado para Conteúdo 2">
+            <a:extLst>
+              <a:ext uri="{FF2B5EF4-FFF2-40B4-BE49-F238E27FC236}">
+                <a16:creationId xmlns:a16="http://schemas.microsoft.com/office/drawing/2014/main" id="{65C59513-9337-0F05-DF5D-F551BECE94F1}"/>
+              </a:ext>
+            </a:extLst>
+          </p:cNvPr>
+          <p:cNvSpPr>
+            <a:spLocks noGrp="1"/>
+          </p:cNvSpPr>
+          <p:nvPr>
+            <p:ph sz="half" idx="1"/>
+          </p:nvPr>
+        </p:nvSpPr>
+        <p:spPr>
+          <a:xfrm>
+            <a:off x="581193" y="2228003"/>
+            <a:ext cx="5422390" cy="4385068"/>
+          </a:xfrm>
+        </p:spPr>
+        <p:txBody>
+          <a:bodyPr anchor="ctr" anchorCtr="0">
+            <a:normAutofit lnSpcReduction="10000"/>
+          </a:bodyPr>
+          <a:lstStyle/>
+          <a:p>
+            <a:r>
+              <a:rPr lang="pt-BR"/>
+              <a:t>Segunda geração – 2G</a:t>
+            </a:r>
+            <a:endParaRPr lang="pt-BR" dirty="0"/>
+          </a:p>
+          <a:p>
+            <a:r>
+              <a:rPr lang="pt-BR" dirty="0"/>
+              <a:t>Conceito de células:</a:t>
+            </a:r>
+          </a:p>
+          <a:p>
+            <a:pPr lvl="1"/>
+            <a:r>
+              <a:rPr lang="pt-BR" sz="1800" dirty="0"/>
+              <a:t>Cada ERB (Estação de Rádio Base) está conectada a uma Central de Comutação e Controle (CCC), que está conectada a rede pública de telefonia</a:t>
+            </a:r>
+          </a:p>
+          <a:p>
+            <a:pPr lvl="1"/>
+            <a:r>
+              <a:rPr lang="pt-BR" sz="1800" dirty="0"/>
+              <a:t>A CCC é responsável pela interligação e controle de várias </a:t>
+            </a:r>
+            <a:r>
+              <a:rPr lang="pt-BR" sz="1800" dirty="0" err="1"/>
+              <a:t>ERBs</a:t>
+            </a:r>
+            <a:r>
+              <a:rPr lang="pt-BR" sz="1800" dirty="0"/>
+              <a:t>, pela monitoração de </a:t>
+            </a:r>
+            <a:r>
+              <a:rPr lang="pt-BR" sz="1800" i="1" dirty="0" err="1"/>
+              <a:t>handoff</a:t>
+            </a:r>
+            <a:r>
+              <a:rPr lang="pt-BR" sz="1800" dirty="0"/>
+              <a:t>(quando um usuário muda de uma ERB para outra à medida que se desloca) e pelo redirecionamento de chamada via </a:t>
+            </a:r>
+            <a:r>
+              <a:rPr lang="pt-BR" sz="1800" i="1" dirty="0"/>
+              <a:t>roaming</a:t>
+            </a:r>
+          </a:p>
+          <a:p>
+            <a:pPr lvl="1"/>
+            <a:r>
+              <a:rPr lang="pt-BR" sz="1800" dirty="0"/>
+              <a:t>Tecnologias analógicas: banda de transmissão limitada e facilidade na interceptação das conversações.</a:t>
+            </a:r>
+          </a:p>
+        </p:txBody>
+      </p:sp>
+      <p:pic>
+        <p:nvPicPr>
+          <p:cNvPr id="5" name="Imagem 4">
+            <a:extLst>
+              <a:ext uri="{FF2B5EF4-FFF2-40B4-BE49-F238E27FC236}">
+                <a16:creationId xmlns:a16="http://schemas.microsoft.com/office/drawing/2014/main" id="{3496C721-1489-8538-69EF-0A0795EBAE3C}"/>
+              </a:ext>
+            </a:extLst>
+          </p:cNvPr>
+          <p:cNvPicPr>
+            <a:picLocks noChangeAspect="1"/>
+          </p:cNvPicPr>
+          <p:nvPr/>
+        </p:nvPicPr>
+        <p:blipFill>
+          <a:blip r:embed="rId2"/>
+          <a:stretch>
+            <a:fillRect/>
+          </a:stretch>
+        </p:blipFill>
+        <p:spPr>
+          <a:xfrm>
+            <a:off x="6188417" y="2777042"/>
+            <a:ext cx="5422392" cy="2534968"/>
+          </a:xfrm>
+          <a:prstGeom prst="rect">
+            <a:avLst/>
+          </a:prstGeom>
+          <a:noFill/>
+        </p:spPr>
+      </p:pic>
+    </p:spTree>
+    <p:extLst>
+      <p:ext uri="{BB962C8B-B14F-4D97-AF65-F5344CB8AC3E}">
+        <p14:creationId xmlns:p14="http://schemas.microsoft.com/office/powerpoint/2010/main" val="2415727671"/>
+      </p:ext>
+    </p:extLst>
+  </p:cSld>
+  <p:clrMapOvr>
+    <a:masterClrMapping/>
+  </p:clrMapOvr>
+</p:sld>
+</file>
+
+<file path=ppt/slides/slide42.xml><?xml version="1.0" encoding="utf-8"?>
 <p:sld xmlns:a="http://schemas.openxmlformats.org/drawingml/2006/main" xmlns:r="http://schemas.openxmlformats.org/officeDocument/2006/relationships" xmlns:p="http://schemas.openxmlformats.org/presentationml/2006/main">
   <p:cSld>
     <p:bg>
@@ -10174,121 +11144,6 @@
     <p:extLst>
       <p:ext uri="{BB962C8B-B14F-4D97-AF65-F5344CB8AC3E}">
         <p14:creationId xmlns:p14="http://schemas.microsoft.com/office/powerpoint/2010/main" val="3501347425"/>
-      </p:ext>
-    </p:extLst>
-  </p:cSld>
-  <p:clrMapOvr>
-    <a:masterClrMapping/>
-  </p:clrMapOvr>
-</p:sld>
-</file>
-
-<file path=ppt/slides/slide4.xml><?xml version="1.0" encoding="utf-8"?>
-<p:sld xmlns:a="http://schemas.openxmlformats.org/drawingml/2006/main" xmlns:r="http://schemas.openxmlformats.org/officeDocument/2006/relationships" xmlns:p="http://schemas.openxmlformats.org/presentationml/2006/main">
-  <p:cSld>
-    <p:spTree>
-      <p:nvGrpSpPr>
-        <p:cNvPr id="1" name="">
-          <a:extLst>
-            <a:ext uri="{FF2B5EF4-FFF2-40B4-BE49-F238E27FC236}">
-              <a16:creationId xmlns:a16="http://schemas.microsoft.com/office/drawing/2014/main" id="{CF90DD28-17D0-3AF8-DFDC-ABCEB511F431}"/>
-            </a:ext>
-          </a:extLst>
-        </p:cNvPr>
-        <p:cNvGrpSpPr/>
-        <p:nvPr/>
-      </p:nvGrpSpPr>
-      <p:grpSpPr>
-        <a:xfrm>
-          <a:off x="0" y="0"/>
-          <a:ext cx="0" cy="0"/>
-          <a:chOff x="0" y="0"/>
-          <a:chExt cx="0" cy="0"/>
-        </a:xfrm>
-      </p:grpSpPr>
-      <p:sp>
-        <p:nvSpPr>
-          <p:cNvPr id="2" name="Título 1">
-            <a:extLst>
-              <a:ext uri="{FF2B5EF4-FFF2-40B4-BE49-F238E27FC236}">
-                <a16:creationId xmlns:a16="http://schemas.microsoft.com/office/drawing/2014/main" id="{9B52FF03-3523-D6EF-B33B-18B2652FB42F}"/>
-              </a:ext>
-            </a:extLst>
-          </p:cNvPr>
-          <p:cNvSpPr>
-            <a:spLocks noGrp="1"/>
-          </p:cNvSpPr>
-          <p:nvPr>
-            <p:ph type="title"/>
-          </p:nvPr>
-        </p:nvSpPr>
-        <p:spPr/>
-        <p:txBody>
-          <a:bodyPr/>
-          <a:lstStyle/>
-          <a:p>
-            <a:r>
-              <a:rPr lang="pt-BR" dirty="0"/>
-              <a:t>O QUE SÃO REDES</a:t>
-            </a:r>
-          </a:p>
-        </p:txBody>
-      </p:sp>
-      <p:sp>
-        <p:nvSpPr>
-          <p:cNvPr id="3" name="Espaço Reservado para Conteúdo 2">
-            <a:extLst>
-              <a:ext uri="{FF2B5EF4-FFF2-40B4-BE49-F238E27FC236}">
-                <a16:creationId xmlns:a16="http://schemas.microsoft.com/office/drawing/2014/main" id="{16BAFA4B-6303-BCD8-22DB-7A17F6C79B3F}"/>
-              </a:ext>
-            </a:extLst>
-          </p:cNvPr>
-          <p:cNvSpPr>
-            <a:spLocks noGrp="1"/>
-          </p:cNvSpPr>
-          <p:nvPr>
-            <p:ph idx="1"/>
-          </p:nvPr>
-        </p:nvSpPr>
-        <p:spPr>
-          <a:xfrm>
-            <a:off x="1395663" y="2180496"/>
-            <a:ext cx="10215144" cy="3678303"/>
-          </a:xfrm>
-        </p:spPr>
-        <p:txBody>
-          <a:bodyPr>
-            <a:normAutofit/>
-          </a:bodyPr>
-          <a:lstStyle/>
-          <a:p>
-            <a:r>
-              <a:rPr lang="pt-BR" dirty="0"/>
-              <a:t>As redes de computadores, apesar do nome, envolvem muito mais que apenas computadores, mas abrangem uma gama de dispositivos e equipamentos</a:t>
-            </a:r>
-            <a:r>
-              <a:rPr lang="pt-BR" sz="2400" dirty="0"/>
-              <a:t> </a:t>
-            </a:r>
-            <a:r>
-              <a:rPr lang="pt-BR" dirty="0"/>
-              <a:t>como celulares, tablets, impressoras, TVs, carros, videogames e até eletrodomésticos.</a:t>
-            </a:r>
-            <a:r>
-              <a:rPr lang="pt-BR" sz="2400" dirty="0"/>
-              <a:t> </a:t>
-            </a:r>
-            <a:br>
-              <a:rPr lang="pt-BR" sz="2400" dirty="0"/>
-            </a:br>
-            <a:endParaRPr lang="pt-BR" sz="2400" dirty="0"/>
-          </a:p>
-        </p:txBody>
-      </p:sp>
-    </p:spTree>
-    <p:extLst>
-      <p:ext uri="{BB962C8B-B14F-4D97-AF65-F5344CB8AC3E}">
-        <p14:creationId xmlns:p14="http://schemas.microsoft.com/office/powerpoint/2010/main" val="726247592"/>
       </p:ext>
     </p:extLst>
   </p:cSld>

--- a/Redes/REDES DE COMPUTADORES.pptx
+++ b/Redes/REDES DE COMPUTADORES.pptx
@@ -171,129 +171,6 @@
       <pc:docMkLst>
         <pc:docMk/>
       </pc:docMkLst>
-      <pc:sldChg chg="modSp mod">
-        <pc:chgData name="Joel Teixeira Cunha" userId="195451ac3a5e8dfd" providerId="LiveId" clId="{9D99295D-09A0-459E-AFDA-61FAD528DEBC}" dt="2026-05-18T22:03:22.235" v="91" actId="20577"/>
-        <pc:sldMkLst>
-          <pc:docMk/>
-          <pc:sldMk cId="2448624542" sldId="285"/>
-        </pc:sldMkLst>
-        <pc:spChg chg="mod">
-          <ac:chgData name="Joel Teixeira Cunha" userId="195451ac3a5e8dfd" providerId="LiveId" clId="{9D99295D-09A0-459E-AFDA-61FAD528DEBC}" dt="2026-05-18T22:03:22.235" v="91" actId="20577"/>
-          <ac:spMkLst>
-            <pc:docMk/>
-            <pc:sldMk cId="2448624542" sldId="285"/>
-            <ac:spMk id="3" creationId="{2F6B353C-1A5B-7BB5-0A90-A4B31FB88685}"/>
-          </ac:spMkLst>
-        </pc:spChg>
-      </pc:sldChg>
-      <pc:sldChg chg="modSp add mod">
-        <pc:chgData name="Joel Teixeira Cunha" userId="195451ac3a5e8dfd" providerId="LiveId" clId="{9D99295D-09A0-459E-AFDA-61FAD528DEBC}" dt="2026-05-18T22:05:24.277" v="266" actId="554"/>
-        <pc:sldMkLst>
-          <pc:docMk/>
-          <pc:sldMk cId="974116489" sldId="292"/>
-        </pc:sldMkLst>
-        <pc:spChg chg="mod">
-          <ac:chgData name="Joel Teixeira Cunha" userId="195451ac3a5e8dfd" providerId="LiveId" clId="{9D99295D-09A0-459E-AFDA-61FAD528DEBC}" dt="2026-05-18T22:03:55.144" v="98" actId="20577"/>
-          <ac:spMkLst>
-            <pc:docMk/>
-            <pc:sldMk cId="974116489" sldId="292"/>
-            <ac:spMk id="2" creationId="{58FAE4EB-9A9A-0E8C-90BA-FF66FE521155}"/>
-          </ac:spMkLst>
-        </pc:spChg>
-        <pc:spChg chg="mod">
-          <ac:chgData name="Joel Teixeira Cunha" userId="195451ac3a5e8dfd" providerId="LiveId" clId="{9D99295D-09A0-459E-AFDA-61FAD528DEBC}" dt="2026-05-18T22:05:24.277" v="266" actId="554"/>
-          <ac:spMkLst>
-            <pc:docMk/>
-            <pc:sldMk cId="974116489" sldId="292"/>
-            <ac:spMk id="3" creationId="{C461B287-8D69-4803-7D99-DF13F17B46F0}"/>
-          </ac:spMkLst>
-        </pc:spChg>
-      </pc:sldChg>
-      <pc:sldChg chg="modSp add mod">
-        <pc:chgData name="Joel Teixeira Cunha" userId="195451ac3a5e8dfd" providerId="LiveId" clId="{9D99295D-09A0-459E-AFDA-61FAD528DEBC}" dt="2026-05-18T22:09:05.343" v="728" actId="20577"/>
-        <pc:sldMkLst>
-          <pc:docMk/>
-          <pc:sldMk cId="3005095367" sldId="293"/>
-        </pc:sldMkLst>
-        <pc:spChg chg="mod">
-          <ac:chgData name="Joel Teixeira Cunha" userId="195451ac3a5e8dfd" providerId="LiveId" clId="{9D99295D-09A0-459E-AFDA-61FAD528DEBC}" dt="2026-05-18T22:05:43.550" v="273" actId="20577"/>
-          <ac:spMkLst>
-            <pc:docMk/>
-            <pc:sldMk cId="3005095367" sldId="293"/>
-            <ac:spMk id="2" creationId="{694774B9-2FB8-E757-C082-1A6174050E85}"/>
-          </ac:spMkLst>
-        </pc:spChg>
-        <pc:spChg chg="mod">
-          <ac:chgData name="Joel Teixeira Cunha" userId="195451ac3a5e8dfd" providerId="LiveId" clId="{9D99295D-09A0-459E-AFDA-61FAD528DEBC}" dt="2026-05-18T22:09:05.343" v="728" actId="20577"/>
-          <ac:spMkLst>
-            <pc:docMk/>
-            <pc:sldMk cId="3005095367" sldId="293"/>
-            <ac:spMk id="3" creationId="{851A2B76-16C4-98C1-5F09-BCA403C9BBBC}"/>
-          </ac:spMkLst>
-        </pc:spChg>
-      </pc:sldChg>
-      <pc:sldChg chg="addSp modSp new mod">
-        <pc:chgData name="Joel Teixeira Cunha" userId="195451ac3a5e8dfd" providerId="LiveId" clId="{9D99295D-09A0-459E-AFDA-61FAD528DEBC}" dt="2026-05-18T22:12:16.062" v="1065"/>
-        <pc:sldMkLst>
-          <pc:docMk/>
-          <pc:sldMk cId="1562692267" sldId="294"/>
-        </pc:sldMkLst>
-        <pc:spChg chg="mod">
-          <ac:chgData name="Joel Teixeira Cunha" userId="195451ac3a5e8dfd" providerId="LiveId" clId="{9D99295D-09A0-459E-AFDA-61FAD528DEBC}" dt="2026-05-18T22:09:35.052" v="755" actId="20577"/>
-          <ac:spMkLst>
-            <pc:docMk/>
-            <pc:sldMk cId="1562692267" sldId="294"/>
-            <ac:spMk id="2" creationId="{D78B2961-D3CA-6F04-431E-CF12565BF917}"/>
-          </ac:spMkLst>
-        </pc:spChg>
-        <pc:spChg chg="mod">
-          <ac:chgData name="Joel Teixeira Cunha" userId="195451ac3a5e8dfd" providerId="LiveId" clId="{9D99295D-09A0-459E-AFDA-61FAD528DEBC}" dt="2026-05-18T22:11:44.767" v="1062" actId="20577"/>
-          <ac:spMkLst>
-            <pc:docMk/>
-            <pc:sldMk cId="1562692267" sldId="294"/>
-            <ac:spMk id="3" creationId="{913FE5D2-5D23-4117-BBB6-08A07C8BCDD8}"/>
-          </ac:spMkLst>
-        </pc:spChg>
-        <pc:picChg chg="add mod">
-          <ac:chgData name="Joel Teixeira Cunha" userId="195451ac3a5e8dfd" providerId="LiveId" clId="{9D99295D-09A0-459E-AFDA-61FAD528DEBC}" dt="2026-05-18T22:12:16.062" v="1065"/>
-          <ac:picMkLst>
-            <pc:docMk/>
-            <pc:sldMk cId="1562692267" sldId="294"/>
-            <ac:picMk id="5" creationId="{80A4EC3A-4951-3982-7D01-F52572EC161D}"/>
-          </ac:picMkLst>
-        </pc:picChg>
-      </pc:sldChg>
-      <pc:sldChg chg="addSp modSp new mod">
-        <pc:chgData name="Joel Teixeira Cunha" userId="195451ac3a5e8dfd" providerId="LiveId" clId="{9D99295D-09A0-459E-AFDA-61FAD528DEBC}" dt="2026-05-18T22:17:41.072" v="1703" actId="1076"/>
-        <pc:sldMkLst>
-          <pc:docMk/>
-          <pc:sldMk cId="3020158856" sldId="295"/>
-        </pc:sldMkLst>
-        <pc:spChg chg="mod">
-          <ac:chgData name="Joel Teixeira Cunha" userId="195451ac3a5e8dfd" providerId="LiveId" clId="{9D99295D-09A0-459E-AFDA-61FAD528DEBC}" dt="2026-05-18T22:12:31.977" v="1090" actId="20577"/>
-          <ac:spMkLst>
-            <pc:docMk/>
-            <pc:sldMk cId="3020158856" sldId="295"/>
-            <ac:spMk id="2" creationId="{B4DE5FC7-2398-B711-7D42-57D885652DDD}"/>
-          </ac:spMkLst>
-        </pc:spChg>
-        <pc:spChg chg="mod">
-          <ac:chgData name="Joel Teixeira Cunha" userId="195451ac3a5e8dfd" providerId="LiveId" clId="{9D99295D-09A0-459E-AFDA-61FAD528DEBC}" dt="2026-05-18T22:17:36.390" v="1702" actId="27636"/>
-          <ac:spMkLst>
-            <pc:docMk/>
-            <pc:sldMk cId="3020158856" sldId="295"/>
-            <ac:spMk id="3" creationId="{281169CA-396E-FD21-629D-8F37D856FF38}"/>
-          </ac:spMkLst>
-        </pc:spChg>
-        <pc:picChg chg="add mod">
-          <ac:chgData name="Joel Teixeira Cunha" userId="195451ac3a5e8dfd" providerId="LiveId" clId="{9D99295D-09A0-459E-AFDA-61FAD528DEBC}" dt="2026-05-18T22:17:41.072" v="1703" actId="1076"/>
-          <ac:picMkLst>
-            <pc:docMk/>
-            <pc:sldMk cId="3020158856" sldId="295"/>
-            <ac:picMk id="5" creationId="{4F68931B-8F48-94FC-507E-33882CBCEEA2}"/>
-          </ac:picMkLst>
-        </pc:picChg>
-      </pc:sldChg>
       <pc:sldChg chg="addSp modSp new mod">
         <pc:chgData name="Joel Teixeira Cunha" userId="195451ac3a5e8dfd" providerId="LiveId" clId="{9D99295D-09A0-459E-AFDA-61FAD528DEBC}" dt="2026-05-20T00:14:12.908" v="2032" actId="20577"/>
         <pc:sldMkLst>
@@ -384,7 +261,7 @@
   <pc:docChgLst>
     <pc:chgData name="Joel Teixeira Cunha" userId="195451ac3a5e8dfd" providerId="LiveId" clId="{2A4D4AF3-9DC9-4CE5-AE1A-E96DDBF3EED9}"/>
     <pc:docChg chg="undo custSel addSld delSld modSld modMainMaster">
-      <pc:chgData name="Joel Teixeira Cunha" userId="195451ac3a5e8dfd" providerId="LiveId" clId="{2A4D4AF3-9DC9-4CE5-AE1A-E96DDBF3EED9}" dt="2026-06-03T11:22:01.766" v="1026" actId="1076"/>
+      <pc:chgData name="Joel Teixeira Cunha" userId="195451ac3a5e8dfd" providerId="LiveId" clId="{2A4D4AF3-9DC9-4CE5-AE1A-E96DDBF3EED9}" dt="2026-06-19T11:07:19.354" v="1051" actId="20577"/>
       <pc:docMkLst>
         <pc:docMk/>
       </pc:docMkLst>
@@ -402,13 +279,6 @@
             <ac:picMk id="5" creationId="{80A4EC3A-4951-3982-7D01-F52572EC161D}"/>
           </ac:picMkLst>
         </pc:picChg>
-      </pc:sldChg>
-      <pc:sldChg chg="new del">
-        <pc:chgData name="Joel Teixeira Cunha" userId="195451ac3a5e8dfd" providerId="LiveId" clId="{2A4D4AF3-9DC9-4CE5-AE1A-E96DDBF3EED9}" dt="2026-06-02T13:59:26.216" v="2" actId="47"/>
-        <pc:sldMkLst>
-          <pc:docMk/>
-          <pc:sldMk cId="3916626868" sldId="299"/>
-        </pc:sldMkLst>
       </pc:sldChg>
       <pc:sldChg chg="addSp modSp new mod modClrScheme chgLayout">
         <pc:chgData name="Joel Teixeira Cunha" userId="195451ac3a5e8dfd" providerId="LiveId" clId="{2A4D4AF3-9DC9-4CE5-AE1A-E96DDBF3EED9}" dt="2026-06-02T13:59:51.330" v="6" actId="26606"/>
@@ -470,14 +340,6 @@
             <ac:spMk id="3" creationId="{F5D8BB43-49E0-6ACE-CF0C-F2BB7C6A2104}"/>
           </ac:spMkLst>
         </pc:spChg>
-        <pc:picChg chg="add del mod">
-          <ac:chgData name="Joel Teixeira Cunha" userId="195451ac3a5e8dfd" providerId="LiveId" clId="{2A4D4AF3-9DC9-4CE5-AE1A-E96DDBF3EED9}" dt="2026-06-02T14:10:45.921" v="501" actId="21"/>
-          <ac:picMkLst>
-            <pc:docMk/>
-            <pc:sldMk cId="1137056065" sldId="302"/>
-            <ac:picMk id="5" creationId="{10752C78-3FAC-2CC2-65C2-028D53743F39}"/>
-          </ac:picMkLst>
-        </pc:picChg>
       </pc:sldChg>
       <pc:sldChg chg="addSp modSp add mod">
         <pc:chgData name="Joel Teixeira Cunha" userId="195451ac3a5e8dfd" providerId="LiveId" clId="{2A4D4AF3-9DC9-4CE5-AE1A-E96DDBF3EED9}" dt="2026-06-02T14:16:58.847" v="1009" actId="27636"/>
@@ -503,13 +365,13 @@
         </pc:picChg>
       </pc:sldChg>
       <pc:sldChg chg="modSp add mod">
-        <pc:chgData name="Joel Teixeira Cunha" userId="195451ac3a5e8dfd" providerId="LiveId" clId="{2A4D4AF3-9DC9-4CE5-AE1A-E96DDBF3EED9}" dt="2026-06-02T14:17:28.739" v="1025" actId="5793"/>
+        <pc:chgData name="Joel Teixeira Cunha" userId="195451ac3a5e8dfd" providerId="LiveId" clId="{2A4D4AF3-9DC9-4CE5-AE1A-E96DDBF3EED9}" dt="2026-06-19T11:07:19.354" v="1051" actId="20577"/>
         <pc:sldMkLst>
           <pc:docMk/>
           <pc:sldMk cId="2415727671" sldId="304"/>
         </pc:sldMkLst>
         <pc:spChg chg="mod">
-          <ac:chgData name="Joel Teixeira Cunha" userId="195451ac3a5e8dfd" providerId="LiveId" clId="{2A4D4AF3-9DC9-4CE5-AE1A-E96DDBF3EED9}" dt="2026-06-02T14:17:28.739" v="1025" actId="5793"/>
+          <ac:chgData name="Joel Teixeira Cunha" userId="195451ac3a5e8dfd" providerId="LiveId" clId="{2A4D4AF3-9DC9-4CE5-AE1A-E96DDBF3EED9}" dt="2026-06-19T11:07:19.354" v="1051" actId="20577"/>
           <ac:spMkLst>
             <pc:docMk/>
             <pc:sldMk cId="2415727671" sldId="304"/>
@@ -537,15 +399,6 @@
               <pc:sldMasterMk cId="82855549" sldId="2147483672"/>
               <pc:sldLayoutMk cId="2739981630" sldId="2147483674"/>
               <ac:spMk id="3" creationId="{00000000-0000-0000-0000-000000000000}"/>
-            </ac:spMkLst>
-          </pc:spChg>
-          <pc:spChg chg="add del mod">
-            <ac:chgData name="Joel Teixeira Cunha" userId="195451ac3a5e8dfd" providerId="LiveId" clId="{2A4D4AF3-9DC9-4CE5-AE1A-E96DDBF3EED9}" dt="2026-06-02T14:09:52.376" v="498"/>
-            <ac:spMkLst>
-              <pc:docMk/>
-              <pc:sldMasterMk cId="82855549" sldId="2147483672"/>
-              <pc:sldLayoutMk cId="2739981630" sldId="2147483674"/>
-              <ac:spMk id="8" creationId="{D5E52AA8-9517-C3C6-656B-8B8AFCA0FC34}"/>
             </ac:spMkLst>
           </pc:spChg>
         </pc:sldLayoutChg>
@@ -651,7 +504,7 @@
             <a:pPr rtl="0"/>
             <a:fld id="{A517C7B7-34F5-4531-9889-28687F60FAC8}" type="datetime1">
               <a:rPr lang="pt-BR" smtClean="0"/>
-              <a:t>03/06/2026</a:t>
+              <a:t>19/06/2026</a:t>
             </a:fld>
             <a:endParaRPr lang="pt-BR" dirty="0"/>
           </a:p>
@@ -832,7 +685,7 @@
             <a:fld id="{40C3EC75-555C-481D-9088-738CE6DDFC83}" type="datetime1">
               <a:rPr lang="pt-BR" smtClean="0"/>
               <a:pPr/>
-              <a:t>03/06/2026</a:t>
+              <a:t>19/06/2026</a:t>
             </a:fld>
             <a:endParaRPr lang="pt-BR" dirty="0"/>
           </a:p>
@@ -1520,7 +1373,7 @@
             <a:pPr rtl="0"/>
             <a:fld id="{2AF5B136-74F1-42D3-987D-A097EEF8F2FE}" type="datetime1">
               <a:rPr lang="pt-BR" noProof="0" smtClean="0"/>
-              <a:t>03/06/2026</a:t>
+              <a:t>19/06/2026</a:t>
             </a:fld>
             <a:endParaRPr lang="pt-BR" noProof="0"/>
           </a:p>
@@ -1785,7 +1638,7 @@
             <a:pPr rtl="0"/>
             <a:fld id="{0229B074-15EB-43FB-8347-3A734D799093}" type="datetime1">
               <a:rPr lang="pt-BR" noProof="0" smtClean="0"/>
-              <a:t>03/06/2026</a:t>
+              <a:t>19/06/2026</a:t>
             </a:fld>
             <a:endParaRPr lang="pt-BR" noProof="0"/>
           </a:p>
@@ -2023,7 +1876,7 @@
             <a:pPr rtl="0"/>
             <a:fld id="{036303E3-8DE9-4C2D-91EE-6F377AE582A8}" type="datetime1">
               <a:rPr lang="pt-BR" noProof="0" smtClean="0"/>
-              <a:t>03/06/2026</a:t>
+              <a:t>19/06/2026</a:t>
             </a:fld>
             <a:endParaRPr lang="pt-BR" noProof="0"/>
           </a:p>
@@ -2266,7 +2119,7 @@
             <a:pPr rtl="0"/>
             <a:fld id="{B04AF3F4-81C7-4F15-8991-6D0E8D06651A}" type="datetime1">
               <a:rPr lang="pt-BR" noProof="0" smtClean="0"/>
-              <a:t>03/06/2026</a:t>
+              <a:t>19/06/2026</a:t>
             </a:fld>
             <a:endParaRPr lang="pt-BR" noProof="0"/>
           </a:p>
@@ -2577,7 +2430,7 @@
             <a:pPr rtl="0"/>
             <a:fld id="{6E2946E4-8964-43BF-B1D5-4261B83248E5}" type="datetime1">
               <a:rPr lang="pt-BR" noProof="0" smtClean="0"/>
-              <a:t>03/06/2026</a:t>
+              <a:t>19/06/2026</a:t>
             </a:fld>
             <a:endParaRPr lang="pt-BR" noProof="0"/>
           </a:p>
@@ -2881,7 +2734,7 @@
             <a:pPr rtl="0"/>
             <a:fld id="{97C9F420-083C-437A-9265-7F13EB97C6A2}" type="datetime1">
               <a:rPr lang="pt-BR" noProof="0" smtClean="0"/>
-              <a:t>03/06/2026</a:t>
+              <a:t>19/06/2026</a:t>
             </a:fld>
             <a:endParaRPr lang="pt-BR" noProof="0"/>
           </a:p>
@@ -3305,7 +3158,7 @@
             <a:pPr rtl="0"/>
             <a:fld id="{BE07AF20-ED70-4B21-B799-75BB5818AB43}" type="datetime1">
               <a:rPr lang="pt-BR" noProof="0" smtClean="0"/>
-              <a:t>03/06/2026</a:t>
+              <a:t>19/06/2026</a:t>
             </a:fld>
             <a:endParaRPr lang="pt-BR" noProof="0"/>
           </a:p>
@@ -3404,7 +3257,7 @@
             <a:pPr rtl="0"/>
             <a:fld id="{0D33D876-8C34-42FC-BFF7-457557B97BB7}" type="datetime1">
               <a:rPr lang="pt-BR" noProof="0" smtClean="0"/>
-              <a:t>03/06/2026</a:t>
+              <a:t>19/06/2026</a:t>
             </a:fld>
             <a:endParaRPr lang="pt-BR" noProof="0"/>
           </a:p>
@@ -3570,7 +3423,7 @@
             <a:pPr rtl="0"/>
             <a:fld id="{4592437E-206F-4A1C-947F-806A50A40B88}" type="datetime1">
               <a:rPr lang="pt-BR" noProof="0" smtClean="0"/>
-              <a:t>03/06/2026</a:t>
+              <a:t>19/06/2026</a:t>
             </a:fld>
             <a:endParaRPr lang="pt-BR" noProof="0"/>
           </a:p>
@@ -3951,7 +3804,7 @@
             <a:pPr rtl="0"/>
             <a:fld id="{B036DDBC-F1EF-4D09-A533-5995BC167053}" type="datetime1">
               <a:rPr lang="pt-BR" noProof="0" smtClean="0"/>
-              <a:t>03/06/2026</a:t>
+              <a:t>19/06/2026</a:t>
             </a:fld>
             <a:endParaRPr lang="pt-BR" noProof="0"/>
           </a:p>
@@ -4244,7 +4097,7 @@
             <a:pPr rtl="0"/>
             <a:fld id="{DFFDDC01-A1CF-4C3A-BE96-FBC60101324D}" type="datetime1">
               <a:rPr lang="pt-BR" noProof="0" smtClean="0"/>
-              <a:t>03/06/2026</a:t>
+              <a:t>19/06/2026</a:t>
             </a:fld>
             <a:endParaRPr lang="pt-BR" noProof="0"/>
           </a:p>
@@ -4458,7 +4311,7 @@
             <a:pPr rtl="0"/>
             <a:fld id="{52266794-2CD5-4ED3-94F8-8B8DC65FDDE3}" type="datetime1">
               <a:rPr lang="pt-BR" noProof="0" smtClean="0"/>
-              <a:t>03/06/2026</a:t>
+              <a:t>19/06/2026</a:t>
             </a:fld>
             <a:endParaRPr lang="pt-BR" noProof="0"/>
           </a:p>
@@ -10610,15 +10463,14 @@
         </p:spPr>
         <p:txBody>
           <a:bodyPr anchor="ctr" anchorCtr="0">
-            <a:normAutofit lnSpcReduction="10000"/>
+            <a:normAutofit/>
           </a:bodyPr>
           <a:lstStyle/>
           <a:p>
             <a:r>
-              <a:rPr lang="pt-BR"/>
+              <a:rPr lang="pt-BR" dirty="0"/>
               <a:t>Segunda geração – 2G</a:t>
             </a:r>
-            <a:endParaRPr lang="pt-BR" dirty="0"/>
           </a:p>
           <a:p>
             <a:r>
@@ -10630,42 +10482,16 @@
             <a:pPr lvl="1"/>
             <a:r>
               <a:rPr lang="pt-BR" sz="1800" dirty="0"/>
-              <a:t>Cada ERB (Estação de Rádio Base) está conectada a uma Central de Comutação e Controle (CCC), que está conectada a rede pública de telefonia</a:t>
+              <a:t>Início da </a:t>
+            </a:r>
+            <a:r>
+              <a:rPr lang="pt-BR" sz="1800"/>
+              <a:t>era digital</a:t>
             </a:r>
           </a:p>
           <a:p>
             <a:pPr lvl="1"/>
-            <a:r>
-              <a:rPr lang="pt-BR" sz="1800" dirty="0"/>
-              <a:t>A CCC é responsável pela interligação e controle de várias </a:t>
-            </a:r>
-            <a:r>
-              <a:rPr lang="pt-BR" sz="1800" dirty="0" err="1"/>
-              <a:t>ERBs</a:t>
-            </a:r>
-            <a:r>
-              <a:rPr lang="pt-BR" sz="1800" dirty="0"/>
-              <a:t>, pela monitoração de </a:t>
-            </a:r>
-            <a:r>
-              <a:rPr lang="pt-BR" sz="1800" i="1" dirty="0" err="1"/>
-              <a:t>handoff</a:t>
-            </a:r>
-            <a:r>
-              <a:rPr lang="pt-BR" sz="1800" dirty="0"/>
-              <a:t>(quando um usuário muda de uma ERB para outra à medida que se desloca) e pelo redirecionamento de chamada via </a:t>
-            </a:r>
-            <a:r>
-              <a:rPr lang="pt-BR" sz="1800" i="1" dirty="0"/>
-              <a:t>roaming</a:t>
-            </a:r>
-          </a:p>
-          <a:p>
-            <a:pPr lvl="1"/>
-            <a:r>
-              <a:rPr lang="pt-BR" sz="1800" dirty="0"/>
-              <a:t>Tecnologias analógicas: banda de transmissão limitada e facilidade na interceptação das conversações.</a:t>
-            </a:r>
+            <a:endParaRPr lang="pt-BR" sz="1800" dirty="0"/>
           </a:p>
         </p:txBody>
       </p:sp>

--- a/Redes/REDES DE COMPUTADORES.pptx
+++ b/Redes/REDES DE COMPUTADORES.pptx
@@ -166,8 +166,8 @@
 <pc:chgInfo xmlns:a="http://schemas.openxmlformats.org/drawingml/2006/main" xmlns:r="http://schemas.openxmlformats.org/officeDocument/2006/relationships" xmlns:ac="http://schemas.microsoft.com/office/drawing/2013/main/command" xmlns:pc="http://schemas.microsoft.com/office/powerpoint/2013/main/command">
   <pc:docChgLst>
     <pc:chgData name="Joel Teixeira Cunha" userId="195451ac3a5e8dfd" providerId="LiveId" clId="{9D99295D-09A0-459E-AFDA-61FAD528DEBC}"/>
-    <pc:docChg chg="undo custSel addSld modSld">
-      <pc:chgData name="Joel Teixeira Cunha" userId="195451ac3a5e8dfd" providerId="LiveId" clId="{9D99295D-09A0-459E-AFDA-61FAD528DEBC}" dt="2026-05-20T00:24:32.639" v="2491" actId="1076"/>
+    <pc:docChg chg="undo custSel addSld delSld modSld">
+      <pc:chgData name="Joel Teixeira Cunha" userId="195451ac3a5e8dfd" providerId="LiveId" clId="{9D99295D-09A0-459E-AFDA-61FAD528DEBC}" dt="2026-06-23T22:38:53.417" v="3229" actId="20577"/>
       <pc:docMkLst>
         <pc:docMk/>
       </pc:docMkLst>
@@ -177,30 +177,6 @@
           <pc:docMk/>
           <pc:sldMk cId="4066461457" sldId="296"/>
         </pc:sldMkLst>
-        <pc:spChg chg="mod">
-          <ac:chgData name="Joel Teixeira Cunha" userId="195451ac3a5e8dfd" providerId="LiveId" clId="{9D99295D-09A0-459E-AFDA-61FAD528DEBC}" dt="2026-05-20T00:10:43.788" v="1722" actId="20577"/>
-          <ac:spMkLst>
-            <pc:docMk/>
-            <pc:sldMk cId="4066461457" sldId="296"/>
-            <ac:spMk id="2" creationId="{62003A4D-7D3F-89DD-B866-6700531E47C6}"/>
-          </ac:spMkLst>
-        </pc:spChg>
-        <pc:spChg chg="mod">
-          <ac:chgData name="Joel Teixeira Cunha" userId="195451ac3a5e8dfd" providerId="LiveId" clId="{9D99295D-09A0-459E-AFDA-61FAD528DEBC}" dt="2026-05-20T00:14:12.908" v="2032" actId="20577"/>
-          <ac:spMkLst>
-            <pc:docMk/>
-            <pc:sldMk cId="4066461457" sldId="296"/>
-            <ac:spMk id="3" creationId="{98A48964-43B1-6C3F-8E72-F17651638038}"/>
-          </ac:spMkLst>
-        </pc:spChg>
-        <pc:picChg chg="add mod">
-          <ac:chgData name="Joel Teixeira Cunha" userId="195451ac3a5e8dfd" providerId="LiveId" clId="{9D99295D-09A0-459E-AFDA-61FAD528DEBC}" dt="2026-05-20T00:11:17.631" v="1726" actId="1076"/>
-          <ac:picMkLst>
-            <pc:docMk/>
-            <pc:sldMk cId="4066461457" sldId="296"/>
-            <ac:picMk id="5" creationId="{99DBD094-3E09-E431-8738-925F31396DFA}"/>
-          </ac:picMkLst>
-        </pc:picChg>
       </pc:sldChg>
       <pc:sldChg chg="addSp modSp new mod">
         <pc:chgData name="Joel Teixeira Cunha" userId="195451ac3a5e8dfd" providerId="LiveId" clId="{9D99295D-09A0-459E-AFDA-61FAD528DEBC}" dt="2026-05-20T00:24:32.639" v="2491" actId="1076"/>
@@ -208,30 +184,6 @@
           <pc:docMk/>
           <pc:sldMk cId="686788975" sldId="297"/>
         </pc:sldMkLst>
-        <pc:spChg chg="mod">
-          <ac:chgData name="Joel Teixeira Cunha" userId="195451ac3a5e8dfd" providerId="LiveId" clId="{9D99295D-09A0-459E-AFDA-61FAD528DEBC}" dt="2026-05-20T00:15:30.607" v="2054" actId="20577"/>
-          <ac:spMkLst>
-            <pc:docMk/>
-            <pc:sldMk cId="686788975" sldId="297"/>
-            <ac:spMk id="2" creationId="{10026B57-3FDA-8018-B938-9FCFE14269E0}"/>
-          </ac:spMkLst>
-        </pc:spChg>
-        <pc:spChg chg="mod">
-          <ac:chgData name="Joel Teixeira Cunha" userId="195451ac3a5e8dfd" providerId="LiveId" clId="{9D99295D-09A0-459E-AFDA-61FAD528DEBC}" dt="2026-05-20T00:24:20.494" v="2490" actId="14100"/>
-          <ac:spMkLst>
-            <pc:docMk/>
-            <pc:sldMk cId="686788975" sldId="297"/>
-            <ac:spMk id="3" creationId="{B12B03D7-AD6D-38F8-2783-E2DFCB32EB20}"/>
-          </ac:spMkLst>
-        </pc:spChg>
-        <pc:picChg chg="add mod">
-          <ac:chgData name="Joel Teixeira Cunha" userId="195451ac3a5e8dfd" providerId="LiveId" clId="{9D99295D-09A0-459E-AFDA-61FAD528DEBC}" dt="2026-05-20T00:24:32.639" v="2491" actId="1076"/>
-          <ac:picMkLst>
-            <pc:docMk/>
-            <pc:sldMk cId="686788975" sldId="297"/>
-            <ac:picMk id="1026" creationId="{D33A01CD-B865-5F9A-3649-D227B2530138}"/>
-          </ac:picMkLst>
-        </pc:picChg>
       </pc:sldChg>
       <pc:sldChg chg="addSp delSp modSp new mod">
         <pc:chgData name="Joel Teixeira Cunha" userId="195451ac3a5e8dfd" providerId="LiveId" clId="{9D99295D-09A0-459E-AFDA-61FAD528DEBC}" dt="2026-05-20T00:21:51.129" v="2484" actId="1076"/>
@@ -239,22 +191,227 @@
           <pc:docMk/>
           <pc:sldMk cId="2555171411" sldId="298"/>
         </pc:sldMkLst>
+      </pc:sldChg>
+      <pc:sldChg chg="addSp delSp modSp new del mod">
+        <pc:chgData name="Joel Teixeira Cunha" userId="195451ac3a5e8dfd" providerId="LiveId" clId="{9D99295D-09A0-459E-AFDA-61FAD528DEBC}" dt="2026-06-23T19:46:01.452" v="2503" actId="2696"/>
+        <pc:sldMkLst>
+          <pc:docMk/>
+          <pc:sldMk cId="1261736707" sldId="299"/>
+        </pc:sldMkLst>
         <pc:spChg chg="mod">
-          <ac:chgData name="Joel Teixeira Cunha" userId="195451ac3a5e8dfd" providerId="LiveId" clId="{9D99295D-09A0-459E-AFDA-61FAD528DEBC}" dt="2026-05-20T00:21:13.447" v="2480" actId="20577"/>
+          <ac:chgData name="Joel Teixeira Cunha" userId="195451ac3a5e8dfd" providerId="LiveId" clId="{9D99295D-09A0-459E-AFDA-61FAD528DEBC}" dt="2026-06-23T19:45:30.823" v="2499" actId="14100"/>
           <ac:spMkLst>
             <pc:docMk/>
-            <pc:sldMk cId="2555171411" sldId="298"/>
-            <ac:spMk id="2" creationId="{8EAC57A4-583D-6ABF-6570-2509B3FA99F1}"/>
+            <pc:sldMk cId="1261736707" sldId="299"/>
+            <ac:spMk id="2" creationId="{7782FD2B-E907-10CE-60C5-8F68AC44E86D}"/>
+          </ac:spMkLst>
+        </pc:spChg>
+        <pc:picChg chg="add del mod">
+          <ac:chgData name="Joel Teixeira Cunha" userId="195451ac3a5e8dfd" providerId="LiveId" clId="{9D99295D-09A0-459E-AFDA-61FAD528DEBC}" dt="2026-06-23T19:45:46.993" v="2501" actId="21"/>
+          <ac:picMkLst>
+            <pc:docMk/>
+            <pc:sldMk cId="1261736707" sldId="299"/>
+            <ac:picMk id="5" creationId="{605A7FCA-AD51-4334-0820-F79955CFDF42}"/>
+          </ac:picMkLst>
+        </pc:picChg>
+        <pc:picChg chg="add del mod">
+          <ac:chgData name="Joel Teixeira Cunha" userId="195451ac3a5e8dfd" providerId="LiveId" clId="{9D99295D-09A0-459E-AFDA-61FAD528DEBC}" dt="2026-06-23T19:45:15.324" v="2496" actId="478"/>
+          <ac:picMkLst>
+            <pc:docMk/>
+            <pc:sldMk cId="1261736707" sldId="299"/>
+            <ac:picMk id="1026" creationId="{D1F38CDE-B3CF-C56E-7466-0690915F535E}"/>
+          </ac:picMkLst>
+        </pc:picChg>
+      </pc:sldChg>
+      <pc:sldChg chg="del">
+        <pc:chgData name="Joel Teixeira Cunha" userId="195451ac3a5e8dfd" providerId="LiveId" clId="{9D99295D-09A0-459E-AFDA-61FAD528DEBC}" dt="2026-06-23T19:40:21.765" v="2492" actId="47"/>
+        <pc:sldMkLst>
+          <pc:docMk/>
+          <pc:sldMk cId="1396634947" sldId="300"/>
+        </pc:sldMkLst>
+      </pc:sldChg>
+      <pc:sldChg chg="addSp modSp new mod">
+        <pc:chgData name="Joel Teixeira Cunha" userId="195451ac3a5e8dfd" providerId="LiveId" clId="{9D99295D-09A0-459E-AFDA-61FAD528DEBC}" dt="2026-06-23T19:50:01.100" v="2552" actId="14100"/>
+        <pc:sldMkLst>
+          <pc:docMk/>
+          <pc:sldMk cId="4047619075" sldId="300"/>
+        </pc:sldMkLst>
+        <pc:spChg chg="add mod">
+          <ac:chgData name="Joel Teixeira Cunha" userId="195451ac3a5e8dfd" providerId="LiveId" clId="{9D99295D-09A0-459E-AFDA-61FAD528DEBC}" dt="2026-06-23T19:50:01.100" v="2552" actId="14100"/>
+          <ac:spMkLst>
+            <pc:docMk/>
+            <pc:sldMk cId="4047619075" sldId="300"/>
+            <ac:spMk id="2" creationId="{03709245-3348-8FFA-4949-BF23545D72CB}"/>
+          </ac:spMkLst>
+        </pc:spChg>
+        <pc:spChg chg="add mod ord">
+          <ac:chgData name="Joel Teixeira Cunha" userId="195451ac3a5e8dfd" providerId="LiveId" clId="{9D99295D-09A0-459E-AFDA-61FAD528DEBC}" dt="2026-06-23T19:49:52.601" v="2550" actId="14100"/>
+          <ac:spMkLst>
+            <pc:docMk/>
+            <pc:sldMk cId="4047619075" sldId="300"/>
+            <ac:spMk id="3" creationId="{5A95A762-6756-7DE0-44B2-D61FE4A48D4F}"/>
           </ac:spMkLst>
         </pc:spChg>
         <pc:picChg chg="add mod">
-          <ac:chgData name="Joel Teixeira Cunha" userId="195451ac3a5e8dfd" providerId="LiveId" clId="{9D99295D-09A0-459E-AFDA-61FAD528DEBC}" dt="2026-05-20T00:21:51.129" v="2484" actId="1076"/>
+          <ac:chgData name="Joel Teixeira Cunha" userId="195451ac3a5e8dfd" providerId="LiveId" clId="{9D99295D-09A0-459E-AFDA-61FAD528DEBC}" dt="2026-06-23T19:45:51.063" v="2502"/>
           <ac:picMkLst>
             <pc:docMk/>
-            <pc:sldMk cId="2555171411" sldId="298"/>
-            <ac:picMk id="5" creationId="{8F73ABFA-E65C-04C7-6F94-A69BA969B5A5}"/>
+            <pc:sldMk cId="4047619075" sldId="300"/>
+            <ac:picMk id="5" creationId="{605A7FCA-AD51-4334-0820-F79955CFDF42}"/>
           </ac:picMkLst>
         </pc:picChg>
+      </pc:sldChg>
+      <pc:sldChg chg="modSp new mod">
+        <pc:chgData name="Joel Teixeira Cunha" userId="195451ac3a5e8dfd" providerId="LiveId" clId="{9D99295D-09A0-459E-AFDA-61FAD528DEBC}" dt="2026-06-23T20:02:28.793" v="2841" actId="20577"/>
+        <pc:sldMkLst>
+          <pc:docMk/>
+          <pc:sldMk cId="2012595901" sldId="301"/>
+        </pc:sldMkLst>
+        <pc:spChg chg="mod">
+          <ac:chgData name="Joel Teixeira Cunha" userId="195451ac3a5e8dfd" providerId="LiveId" clId="{9D99295D-09A0-459E-AFDA-61FAD528DEBC}" dt="2026-06-23T19:55:56.946" v="2570" actId="20577"/>
+          <ac:spMkLst>
+            <pc:docMk/>
+            <pc:sldMk cId="2012595901" sldId="301"/>
+            <ac:spMk id="2" creationId="{12915F41-BDAD-7BDF-78A3-CCDCC2CE7F31}"/>
+          </ac:spMkLst>
+        </pc:spChg>
+        <pc:spChg chg="mod">
+          <ac:chgData name="Joel Teixeira Cunha" userId="195451ac3a5e8dfd" providerId="LiveId" clId="{9D99295D-09A0-459E-AFDA-61FAD528DEBC}" dt="2026-06-23T20:02:28.793" v="2841" actId="20577"/>
+          <ac:spMkLst>
+            <pc:docMk/>
+            <pc:sldMk cId="2012595901" sldId="301"/>
+            <ac:spMk id="3" creationId="{BC7FB8B9-E48D-E230-67BD-A3D86A4058DC}"/>
+          </ac:spMkLst>
+        </pc:spChg>
+      </pc:sldChg>
+      <pc:sldChg chg="del">
+        <pc:chgData name="Joel Teixeira Cunha" userId="195451ac3a5e8dfd" providerId="LiveId" clId="{9D99295D-09A0-459E-AFDA-61FAD528DEBC}" dt="2026-06-23T19:40:21.765" v="2492" actId="47"/>
+        <pc:sldMkLst>
+          <pc:docMk/>
+          <pc:sldMk cId="2228430991" sldId="301"/>
+        </pc:sldMkLst>
+      </pc:sldChg>
+      <pc:sldChg chg="del">
+        <pc:chgData name="Joel Teixeira Cunha" userId="195451ac3a5e8dfd" providerId="LiveId" clId="{9D99295D-09A0-459E-AFDA-61FAD528DEBC}" dt="2026-06-23T19:40:21.765" v="2492" actId="47"/>
+        <pc:sldMkLst>
+          <pc:docMk/>
+          <pc:sldMk cId="1137056065" sldId="302"/>
+        </pc:sldMkLst>
+      </pc:sldChg>
+      <pc:sldChg chg="addSp modSp add mod">
+        <pc:chgData name="Joel Teixeira Cunha" userId="195451ac3a5e8dfd" providerId="LiveId" clId="{9D99295D-09A0-459E-AFDA-61FAD528DEBC}" dt="2026-06-23T20:13:08.719" v="3137" actId="1076"/>
+        <pc:sldMkLst>
+          <pc:docMk/>
+          <pc:sldMk cId="2189762848" sldId="302"/>
+        </pc:sldMkLst>
+        <pc:spChg chg="mod">
+          <ac:chgData name="Joel Teixeira Cunha" userId="195451ac3a5e8dfd" providerId="LiveId" clId="{9D99295D-09A0-459E-AFDA-61FAD528DEBC}" dt="2026-06-23T20:12:48.581" v="3135" actId="403"/>
+          <ac:spMkLst>
+            <pc:docMk/>
+            <pc:sldMk cId="2189762848" sldId="302"/>
+            <ac:spMk id="3" creationId="{DB1D5FCB-0A9B-2EE0-8029-527855B69E40}"/>
+          </ac:spMkLst>
+        </pc:spChg>
+        <pc:spChg chg="add mod">
+          <ac:chgData name="Joel Teixeira Cunha" userId="195451ac3a5e8dfd" providerId="LiveId" clId="{9D99295D-09A0-459E-AFDA-61FAD528DEBC}" dt="2026-06-23T20:12:39.998" v="3118" actId="2710"/>
+          <ac:spMkLst>
+            <pc:docMk/>
+            <pc:sldMk cId="2189762848" sldId="302"/>
+            <ac:spMk id="7" creationId="{2CC49E5A-E1FD-0DCD-BBA2-2698EE71615E}"/>
+          </ac:spMkLst>
+        </pc:spChg>
+        <pc:picChg chg="add mod">
+          <ac:chgData name="Joel Teixeira Cunha" userId="195451ac3a5e8dfd" providerId="LiveId" clId="{9D99295D-09A0-459E-AFDA-61FAD528DEBC}" dt="2026-06-23T20:12:54.899" v="3136" actId="1076"/>
+          <ac:picMkLst>
+            <pc:docMk/>
+            <pc:sldMk cId="2189762848" sldId="302"/>
+            <ac:picMk id="5" creationId="{1B4202D9-6C16-E8B6-60C5-D3F9FE7BB375}"/>
+          </ac:picMkLst>
+        </pc:picChg>
+        <pc:picChg chg="add mod">
+          <ac:chgData name="Joel Teixeira Cunha" userId="195451ac3a5e8dfd" providerId="LiveId" clId="{9D99295D-09A0-459E-AFDA-61FAD528DEBC}" dt="2026-06-23T20:13:08.719" v="3137" actId="1076"/>
+          <ac:picMkLst>
+            <pc:docMk/>
+            <pc:sldMk cId="2189762848" sldId="302"/>
+            <ac:picMk id="6" creationId="{AF8516A8-2AB5-EAD7-A349-053FAF560259}"/>
+          </ac:picMkLst>
+        </pc:picChg>
+      </pc:sldChg>
+      <pc:sldChg chg="addSp modSp add mod">
+        <pc:chgData name="Joel Teixeira Cunha" userId="195451ac3a5e8dfd" providerId="LiveId" clId="{9D99295D-09A0-459E-AFDA-61FAD528DEBC}" dt="2026-06-23T22:36:48.798" v="3140" actId="1076"/>
+        <pc:sldMkLst>
+          <pc:docMk/>
+          <pc:sldMk cId="3132615768" sldId="303"/>
+        </pc:sldMkLst>
+        <pc:spChg chg="mod">
+          <ac:chgData name="Joel Teixeira Cunha" userId="195451ac3a5e8dfd" providerId="LiveId" clId="{9D99295D-09A0-459E-AFDA-61FAD528DEBC}" dt="2026-06-23T22:36:39.068" v="3139" actId="164"/>
+          <ac:spMkLst>
+            <pc:docMk/>
+            <pc:sldMk cId="3132615768" sldId="303"/>
+            <ac:spMk id="7" creationId="{502A6C2F-53B8-317D-AF66-13B742D921CA}"/>
+          </ac:spMkLst>
+        </pc:spChg>
+        <pc:grpChg chg="add mod">
+          <ac:chgData name="Joel Teixeira Cunha" userId="195451ac3a5e8dfd" providerId="LiveId" clId="{9D99295D-09A0-459E-AFDA-61FAD528DEBC}" dt="2026-06-23T22:36:48.798" v="3140" actId="1076"/>
+          <ac:grpSpMkLst>
+            <pc:docMk/>
+            <pc:sldMk cId="3132615768" sldId="303"/>
+            <ac:grpSpMk id="4" creationId="{04F25D28-B53A-3BCD-1122-B80EDC57A148}"/>
+          </ac:grpSpMkLst>
+        </pc:grpChg>
+        <pc:picChg chg="mod">
+          <ac:chgData name="Joel Teixeira Cunha" userId="195451ac3a5e8dfd" providerId="LiveId" clId="{9D99295D-09A0-459E-AFDA-61FAD528DEBC}" dt="2026-06-23T22:36:39.068" v="3139" actId="164"/>
+          <ac:picMkLst>
+            <pc:docMk/>
+            <pc:sldMk cId="3132615768" sldId="303"/>
+            <ac:picMk id="5" creationId="{E169A7E7-D9B5-A6C3-429E-F2BCB46497B4}"/>
+          </ac:picMkLst>
+        </pc:picChg>
+        <pc:picChg chg="mod">
+          <ac:chgData name="Joel Teixeira Cunha" userId="195451ac3a5e8dfd" providerId="LiveId" clId="{9D99295D-09A0-459E-AFDA-61FAD528DEBC}" dt="2026-06-23T22:36:39.068" v="3139" actId="164"/>
+          <ac:picMkLst>
+            <pc:docMk/>
+            <pc:sldMk cId="3132615768" sldId="303"/>
+            <ac:picMk id="6" creationId="{86B1B748-52E0-1B25-4EFD-A69ECF441922}"/>
+          </ac:picMkLst>
+        </pc:picChg>
+      </pc:sldChg>
+      <pc:sldChg chg="del">
+        <pc:chgData name="Joel Teixeira Cunha" userId="195451ac3a5e8dfd" providerId="LiveId" clId="{9D99295D-09A0-459E-AFDA-61FAD528DEBC}" dt="2026-06-23T19:40:21.765" v="2492" actId="47"/>
+        <pc:sldMkLst>
+          <pc:docMk/>
+          <pc:sldMk cId="3752736611" sldId="303"/>
+        </pc:sldMkLst>
+      </pc:sldChg>
+      <pc:sldChg chg="del">
+        <pc:chgData name="Joel Teixeira Cunha" userId="195451ac3a5e8dfd" providerId="LiveId" clId="{9D99295D-09A0-459E-AFDA-61FAD528DEBC}" dt="2026-06-23T19:40:21.765" v="2492" actId="47"/>
+        <pc:sldMkLst>
+          <pc:docMk/>
+          <pc:sldMk cId="2415727671" sldId="304"/>
+        </pc:sldMkLst>
+      </pc:sldChg>
+      <pc:sldChg chg="modSp new mod">
+        <pc:chgData name="Joel Teixeira Cunha" userId="195451ac3a5e8dfd" providerId="LiveId" clId="{9D99295D-09A0-459E-AFDA-61FAD528DEBC}" dt="2026-06-23T22:38:53.417" v="3229" actId="20577"/>
+        <pc:sldMkLst>
+          <pc:docMk/>
+          <pc:sldMk cId="3793655364" sldId="304"/>
+        </pc:sldMkLst>
+        <pc:spChg chg="mod">
+          <ac:chgData name="Joel Teixeira Cunha" userId="195451ac3a5e8dfd" providerId="LiveId" clId="{9D99295D-09A0-459E-AFDA-61FAD528DEBC}" dt="2026-06-23T22:37:45.960" v="3173" actId="20577"/>
+          <ac:spMkLst>
+            <pc:docMk/>
+            <pc:sldMk cId="3793655364" sldId="304"/>
+            <ac:spMk id="2" creationId="{F304B218-6F6E-FCF1-6E5D-3395C9E1E3B8}"/>
+          </ac:spMkLst>
+        </pc:spChg>
+        <pc:spChg chg="mod">
+          <ac:chgData name="Joel Teixeira Cunha" userId="195451ac3a5e8dfd" providerId="LiveId" clId="{9D99295D-09A0-459E-AFDA-61FAD528DEBC}" dt="2026-06-23T22:38:53.417" v="3229" actId="20577"/>
+          <ac:spMkLst>
+            <pc:docMk/>
+            <pc:sldMk cId="3793655364" sldId="304"/>
+            <ac:spMk id="3" creationId="{C8B01E91-E4E0-9BA5-D2B0-67B55C15AB35}"/>
+          </ac:spMkLst>
+        </pc:spChg>
       </pc:sldChg>
     </pc:docChg>
   </pc:docChgLst>
@@ -286,14 +443,6 @@
           <pc:docMk/>
           <pc:sldMk cId="1396634947" sldId="300"/>
         </pc:sldMkLst>
-        <pc:picChg chg="add mod">
-          <ac:chgData name="Joel Teixeira Cunha" userId="195451ac3a5e8dfd" providerId="LiveId" clId="{2A4D4AF3-9DC9-4CE5-AE1A-E96DDBF3EED9}" dt="2026-06-02T13:59:51.330" v="6" actId="26606"/>
-          <ac:picMkLst>
-            <pc:docMk/>
-            <pc:sldMk cId="1396634947" sldId="300"/>
-            <ac:picMk id="3" creationId="{748CC09D-9B0C-2949-DB27-1621A15D751E}"/>
-          </ac:picMkLst>
-        </pc:picChg>
       </pc:sldChg>
       <pc:sldChg chg="modSp new mod">
         <pc:chgData name="Joel Teixeira Cunha" userId="195451ac3a5e8dfd" providerId="LiveId" clId="{2A4D4AF3-9DC9-4CE5-AE1A-E96DDBF3EED9}" dt="2026-06-02T14:01:55.757" v="216" actId="20577"/>
@@ -301,22 +450,6 @@
           <pc:docMk/>
           <pc:sldMk cId="2228430991" sldId="301"/>
         </pc:sldMkLst>
-        <pc:spChg chg="mod">
-          <ac:chgData name="Joel Teixeira Cunha" userId="195451ac3a5e8dfd" providerId="LiveId" clId="{2A4D4AF3-9DC9-4CE5-AE1A-E96DDBF3EED9}" dt="2026-06-02T14:00:29.905" v="35" actId="20577"/>
-          <ac:spMkLst>
-            <pc:docMk/>
-            <pc:sldMk cId="2228430991" sldId="301"/>
-            <ac:spMk id="2" creationId="{8856C33B-2C26-F485-A7D2-39C601A67615}"/>
-          </ac:spMkLst>
-        </pc:spChg>
-        <pc:spChg chg="mod">
-          <ac:chgData name="Joel Teixeira Cunha" userId="195451ac3a5e8dfd" providerId="LiveId" clId="{2A4D4AF3-9DC9-4CE5-AE1A-E96DDBF3EED9}" dt="2026-06-02T14:01:55.757" v="216" actId="20577"/>
-          <ac:spMkLst>
-            <pc:docMk/>
-            <pc:sldMk cId="2228430991" sldId="301"/>
-            <ac:spMk id="3" creationId="{A13842A8-2417-E583-8B33-0FCFAB6EE58E}"/>
-          </ac:spMkLst>
-        </pc:spChg>
       </pc:sldChg>
       <pc:sldChg chg="addSp delSp modSp add mod modClrScheme chgLayout">
         <pc:chgData name="Joel Teixeira Cunha" userId="195451ac3a5e8dfd" providerId="LiveId" clId="{2A4D4AF3-9DC9-4CE5-AE1A-E96DDBF3EED9}" dt="2026-06-02T14:11:11.776" v="503" actId="3064"/>
@@ -324,22 +457,6 @@
           <pc:docMk/>
           <pc:sldMk cId="1137056065" sldId="302"/>
         </pc:sldMkLst>
-        <pc:spChg chg="mod">
-          <ac:chgData name="Joel Teixeira Cunha" userId="195451ac3a5e8dfd" providerId="LiveId" clId="{2A4D4AF3-9DC9-4CE5-AE1A-E96DDBF3EED9}" dt="2026-06-02T14:10:30.862" v="500" actId="26606"/>
-          <ac:spMkLst>
-            <pc:docMk/>
-            <pc:sldMk cId="1137056065" sldId="302"/>
-            <ac:spMk id="2" creationId="{7AD21C45-6F07-B69F-59CC-ED7E4E0C5758}"/>
-          </ac:spMkLst>
-        </pc:spChg>
-        <pc:spChg chg="mod">
-          <ac:chgData name="Joel Teixeira Cunha" userId="195451ac3a5e8dfd" providerId="LiveId" clId="{2A4D4AF3-9DC9-4CE5-AE1A-E96DDBF3EED9}" dt="2026-06-02T14:11:11.776" v="503" actId="3064"/>
-          <ac:spMkLst>
-            <pc:docMk/>
-            <pc:sldMk cId="1137056065" sldId="302"/>
-            <ac:spMk id="3" creationId="{F5D8BB43-49E0-6ACE-CF0C-F2BB7C6A2104}"/>
-          </ac:spMkLst>
-        </pc:spChg>
       </pc:sldChg>
       <pc:sldChg chg="addSp modSp add mod">
         <pc:chgData name="Joel Teixeira Cunha" userId="195451ac3a5e8dfd" providerId="LiveId" clId="{2A4D4AF3-9DC9-4CE5-AE1A-E96DDBF3EED9}" dt="2026-06-02T14:16:58.847" v="1009" actId="27636"/>
@@ -347,22 +464,6 @@
           <pc:docMk/>
           <pc:sldMk cId="3752736611" sldId="303"/>
         </pc:sldMkLst>
-        <pc:spChg chg="mod">
-          <ac:chgData name="Joel Teixeira Cunha" userId="195451ac3a5e8dfd" providerId="LiveId" clId="{2A4D4AF3-9DC9-4CE5-AE1A-E96DDBF3EED9}" dt="2026-06-02T14:16:58.847" v="1009" actId="27636"/>
-          <ac:spMkLst>
-            <pc:docMk/>
-            <pc:sldMk cId="3752736611" sldId="303"/>
-            <ac:spMk id="3" creationId="{0608DF11-7331-AADB-7A61-CB6D86DA7772}"/>
-          </ac:spMkLst>
-        </pc:spChg>
-        <pc:picChg chg="add mod">
-          <ac:chgData name="Joel Teixeira Cunha" userId="195451ac3a5e8dfd" providerId="LiveId" clId="{2A4D4AF3-9DC9-4CE5-AE1A-E96DDBF3EED9}" dt="2026-06-02T14:14:33.520" v="896"/>
-          <ac:picMkLst>
-            <pc:docMk/>
-            <pc:sldMk cId="3752736611" sldId="303"/>
-            <ac:picMk id="5" creationId="{10752C78-3FAC-2CC2-65C2-028D53743F39}"/>
-          </ac:picMkLst>
-        </pc:picChg>
       </pc:sldChg>
       <pc:sldChg chg="modSp add mod">
         <pc:chgData name="Joel Teixeira Cunha" userId="195451ac3a5e8dfd" providerId="LiveId" clId="{2A4D4AF3-9DC9-4CE5-AE1A-E96DDBF3EED9}" dt="2026-06-19T11:07:19.354" v="1051" actId="20577"/>
@@ -370,14 +471,6 @@
           <pc:docMk/>
           <pc:sldMk cId="2415727671" sldId="304"/>
         </pc:sldMkLst>
-        <pc:spChg chg="mod">
-          <ac:chgData name="Joel Teixeira Cunha" userId="195451ac3a5e8dfd" providerId="LiveId" clId="{2A4D4AF3-9DC9-4CE5-AE1A-E96DDBF3EED9}" dt="2026-06-19T11:07:19.354" v="1051" actId="20577"/>
-          <ac:spMkLst>
-            <pc:docMk/>
-            <pc:sldMk cId="2415727671" sldId="304"/>
-            <ac:spMk id="3" creationId="{65C59513-9337-0F05-DF5D-F551BECE94F1}"/>
-          </ac:spMkLst>
-        </pc:spChg>
       </pc:sldChg>
       <pc:sldMasterChg chg="modSldLayout">
         <pc:chgData name="Joel Teixeira Cunha" userId="195451ac3a5e8dfd" providerId="LiveId" clId="{2A4D4AF3-9DC9-4CE5-AE1A-E96DDBF3EED9}" dt="2026-06-02T14:09:52.376" v="498"/>
@@ -504,7 +597,7 @@
             <a:pPr rtl="0"/>
             <a:fld id="{A517C7B7-34F5-4531-9889-28687F60FAC8}" type="datetime1">
               <a:rPr lang="pt-BR" smtClean="0"/>
-              <a:t>19/06/2026</a:t>
+              <a:t>23/06/2026</a:t>
             </a:fld>
             <a:endParaRPr lang="pt-BR" dirty="0"/>
           </a:p>
@@ -685,7 +778,7 @@
             <a:fld id="{40C3EC75-555C-481D-9088-738CE6DDFC83}" type="datetime1">
               <a:rPr lang="pt-BR" smtClean="0"/>
               <a:pPr/>
-              <a:t>19/06/2026</a:t>
+              <a:t>23/06/2026</a:t>
             </a:fld>
             <a:endParaRPr lang="pt-BR" dirty="0"/>
           </a:p>
@@ -1373,7 +1466,7 @@
             <a:pPr rtl="0"/>
             <a:fld id="{2AF5B136-74F1-42D3-987D-A097EEF8F2FE}" type="datetime1">
               <a:rPr lang="pt-BR" noProof="0" smtClean="0"/>
-              <a:t>19/06/2026</a:t>
+              <a:t>23/06/2026</a:t>
             </a:fld>
             <a:endParaRPr lang="pt-BR" noProof="0"/>
           </a:p>
@@ -1638,7 +1731,7 @@
             <a:pPr rtl="0"/>
             <a:fld id="{0229B074-15EB-43FB-8347-3A734D799093}" type="datetime1">
               <a:rPr lang="pt-BR" noProof="0" smtClean="0"/>
-              <a:t>19/06/2026</a:t>
+              <a:t>23/06/2026</a:t>
             </a:fld>
             <a:endParaRPr lang="pt-BR" noProof="0"/>
           </a:p>
@@ -1876,7 +1969,7 @@
             <a:pPr rtl="0"/>
             <a:fld id="{036303E3-8DE9-4C2D-91EE-6F377AE582A8}" type="datetime1">
               <a:rPr lang="pt-BR" noProof="0" smtClean="0"/>
-              <a:t>19/06/2026</a:t>
+              <a:t>23/06/2026</a:t>
             </a:fld>
             <a:endParaRPr lang="pt-BR" noProof="0"/>
           </a:p>
@@ -2119,7 +2212,7 @@
             <a:pPr rtl="0"/>
             <a:fld id="{B04AF3F4-81C7-4F15-8991-6D0E8D06651A}" type="datetime1">
               <a:rPr lang="pt-BR" noProof="0" smtClean="0"/>
-              <a:t>19/06/2026</a:t>
+              <a:t>23/06/2026</a:t>
             </a:fld>
             <a:endParaRPr lang="pt-BR" noProof="0"/>
           </a:p>
@@ -2430,7 +2523,7 @@
             <a:pPr rtl="0"/>
             <a:fld id="{6E2946E4-8964-43BF-B1D5-4261B83248E5}" type="datetime1">
               <a:rPr lang="pt-BR" noProof="0" smtClean="0"/>
-              <a:t>19/06/2026</a:t>
+              <a:t>23/06/2026</a:t>
             </a:fld>
             <a:endParaRPr lang="pt-BR" noProof="0"/>
           </a:p>
@@ -2734,7 +2827,7 @@
             <a:pPr rtl="0"/>
             <a:fld id="{97C9F420-083C-437A-9265-7F13EB97C6A2}" type="datetime1">
               <a:rPr lang="pt-BR" noProof="0" smtClean="0"/>
-              <a:t>19/06/2026</a:t>
+              <a:t>23/06/2026</a:t>
             </a:fld>
             <a:endParaRPr lang="pt-BR" noProof="0"/>
           </a:p>
@@ -3158,7 +3251,7 @@
             <a:pPr rtl="0"/>
             <a:fld id="{BE07AF20-ED70-4B21-B799-75BB5818AB43}" type="datetime1">
               <a:rPr lang="pt-BR" noProof="0" smtClean="0"/>
-              <a:t>19/06/2026</a:t>
+              <a:t>23/06/2026</a:t>
             </a:fld>
             <a:endParaRPr lang="pt-BR" noProof="0"/>
           </a:p>
@@ -3257,7 +3350,7 @@
             <a:pPr rtl="0"/>
             <a:fld id="{0D33D876-8C34-42FC-BFF7-457557B97BB7}" type="datetime1">
               <a:rPr lang="pt-BR" noProof="0" smtClean="0"/>
-              <a:t>19/06/2026</a:t>
+              <a:t>23/06/2026</a:t>
             </a:fld>
             <a:endParaRPr lang="pt-BR" noProof="0"/>
           </a:p>
@@ -3423,7 +3516,7 @@
             <a:pPr rtl="0"/>
             <a:fld id="{4592437E-206F-4A1C-947F-806A50A40B88}" type="datetime1">
               <a:rPr lang="pt-BR" noProof="0" smtClean="0"/>
-              <a:t>19/06/2026</a:t>
+              <a:t>23/06/2026</a:t>
             </a:fld>
             <a:endParaRPr lang="pt-BR" noProof="0"/>
           </a:p>
@@ -3804,7 +3897,7 @@
             <a:pPr rtl="0"/>
             <a:fld id="{B036DDBC-F1EF-4D09-A533-5995BC167053}" type="datetime1">
               <a:rPr lang="pt-BR" noProof="0" smtClean="0"/>
-              <a:t>19/06/2026</a:t>
+              <a:t>23/06/2026</a:t>
             </a:fld>
             <a:endParaRPr lang="pt-BR" noProof="0"/>
           </a:p>
@@ -4097,7 +4190,7 @@
             <a:pPr rtl="0"/>
             <a:fld id="{DFFDDC01-A1CF-4C3A-BE96-FBC60101324D}" type="datetime1">
               <a:rPr lang="pt-BR" noProof="0" smtClean="0"/>
-              <a:t>19/06/2026</a:t>
+              <a:t>23/06/2026</a:t>
             </a:fld>
             <a:endParaRPr lang="pt-BR" noProof="0"/>
           </a:p>
@@ -4311,7 +4404,7 @@
             <a:pPr rtl="0"/>
             <a:fld id="{52266794-2CD5-4ED3-94F8-8B8DC65FDDE3}" type="datetime1">
               <a:rPr lang="pt-BR" noProof="0" smtClean="0"/>
-              <a:t>19/06/2026</a:t>
+              <a:t>23/06/2026</a:t>
             </a:fld>
             <a:endParaRPr lang="pt-BR" noProof="0"/>
           </a:p>
@@ -9781,12 +9874,61 @@
           <a:chExt cx="0" cy="0"/>
         </a:xfrm>
       </p:grpSpPr>
+      <p:sp>
+        <p:nvSpPr>
+          <p:cNvPr id="3" name="Retângulo 2">
+            <a:extLst>
+              <a:ext uri="{FF2B5EF4-FFF2-40B4-BE49-F238E27FC236}">
+                <a16:creationId xmlns:a16="http://schemas.microsoft.com/office/drawing/2014/main" id="{5A95A762-6756-7DE0-44B2-D61FE4A48D4F}"/>
+              </a:ext>
+            </a:extLst>
+          </p:cNvPr>
+          <p:cNvSpPr/>
+          <p:nvPr/>
+        </p:nvSpPr>
+        <p:spPr>
+          <a:xfrm>
+            <a:off x="6575196" y="0"/>
+            <a:ext cx="5616804" cy="6858000"/>
+          </a:xfrm>
+          <a:prstGeom prst="rect">
+            <a:avLst/>
+          </a:prstGeom>
+          <a:ln>
+            <a:noFill/>
+          </a:ln>
+        </p:spPr>
+        <p:style>
+          <a:lnRef idx="2">
+            <a:schemeClr val="accent1">
+              <a:shade val="15000"/>
+            </a:schemeClr>
+          </a:lnRef>
+          <a:fillRef idx="1">
+            <a:schemeClr val="accent1"/>
+          </a:fillRef>
+          <a:effectRef idx="0">
+            <a:schemeClr val="accent1"/>
+          </a:effectRef>
+          <a:fontRef idx="minor">
+            <a:schemeClr val="lt1"/>
+          </a:fontRef>
+        </p:style>
+        <p:txBody>
+          <a:bodyPr rtlCol="0" anchor="ctr"/>
+          <a:lstStyle/>
+          <a:p>
+            <a:pPr algn="ctr"/>
+            <a:endParaRPr lang="pt-BR"/>
+          </a:p>
+        </p:txBody>
+      </p:sp>
       <p:pic>
         <p:nvPicPr>
-          <p:cNvPr id="3" name="Imagem 2">
+          <p:cNvPr id="5" name="Imagem 4">
             <a:extLst>
               <a:ext uri="{FF2B5EF4-FFF2-40B4-BE49-F238E27FC236}">
-                <a16:creationId xmlns:a16="http://schemas.microsoft.com/office/drawing/2014/main" id="{748CC09D-9B0C-2949-DB27-1621A15D751E}"/>
+                <a16:creationId xmlns:a16="http://schemas.microsoft.com/office/drawing/2014/main" id="{605A7FCA-AD51-4334-0820-F79955CFDF42}"/>
               </a:ext>
             </a:extLst>
           </p:cNvPr>
@@ -9797,26 +9939,71 @@
         </p:nvPicPr>
         <p:blipFill>
           <a:blip r:embed="rId2"/>
-          <a:srcRect l="444"/>
           <a:stretch>
             <a:fillRect/>
           </a:stretch>
         </p:blipFill>
         <p:spPr>
           <a:xfrm>
-            <a:off x="20" y="10"/>
-            <a:ext cx="12191980" cy="6857990"/>
+            <a:off x="0" y="0"/>
+            <a:ext cx="6575196" cy="6858000"/>
+          </a:xfrm>
+          <a:prstGeom prst="rect">
+            <a:avLst/>
+          </a:prstGeom>
+        </p:spPr>
+      </p:pic>
+      <p:sp>
+        <p:nvSpPr>
+          <p:cNvPr id="2" name="CaixaDeTexto 1">
+            <a:extLst>
+              <a:ext uri="{FF2B5EF4-FFF2-40B4-BE49-F238E27FC236}">
+                <a16:creationId xmlns:a16="http://schemas.microsoft.com/office/drawing/2014/main" id="{03709245-3348-8FFA-4949-BF23545D72CB}"/>
+              </a:ext>
+            </a:extLst>
+          </p:cNvPr>
+          <p:cNvSpPr txBox="1"/>
+          <p:nvPr/>
+        </p:nvSpPr>
+        <p:spPr>
+          <a:xfrm>
+            <a:off x="6711696" y="1408176"/>
+            <a:ext cx="5480304" cy="2308324"/>
           </a:xfrm>
           <a:prstGeom prst="rect">
             <a:avLst/>
           </a:prstGeom>
           <a:noFill/>
         </p:spPr>
-      </p:pic>
+        <p:txBody>
+          <a:bodyPr wrap="square" rtlCol="0">
+            <a:spAutoFit/>
+            <a:scene3d>
+              <a:camera prst="orthographicFront"/>
+              <a:lightRig rig="threePt" dir="t"/>
+            </a:scene3d>
+            <a:sp3d extrusionH="57150">
+              <a:bevelT w="38100" h="38100"/>
+            </a:sp3d>
+          </a:bodyPr>
+          <a:lstStyle/>
+          <a:p>
+            <a:pPr algn="ctr"/>
+            <a:r>
+              <a:rPr lang="pt-BR" sz="4800" spc="300" dirty="0">
+                <a:solidFill>
+                  <a:schemeClr val="bg1"/>
+                </a:solidFill>
+              </a:rPr>
+              <a:t>PROTOCOLOS DE COMUNICAÇÃO</a:t>
+            </a:r>
+          </a:p>
+        </p:txBody>
+      </p:sp>
     </p:spTree>
     <p:extLst>
       <p:ext uri="{BB962C8B-B14F-4D97-AF65-F5344CB8AC3E}">
-        <p14:creationId xmlns:p14="http://schemas.microsoft.com/office/powerpoint/2010/main" val="1396634947"/>
+        <p14:creationId xmlns:p14="http://schemas.microsoft.com/office/powerpoint/2010/main" val="4047619075"/>
       </p:ext>
     </p:extLst>
   </p:cSld>
@@ -9848,7 +10035,7 @@
           <p:cNvPr id="2" name="Título 1">
             <a:extLst>
               <a:ext uri="{FF2B5EF4-FFF2-40B4-BE49-F238E27FC236}">
-                <a16:creationId xmlns:a16="http://schemas.microsoft.com/office/drawing/2014/main" id="{8856C33B-2C26-F485-A7D2-39C601A67615}"/>
+                <a16:creationId xmlns:a16="http://schemas.microsoft.com/office/drawing/2014/main" id="{12915F41-BDAD-7BDF-78A3-CCDCC2CE7F31}"/>
               </a:ext>
             </a:extLst>
           </p:cNvPr>
@@ -9866,7 +10053,7 @@
           <a:p>
             <a:r>
               <a:rPr lang="pt-BR" dirty="0"/>
-              <a:t>Sistema de Telefonia móvel</a:t>
+              <a:t>O QUE É PROTOCOLO</a:t>
             </a:r>
           </a:p>
         </p:txBody>
@@ -9876,7 +10063,7 @@
           <p:cNvPr id="3" name="Espaço Reservado para Conteúdo 2">
             <a:extLst>
               <a:ext uri="{FF2B5EF4-FFF2-40B4-BE49-F238E27FC236}">
-                <a16:creationId xmlns:a16="http://schemas.microsoft.com/office/drawing/2014/main" id="{A13842A8-2417-E583-8B33-0FCFAB6EE58E}"/>
+                <a16:creationId xmlns:a16="http://schemas.microsoft.com/office/drawing/2014/main" id="{BC7FB8B9-E48D-E230-67BD-A3D86A4058DC}"/>
               </a:ext>
             </a:extLst>
           </p:cNvPr>
@@ -9894,45 +10081,62 @@
           <a:p>
             <a:r>
               <a:rPr lang="pt-BR" dirty="0"/>
-              <a:t>Os telefones possuem três gerações distintas</a:t>
-            </a:r>
-          </a:p>
-          <a:p>
-            <a:pPr marL="342900" indent="-342900">
-              <a:buFont typeface="+mj-lt"/>
-              <a:buAutoNum type="alphaLcParenR"/>
-            </a:pPr>
-            <a:r>
-              <a:rPr lang="pt-BR" dirty="0"/>
-              <a:t>Primeira geração: voz analógica;</a:t>
-            </a:r>
-          </a:p>
-          <a:p>
-            <a:pPr marL="342900" indent="-342900">
-              <a:buFont typeface="+mj-lt"/>
-              <a:buAutoNum type="alphaLcParenR"/>
-            </a:pPr>
-            <a:r>
-              <a:rPr lang="pt-BR" dirty="0"/>
-              <a:t>Segunda geração: voz digital;</a:t>
-            </a:r>
-          </a:p>
-          <a:p>
-            <a:pPr marL="342900" indent="-342900">
-              <a:buFont typeface="+mj-lt"/>
-              <a:buAutoNum type="alphaLcParenR"/>
-            </a:pPr>
-            <a:r>
-              <a:rPr lang="pt-BR" dirty="0"/>
-              <a:t>Terceira geração: voz digital e dados (internet, correio eletrônico </a:t>
-            </a:r>
-            <a:r>
-              <a:rPr lang="pt-BR" dirty="0" err="1"/>
-              <a:t>etc</a:t>
-            </a:r>
-            <a:r>
-              <a:rPr lang="pt-BR" dirty="0"/>
-              <a:t>)</a:t>
+              <a:t>Exemplo:</a:t>
+            </a:r>
+          </a:p>
+          <a:p>
+            <a:pPr lvl="1"/>
+            <a:r>
+              <a:rPr lang="pt-BR" dirty="0"/>
+              <a:t>Ao abordar uma pessoa para pedir informações, seguimos um protocolo de conduta, que ordena as boas maneiras.</a:t>
+            </a:r>
+          </a:p>
+          <a:p>
+            <a:pPr lvl="2"/>
+            <a:r>
+              <a:rPr lang="pt-BR" dirty="0"/>
+              <a:t>Saudação</a:t>
+            </a:r>
+          </a:p>
+          <a:p>
+            <a:pPr lvl="2"/>
+            <a:r>
+              <a:rPr lang="pt-BR" dirty="0"/>
+              <a:t>Identificação</a:t>
+            </a:r>
+          </a:p>
+          <a:p>
+            <a:pPr lvl="2"/>
+            <a:r>
+              <a:rPr lang="pt-BR" dirty="0"/>
+              <a:t>Pergunta</a:t>
+            </a:r>
+          </a:p>
+          <a:p>
+            <a:pPr lvl="2"/>
+            <a:r>
+              <a:rPr lang="pt-BR" dirty="0"/>
+              <a:t>Resposta</a:t>
+            </a:r>
+          </a:p>
+          <a:p>
+            <a:r>
+              <a:rPr lang="pt-BR" dirty="0"/>
+              <a:t>Em informática</a:t>
+            </a:r>
+          </a:p>
+          <a:p>
+            <a:pPr lvl="1"/>
+            <a:r>
+              <a:rPr lang="pt-BR" dirty="0"/>
+              <a:t>Hardwares e</a:t>
+            </a:r>
+          </a:p>
+          <a:p>
+            <a:pPr lvl="1"/>
+            <a:r>
+              <a:rPr lang="pt-BR" dirty="0"/>
+              <a:t>Softwares</a:t>
             </a:r>
           </a:p>
         </p:txBody>
@@ -9940,7 +10144,7 @@
     </p:spTree>
     <p:extLst>
       <p:ext uri="{BB962C8B-B14F-4D97-AF65-F5344CB8AC3E}">
-        <p14:creationId xmlns:p14="http://schemas.microsoft.com/office/powerpoint/2010/main" val="2228430991"/>
+        <p14:creationId xmlns:p14="http://schemas.microsoft.com/office/powerpoint/2010/main" val="2012595901"/>
       </p:ext>
     </p:extLst>
   </p:cSld>
@@ -9958,7 +10162,7 @@
         <p:cNvPr id="1" name="">
           <a:extLst>
             <a:ext uri="{FF2B5EF4-FFF2-40B4-BE49-F238E27FC236}">
-              <a16:creationId xmlns:a16="http://schemas.microsoft.com/office/drawing/2014/main" id="{F1C3E196-4B96-334E-E982-8501ADD26032}"/>
+              <a16:creationId xmlns:a16="http://schemas.microsoft.com/office/drawing/2014/main" id="{5BB88CE3-2437-8A6E-4FE5-0C6C8D48826A}"/>
             </a:ext>
           </a:extLst>
         </p:cNvPr>
@@ -9978,7 +10182,7 @@
           <p:cNvPr id="2" name="Título 1">
             <a:extLst>
               <a:ext uri="{FF2B5EF4-FFF2-40B4-BE49-F238E27FC236}">
-                <a16:creationId xmlns:a16="http://schemas.microsoft.com/office/drawing/2014/main" id="{7AD21C45-6F07-B69F-59CC-ED7E4E0C5758}"/>
+                <a16:creationId xmlns:a16="http://schemas.microsoft.com/office/drawing/2014/main" id="{982F1C12-C501-8337-0166-69AD33C4876B}"/>
               </a:ext>
             </a:extLst>
           </p:cNvPr>
@@ -9987,84 +10191,170 @@
           </p:cNvSpPr>
           <p:nvPr>
             <p:ph type="title"/>
+          </p:nvPr>
+        </p:nvSpPr>
+        <p:spPr/>
+        <p:txBody>
+          <a:bodyPr/>
+          <a:lstStyle/>
+          <a:p>
+            <a:r>
+              <a:rPr lang="pt-BR" dirty="0"/>
+              <a:t>O QUE É PROTOCOLO</a:t>
+            </a:r>
+          </a:p>
+        </p:txBody>
+      </p:sp>
+      <p:sp>
+        <p:nvSpPr>
+          <p:cNvPr id="3" name="Espaço Reservado para Conteúdo 2">
+            <a:extLst>
+              <a:ext uri="{FF2B5EF4-FFF2-40B4-BE49-F238E27FC236}">
+                <a16:creationId xmlns:a16="http://schemas.microsoft.com/office/drawing/2014/main" id="{DB1D5FCB-0A9B-2EE0-8029-527855B69E40}"/>
+              </a:ext>
+            </a:extLst>
+          </p:cNvPr>
+          <p:cNvSpPr>
+            <a:spLocks noGrp="1"/>
+          </p:cNvSpPr>
+          <p:nvPr>
+            <p:ph idx="1"/>
           </p:nvPr>
         </p:nvSpPr>
         <p:spPr>
           <a:xfrm>
-            <a:off x="581193" y="729658"/>
-            <a:ext cx="11029616" cy="988332"/>
+            <a:off x="581192" y="2180497"/>
+            <a:ext cx="11029615" cy="605498"/>
           </a:xfrm>
         </p:spPr>
         <p:txBody>
-          <a:bodyPr anchor="b">
-            <a:normAutofit/>
+          <a:bodyPr>
+            <a:normAutofit fontScale="25000" lnSpcReduction="20000"/>
           </a:bodyPr>
           <a:lstStyle/>
           <a:p>
             <a:r>
-              <a:rPr lang="pt-BR" dirty="0"/>
-              <a:t>Sistema de Telefonia móvel</a:t>
-            </a:r>
-          </a:p>
-        </p:txBody>
-      </p:sp>
-      <p:sp>
-        <p:nvSpPr>
-          <p:cNvPr id="3" name="Espaço Reservado para Conteúdo 2">
+              <a:rPr lang="pt-BR" sz="11200" dirty="0"/>
+              <a:t>Definição</a:t>
+            </a:r>
+          </a:p>
+          <a:p>
+            <a:pPr marL="324000" lvl="1" indent="0">
+              <a:buNone/>
+            </a:pPr>
+            <a:r>
+              <a:rPr lang="pt-BR" sz="2000" dirty="0"/>
+              <a:t>	</a:t>
+            </a:r>
+          </a:p>
+          <a:p>
+            <a:pPr marL="324000" lvl="1" indent="0">
+              <a:buNone/>
+            </a:pPr>
+            <a:r>
+              <a:rPr lang="pt-BR" sz="2000" dirty="0"/>
+              <a:t>	</a:t>
+            </a:r>
+            <a:endParaRPr lang="pt-BR" dirty="0"/>
+          </a:p>
+        </p:txBody>
+      </p:sp>
+      <p:pic>
+        <p:nvPicPr>
+          <p:cNvPr id="5" name="Imagem 4">
             <a:extLst>
               <a:ext uri="{FF2B5EF4-FFF2-40B4-BE49-F238E27FC236}">
-                <a16:creationId xmlns:a16="http://schemas.microsoft.com/office/drawing/2014/main" id="{F5D8BB43-49E0-6ACE-CF0C-F2BB7C6A2104}"/>
+                <a16:creationId xmlns:a16="http://schemas.microsoft.com/office/drawing/2014/main" id="{1B4202D9-6C16-E8B6-60C5-D3F9FE7BB375}"/>
               </a:ext>
             </a:extLst>
           </p:cNvPr>
-          <p:cNvSpPr>
-            <a:spLocks noGrp="1"/>
-          </p:cNvSpPr>
-          <p:nvPr>
-            <p:ph sz="half" idx="1"/>
-          </p:nvPr>
-        </p:nvSpPr>
+          <p:cNvPicPr>
+            <a:picLocks noChangeAspect="1"/>
+          </p:cNvPicPr>
+          <p:nvPr/>
+        </p:nvPicPr>
+        <p:blipFill>
+          <a:blip r:embed="rId2"/>
+          <a:stretch>
+            <a:fillRect/>
+          </a:stretch>
+        </p:blipFill>
         <p:spPr>
           <a:xfrm>
-            <a:off x="581193" y="2228003"/>
-            <a:ext cx="10701850" cy="3633047"/>
+            <a:off x="2229184" y="2882030"/>
+            <a:ext cx="625816" cy="460886"/>
           </a:xfrm>
+          <a:prstGeom prst="rect">
+            <a:avLst/>
+          </a:prstGeom>
         </p:spPr>
-        <p:txBody>
-          <a:bodyPr anchor="t" anchorCtr="0">
-            <a:normAutofit/>
+      </p:pic>
+      <p:pic>
+        <p:nvPicPr>
+          <p:cNvPr id="6" name="Imagem 5">
+            <a:extLst>
+              <a:ext uri="{FF2B5EF4-FFF2-40B4-BE49-F238E27FC236}">
+                <a16:creationId xmlns:a16="http://schemas.microsoft.com/office/drawing/2014/main" id="{AF8516A8-2AB5-EAD7-A349-053FAF560259}"/>
+              </a:ext>
+            </a:extLst>
+          </p:cNvPr>
+          <p:cNvPicPr>
+            <a:picLocks noChangeAspect="1"/>
+          </p:cNvPicPr>
+          <p:nvPr/>
+        </p:nvPicPr>
+        <p:blipFill>
+          <a:blip r:embed="rId2"/>
+          <a:stretch>
+            <a:fillRect/>
+          </a:stretch>
+        </p:blipFill>
+        <p:spPr>
+          <a:xfrm rot="10800000">
+            <a:off x="4436913" y="5073337"/>
+            <a:ext cx="625816" cy="460886"/>
+          </a:xfrm>
+          <a:prstGeom prst="rect">
+            <a:avLst/>
+          </a:prstGeom>
+        </p:spPr>
+      </p:pic>
+      <p:sp>
+        <p:nvSpPr>
+          <p:cNvPr id="7" name="CaixaDeTexto 6">
+            <a:extLst>
+              <a:ext uri="{FF2B5EF4-FFF2-40B4-BE49-F238E27FC236}">
+                <a16:creationId xmlns:a16="http://schemas.microsoft.com/office/drawing/2014/main" id="{2CC49E5A-E1FD-0DCD-BBA2-2698EE71615E}"/>
+              </a:ext>
+            </a:extLst>
+          </p:cNvPr>
+          <p:cNvSpPr txBox="1"/>
+          <p:nvPr/>
+        </p:nvSpPr>
+        <p:spPr>
+          <a:xfrm>
+            <a:off x="2855000" y="3017520"/>
+            <a:ext cx="5950672" cy="2346412"/>
+          </a:xfrm>
+          <a:prstGeom prst="rect">
+            <a:avLst/>
+          </a:prstGeom>
+          <a:noFill/>
+        </p:spPr>
+        <p:txBody>
+          <a:bodyPr wrap="square" rtlCol="0">
+            <a:spAutoFit/>
           </a:bodyPr>
           <a:lstStyle/>
           <a:p>
-            <a:r>
-              <a:rPr lang="pt-BR" dirty="0"/>
-              <a:t>Primeira geração</a:t>
-            </a:r>
-          </a:p>
-          <a:p>
-            <a:r>
-              <a:rPr lang="pt-BR" dirty="0"/>
-              <a:t>Conceito de células</a:t>
-            </a:r>
-          </a:p>
-          <a:p>
-            <a:pPr lvl="1"/>
-            <a:r>
-              <a:rPr lang="pt-BR" sz="1800" dirty="0"/>
-              <a:t>Substituição de um único transmissor de alta potência cobrindo toda a região geográfica </a:t>
-            </a:r>
-          </a:p>
-          <a:p>
-            <a:pPr lvl="1"/>
-            <a:r>
-              <a:rPr lang="pt-BR" sz="1800" dirty="0"/>
-              <a:t>por vários transmissores de baixa potência cobrindo uma pequena região geográfica</a:t>
-            </a:r>
-          </a:p>
-          <a:p>
-            <a:r>
-              <a:rPr lang="pt-BR" dirty="0"/>
-              <a:t>Desenvolvido pelos laboratórios Bell, da empresa AT&amp;T</a:t>
+            <a:pPr>
+              <a:lnSpc>
+                <a:spcPct val="150000"/>
+              </a:lnSpc>
+            </a:pPr>
+            <a:r>
+              <a:rPr lang="pt-BR" sz="2000" dirty="0"/>
+              <a:t>Um protocolo define o formato e a ordem das mensagens trocadas entre duas ou mais entidades comunicantes, bem como as ações realizadas na transmissão e/ou no recebimento de uma mensagem ou outro evento.</a:t>
             </a:r>
           </a:p>
         </p:txBody>
@@ -10072,7 +10362,7 @@
     </p:spTree>
     <p:extLst>
       <p:ext uri="{BB962C8B-B14F-4D97-AF65-F5344CB8AC3E}">
-        <p14:creationId xmlns:p14="http://schemas.microsoft.com/office/powerpoint/2010/main" val="1137056065"/>
+        <p14:creationId xmlns:p14="http://schemas.microsoft.com/office/powerpoint/2010/main" val="2189762848"/>
       </p:ext>
     </p:extLst>
   </p:cSld>
@@ -10205,7 +10495,7 @@
         <p:cNvPr id="1" name="">
           <a:extLst>
             <a:ext uri="{FF2B5EF4-FFF2-40B4-BE49-F238E27FC236}">
-              <a16:creationId xmlns:a16="http://schemas.microsoft.com/office/drawing/2014/main" id="{24969301-FDFC-F0E2-5B12-7A830357D547}"/>
+              <a16:creationId xmlns:a16="http://schemas.microsoft.com/office/drawing/2014/main" id="{8B304A27-205F-56EE-2E8D-1092EC227305}"/>
             </a:ext>
           </a:extLst>
         </p:cNvPr>
@@ -10225,7 +10515,7 @@
           <p:cNvPr id="2" name="Título 1">
             <a:extLst>
               <a:ext uri="{FF2B5EF4-FFF2-40B4-BE49-F238E27FC236}">
-                <a16:creationId xmlns:a16="http://schemas.microsoft.com/office/drawing/2014/main" id="{1D5E78A5-C1CD-4521-E438-726B2676B78D}"/>
+                <a16:creationId xmlns:a16="http://schemas.microsoft.com/office/drawing/2014/main" id="{03173660-148D-3210-C6D4-4D4AE8FFCA3F}"/>
               </a:ext>
             </a:extLst>
           </p:cNvPr>
@@ -10234,144 +10524,199 @@
           </p:cNvSpPr>
           <p:nvPr>
             <p:ph type="title"/>
+          </p:nvPr>
+        </p:nvSpPr>
+        <p:spPr/>
+        <p:txBody>
+          <a:bodyPr/>
+          <a:lstStyle/>
+          <a:p>
+            <a:r>
+              <a:rPr lang="pt-BR" dirty="0"/>
+              <a:t>O QUE É PROTOCOLO</a:t>
+            </a:r>
+          </a:p>
+        </p:txBody>
+      </p:sp>
+      <p:sp>
+        <p:nvSpPr>
+          <p:cNvPr id="3" name="Espaço Reservado para Conteúdo 2">
+            <a:extLst>
+              <a:ext uri="{FF2B5EF4-FFF2-40B4-BE49-F238E27FC236}">
+                <a16:creationId xmlns:a16="http://schemas.microsoft.com/office/drawing/2014/main" id="{504A59ED-8884-4F54-C262-41255E520736}"/>
+              </a:ext>
+            </a:extLst>
+          </p:cNvPr>
+          <p:cNvSpPr>
+            <a:spLocks noGrp="1"/>
+          </p:cNvSpPr>
+          <p:nvPr>
+            <p:ph idx="1"/>
           </p:nvPr>
         </p:nvSpPr>
         <p:spPr>
           <a:xfrm>
-            <a:off x="581193" y="729658"/>
-            <a:ext cx="11029616" cy="988332"/>
+            <a:off x="581192" y="2180497"/>
+            <a:ext cx="11029615" cy="605498"/>
           </a:xfrm>
         </p:spPr>
         <p:txBody>
-          <a:bodyPr anchor="b">
-            <a:normAutofit/>
+          <a:bodyPr>
+            <a:normAutofit fontScale="25000" lnSpcReduction="20000"/>
           </a:bodyPr>
           <a:lstStyle/>
           <a:p>
             <a:r>
-              <a:rPr lang="pt-BR" dirty="0"/>
-              <a:t>Sistema de Telefonia móvel</a:t>
-            </a:r>
-          </a:p>
-        </p:txBody>
-      </p:sp>
-      <p:sp>
-        <p:nvSpPr>
-          <p:cNvPr id="3" name="Espaço Reservado para Conteúdo 2">
+              <a:rPr lang="pt-BR" sz="11200" dirty="0"/>
+              <a:t>Definição</a:t>
+            </a:r>
+          </a:p>
+          <a:p>
+            <a:pPr marL="324000" lvl="1" indent="0">
+              <a:buNone/>
+            </a:pPr>
+            <a:r>
+              <a:rPr lang="pt-BR" sz="2000" dirty="0"/>
+              <a:t>	</a:t>
+            </a:r>
+          </a:p>
+          <a:p>
+            <a:pPr marL="324000" lvl="1" indent="0">
+              <a:buNone/>
+            </a:pPr>
+            <a:r>
+              <a:rPr lang="pt-BR" sz="2000" dirty="0"/>
+              <a:t>	</a:t>
+            </a:r>
+            <a:endParaRPr lang="pt-BR" dirty="0"/>
+          </a:p>
+        </p:txBody>
+      </p:sp>
+      <p:grpSp>
+        <p:nvGrpSpPr>
+          <p:cNvPr id="4" name="Agrupar 3">
             <a:extLst>
               <a:ext uri="{FF2B5EF4-FFF2-40B4-BE49-F238E27FC236}">
-                <a16:creationId xmlns:a16="http://schemas.microsoft.com/office/drawing/2014/main" id="{0608DF11-7331-AADB-7A61-CB6D86DA7772}"/>
+                <a16:creationId xmlns:a16="http://schemas.microsoft.com/office/drawing/2014/main" id="{04F25D28-B53A-3BCD-1122-B80EDC57A148}"/>
               </a:ext>
             </a:extLst>
           </p:cNvPr>
-          <p:cNvSpPr>
-            <a:spLocks noGrp="1"/>
-          </p:cNvSpPr>
-          <p:nvPr>
-            <p:ph sz="half" idx="1"/>
-          </p:nvPr>
-        </p:nvSpPr>
-        <p:spPr>
+          <p:cNvGrpSpPr/>
+          <p:nvPr/>
+        </p:nvGrpSpPr>
+        <p:grpSpPr>
           <a:xfrm>
-            <a:off x="581193" y="2228003"/>
-            <a:ext cx="5422390" cy="4385068"/>
+            <a:off x="2807755" y="2785995"/>
+            <a:ext cx="6576488" cy="2652193"/>
+            <a:chOff x="2229184" y="2882030"/>
+            <a:chExt cx="6576488" cy="2652193"/>
           </a:xfrm>
-        </p:spPr>
-        <p:txBody>
-          <a:bodyPr anchor="ctr" anchorCtr="0">
-            <a:normAutofit lnSpcReduction="10000"/>
-          </a:bodyPr>
-          <a:lstStyle/>
-          <a:p>
-            <a:r>
-              <a:rPr lang="pt-BR" dirty="0"/>
-              <a:t>Primeira geração</a:t>
-            </a:r>
-          </a:p>
-          <a:p>
-            <a:r>
-              <a:rPr lang="pt-BR" dirty="0"/>
-              <a:t>Conceito de células:</a:t>
-            </a:r>
-          </a:p>
-          <a:p>
-            <a:pPr lvl="1"/>
-            <a:r>
-              <a:rPr lang="pt-BR" sz="1800" dirty="0"/>
-              <a:t>Cada ERB (Estação de Rádio Base) está conectada a uma Central de Comutação e Controle (CCC), que está conectada a rede pública de telefonia</a:t>
-            </a:r>
-          </a:p>
-          <a:p>
-            <a:pPr lvl="1"/>
-            <a:r>
-              <a:rPr lang="pt-BR" sz="1800" dirty="0"/>
-              <a:t>A CCC é responsável pela interligação e controle de várias </a:t>
-            </a:r>
-            <a:r>
-              <a:rPr lang="pt-BR" sz="1800" dirty="0" err="1"/>
-              <a:t>ERBs</a:t>
-            </a:r>
-            <a:r>
-              <a:rPr lang="pt-BR" sz="1800" dirty="0"/>
-              <a:t>, pela monitoração de </a:t>
-            </a:r>
-            <a:r>
-              <a:rPr lang="pt-BR" sz="1800" i="1" dirty="0" err="1"/>
-              <a:t>handoff</a:t>
-            </a:r>
-            <a:r>
-              <a:rPr lang="pt-BR" sz="1800" dirty="0"/>
-              <a:t>(quando um usuário muda de uma ERB para outra à medida que se desloca) e pelo redirecionamento de chamada via </a:t>
-            </a:r>
-            <a:r>
-              <a:rPr lang="pt-BR" sz="1800" i="1" dirty="0"/>
-              <a:t>roaming</a:t>
-            </a:r>
-          </a:p>
-          <a:p>
-            <a:pPr lvl="1"/>
-            <a:r>
-              <a:rPr lang="pt-BR" sz="1800" dirty="0"/>
-              <a:t>Tecnologias analógicas: banda de transmissão limitada e facilidade na interceptação das conversações.</a:t>
-            </a:r>
-          </a:p>
-        </p:txBody>
-      </p:sp>
-      <p:pic>
-        <p:nvPicPr>
-          <p:cNvPr id="5" name="Imagem 4">
-            <a:extLst>
-              <a:ext uri="{FF2B5EF4-FFF2-40B4-BE49-F238E27FC236}">
-                <a16:creationId xmlns:a16="http://schemas.microsoft.com/office/drawing/2014/main" id="{10752C78-3FAC-2CC2-65C2-028D53743F39}"/>
-              </a:ext>
-            </a:extLst>
-          </p:cNvPr>
-          <p:cNvPicPr>
-            <a:picLocks noChangeAspect="1"/>
-          </p:cNvPicPr>
-          <p:nvPr/>
-        </p:nvPicPr>
-        <p:blipFill>
-          <a:blip r:embed="rId2"/>
-          <a:stretch>
-            <a:fillRect/>
-          </a:stretch>
-        </p:blipFill>
-        <p:spPr>
-          <a:xfrm>
-            <a:off x="6188417" y="2777042"/>
-            <a:ext cx="5422392" cy="2534968"/>
-          </a:xfrm>
-          <a:prstGeom prst="rect">
-            <a:avLst/>
-          </a:prstGeom>
-          <a:noFill/>
-        </p:spPr>
-      </p:pic>
+        </p:grpSpPr>
+        <p:pic>
+          <p:nvPicPr>
+            <p:cNvPr id="5" name="Imagem 4">
+              <a:extLst>
+                <a:ext uri="{FF2B5EF4-FFF2-40B4-BE49-F238E27FC236}">
+                  <a16:creationId xmlns:a16="http://schemas.microsoft.com/office/drawing/2014/main" id="{E169A7E7-D9B5-A6C3-429E-F2BCB46497B4}"/>
+                </a:ext>
+              </a:extLst>
+            </p:cNvPr>
+            <p:cNvPicPr>
+              <a:picLocks noChangeAspect="1"/>
+            </p:cNvPicPr>
+            <p:nvPr/>
+          </p:nvPicPr>
+          <p:blipFill>
+            <a:blip r:embed="rId2"/>
+            <a:stretch>
+              <a:fillRect/>
+            </a:stretch>
+          </p:blipFill>
+          <p:spPr>
+            <a:xfrm>
+              <a:off x="2229184" y="2882030"/>
+              <a:ext cx="625816" cy="460886"/>
+            </a:xfrm>
+            <a:prstGeom prst="rect">
+              <a:avLst/>
+            </a:prstGeom>
+          </p:spPr>
+        </p:pic>
+        <p:pic>
+          <p:nvPicPr>
+            <p:cNvPr id="6" name="Imagem 5">
+              <a:extLst>
+                <a:ext uri="{FF2B5EF4-FFF2-40B4-BE49-F238E27FC236}">
+                  <a16:creationId xmlns:a16="http://schemas.microsoft.com/office/drawing/2014/main" id="{86B1B748-52E0-1B25-4EFD-A69ECF441922}"/>
+                </a:ext>
+              </a:extLst>
+            </p:cNvPr>
+            <p:cNvPicPr>
+              <a:picLocks noChangeAspect="1"/>
+            </p:cNvPicPr>
+            <p:nvPr/>
+          </p:nvPicPr>
+          <p:blipFill>
+            <a:blip r:embed="rId2"/>
+            <a:stretch>
+              <a:fillRect/>
+            </a:stretch>
+          </p:blipFill>
+          <p:spPr>
+            <a:xfrm rot="10800000">
+              <a:off x="4436913" y="5073337"/>
+              <a:ext cx="625816" cy="460886"/>
+            </a:xfrm>
+            <a:prstGeom prst="rect">
+              <a:avLst/>
+            </a:prstGeom>
+          </p:spPr>
+        </p:pic>
+        <p:sp>
+          <p:nvSpPr>
+            <p:cNvPr id="7" name="CaixaDeTexto 6">
+              <a:extLst>
+                <a:ext uri="{FF2B5EF4-FFF2-40B4-BE49-F238E27FC236}">
+                  <a16:creationId xmlns:a16="http://schemas.microsoft.com/office/drawing/2014/main" id="{502A6C2F-53B8-317D-AF66-13B742D921CA}"/>
+                </a:ext>
+              </a:extLst>
+            </p:cNvPr>
+            <p:cNvSpPr txBox="1"/>
+            <p:nvPr/>
+          </p:nvSpPr>
+          <p:spPr>
+            <a:xfrm>
+              <a:off x="2855000" y="3017520"/>
+              <a:ext cx="5950672" cy="2346412"/>
+            </a:xfrm>
+            <a:prstGeom prst="rect">
+              <a:avLst/>
+            </a:prstGeom>
+            <a:noFill/>
+          </p:spPr>
+          <p:txBody>
+            <a:bodyPr wrap="square" rtlCol="0">
+              <a:spAutoFit/>
+            </a:bodyPr>
+            <a:lstStyle/>
+            <a:p>
+              <a:pPr>
+                <a:lnSpc>
+                  <a:spcPct val="150000"/>
+                </a:lnSpc>
+              </a:pPr>
+              <a:r>
+                <a:rPr lang="pt-BR" sz="2000" dirty="0"/>
+                <a:t>Um protocolo define o formato e a ordem das mensagens trocadas entre duas ou mais entidades comunicantes, bem como as ações realizadas na transmissão e/ou no recebimento de uma mensagem ou outro evento.</a:t>
+              </a:r>
+            </a:p>
+          </p:txBody>
+        </p:sp>
+      </p:grpSp>
     </p:spTree>
     <p:extLst>
       <p:ext uri="{BB962C8B-B14F-4D97-AF65-F5344CB8AC3E}">
-        <p14:creationId xmlns:p14="http://schemas.microsoft.com/office/powerpoint/2010/main" val="3752736611"/>
+        <p14:creationId xmlns:p14="http://schemas.microsoft.com/office/powerpoint/2010/main" val="3132615768"/>
       </p:ext>
     </p:extLst>
   </p:cSld>
@@ -10386,13 +10731,7 @@
   <p:cSld>
     <p:spTree>
       <p:nvGrpSpPr>
-        <p:cNvPr id="1" name="">
-          <a:extLst>
-            <a:ext uri="{FF2B5EF4-FFF2-40B4-BE49-F238E27FC236}">
-              <a16:creationId xmlns:a16="http://schemas.microsoft.com/office/drawing/2014/main" id="{DE7189B2-FFF7-0C5B-FAA0-5EFF8EBE5B11}"/>
-            </a:ext>
-          </a:extLst>
-        </p:cNvPr>
+        <p:cNvPr id="1" name=""/>
         <p:cNvGrpSpPr/>
         <p:nvPr/>
       </p:nvGrpSpPr>
@@ -10409,7 +10748,7 @@
           <p:cNvPr id="2" name="Título 1">
             <a:extLst>
               <a:ext uri="{FF2B5EF4-FFF2-40B4-BE49-F238E27FC236}">
-                <a16:creationId xmlns:a16="http://schemas.microsoft.com/office/drawing/2014/main" id="{1E422106-03EF-724F-E15C-65B13C746323}"/>
+                <a16:creationId xmlns:a16="http://schemas.microsoft.com/office/drawing/2014/main" id="{F304B218-6F6E-FCF1-6E5D-3395C9E1E3B8}"/>
               </a:ext>
             </a:extLst>
           </p:cNvPr>
@@ -10420,21 +10759,14 @@
             <p:ph type="title"/>
           </p:nvPr>
         </p:nvSpPr>
-        <p:spPr>
-          <a:xfrm>
-            <a:off x="581193" y="729658"/>
-            <a:ext cx="11029616" cy="988332"/>
-          </a:xfrm>
-        </p:spPr>
-        <p:txBody>
-          <a:bodyPr anchor="b">
-            <a:normAutofit/>
-          </a:bodyPr>
+        <p:spPr/>
+        <p:txBody>
+          <a:bodyPr/>
           <a:lstStyle/>
           <a:p>
             <a:r>
               <a:rPr lang="pt-BR" dirty="0"/>
-              <a:t>Sistema de Telefonia móvel</a:t>
+              <a:t>Serviço orientado à conexão</a:t>
             </a:r>
           </a:p>
         </p:txBody>
@@ -10444,7 +10776,7 @@
           <p:cNvPr id="3" name="Espaço Reservado para Conteúdo 2">
             <a:extLst>
               <a:ext uri="{FF2B5EF4-FFF2-40B4-BE49-F238E27FC236}">
-                <a16:creationId xmlns:a16="http://schemas.microsoft.com/office/drawing/2014/main" id="{65C59513-9337-0F05-DF5D-F551BECE94F1}"/>
+                <a16:creationId xmlns:a16="http://schemas.microsoft.com/office/drawing/2014/main" id="{C8B01E91-E4E0-9BA5-D2B0-67B55C15AB35}"/>
               </a:ext>
             </a:extLst>
           </p:cNvPr>
@@ -10452,84 +10784,32 @@
             <a:spLocks noGrp="1"/>
           </p:cNvSpPr>
           <p:nvPr>
-            <p:ph sz="half" idx="1"/>
-          </p:nvPr>
-        </p:nvSpPr>
-        <p:spPr>
-          <a:xfrm>
-            <a:off x="581193" y="2228003"/>
-            <a:ext cx="5422390" cy="4385068"/>
-          </a:xfrm>
-        </p:spPr>
-        <p:txBody>
-          <a:bodyPr anchor="ctr" anchorCtr="0">
-            <a:normAutofit/>
-          </a:bodyPr>
+            <p:ph idx="1"/>
+          </p:nvPr>
+        </p:nvSpPr>
+        <p:spPr/>
+        <p:txBody>
+          <a:bodyPr/>
           <a:lstStyle/>
           <a:p>
             <a:r>
               <a:rPr lang="pt-BR" dirty="0"/>
-              <a:t>Segunda geração – 2G</a:t>
-            </a:r>
-          </a:p>
-          <a:p>
-            <a:r>
-              <a:rPr lang="pt-BR" dirty="0"/>
-              <a:t>Conceito de células:</a:t>
-            </a:r>
-          </a:p>
-          <a:p>
-            <a:pPr lvl="1"/>
-            <a:r>
-              <a:rPr lang="pt-BR" sz="1800" dirty="0"/>
-              <a:t>Início da </a:t>
-            </a:r>
-            <a:r>
-              <a:rPr lang="pt-BR" sz="1800"/>
-              <a:t>era digital</a:t>
-            </a:r>
-          </a:p>
-          <a:p>
-            <a:pPr lvl="1"/>
-            <a:endParaRPr lang="pt-BR" sz="1800" dirty="0"/>
-          </a:p>
-        </p:txBody>
-      </p:sp>
-      <p:pic>
-        <p:nvPicPr>
-          <p:cNvPr id="5" name="Imagem 4">
-            <a:extLst>
-              <a:ext uri="{FF2B5EF4-FFF2-40B4-BE49-F238E27FC236}">
-                <a16:creationId xmlns:a16="http://schemas.microsoft.com/office/drawing/2014/main" id="{3496C721-1489-8538-69EF-0A0795EBAE3C}"/>
-              </a:ext>
-            </a:extLst>
-          </p:cNvPr>
-          <p:cNvPicPr>
-            <a:picLocks noChangeAspect="1"/>
-          </p:cNvPicPr>
-          <p:nvPr/>
-        </p:nvPicPr>
-        <p:blipFill>
-          <a:blip r:embed="rId2"/>
-          <a:stretch>
-            <a:fillRect/>
-          </a:stretch>
-        </p:blipFill>
-        <p:spPr>
-          <a:xfrm>
-            <a:off x="6188417" y="2777042"/>
-            <a:ext cx="5422392" cy="2534968"/>
-          </a:xfrm>
-          <a:prstGeom prst="rect">
-            <a:avLst/>
-          </a:prstGeom>
-          <a:noFill/>
-        </p:spPr>
-      </p:pic>
+              <a:t>Refere-se a estabelecimento, o uso e término </a:t>
+            </a:r>
+            <a:r>
+              <a:rPr lang="pt-BR"/>
+              <a:t>da conexão</a:t>
+            </a:r>
+          </a:p>
+          <a:p>
+            <a:endParaRPr lang="pt-BR"/>
+          </a:p>
+        </p:txBody>
+      </p:sp>
     </p:spTree>
     <p:extLst>
       <p:ext uri="{BB962C8B-B14F-4D97-AF65-F5344CB8AC3E}">
-        <p14:creationId xmlns:p14="http://schemas.microsoft.com/office/powerpoint/2010/main" val="2415727671"/>
+        <p14:creationId xmlns:p14="http://schemas.microsoft.com/office/powerpoint/2010/main" val="3793655364"/>
       </p:ext>
     </p:extLst>
   </p:cSld>

--- a/Redes/REDES DE COMPUTADORES.pptx
+++ b/Redes/REDES DE COMPUTADORES.pptx
@@ -5,10 +5,10 @@
     <p:sldMasterId id="2147483672" r:id="rId1"/>
   </p:sldMasterIdLst>
   <p:notesMasterIdLst>
-    <p:notesMasterId r:id="rId44"/>
+    <p:notesMasterId r:id="rId46"/>
   </p:notesMasterIdLst>
   <p:handoutMasterIdLst>
-    <p:handoutMasterId r:id="rId45"/>
+    <p:handoutMasterId r:id="rId47"/>
   </p:handoutMasterIdLst>
   <p:sldIdLst>
     <p:sldId id="256" r:id="rId2"/>
@@ -52,7 +52,9 @@
     <p:sldId id="302" r:id="rId40"/>
     <p:sldId id="303" r:id="rId41"/>
     <p:sldId id="304" r:id="rId42"/>
-    <p:sldId id="260" r:id="rId43"/>
+    <p:sldId id="305" r:id="rId43"/>
+    <p:sldId id="306" r:id="rId44"/>
+    <p:sldId id="260" r:id="rId45"/>
   </p:sldIdLst>
   <p:sldSz cx="12192000" cy="6858000"/>
   <p:notesSz cx="6858000" cy="9144000"/>
@@ -167,7 +169,7 @@
   <pc:docChgLst>
     <pc:chgData name="Joel Teixeira Cunha" userId="195451ac3a5e8dfd" providerId="LiveId" clId="{9D99295D-09A0-459E-AFDA-61FAD528DEBC}"/>
     <pc:docChg chg="undo custSel addSld delSld modSld">
-      <pc:chgData name="Joel Teixeira Cunha" userId="195451ac3a5e8dfd" providerId="LiveId" clId="{9D99295D-09A0-459E-AFDA-61FAD528DEBC}" dt="2026-06-23T22:38:53.417" v="3229" actId="20577"/>
+      <pc:chgData name="Joel Teixeira Cunha" userId="195451ac3a5e8dfd" providerId="LiveId" clId="{9D99295D-09A0-459E-AFDA-61FAD528DEBC}" dt="2026-07-24T19:20:44.139" v="3691" actId="20577"/>
       <pc:docMkLst>
         <pc:docMk/>
       </pc:docMkLst>
@@ -198,30 +200,6 @@
           <pc:docMk/>
           <pc:sldMk cId="1261736707" sldId="299"/>
         </pc:sldMkLst>
-        <pc:spChg chg="mod">
-          <ac:chgData name="Joel Teixeira Cunha" userId="195451ac3a5e8dfd" providerId="LiveId" clId="{9D99295D-09A0-459E-AFDA-61FAD528DEBC}" dt="2026-06-23T19:45:30.823" v="2499" actId="14100"/>
-          <ac:spMkLst>
-            <pc:docMk/>
-            <pc:sldMk cId="1261736707" sldId="299"/>
-            <ac:spMk id="2" creationId="{7782FD2B-E907-10CE-60C5-8F68AC44E86D}"/>
-          </ac:spMkLst>
-        </pc:spChg>
-        <pc:picChg chg="add del mod">
-          <ac:chgData name="Joel Teixeira Cunha" userId="195451ac3a5e8dfd" providerId="LiveId" clId="{9D99295D-09A0-459E-AFDA-61FAD528DEBC}" dt="2026-06-23T19:45:46.993" v="2501" actId="21"/>
-          <ac:picMkLst>
-            <pc:docMk/>
-            <pc:sldMk cId="1261736707" sldId="299"/>
-            <ac:picMk id="5" creationId="{605A7FCA-AD51-4334-0820-F79955CFDF42}"/>
-          </ac:picMkLst>
-        </pc:picChg>
-        <pc:picChg chg="add del mod">
-          <ac:chgData name="Joel Teixeira Cunha" userId="195451ac3a5e8dfd" providerId="LiveId" clId="{9D99295D-09A0-459E-AFDA-61FAD528DEBC}" dt="2026-06-23T19:45:15.324" v="2496" actId="478"/>
-          <ac:picMkLst>
-            <pc:docMk/>
-            <pc:sldMk cId="1261736707" sldId="299"/>
-            <ac:picMk id="1026" creationId="{D1F38CDE-B3CF-C56E-7466-0690915F535E}"/>
-          </ac:picMkLst>
-        </pc:picChg>
       </pc:sldChg>
       <pc:sldChg chg="del">
         <pc:chgData name="Joel Teixeira Cunha" userId="195451ac3a5e8dfd" providerId="LiveId" clId="{9D99295D-09A0-459E-AFDA-61FAD528DEBC}" dt="2026-06-23T19:40:21.765" v="2492" actId="47"/>
@@ -236,30 +214,6 @@
           <pc:docMk/>
           <pc:sldMk cId="4047619075" sldId="300"/>
         </pc:sldMkLst>
-        <pc:spChg chg="add mod">
-          <ac:chgData name="Joel Teixeira Cunha" userId="195451ac3a5e8dfd" providerId="LiveId" clId="{9D99295D-09A0-459E-AFDA-61FAD528DEBC}" dt="2026-06-23T19:50:01.100" v="2552" actId="14100"/>
-          <ac:spMkLst>
-            <pc:docMk/>
-            <pc:sldMk cId="4047619075" sldId="300"/>
-            <ac:spMk id="2" creationId="{03709245-3348-8FFA-4949-BF23545D72CB}"/>
-          </ac:spMkLst>
-        </pc:spChg>
-        <pc:spChg chg="add mod ord">
-          <ac:chgData name="Joel Teixeira Cunha" userId="195451ac3a5e8dfd" providerId="LiveId" clId="{9D99295D-09A0-459E-AFDA-61FAD528DEBC}" dt="2026-06-23T19:49:52.601" v="2550" actId="14100"/>
-          <ac:spMkLst>
-            <pc:docMk/>
-            <pc:sldMk cId="4047619075" sldId="300"/>
-            <ac:spMk id="3" creationId="{5A95A762-6756-7DE0-44B2-D61FE4A48D4F}"/>
-          </ac:spMkLst>
-        </pc:spChg>
-        <pc:picChg chg="add mod">
-          <ac:chgData name="Joel Teixeira Cunha" userId="195451ac3a5e8dfd" providerId="LiveId" clId="{9D99295D-09A0-459E-AFDA-61FAD528DEBC}" dt="2026-06-23T19:45:51.063" v="2502"/>
-          <ac:picMkLst>
-            <pc:docMk/>
-            <pc:sldMk cId="4047619075" sldId="300"/>
-            <ac:picMk id="5" creationId="{605A7FCA-AD51-4334-0820-F79955CFDF42}"/>
-          </ac:picMkLst>
-        </pc:picChg>
       </pc:sldChg>
       <pc:sldChg chg="modSp new mod">
         <pc:chgData name="Joel Teixeira Cunha" userId="195451ac3a5e8dfd" providerId="LiveId" clId="{9D99295D-09A0-459E-AFDA-61FAD528DEBC}" dt="2026-06-23T20:02:28.793" v="2841" actId="20577"/>
@@ -267,22 +221,6 @@
           <pc:docMk/>
           <pc:sldMk cId="2012595901" sldId="301"/>
         </pc:sldMkLst>
-        <pc:spChg chg="mod">
-          <ac:chgData name="Joel Teixeira Cunha" userId="195451ac3a5e8dfd" providerId="LiveId" clId="{9D99295D-09A0-459E-AFDA-61FAD528DEBC}" dt="2026-06-23T19:55:56.946" v="2570" actId="20577"/>
-          <ac:spMkLst>
-            <pc:docMk/>
-            <pc:sldMk cId="2012595901" sldId="301"/>
-            <ac:spMk id="2" creationId="{12915F41-BDAD-7BDF-78A3-CCDCC2CE7F31}"/>
-          </ac:spMkLst>
-        </pc:spChg>
-        <pc:spChg chg="mod">
-          <ac:chgData name="Joel Teixeira Cunha" userId="195451ac3a5e8dfd" providerId="LiveId" clId="{9D99295D-09A0-459E-AFDA-61FAD528DEBC}" dt="2026-06-23T20:02:28.793" v="2841" actId="20577"/>
-          <ac:spMkLst>
-            <pc:docMk/>
-            <pc:sldMk cId="2012595901" sldId="301"/>
-            <ac:spMk id="3" creationId="{BC7FB8B9-E48D-E230-67BD-A3D86A4058DC}"/>
-          </ac:spMkLst>
-        </pc:spChg>
       </pc:sldChg>
       <pc:sldChg chg="del">
         <pc:chgData name="Joel Teixeira Cunha" userId="195451ac3a5e8dfd" providerId="LiveId" clId="{9D99295D-09A0-459E-AFDA-61FAD528DEBC}" dt="2026-06-23T19:40:21.765" v="2492" actId="47"/>
@@ -304,38 +242,6 @@
           <pc:docMk/>
           <pc:sldMk cId="2189762848" sldId="302"/>
         </pc:sldMkLst>
-        <pc:spChg chg="mod">
-          <ac:chgData name="Joel Teixeira Cunha" userId="195451ac3a5e8dfd" providerId="LiveId" clId="{9D99295D-09A0-459E-AFDA-61FAD528DEBC}" dt="2026-06-23T20:12:48.581" v="3135" actId="403"/>
-          <ac:spMkLst>
-            <pc:docMk/>
-            <pc:sldMk cId="2189762848" sldId="302"/>
-            <ac:spMk id="3" creationId="{DB1D5FCB-0A9B-2EE0-8029-527855B69E40}"/>
-          </ac:spMkLst>
-        </pc:spChg>
-        <pc:spChg chg="add mod">
-          <ac:chgData name="Joel Teixeira Cunha" userId="195451ac3a5e8dfd" providerId="LiveId" clId="{9D99295D-09A0-459E-AFDA-61FAD528DEBC}" dt="2026-06-23T20:12:39.998" v="3118" actId="2710"/>
-          <ac:spMkLst>
-            <pc:docMk/>
-            <pc:sldMk cId="2189762848" sldId="302"/>
-            <ac:spMk id="7" creationId="{2CC49E5A-E1FD-0DCD-BBA2-2698EE71615E}"/>
-          </ac:spMkLst>
-        </pc:spChg>
-        <pc:picChg chg="add mod">
-          <ac:chgData name="Joel Teixeira Cunha" userId="195451ac3a5e8dfd" providerId="LiveId" clId="{9D99295D-09A0-459E-AFDA-61FAD528DEBC}" dt="2026-06-23T20:12:54.899" v="3136" actId="1076"/>
-          <ac:picMkLst>
-            <pc:docMk/>
-            <pc:sldMk cId="2189762848" sldId="302"/>
-            <ac:picMk id="5" creationId="{1B4202D9-6C16-E8B6-60C5-D3F9FE7BB375}"/>
-          </ac:picMkLst>
-        </pc:picChg>
-        <pc:picChg chg="add mod">
-          <ac:chgData name="Joel Teixeira Cunha" userId="195451ac3a5e8dfd" providerId="LiveId" clId="{9D99295D-09A0-459E-AFDA-61FAD528DEBC}" dt="2026-06-23T20:13:08.719" v="3137" actId="1076"/>
-          <ac:picMkLst>
-            <pc:docMk/>
-            <pc:sldMk cId="2189762848" sldId="302"/>
-            <ac:picMk id="6" creationId="{AF8516A8-2AB5-EAD7-A349-053FAF560259}"/>
-          </ac:picMkLst>
-        </pc:picChg>
       </pc:sldChg>
       <pc:sldChg chg="addSp modSp add mod">
         <pc:chgData name="Joel Teixeira Cunha" userId="195451ac3a5e8dfd" providerId="LiveId" clId="{9D99295D-09A0-459E-AFDA-61FAD528DEBC}" dt="2026-06-23T22:36:48.798" v="3140" actId="1076"/>
@@ -343,38 +249,6 @@
           <pc:docMk/>
           <pc:sldMk cId="3132615768" sldId="303"/>
         </pc:sldMkLst>
-        <pc:spChg chg="mod">
-          <ac:chgData name="Joel Teixeira Cunha" userId="195451ac3a5e8dfd" providerId="LiveId" clId="{9D99295D-09A0-459E-AFDA-61FAD528DEBC}" dt="2026-06-23T22:36:39.068" v="3139" actId="164"/>
-          <ac:spMkLst>
-            <pc:docMk/>
-            <pc:sldMk cId="3132615768" sldId="303"/>
-            <ac:spMk id="7" creationId="{502A6C2F-53B8-317D-AF66-13B742D921CA}"/>
-          </ac:spMkLst>
-        </pc:spChg>
-        <pc:grpChg chg="add mod">
-          <ac:chgData name="Joel Teixeira Cunha" userId="195451ac3a5e8dfd" providerId="LiveId" clId="{9D99295D-09A0-459E-AFDA-61FAD528DEBC}" dt="2026-06-23T22:36:48.798" v="3140" actId="1076"/>
-          <ac:grpSpMkLst>
-            <pc:docMk/>
-            <pc:sldMk cId="3132615768" sldId="303"/>
-            <ac:grpSpMk id="4" creationId="{04F25D28-B53A-3BCD-1122-B80EDC57A148}"/>
-          </ac:grpSpMkLst>
-        </pc:grpChg>
-        <pc:picChg chg="mod">
-          <ac:chgData name="Joel Teixeira Cunha" userId="195451ac3a5e8dfd" providerId="LiveId" clId="{9D99295D-09A0-459E-AFDA-61FAD528DEBC}" dt="2026-06-23T22:36:39.068" v="3139" actId="164"/>
-          <ac:picMkLst>
-            <pc:docMk/>
-            <pc:sldMk cId="3132615768" sldId="303"/>
-            <ac:picMk id="5" creationId="{E169A7E7-D9B5-A6C3-429E-F2BCB46497B4}"/>
-          </ac:picMkLst>
-        </pc:picChg>
-        <pc:picChg chg="mod">
-          <ac:chgData name="Joel Teixeira Cunha" userId="195451ac3a5e8dfd" providerId="LiveId" clId="{9D99295D-09A0-459E-AFDA-61FAD528DEBC}" dt="2026-06-23T22:36:39.068" v="3139" actId="164"/>
-          <ac:picMkLst>
-            <pc:docMk/>
-            <pc:sldMk cId="3132615768" sldId="303"/>
-            <ac:picMk id="6" creationId="{86B1B748-52E0-1B25-4EFD-A69ECF441922}"/>
-          </ac:picMkLst>
-        </pc:picChg>
       </pc:sldChg>
       <pc:sldChg chg="del">
         <pc:chgData name="Joel Teixeira Cunha" userId="195451ac3a5e8dfd" providerId="LiveId" clId="{9D99295D-09A0-459E-AFDA-61FAD528DEBC}" dt="2026-06-23T19:40:21.765" v="2492" actId="47"/>
@@ -391,25 +265,55 @@
         </pc:sldMkLst>
       </pc:sldChg>
       <pc:sldChg chg="modSp new mod">
-        <pc:chgData name="Joel Teixeira Cunha" userId="195451ac3a5e8dfd" providerId="LiveId" clId="{9D99295D-09A0-459E-AFDA-61FAD528DEBC}" dt="2026-06-23T22:38:53.417" v="3229" actId="20577"/>
+        <pc:chgData name="Joel Teixeira Cunha" userId="195451ac3a5e8dfd" providerId="LiveId" clId="{9D99295D-09A0-459E-AFDA-61FAD528DEBC}" dt="2026-07-23T14:09:51.978" v="3283" actId="20577"/>
         <pc:sldMkLst>
           <pc:docMk/>
           <pc:sldMk cId="3793655364" sldId="304"/>
         </pc:sldMkLst>
         <pc:spChg chg="mod">
-          <ac:chgData name="Joel Teixeira Cunha" userId="195451ac3a5e8dfd" providerId="LiveId" clId="{9D99295D-09A0-459E-AFDA-61FAD528DEBC}" dt="2026-06-23T22:37:45.960" v="3173" actId="20577"/>
-          <ac:spMkLst>
-            <pc:docMk/>
-            <pc:sldMk cId="3793655364" sldId="304"/>
-            <ac:spMk id="2" creationId="{F304B218-6F6E-FCF1-6E5D-3395C9E1E3B8}"/>
-          </ac:spMkLst>
-        </pc:spChg>
-        <pc:spChg chg="mod">
-          <ac:chgData name="Joel Teixeira Cunha" userId="195451ac3a5e8dfd" providerId="LiveId" clId="{9D99295D-09A0-459E-AFDA-61FAD528DEBC}" dt="2026-06-23T22:38:53.417" v="3229" actId="20577"/>
+          <ac:chgData name="Joel Teixeira Cunha" userId="195451ac3a5e8dfd" providerId="LiveId" clId="{9D99295D-09A0-459E-AFDA-61FAD528DEBC}" dt="2026-07-23T14:09:51.978" v="3283" actId="20577"/>
           <ac:spMkLst>
             <pc:docMk/>
             <pc:sldMk cId="3793655364" sldId="304"/>
             <ac:spMk id="3" creationId="{C8B01E91-E4E0-9BA5-D2B0-67B55C15AB35}"/>
+          </ac:spMkLst>
+        </pc:spChg>
+      </pc:sldChg>
+      <pc:sldChg chg="modSp add mod">
+        <pc:chgData name="Joel Teixeira Cunha" userId="195451ac3a5e8dfd" providerId="LiveId" clId="{9D99295D-09A0-459E-AFDA-61FAD528DEBC}" dt="2026-07-23T14:11:12.578" v="3334" actId="20577"/>
+        <pc:sldMkLst>
+          <pc:docMk/>
+          <pc:sldMk cId="935552012" sldId="305"/>
+        </pc:sldMkLst>
+        <pc:spChg chg="mod">
+          <ac:chgData name="Joel Teixeira Cunha" userId="195451ac3a5e8dfd" providerId="LiveId" clId="{9D99295D-09A0-459E-AFDA-61FAD528DEBC}" dt="2026-07-23T14:11:12.578" v="3334" actId="20577"/>
+          <ac:spMkLst>
+            <pc:docMk/>
+            <pc:sldMk cId="935552012" sldId="305"/>
+            <ac:spMk id="3" creationId="{ACE9F982-35CD-D3BE-7DD8-6F416CC8F15D}"/>
+          </ac:spMkLst>
+        </pc:spChg>
+      </pc:sldChg>
+      <pc:sldChg chg="modSp new mod">
+        <pc:chgData name="Joel Teixeira Cunha" userId="195451ac3a5e8dfd" providerId="LiveId" clId="{9D99295D-09A0-459E-AFDA-61FAD528DEBC}" dt="2026-07-24T19:20:44.139" v="3691" actId="20577"/>
+        <pc:sldMkLst>
+          <pc:docMk/>
+          <pc:sldMk cId="1796580746" sldId="306"/>
+        </pc:sldMkLst>
+        <pc:spChg chg="mod">
+          <ac:chgData name="Joel Teixeira Cunha" userId="195451ac3a5e8dfd" providerId="LiveId" clId="{9D99295D-09A0-459E-AFDA-61FAD528DEBC}" dt="2026-07-24T19:17:21.060" v="3360" actId="20577"/>
+          <ac:spMkLst>
+            <pc:docMk/>
+            <pc:sldMk cId="1796580746" sldId="306"/>
+            <ac:spMk id="2" creationId="{928E456E-9974-9F6E-1925-890C5F815883}"/>
+          </ac:spMkLst>
+        </pc:spChg>
+        <pc:spChg chg="mod">
+          <ac:chgData name="Joel Teixeira Cunha" userId="195451ac3a5e8dfd" providerId="LiveId" clId="{9D99295D-09A0-459E-AFDA-61FAD528DEBC}" dt="2026-07-24T19:20:44.139" v="3691" actId="20577"/>
+          <ac:spMkLst>
+            <pc:docMk/>
+            <pc:sldMk cId="1796580746" sldId="306"/>
+            <ac:spMk id="3" creationId="{BB723020-C9E1-3D3E-015E-916522977CF7}"/>
           </ac:spMkLst>
         </pc:spChg>
       </pc:sldChg>
@@ -428,14 +332,6 @@
           <pc:docMk/>
           <pc:sldMk cId="1562692267" sldId="294"/>
         </pc:sldMkLst>
-        <pc:picChg chg="mod">
-          <ac:chgData name="Joel Teixeira Cunha" userId="195451ac3a5e8dfd" providerId="LiveId" clId="{2A4D4AF3-9DC9-4CE5-AE1A-E96DDBF3EED9}" dt="2026-06-03T11:22:01.766" v="1026" actId="1076"/>
-          <ac:picMkLst>
-            <pc:docMk/>
-            <pc:sldMk cId="1562692267" sldId="294"/>
-            <ac:picMk id="5" creationId="{80A4EC3A-4951-3982-7D01-F52572EC161D}"/>
-          </ac:picMkLst>
-        </pc:picChg>
       </pc:sldChg>
       <pc:sldChg chg="addSp modSp new mod modClrScheme chgLayout">
         <pc:chgData name="Joel Teixeira Cunha" userId="195451ac3a5e8dfd" providerId="LiveId" clId="{2A4D4AF3-9DC9-4CE5-AE1A-E96DDBF3EED9}" dt="2026-06-02T13:59:51.330" v="6" actId="26606"/>
@@ -485,15 +381,6 @@
             <pc:sldMasterMk cId="82855549" sldId="2147483672"/>
             <pc:sldLayoutMk cId="2739981630" sldId="2147483674"/>
           </pc:sldLayoutMkLst>
-          <pc:spChg chg="mod">
-            <ac:chgData name="Joel Teixeira Cunha" userId="195451ac3a5e8dfd" providerId="LiveId" clId="{2A4D4AF3-9DC9-4CE5-AE1A-E96DDBF3EED9}" dt="2026-06-02T14:09:41.774" v="496" actId="3064"/>
-            <ac:spMkLst>
-              <pc:docMk/>
-              <pc:sldMasterMk cId="82855549" sldId="2147483672"/>
-              <pc:sldLayoutMk cId="2739981630" sldId="2147483674"/>
-              <ac:spMk id="3" creationId="{00000000-0000-0000-0000-000000000000}"/>
-            </ac:spMkLst>
-          </pc:spChg>
         </pc:sldLayoutChg>
       </pc:sldMasterChg>
     </pc:docChg>
@@ -597,7 +484,7 @@
             <a:pPr rtl="0"/>
             <a:fld id="{A517C7B7-34F5-4531-9889-28687F60FAC8}" type="datetime1">
               <a:rPr lang="pt-BR" smtClean="0"/>
-              <a:t>23/06/2026</a:t>
+              <a:t>23/07/2026</a:t>
             </a:fld>
             <a:endParaRPr lang="pt-BR" dirty="0"/>
           </a:p>
@@ -778,7 +665,7 @@
             <a:fld id="{40C3EC75-555C-481D-9088-738CE6DDFC83}" type="datetime1">
               <a:rPr lang="pt-BR" smtClean="0"/>
               <a:pPr/>
-              <a:t>23/06/2026</a:t>
+              <a:t>23/07/2026</a:t>
             </a:fld>
             <a:endParaRPr lang="pt-BR" dirty="0"/>
           </a:p>
@@ -1201,7 +1088,7 @@
             <a:pPr rtl="0"/>
             <a:fld id="{C6B3AB32-59DF-41F1-9618-EDFBF5049629}" type="slidenum">
               <a:rPr lang="pt-BR" smtClean="0"/>
-              <a:t>42</a:t>
+              <a:t>44</a:t>
             </a:fld>
             <a:endParaRPr lang="pt-BR"/>
           </a:p>
@@ -1466,7 +1353,7 @@
             <a:pPr rtl="0"/>
             <a:fld id="{2AF5B136-74F1-42D3-987D-A097EEF8F2FE}" type="datetime1">
               <a:rPr lang="pt-BR" noProof="0" smtClean="0"/>
-              <a:t>23/06/2026</a:t>
+              <a:t>23/07/2026</a:t>
             </a:fld>
             <a:endParaRPr lang="pt-BR" noProof="0"/>
           </a:p>
@@ -1731,7 +1618,7 @@
             <a:pPr rtl="0"/>
             <a:fld id="{0229B074-15EB-43FB-8347-3A734D799093}" type="datetime1">
               <a:rPr lang="pt-BR" noProof="0" smtClean="0"/>
-              <a:t>23/06/2026</a:t>
+              <a:t>23/07/2026</a:t>
             </a:fld>
             <a:endParaRPr lang="pt-BR" noProof="0"/>
           </a:p>
@@ -1969,7 +1856,7 @@
             <a:pPr rtl="0"/>
             <a:fld id="{036303E3-8DE9-4C2D-91EE-6F377AE582A8}" type="datetime1">
               <a:rPr lang="pt-BR" noProof="0" smtClean="0"/>
-              <a:t>23/06/2026</a:t>
+              <a:t>23/07/2026</a:t>
             </a:fld>
             <a:endParaRPr lang="pt-BR" noProof="0"/>
           </a:p>
@@ -2212,7 +2099,7 @@
             <a:pPr rtl="0"/>
             <a:fld id="{B04AF3F4-81C7-4F15-8991-6D0E8D06651A}" type="datetime1">
               <a:rPr lang="pt-BR" noProof="0" smtClean="0"/>
-              <a:t>23/06/2026</a:t>
+              <a:t>23/07/2026</a:t>
             </a:fld>
             <a:endParaRPr lang="pt-BR" noProof="0"/>
           </a:p>
@@ -2523,7 +2410,7 @@
             <a:pPr rtl="0"/>
             <a:fld id="{6E2946E4-8964-43BF-B1D5-4261B83248E5}" type="datetime1">
               <a:rPr lang="pt-BR" noProof="0" smtClean="0"/>
-              <a:t>23/06/2026</a:t>
+              <a:t>23/07/2026</a:t>
             </a:fld>
             <a:endParaRPr lang="pt-BR" noProof="0"/>
           </a:p>
@@ -2827,7 +2714,7 @@
             <a:pPr rtl="0"/>
             <a:fld id="{97C9F420-083C-437A-9265-7F13EB97C6A2}" type="datetime1">
               <a:rPr lang="pt-BR" noProof="0" smtClean="0"/>
-              <a:t>23/06/2026</a:t>
+              <a:t>23/07/2026</a:t>
             </a:fld>
             <a:endParaRPr lang="pt-BR" noProof="0"/>
           </a:p>
@@ -3251,7 +3138,7 @@
             <a:pPr rtl="0"/>
             <a:fld id="{BE07AF20-ED70-4B21-B799-75BB5818AB43}" type="datetime1">
               <a:rPr lang="pt-BR" noProof="0" smtClean="0"/>
-              <a:t>23/06/2026</a:t>
+              <a:t>23/07/2026</a:t>
             </a:fld>
             <a:endParaRPr lang="pt-BR" noProof="0"/>
           </a:p>
@@ -3350,7 +3237,7 @@
             <a:pPr rtl="0"/>
             <a:fld id="{0D33D876-8C34-42FC-BFF7-457557B97BB7}" type="datetime1">
               <a:rPr lang="pt-BR" noProof="0" smtClean="0"/>
-              <a:t>23/06/2026</a:t>
+              <a:t>23/07/2026</a:t>
             </a:fld>
             <a:endParaRPr lang="pt-BR" noProof="0"/>
           </a:p>
@@ -3516,7 +3403,7 @@
             <a:pPr rtl="0"/>
             <a:fld id="{4592437E-206F-4A1C-947F-806A50A40B88}" type="datetime1">
               <a:rPr lang="pt-BR" noProof="0" smtClean="0"/>
-              <a:t>23/06/2026</a:t>
+              <a:t>23/07/2026</a:t>
             </a:fld>
             <a:endParaRPr lang="pt-BR" noProof="0"/>
           </a:p>
@@ -3897,7 +3784,7 @@
             <a:pPr rtl="0"/>
             <a:fld id="{B036DDBC-F1EF-4D09-A533-5995BC167053}" type="datetime1">
               <a:rPr lang="pt-BR" noProof="0" smtClean="0"/>
-              <a:t>23/06/2026</a:t>
+              <a:t>23/07/2026</a:t>
             </a:fld>
             <a:endParaRPr lang="pt-BR" noProof="0"/>
           </a:p>
@@ -4190,7 +4077,7 @@
             <a:pPr rtl="0"/>
             <a:fld id="{DFFDDC01-A1CF-4C3A-BE96-FBC60101324D}" type="datetime1">
               <a:rPr lang="pt-BR" noProof="0" smtClean="0"/>
-              <a:t>23/06/2026</a:t>
+              <a:t>23/07/2026</a:t>
             </a:fld>
             <a:endParaRPr lang="pt-BR" noProof="0"/>
           </a:p>
@@ -4404,7 +4291,7 @@
             <a:pPr rtl="0"/>
             <a:fld id="{52266794-2CD5-4ED3-94F8-8B8DC65FDDE3}" type="datetime1">
               <a:rPr lang="pt-BR" noProof="0" smtClean="0"/>
-              <a:t>23/06/2026</a:t>
+              <a:t>23/07/2026</a:t>
             </a:fld>
             <a:endParaRPr lang="pt-BR" noProof="0"/>
           </a:p>
@@ -10794,15 +10681,39 @@
           <a:p>
             <a:r>
               <a:rPr lang="pt-BR" dirty="0"/>
-              <a:t>Refere-se a estabelecimento, o uso e término </a:t>
-            </a:r>
-            <a:r>
-              <a:rPr lang="pt-BR"/>
-              <a:t>da conexão</a:t>
-            </a:r>
-          </a:p>
-          <a:p>
-            <a:endParaRPr lang="pt-BR"/>
+              <a:t>Refere-se a estabelecimento, o uso e término da conexão</a:t>
+            </a:r>
+          </a:p>
+          <a:p>
+            <a:r>
+              <a:rPr lang="pt-BR" dirty="0"/>
+              <a:t>O aspecto essencial de uma conexão é que funciona como um tubo: o transmissor empurra os objetos (</a:t>
+            </a:r>
+            <a:r>
+              <a:rPr lang="pt-BR" i="1" dirty="0"/>
+              <a:t>bits</a:t>
+            </a:r>
+            <a:r>
+              <a:rPr lang="pt-BR" dirty="0"/>
+              <a:t>) em uma extremidade, e esses objetos são recebidos pelo receptor na outra extremidade </a:t>
+            </a:r>
+          </a:p>
+          <a:p>
+            <a:r>
+              <a:rPr lang="pt-BR" dirty="0"/>
+              <a:t>É importante ressaltar que o serviço orientado a conexão prevê uma negociação entre o transmissor e o receptor de alguns parâmetros como, por exemplo, o tamanho máximo das mensagens a serem trocadas, a qualidade de serviço exigida e outros, tudo para que a transmissão ocorra sem problemas e erros. </a:t>
+            </a:r>
+          </a:p>
+          <a:p>
+            <a:pPr lvl="1"/>
+            <a:r>
+              <a:rPr lang="pt-BR" dirty="0"/>
+              <a:t>Exemplo: download de arquivos</a:t>
+            </a:r>
+            <a:br>
+              <a:rPr lang="pt-BR" dirty="0"/>
+            </a:br>
+            <a:endParaRPr lang="pt-BR" dirty="0"/>
           </a:p>
         </p:txBody>
       </p:sp>
@@ -10820,6 +10731,277 @@
 </file>
 
 <file path=ppt/slides/slide42.xml><?xml version="1.0" encoding="utf-8"?>
+<p:sld xmlns:a="http://schemas.openxmlformats.org/drawingml/2006/main" xmlns:r="http://schemas.openxmlformats.org/officeDocument/2006/relationships" xmlns:p="http://schemas.openxmlformats.org/presentationml/2006/main">
+  <p:cSld>
+    <p:spTree>
+      <p:nvGrpSpPr>
+        <p:cNvPr id="1" name="">
+          <a:extLst>
+            <a:ext uri="{FF2B5EF4-FFF2-40B4-BE49-F238E27FC236}">
+              <a16:creationId xmlns:a16="http://schemas.microsoft.com/office/drawing/2014/main" id="{48CCEFAB-9526-228B-CAF3-03C9FCECBF2C}"/>
+            </a:ext>
+          </a:extLst>
+        </p:cNvPr>
+        <p:cNvGrpSpPr/>
+        <p:nvPr/>
+      </p:nvGrpSpPr>
+      <p:grpSpPr>
+        <a:xfrm>
+          <a:off x="0" y="0"/>
+          <a:ext cx="0" cy="0"/>
+          <a:chOff x="0" y="0"/>
+          <a:chExt cx="0" cy="0"/>
+        </a:xfrm>
+      </p:grpSpPr>
+      <p:sp>
+        <p:nvSpPr>
+          <p:cNvPr id="2" name="Título 1">
+            <a:extLst>
+              <a:ext uri="{FF2B5EF4-FFF2-40B4-BE49-F238E27FC236}">
+                <a16:creationId xmlns:a16="http://schemas.microsoft.com/office/drawing/2014/main" id="{9FBA5F9E-5B30-132C-9BCA-360282C5A56E}"/>
+              </a:ext>
+            </a:extLst>
+          </p:cNvPr>
+          <p:cNvSpPr>
+            <a:spLocks noGrp="1"/>
+          </p:cNvSpPr>
+          <p:nvPr>
+            <p:ph type="title"/>
+          </p:nvPr>
+        </p:nvSpPr>
+        <p:spPr/>
+        <p:txBody>
+          <a:bodyPr/>
+          <a:lstStyle/>
+          <a:p>
+            <a:r>
+              <a:rPr lang="pt-BR" dirty="0"/>
+              <a:t>Serviço orientado à conexão</a:t>
+            </a:r>
+          </a:p>
+        </p:txBody>
+      </p:sp>
+      <p:sp>
+        <p:nvSpPr>
+          <p:cNvPr id="3" name="Espaço Reservado para Conteúdo 2">
+            <a:extLst>
+              <a:ext uri="{FF2B5EF4-FFF2-40B4-BE49-F238E27FC236}">
+                <a16:creationId xmlns:a16="http://schemas.microsoft.com/office/drawing/2014/main" id="{ACE9F982-35CD-D3BE-7DD8-6F416CC8F15D}"/>
+              </a:ext>
+            </a:extLst>
+          </p:cNvPr>
+          <p:cNvSpPr>
+            <a:spLocks noGrp="1"/>
+          </p:cNvSpPr>
+          <p:nvPr>
+            <p:ph idx="1"/>
+          </p:nvPr>
+        </p:nvSpPr>
+        <p:spPr/>
+        <p:txBody>
+          <a:bodyPr/>
+          <a:lstStyle/>
+          <a:p>
+            <a:r>
+              <a:rPr lang="pt-BR" dirty="0"/>
+              <a:t>Possuem duas características importantes</a:t>
+            </a:r>
+          </a:p>
+          <a:p>
+            <a:r>
+              <a:rPr lang="pt-BR" b="1" dirty="0"/>
+              <a:t>Sequência de mensagem</a:t>
+            </a:r>
+            <a:r>
+              <a:rPr lang="pt-BR" dirty="0"/>
+              <a:t>: quando se enviam duas mensagens de 1.024 </a:t>
+            </a:r>
+            <a:r>
+              <a:rPr lang="pt-BR" i="1" dirty="0"/>
+              <a:t>bytes</a:t>
+            </a:r>
+            <a:r>
+              <a:rPr lang="pt-BR" dirty="0"/>
+              <a:t>, elas chegaram ao destino como duas mensagens de 1.024 </a:t>
+            </a:r>
+            <a:r>
+              <a:rPr lang="pt-BR" i="1" dirty="0"/>
+              <a:t>bytes </a:t>
+            </a:r>
+            <a:r>
+              <a:rPr lang="pt-BR" dirty="0"/>
+              <a:t>distintas e não como uma de 2.048 </a:t>
+            </a:r>
+            <a:r>
+              <a:rPr lang="pt-BR" i="1" dirty="0"/>
+              <a:t>bytes</a:t>
+            </a:r>
+            <a:r>
+              <a:rPr lang="pt-BR" dirty="0"/>
+              <a:t>. Ou seja, tem uma sequência a ser obedecida </a:t>
+            </a:r>
+          </a:p>
+          <a:p>
+            <a:r>
+              <a:rPr lang="pt-BR" b="1" dirty="0"/>
+              <a:t>Fluxo de </a:t>
+            </a:r>
+            <a:r>
+              <a:rPr lang="pt-BR" b="1" i="1" dirty="0"/>
+              <a:t>bytes</a:t>
+            </a:r>
+            <a:r>
+              <a:rPr lang="pt-BR" dirty="0"/>
+              <a:t>: uma vez estabelecida a conexão entre usuário e servidor, é necessário que exista um fluxo de dados entre os computadores </a:t>
+            </a:r>
+            <a:br>
+              <a:rPr lang="pt-BR" dirty="0"/>
+            </a:br>
+            <a:br>
+              <a:rPr lang="pt-BR" dirty="0"/>
+            </a:br>
+            <a:endParaRPr lang="pt-BR" dirty="0"/>
+          </a:p>
+        </p:txBody>
+      </p:sp>
+    </p:spTree>
+    <p:extLst>
+      <p:ext uri="{BB962C8B-B14F-4D97-AF65-F5344CB8AC3E}">
+        <p14:creationId xmlns:p14="http://schemas.microsoft.com/office/powerpoint/2010/main" val="935552012"/>
+      </p:ext>
+    </p:extLst>
+  </p:cSld>
+  <p:clrMapOvr>
+    <a:masterClrMapping/>
+  </p:clrMapOvr>
+</p:sld>
+</file>
+
+<file path=ppt/slides/slide43.xml><?xml version="1.0" encoding="utf-8"?>
+<p:sld xmlns:a="http://schemas.openxmlformats.org/drawingml/2006/main" xmlns:r="http://schemas.openxmlformats.org/officeDocument/2006/relationships" xmlns:p="http://schemas.openxmlformats.org/presentationml/2006/main">
+  <p:cSld>
+    <p:spTree>
+      <p:nvGrpSpPr>
+        <p:cNvPr id="1" name=""/>
+        <p:cNvGrpSpPr/>
+        <p:nvPr/>
+      </p:nvGrpSpPr>
+      <p:grpSpPr>
+        <a:xfrm>
+          <a:off x="0" y="0"/>
+          <a:ext cx="0" cy="0"/>
+          <a:chOff x="0" y="0"/>
+          <a:chExt cx="0" cy="0"/>
+        </a:xfrm>
+      </p:grpSpPr>
+      <p:sp>
+        <p:nvSpPr>
+          <p:cNvPr id="2" name="Título 1">
+            <a:extLst>
+              <a:ext uri="{FF2B5EF4-FFF2-40B4-BE49-F238E27FC236}">
+                <a16:creationId xmlns:a16="http://schemas.microsoft.com/office/drawing/2014/main" id="{928E456E-9974-9F6E-1925-890C5F815883}"/>
+              </a:ext>
+            </a:extLst>
+          </p:cNvPr>
+          <p:cNvSpPr>
+            <a:spLocks noGrp="1"/>
+          </p:cNvSpPr>
+          <p:nvPr>
+            <p:ph type="title"/>
+          </p:nvPr>
+        </p:nvSpPr>
+        <p:spPr/>
+        <p:txBody>
+          <a:bodyPr/>
+          <a:lstStyle/>
+          <a:p>
+            <a:r>
+              <a:rPr lang="pt-BR" dirty="0"/>
+              <a:t>Modelo de referência </a:t>
+            </a:r>
+            <a:r>
+              <a:rPr lang="pt-BR" dirty="0" err="1"/>
+              <a:t>osi</a:t>
+            </a:r>
+            <a:endParaRPr lang="pt-BR" dirty="0"/>
+          </a:p>
+        </p:txBody>
+      </p:sp>
+      <p:sp>
+        <p:nvSpPr>
+          <p:cNvPr id="3" name="Espaço Reservado para Conteúdo 2">
+            <a:extLst>
+              <a:ext uri="{FF2B5EF4-FFF2-40B4-BE49-F238E27FC236}">
+                <a16:creationId xmlns:a16="http://schemas.microsoft.com/office/drawing/2014/main" id="{BB723020-C9E1-3D3E-015E-916522977CF7}"/>
+              </a:ext>
+            </a:extLst>
+          </p:cNvPr>
+          <p:cNvSpPr>
+            <a:spLocks noGrp="1"/>
+          </p:cNvSpPr>
+          <p:nvPr>
+            <p:ph idx="1"/>
+          </p:nvPr>
+        </p:nvSpPr>
+        <p:spPr/>
+        <p:txBody>
+          <a:bodyPr/>
+          <a:lstStyle/>
+          <a:p>
+            <a:r>
+              <a:rPr lang="pt-BR" dirty="0"/>
+              <a:t>OSI (Open System </a:t>
+            </a:r>
+            <a:r>
+              <a:rPr lang="pt-BR" dirty="0" err="1"/>
+              <a:t>Interconnection</a:t>
+            </a:r>
+            <a:r>
+              <a:rPr lang="pt-BR" dirty="0"/>
+              <a:t>)</a:t>
+            </a:r>
+          </a:p>
+          <a:p>
+            <a:r>
+              <a:rPr lang="pt-BR" dirty="0"/>
+              <a:t>Primeiro passo em direção a padronização internacional</a:t>
+            </a:r>
+          </a:p>
+          <a:p>
+            <a:r>
+              <a:rPr lang="pt-BR" dirty="0"/>
+              <a:t>Trata-se da interconexão de sistemas abertos com outros sistemas</a:t>
+            </a:r>
+          </a:p>
+          <a:p>
+            <a:r>
+              <a:rPr lang="pt-BR" dirty="0"/>
+              <a:t>Devido a complexidade tudo é dividido em camadas </a:t>
+            </a:r>
+            <a:r>
+              <a:rPr lang="pt-BR"/>
+              <a:t>(níveis)</a:t>
+            </a:r>
+          </a:p>
+          <a:p>
+            <a:endParaRPr lang="pt-BR"/>
+          </a:p>
+        </p:txBody>
+      </p:sp>
+    </p:spTree>
+    <p:extLst>
+      <p:ext uri="{BB962C8B-B14F-4D97-AF65-F5344CB8AC3E}">
+        <p14:creationId xmlns:p14="http://schemas.microsoft.com/office/powerpoint/2010/main" val="1796580746"/>
+      </p:ext>
+    </p:extLst>
+  </p:cSld>
+  <p:clrMapOvr>
+    <a:masterClrMapping/>
+  </p:clrMapOvr>
+</p:sld>
+</file>
+
+<file path=ppt/slides/slide44.xml><?xml version="1.0" encoding="utf-8"?>
 <p:sld xmlns:a="http://schemas.openxmlformats.org/drawingml/2006/main" xmlns:r="http://schemas.openxmlformats.org/officeDocument/2006/relationships" xmlns:p="http://schemas.openxmlformats.org/presentationml/2006/main">
   <p:cSld>
     <p:bg>

--- a/Redes/REDES DE COMPUTADORES.pptx
+++ b/Redes/REDES DE COMPUTADORES.pptx
@@ -5,10 +5,10 @@
     <p:sldMasterId id="2147483672" r:id="rId1"/>
   </p:sldMasterIdLst>
   <p:notesMasterIdLst>
-    <p:notesMasterId r:id="rId46"/>
+    <p:notesMasterId r:id="rId55"/>
   </p:notesMasterIdLst>
   <p:handoutMasterIdLst>
-    <p:handoutMasterId r:id="rId47"/>
+    <p:handoutMasterId r:id="rId56"/>
   </p:handoutMasterIdLst>
   <p:sldIdLst>
     <p:sldId id="256" r:id="rId2"/>
@@ -54,7 +54,16 @@
     <p:sldId id="304" r:id="rId42"/>
     <p:sldId id="305" r:id="rId43"/>
     <p:sldId id="306" r:id="rId44"/>
-    <p:sldId id="260" r:id="rId45"/>
+    <p:sldId id="307" r:id="rId45"/>
+    <p:sldId id="308" r:id="rId46"/>
+    <p:sldId id="309" r:id="rId47"/>
+    <p:sldId id="310" r:id="rId48"/>
+    <p:sldId id="311" r:id="rId49"/>
+    <p:sldId id="312" r:id="rId50"/>
+    <p:sldId id="313" r:id="rId51"/>
+    <p:sldId id="314" r:id="rId52"/>
+    <p:sldId id="315" r:id="rId53"/>
+    <p:sldId id="260" r:id="rId54"/>
   </p:sldIdLst>
   <p:sldSz cx="12192000" cy="6858000"/>
   <p:notesSz cx="6858000" cy="9144000"/>
@@ -169,7 +178,7 @@
   <pc:docChgLst>
     <pc:chgData name="Joel Teixeira Cunha" userId="195451ac3a5e8dfd" providerId="LiveId" clId="{9D99295D-09A0-459E-AFDA-61FAD528DEBC}"/>
     <pc:docChg chg="undo custSel addSld delSld modSld">
-      <pc:chgData name="Joel Teixeira Cunha" userId="195451ac3a5e8dfd" providerId="LiveId" clId="{9D99295D-09A0-459E-AFDA-61FAD528DEBC}" dt="2026-07-24T19:20:44.139" v="3691" actId="20577"/>
+      <pc:chgData name="Joel Teixeira Cunha" userId="195451ac3a5e8dfd" providerId="LiveId" clId="{9D99295D-09A0-459E-AFDA-61FAD528DEBC}" dt="2026-08-04T22:53:39.446" v="6095" actId="20577"/>
       <pc:docMkLst>
         <pc:docMk/>
       </pc:docMkLst>
@@ -317,6 +326,165 @@
           </ac:spMkLst>
         </pc:spChg>
       </pc:sldChg>
+      <pc:sldChg chg="addSp delSp modSp add mod">
+        <pc:chgData name="Joel Teixeira Cunha" userId="195451ac3a5e8dfd" providerId="LiveId" clId="{9D99295D-09A0-459E-AFDA-61FAD528DEBC}" dt="2026-08-04T22:03:24.827" v="3698" actId="1076"/>
+        <pc:sldMkLst>
+          <pc:docMk/>
+          <pc:sldMk cId="3788522929" sldId="307"/>
+        </pc:sldMkLst>
+        <pc:spChg chg="del">
+          <ac:chgData name="Joel Teixeira Cunha" userId="195451ac3a5e8dfd" providerId="LiveId" clId="{9D99295D-09A0-459E-AFDA-61FAD528DEBC}" dt="2026-08-04T22:02:47.380" v="3693" actId="478"/>
+          <ac:spMkLst>
+            <pc:docMk/>
+            <pc:sldMk cId="3788522929" sldId="307"/>
+            <ac:spMk id="3" creationId="{5239F6E7-0598-C70A-A443-697FED1943EB}"/>
+          </ac:spMkLst>
+        </pc:spChg>
+        <pc:spChg chg="add del mod">
+          <ac:chgData name="Joel Teixeira Cunha" userId="195451ac3a5e8dfd" providerId="LiveId" clId="{9D99295D-09A0-459E-AFDA-61FAD528DEBC}" dt="2026-08-04T22:02:52.841" v="3694" actId="478"/>
+          <ac:spMkLst>
+            <pc:docMk/>
+            <pc:sldMk cId="3788522929" sldId="307"/>
+            <ac:spMk id="5" creationId="{B99F0579-84BA-6DFD-ADA3-2ED15A2B23A6}"/>
+          </ac:spMkLst>
+        </pc:spChg>
+        <pc:picChg chg="add mod">
+          <ac:chgData name="Joel Teixeira Cunha" userId="195451ac3a5e8dfd" providerId="LiveId" clId="{9D99295D-09A0-459E-AFDA-61FAD528DEBC}" dt="2026-08-04T22:03:24.827" v="3698" actId="1076"/>
+          <ac:picMkLst>
+            <pc:docMk/>
+            <pc:sldMk cId="3788522929" sldId="307"/>
+            <ac:picMk id="7" creationId="{DF0B3B46-488F-0919-2E31-DF3C39EDE853}"/>
+          </ac:picMkLst>
+        </pc:picChg>
+      </pc:sldChg>
+      <pc:sldChg chg="modSp add mod">
+        <pc:chgData name="Joel Teixeira Cunha" userId="195451ac3a5e8dfd" providerId="LiveId" clId="{9D99295D-09A0-459E-AFDA-61FAD528DEBC}" dt="2026-08-04T22:08:15.257" v="4075" actId="20577"/>
+        <pc:sldMkLst>
+          <pc:docMk/>
+          <pc:sldMk cId="3888856219" sldId="308"/>
+        </pc:sldMkLst>
+        <pc:spChg chg="mod">
+          <ac:chgData name="Joel Teixeira Cunha" userId="195451ac3a5e8dfd" providerId="LiveId" clId="{9D99295D-09A0-459E-AFDA-61FAD528DEBC}" dt="2026-08-04T22:08:15.257" v="4075" actId="20577"/>
+          <ac:spMkLst>
+            <pc:docMk/>
+            <pc:sldMk cId="3888856219" sldId="308"/>
+            <ac:spMk id="3" creationId="{0CE7787B-7413-0521-931D-A0083073501E}"/>
+          </ac:spMkLst>
+        </pc:spChg>
+      </pc:sldChg>
+      <pc:sldChg chg="addSp delSp modSp add mod">
+        <pc:chgData name="Joel Teixeira Cunha" userId="195451ac3a5e8dfd" providerId="LiveId" clId="{9D99295D-09A0-459E-AFDA-61FAD528DEBC}" dt="2026-08-04T22:32:50.993" v="4542" actId="22"/>
+        <pc:sldMkLst>
+          <pc:docMk/>
+          <pc:sldMk cId="377226178" sldId="309"/>
+        </pc:sldMkLst>
+        <pc:spChg chg="mod">
+          <ac:chgData name="Joel Teixeira Cunha" userId="195451ac3a5e8dfd" providerId="LiveId" clId="{9D99295D-09A0-459E-AFDA-61FAD528DEBC}" dt="2026-08-04T22:11:57.157" v="4540" actId="20577"/>
+          <ac:spMkLst>
+            <pc:docMk/>
+            <pc:sldMk cId="377226178" sldId="309"/>
+            <ac:spMk id="3" creationId="{AFAAAF7D-4FE8-7C8A-3AE5-C5A5DE62B1F3}"/>
+          </ac:spMkLst>
+        </pc:spChg>
+        <pc:spChg chg="add del">
+          <ac:chgData name="Joel Teixeira Cunha" userId="195451ac3a5e8dfd" providerId="LiveId" clId="{9D99295D-09A0-459E-AFDA-61FAD528DEBC}" dt="2026-08-04T22:32:50.993" v="4542" actId="22"/>
+          <ac:spMkLst>
+            <pc:docMk/>
+            <pc:sldMk cId="377226178" sldId="309"/>
+            <ac:spMk id="5" creationId="{6E1350ED-20F0-D0A0-1958-EA2C39C7ADF6}"/>
+          </ac:spMkLst>
+        </pc:spChg>
+      </pc:sldChg>
+      <pc:sldChg chg="modSp add mod">
+        <pc:chgData name="Joel Teixeira Cunha" userId="195451ac3a5e8dfd" providerId="LiveId" clId="{9D99295D-09A0-459E-AFDA-61FAD528DEBC}" dt="2026-08-04T22:36:54.268" v="4805" actId="20577"/>
+        <pc:sldMkLst>
+          <pc:docMk/>
+          <pc:sldMk cId="2267116923" sldId="310"/>
+        </pc:sldMkLst>
+        <pc:spChg chg="mod">
+          <ac:chgData name="Joel Teixeira Cunha" userId="195451ac3a5e8dfd" providerId="LiveId" clId="{9D99295D-09A0-459E-AFDA-61FAD528DEBC}" dt="2026-08-04T22:36:54.268" v="4805" actId="20577"/>
+          <ac:spMkLst>
+            <pc:docMk/>
+            <pc:sldMk cId="2267116923" sldId="310"/>
+            <ac:spMk id="3" creationId="{16ADDCE8-4D6D-F500-4876-182C221919D0}"/>
+          </ac:spMkLst>
+        </pc:spChg>
+      </pc:sldChg>
+      <pc:sldChg chg="modSp add mod">
+        <pc:chgData name="Joel Teixeira Cunha" userId="195451ac3a5e8dfd" providerId="LiveId" clId="{9D99295D-09A0-459E-AFDA-61FAD528DEBC}" dt="2026-08-04T22:39:47.321" v="5116" actId="20577"/>
+        <pc:sldMkLst>
+          <pc:docMk/>
+          <pc:sldMk cId="4170713381" sldId="311"/>
+        </pc:sldMkLst>
+        <pc:spChg chg="mod">
+          <ac:chgData name="Joel Teixeira Cunha" userId="195451ac3a5e8dfd" providerId="LiveId" clId="{9D99295D-09A0-459E-AFDA-61FAD528DEBC}" dt="2026-08-04T22:39:47.321" v="5116" actId="20577"/>
+          <ac:spMkLst>
+            <pc:docMk/>
+            <pc:sldMk cId="4170713381" sldId="311"/>
+            <ac:spMk id="3" creationId="{B6699D3F-12A8-C771-4BE8-72A7A13E9EFA}"/>
+          </ac:spMkLst>
+        </pc:spChg>
+      </pc:sldChg>
+      <pc:sldChg chg="modSp add mod">
+        <pc:chgData name="Joel Teixeira Cunha" userId="195451ac3a5e8dfd" providerId="LiveId" clId="{9D99295D-09A0-459E-AFDA-61FAD528DEBC}" dt="2026-08-04T22:42:41.335" v="5439" actId="20577"/>
+        <pc:sldMkLst>
+          <pc:docMk/>
+          <pc:sldMk cId="3321898828" sldId="312"/>
+        </pc:sldMkLst>
+        <pc:spChg chg="mod">
+          <ac:chgData name="Joel Teixeira Cunha" userId="195451ac3a5e8dfd" providerId="LiveId" clId="{9D99295D-09A0-459E-AFDA-61FAD528DEBC}" dt="2026-08-04T22:42:41.335" v="5439" actId="20577"/>
+          <ac:spMkLst>
+            <pc:docMk/>
+            <pc:sldMk cId="3321898828" sldId="312"/>
+            <ac:spMk id="3" creationId="{F9082003-8D04-F554-B74E-BFDEB041936A}"/>
+          </ac:spMkLst>
+        </pc:spChg>
+      </pc:sldChg>
+      <pc:sldChg chg="modSp add mod">
+        <pc:chgData name="Joel Teixeira Cunha" userId="195451ac3a5e8dfd" providerId="LiveId" clId="{9D99295D-09A0-459E-AFDA-61FAD528DEBC}" dt="2026-08-04T22:44:30.395" v="5592" actId="20577"/>
+        <pc:sldMkLst>
+          <pc:docMk/>
+          <pc:sldMk cId="2625125890" sldId="313"/>
+        </pc:sldMkLst>
+        <pc:spChg chg="mod">
+          <ac:chgData name="Joel Teixeira Cunha" userId="195451ac3a5e8dfd" providerId="LiveId" clId="{9D99295D-09A0-459E-AFDA-61FAD528DEBC}" dt="2026-08-04T22:44:30.395" v="5592" actId="20577"/>
+          <ac:spMkLst>
+            <pc:docMk/>
+            <pc:sldMk cId="2625125890" sldId="313"/>
+            <ac:spMk id="3" creationId="{E06F2848-2FF1-B49C-BF23-98B1A760BFE9}"/>
+          </ac:spMkLst>
+        </pc:spChg>
+      </pc:sldChg>
+      <pc:sldChg chg="modSp add mod">
+        <pc:chgData name="Joel Teixeira Cunha" userId="195451ac3a5e8dfd" providerId="LiveId" clId="{9D99295D-09A0-459E-AFDA-61FAD528DEBC}" dt="2026-08-04T22:47:44.738" v="5981" actId="20577"/>
+        <pc:sldMkLst>
+          <pc:docMk/>
+          <pc:sldMk cId="1142326940" sldId="314"/>
+        </pc:sldMkLst>
+        <pc:spChg chg="mod">
+          <ac:chgData name="Joel Teixeira Cunha" userId="195451ac3a5e8dfd" providerId="LiveId" clId="{9D99295D-09A0-459E-AFDA-61FAD528DEBC}" dt="2026-08-04T22:47:44.738" v="5981" actId="20577"/>
+          <ac:spMkLst>
+            <pc:docMk/>
+            <pc:sldMk cId="1142326940" sldId="314"/>
+            <ac:spMk id="3" creationId="{229D6C34-71D6-9C78-E2C4-73BABFE343C8}"/>
+          </ac:spMkLst>
+        </pc:spChg>
+      </pc:sldChg>
+      <pc:sldChg chg="modSp add mod">
+        <pc:chgData name="Joel Teixeira Cunha" userId="195451ac3a5e8dfd" providerId="LiveId" clId="{9D99295D-09A0-459E-AFDA-61FAD528DEBC}" dt="2026-08-04T22:53:39.446" v="6095" actId="20577"/>
+        <pc:sldMkLst>
+          <pc:docMk/>
+          <pc:sldMk cId="3792217234" sldId="315"/>
+        </pc:sldMkLst>
+        <pc:spChg chg="mod">
+          <ac:chgData name="Joel Teixeira Cunha" userId="195451ac3a5e8dfd" providerId="LiveId" clId="{9D99295D-09A0-459E-AFDA-61FAD528DEBC}" dt="2026-08-04T22:53:39.446" v="6095" actId="20577"/>
+          <ac:spMkLst>
+            <pc:docMk/>
+            <pc:sldMk cId="3792217234" sldId="315"/>
+            <ac:spMk id="3" creationId="{11543264-492C-AD2C-FCAB-5CDD725DC939}"/>
+          </ac:spMkLst>
+        </pc:spChg>
+      </pc:sldChg>
     </pc:docChg>
   </pc:docChgLst>
   <pc:docChgLst>
@@ -484,7 +652,7 @@
             <a:pPr rtl="0"/>
             <a:fld id="{A517C7B7-34F5-4531-9889-28687F60FAC8}" type="datetime1">
               <a:rPr lang="pt-BR" smtClean="0"/>
-              <a:t>23/07/2026</a:t>
+              <a:t>04/08/2026</a:t>
             </a:fld>
             <a:endParaRPr lang="pt-BR" dirty="0"/>
           </a:p>
@@ -665,7 +833,7 @@
             <a:fld id="{40C3EC75-555C-481D-9088-738CE6DDFC83}" type="datetime1">
               <a:rPr lang="pt-BR" smtClean="0"/>
               <a:pPr/>
-              <a:t>23/07/2026</a:t>
+              <a:t>04/08/2026</a:t>
             </a:fld>
             <a:endParaRPr lang="pt-BR" dirty="0"/>
           </a:p>
@@ -1088,7 +1256,7 @@
             <a:pPr rtl="0"/>
             <a:fld id="{C6B3AB32-59DF-41F1-9618-EDFBF5049629}" type="slidenum">
               <a:rPr lang="pt-BR" smtClean="0"/>
-              <a:t>44</a:t>
+              <a:t>53</a:t>
             </a:fld>
             <a:endParaRPr lang="pt-BR"/>
           </a:p>
@@ -1353,7 +1521,7 @@
             <a:pPr rtl="0"/>
             <a:fld id="{2AF5B136-74F1-42D3-987D-A097EEF8F2FE}" type="datetime1">
               <a:rPr lang="pt-BR" noProof="0" smtClean="0"/>
-              <a:t>23/07/2026</a:t>
+              <a:t>04/08/2026</a:t>
             </a:fld>
             <a:endParaRPr lang="pt-BR" noProof="0"/>
           </a:p>
@@ -1618,7 +1786,7 @@
             <a:pPr rtl="0"/>
             <a:fld id="{0229B074-15EB-43FB-8347-3A734D799093}" type="datetime1">
               <a:rPr lang="pt-BR" noProof="0" smtClean="0"/>
-              <a:t>23/07/2026</a:t>
+              <a:t>04/08/2026</a:t>
             </a:fld>
             <a:endParaRPr lang="pt-BR" noProof="0"/>
           </a:p>
@@ -1856,7 +2024,7 @@
             <a:pPr rtl="0"/>
             <a:fld id="{036303E3-8DE9-4C2D-91EE-6F377AE582A8}" type="datetime1">
               <a:rPr lang="pt-BR" noProof="0" smtClean="0"/>
-              <a:t>23/07/2026</a:t>
+              <a:t>04/08/2026</a:t>
             </a:fld>
             <a:endParaRPr lang="pt-BR" noProof="0"/>
           </a:p>
@@ -2099,7 +2267,7 @@
             <a:pPr rtl="0"/>
             <a:fld id="{B04AF3F4-81C7-4F15-8991-6D0E8D06651A}" type="datetime1">
               <a:rPr lang="pt-BR" noProof="0" smtClean="0"/>
-              <a:t>23/07/2026</a:t>
+              <a:t>04/08/2026</a:t>
             </a:fld>
             <a:endParaRPr lang="pt-BR" noProof="0"/>
           </a:p>
@@ -2410,7 +2578,7 @@
             <a:pPr rtl="0"/>
             <a:fld id="{6E2946E4-8964-43BF-B1D5-4261B83248E5}" type="datetime1">
               <a:rPr lang="pt-BR" noProof="0" smtClean="0"/>
-              <a:t>23/07/2026</a:t>
+              <a:t>04/08/2026</a:t>
             </a:fld>
             <a:endParaRPr lang="pt-BR" noProof="0"/>
           </a:p>
@@ -2714,7 +2882,7 @@
             <a:pPr rtl="0"/>
             <a:fld id="{97C9F420-083C-437A-9265-7F13EB97C6A2}" type="datetime1">
               <a:rPr lang="pt-BR" noProof="0" smtClean="0"/>
-              <a:t>23/07/2026</a:t>
+              <a:t>04/08/2026</a:t>
             </a:fld>
             <a:endParaRPr lang="pt-BR" noProof="0"/>
           </a:p>
@@ -3138,7 +3306,7 @@
             <a:pPr rtl="0"/>
             <a:fld id="{BE07AF20-ED70-4B21-B799-75BB5818AB43}" type="datetime1">
               <a:rPr lang="pt-BR" noProof="0" smtClean="0"/>
-              <a:t>23/07/2026</a:t>
+              <a:t>04/08/2026</a:t>
             </a:fld>
             <a:endParaRPr lang="pt-BR" noProof="0"/>
           </a:p>
@@ -3237,7 +3405,7 @@
             <a:pPr rtl="0"/>
             <a:fld id="{0D33D876-8C34-42FC-BFF7-457557B97BB7}" type="datetime1">
               <a:rPr lang="pt-BR" noProof="0" smtClean="0"/>
-              <a:t>23/07/2026</a:t>
+              <a:t>04/08/2026</a:t>
             </a:fld>
             <a:endParaRPr lang="pt-BR" noProof="0"/>
           </a:p>
@@ -3403,7 +3571,7 @@
             <a:pPr rtl="0"/>
             <a:fld id="{4592437E-206F-4A1C-947F-806A50A40B88}" type="datetime1">
               <a:rPr lang="pt-BR" noProof="0" smtClean="0"/>
-              <a:t>23/07/2026</a:t>
+              <a:t>04/08/2026</a:t>
             </a:fld>
             <a:endParaRPr lang="pt-BR" noProof="0"/>
           </a:p>
@@ -3784,7 +3952,7 @@
             <a:pPr rtl="0"/>
             <a:fld id="{B036DDBC-F1EF-4D09-A533-5995BC167053}" type="datetime1">
               <a:rPr lang="pt-BR" noProof="0" smtClean="0"/>
-              <a:t>23/07/2026</a:t>
+              <a:t>04/08/2026</a:t>
             </a:fld>
             <a:endParaRPr lang="pt-BR" noProof="0"/>
           </a:p>
@@ -4077,7 +4245,7 @@
             <a:pPr rtl="0"/>
             <a:fld id="{DFFDDC01-A1CF-4C3A-BE96-FBC60101324D}" type="datetime1">
               <a:rPr lang="pt-BR" noProof="0" smtClean="0"/>
-              <a:t>23/07/2026</a:t>
+              <a:t>04/08/2026</a:t>
             </a:fld>
             <a:endParaRPr lang="pt-BR" noProof="0"/>
           </a:p>
@@ -4291,7 +4459,7 @@
             <a:pPr rtl="0"/>
             <a:fld id="{52266794-2CD5-4ED3-94F8-8B8DC65FDDE3}" type="datetime1">
               <a:rPr lang="pt-BR" noProof="0" smtClean="0"/>
-              <a:t>23/07/2026</a:t>
+              <a:t>04/08/2026</a:t>
             </a:fld>
             <a:endParaRPr lang="pt-BR" noProof="0"/>
           </a:p>
@@ -11004,6 +11172,1338 @@
 <file path=ppt/slides/slide44.xml><?xml version="1.0" encoding="utf-8"?>
 <p:sld xmlns:a="http://schemas.openxmlformats.org/drawingml/2006/main" xmlns:r="http://schemas.openxmlformats.org/officeDocument/2006/relationships" xmlns:p="http://schemas.openxmlformats.org/presentationml/2006/main">
   <p:cSld>
+    <p:spTree>
+      <p:nvGrpSpPr>
+        <p:cNvPr id="1" name="">
+          <a:extLst>
+            <a:ext uri="{FF2B5EF4-FFF2-40B4-BE49-F238E27FC236}">
+              <a16:creationId xmlns:a16="http://schemas.microsoft.com/office/drawing/2014/main" id="{03E6B827-7C25-688F-1A7E-AB10B8EDF9DF}"/>
+            </a:ext>
+          </a:extLst>
+        </p:cNvPr>
+        <p:cNvGrpSpPr/>
+        <p:nvPr/>
+      </p:nvGrpSpPr>
+      <p:grpSpPr>
+        <a:xfrm>
+          <a:off x="0" y="0"/>
+          <a:ext cx="0" cy="0"/>
+          <a:chOff x="0" y="0"/>
+          <a:chExt cx="0" cy="0"/>
+        </a:xfrm>
+      </p:grpSpPr>
+      <p:sp>
+        <p:nvSpPr>
+          <p:cNvPr id="2" name="Título 1">
+            <a:extLst>
+              <a:ext uri="{FF2B5EF4-FFF2-40B4-BE49-F238E27FC236}">
+                <a16:creationId xmlns:a16="http://schemas.microsoft.com/office/drawing/2014/main" id="{863CB46C-584B-AF9D-7924-C6197C5D36F7}"/>
+              </a:ext>
+            </a:extLst>
+          </p:cNvPr>
+          <p:cNvSpPr>
+            <a:spLocks noGrp="1"/>
+          </p:cNvSpPr>
+          <p:nvPr>
+            <p:ph type="title"/>
+          </p:nvPr>
+        </p:nvSpPr>
+        <p:spPr/>
+        <p:txBody>
+          <a:bodyPr/>
+          <a:lstStyle/>
+          <a:p>
+            <a:r>
+              <a:rPr lang="pt-BR" dirty="0"/>
+              <a:t>Modelo de referência </a:t>
+            </a:r>
+            <a:r>
+              <a:rPr lang="pt-BR" dirty="0" err="1"/>
+              <a:t>osi</a:t>
+            </a:r>
+            <a:endParaRPr lang="pt-BR" dirty="0"/>
+          </a:p>
+        </p:txBody>
+      </p:sp>
+      <p:pic>
+        <p:nvPicPr>
+          <p:cNvPr id="7" name="Imagem 6">
+            <a:extLst>
+              <a:ext uri="{FF2B5EF4-FFF2-40B4-BE49-F238E27FC236}">
+                <a16:creationId xmlns:a16="http://schemas.microsoft.com/office/drawing/2014/main" id="{DF0B3B46-488F-0919-2E31-DF3C39EDE853}"/>
+              </a:ext>
+            </a:extLst>
+          </p:cNvPr>
+          <p:cNvPicPr>
+            <a:picLocks noChangeAspect="1"/>
+          </p:cNvPicPr>
+          <p:nvPr/>
+        </p:nvPicPr>
+        <p:blipFill>
+          <a:blip r:embed="rId2"/>
+          <a:stretch>
+            <a:fillRect/>
+          </a:stretch>
+        </p:blipFill>
+        <p:spPr>
+          <a:xfrm>
+            <a:off x="4060504" y="1815832"/>
+            <a:ext cx="4070991" cy="4905008"/>
+          </a:xfrm>
+          <a:prstGeom prst="rect">
+            <a:avLst/>
+          </a:prstGeom>
+        </p:spPr>
+      </p:pic>
+    </p:spTree>
+    <p:extLst>
+      <p:ext uri="{BB962C8B-B14F-4D97-AF65-F5344CB8AC3E}">
+        <p14:creationId xmlns:p14="http://schemas.microsoft.com/office/powerpoint/2010/main" val="3788522929"/>
+      </p:ext>
+    </p:extLst>
+  </p:cSld>
+  <p:clrMapOvr>
+    <a:masterClrMapping/>
+  </p:clrMapOvr>
+</p:sld>
+</file>
+
+<file path=ppt/slides/slide45.xml><?xml version="1.0" encoding="utf-8"?>
+<p:sld xmlns:a="http://schemas.openxmlformats.org/drawingml/2006/main" xmlns:r="http://schemas.openxmlformats.org/officeDocument/2006/relationships" xmlns:p="http://schemas.openxmlformats.org/presentationml/2006/main">
+  <p:cSld>
+    <p:spTree>
+      <p:nvGrpSpPr>
+        <p:cNvPr id="1" name="">
+          <a:extLst>
+            <a:ext uri="{FF2B5EF4-FFF2-40B4-BE49-F238E27FC236}">
+              <a16:creationId xmlns:a16="http://schemas.microsoft.com/office/drawing/2014/main" id="{ABC86BA9-A944-96D1-04B3-0D60C97384E6}"/>
+            </a:ext>
+          </a:extLst>
+        </p:cNvPr>
+        <p:cNvGrpSpPr/>
+        <p:nvPr/>
+      </p:nvGrpSpPr>
+      <p:grpSpPr>
+        <a:xfrm>
+          <a:off x="0" y="0"/>
+          <a:ext cx="0" cy="0"/>
+          <a:chOff x="0" y="0"/>
+          <a:chExt cx="0" cy="0"/>
+        </a:xfrm>
+      </p:grpSpPr>
+      <p:sp>
+        <p:nvSpPr>
+          <p:cNvPr id="2" name="Título 1">
+            <a:extLst>
+              <a:ext uri="{FF2B5EF4-FFF2-40B4-BE49-F238E27FC236}">
+                <a16:creationId xmlns:a16="http://schemas.microsoft.com/office/drawing/2014/main" id="{D65B2C25-5C0A-456D-18FC-FA4281C20DAE}"/>
+              </a:ext>
+            </a:extLst>
+          </p:cNvPr>
+          <p:cNvSpPr>
+            <a:spLocks noGrp="1"/>
+          </p:cNvSpPr>
+          <p:nvPr>
+            <p:ph type="title"/>
+          </p:nvPr>
+        </p:nvSpPr>
+        <p:spPr/>
+        <p:txBody>
+          <a:bodyPr/>
+          <a:lstStyle/>
+          <a:p>
+            <a:r>
+              <a:rPr lang="pt-BR" dirty="0"/>
+              <a:t>Modelo de referência </a:t>
+            </a:r>
+            <a:r>
+              <a:rPr lang="pt-BR" dirty="0" err="1"/>
+              <a:t>osi</a:t>
+            </a:r>
+            <a:endParaRPr lang="pt-BR" dirty="0"/>
+          </a:p>
+        </p:txBody>
+      </p:sp>
+      <p:sp>
+        <p:nvSpPr>
+          <p:cNvPr id="3" name="Espaço Reservado para Conteúdo 2">
+            <a:extLst>
+              <a:ext uri="{FF2B5EF4-FFF2-40B4-BE49-F238E27FC236}">
+                <a16:creationId xmlns:a16="http://schemas.microsoft.com/office/drawing/2014/main" id="{0CE7787B-7413-0521-931D-A0083073501E}"/>
+              </a:ext>
+            </a:extLst>
+          </p:cNvPr>
+          <p:cNvSpPr>
+            <a:spLocks noGrp="1"/>
+          </p:cNvSpPr>
+          <p:nvPr>
+            <p:ph idx="1"/>
+          </p:nvPr>
+        </p:nvSpPr>
+        <p:spPr/>
+        <p:txBody>
+          <a:bodyPr/>
+          <a:lstStyle/>
+          <a:p>
+            <a:r>
+              <a:rPr lang="pt-BR" dirty="0"/>
+              <a:t>Camada Física</a:t>
+            </a:r>
+          </a:p>
+          <a:p>
+            <a:pPr lvl="1"/>
+            <a:r>
+              <a:rPr lang="pt-BR" dirty="0"/>
+              <a:t>Responsável pelos meios mecânicos, elétricos, funcionais</a:t>
+            </a:r>
+          </a:p>
+          <a:p>
+            <a:pPr lvl="1"/>
+            <a:r>
+              <a:rPr lang="pt-BR" dirty="0"/>
+              <a:t>Procedimentos necessários para ativar, manter e desativar conexões físicas usadas para transmitir bits entre entidades de enlace</a:t>
+            </a:r>
+          </a:p>
+          <a:p>
+            <a:pPr lvl="1"/>
+            <a:r>
+              <a:rPr lang="pt-BR" dirty="0"/>
+              <a:t>É ela que permite a ligação (conexão) entre duas máquinas, em uma conexão ponto-a-ponto ou várias em um canal broadcast (é um método de transmissão onde um único dispositivo envia dados para </a:t>
+            </a:r>
+            <a:r>
+              <a:rPr lang="pt-BR" b="1" dirty="0"/>
+              <a:t>todos os outros aparelhos conectados</a:t>
+            </a:r>
+            <a:r>
+              <a:rPr lang="pt-BR" dirty="0"/>
+              <a:t> na mesma rede local ao mesmo tempo)</a:t>
+            </a:r>
+          </a:p>
+          <a:p>
+            <a:endParaRPr lang="pt-BR" dirty="0"/>
+          </a:p>
+        </p:txBody>
+      </p:sp>
+    </p:spTree>
+    <p:extLst>
+      <p:ext uri="{BB962C8B-B14F-4D97-AF65-F5344CB8AC3E}">
+        <p14:creationId xmlns:p14="http://schemas.microsoft.com/office/powerpoint/2010/main" val="3888856219"/>
+      </p:ext>
+    </p:extLst>
+  </p:cSld>
+  <p:clrMapOvr>
+    <a:masterClrMapping/>
+  </p:clrMapOvr>
+</p:sld>
+</file>
+
+<file path=ppt/slides/slide46.xml><?xml version="1.0" encoding="utf-8"?>
+<p:sld xmlns:a="http://schemas.openxmlformats.org/drawingml/2006/main" xmlns:r="http://schemas.openxmlformats.org/officeDocument/2006/relationships" xmlns:p="http://schemas.openxmlformats.org/presentationml/2006/main">
+  <p:cSld>
+    <p:spTree>
+      <p:nvGrpSpPr>
+        <p:cNvPr id="1" name="">
+          <a:extLst>
+            <a:ext uri="{FF2B5EF4-FFF2-40B4-BE49-F238E27FC236}">
+              <a16:creationId xmlns:a16="http://schemas.microsoft.com/office/drawing/2014/main" id="{E56AB9F0-B8F4-AFB5-5491-4EF4A5E9BB9C}"/>
+            </a:ext>
+          </a:extLst>
+        </p:cNvPr>
+        <p:cNvGrpSpPr/>
+        <p:nvPr/>
+      </p:nvGrpSpPr>
+      <p:grpSpPr>
+        <a:xfrm>
+          <a:off x="0" y="0"/>
+          <a:ext cx="0" cy="0"/>
+          <a:chOff x="0" y="0"/>
+          <a:chExt cx="0" cy="0"/>
+        </a:xfrm>
+      </p:grpSpPr>
+      <p:sp>
+        <p:nvSpPr>
+          <p:cNvPr id="2" name="Título 1">
+            <a:extLst>
+              <a:ext uri="{FF2B5EF4-FFF2-40B4-BE49-F238E27FC236}">
+                <a16:creationId xmlns:a16="http://schemas.microsoft.com/office/drawing/2014/main" id="{F42F7E45-53FE-8FBE-7A93-882F4AB41222}"/>
+              </a:ext>
+            </a:extLst>
+          </p:cNvPr>
+          <p:cNvSpPr>
+            <a:spLocks noGrp="1"/>
+          </p:cNvSpPr>
+          <p:nvPr>
+            <p:ph type="title"/>
+          </p:nvPr>
+        </p:nvSpPr>
+        <p:spPr/>
+        <p:txBody>
+          <a:bodyPr/>
+          <a:lstStyle/>
+          <a:p>
+            <a:r>
+              <a:rPr lang="pt-BR" dirty="0"/>
+              <a:t>Modelo de referência </a:t>
+            </a:r>
+            <a:r>
+              <a:rPr lang="pt-BR" dirty="0" err="1"/>
+              <a:t>osi</a:t>
+            </a:r>
+            <a:endParaRPr lang="pt-BR" dirty="0"/>
+          </a:p>
+        </p:txBody>
+      </p:sp>
+      <p:sp>
+        <p:nvSpPr>
+          <p:cNvPr id="3" name="Espaço Reservado para Conteúdo 2">
+            <a:extLst>
+              <a:ext uri="{FF2B5EF4-FFF2-40B4-BE49-F238E27FC236}">
+                <a16:creationId xmlns:a16="http://schemas.microsoft.com/office/drawing/2014/main" id="{AFAAAF7D-4FE8-7C8A-3AE5-C5A5DE62B1F3}"/>
+              </a:ext>
+            </a:extLst>
+          </p:cNvPr>
+          <p:cNvSpPr>
+            <a:spLocks noGrp="1"/>
+          </p:cNvSpPr>
+          <p:nvPr>
+            <p:ph idx="1"/>
+          </p:nvPr>
+        </p:nvSpPr>
+        <p:spPr/>
+        <p:txBody>
+          <a:bodyPr/>
+          <a:lstStyle/>
+          <a:p>
+            <a:r>
+              <a:rPr lang="pt-BR" dirty="0"/>
+              <a:t>Camada de Enlace de Dados (Link)</a:t>
+            </a:r>
+          </a:p>
+          <a:p>
+            <a:pPr lvl="1"/>
+            <a:r>
+              <a:rPr lang="pt-BR" dirty="0"/>
+              <a:t>Tem como principal tarefa um canal de transmissão bruto em uma linha que pareça livre de erros</a:t>
+            </a:r>
+          </a:p>
+          <a:p>
+            <a:pPr lvl="1"/>
+            <a:r>
+              <a:rPr lang="pt-BR" dirty="0"/>
+              <a:t>Dispõe de funções e procedimentos necessários para estabelecer, manter e encerrar conexões de enlaces entre entidades de rede</a:t>
+            </a:r>
+          </a:p>
+          <a:p>
+            <a:pPr lvl="1"/>
+            <a:r>
+              <a:rPr lang="pt-BR" dirty="0"/>
+              <a:t>Controla o acesso aos meios físicos e compartilhados de transmissão</a:t>
+            </a:r>
+          </a:p>
+          <a:p>
+            <a:pPr lvl="1"/>
+            <a:r>
+              <a:rPr lang="pt-BR" dirty="0"/>
+              <a:t>Detecta a possibilidade de correção de erros da camada física</a:t>
+            </a:r>
+          </a:p>
+          <a:p>
+            <a:pPr lvl="1"/>
+            <a:r>
+              <a:rPr lang="pt-BR" dirty="0"/>
+              <a:t>Gerencia a comunicação entre duas ou mais máquinas ligadas via meio físico</a:t>
+            </a:r>
+          </a:p>
+          <a:p>
+            <a:endParaRPr lang="pt-BR" dirty="0"/>
+          </a:p>
+        </p:txBody>
+      </p:sp>
+    </p:spTree>
+    <p:extLst>
+      <p:ext uri="{BB962C8B-B14F-4D97-AF65-F5344CB8AC3E}">
+        <p14:creationId xmlns:p14="http://schemas.microsoft.com/office/powerpoint/2010/main" val="377226178"/>
+      </p:ext>
+    </p:extLst>
+  </p:cSld>
+  <p:clrMapOvr>
+    <a:masterClrMapping/>
+  </p:clrMapOvr>
+</p:sld>
+</file>
+
+<file path=ppt/slides/slide47.xml><?xml version="1.0" encoding="utf-8"?>
+<p:sld xmlns:a="http://schemas.openxmlformats.org/drawingml/2006/main" xmlns:r="http://schemas.openxmlformats.org/officeDocument/2006/relationships" xmlns:p="http://schemas.openxmlformats.org/presentationml/2006/main">
+  <p:cSld>
+    <p:spTree>
+      <p:nvGrpSpPr>
+        <p:cNvPr id="1" name="">
+          <a:extLst>
+            <a:ext uri="{FF2B5EF4-FFF2-40B4-BE49-F238E27FC236}">
+              <a16:creationId xmlns:a16="http://schemas.microsoft.com/office/drawing/2014/main" id="{E778D80F-D8EA-0C81-5460-776C22C73F27}"/>
+            </a:ext>
+          </a:extLst>
+        </p:cNvPr>
+        <p:cNvGrpSpPr/>
+        <p:nvPr/>
+      </p:nvGrpSpPr>
+      <p:grpSpPr>
+        <a:xfrm>
+          <a:off x="0" y="0"/>
+          <a:ext cx="0" cy="0"/>
+          <a:chOff x="0" y="0"/>
+          <a:chExt cx="0" cy="0"/>
+        </a:xfrm>
+      </p:grpSpPr>
+      <p:sp>
+        <p:nvSpPr>
+          <p:cNvPr id="2" name="Título 1">
+            <a:extLst>
+              <a:ext uri="{FF2B5EF4-FFF2-40B4-BE49-F238E27FC236}">
+                <a16:creationId xmlns:a16="http://schemas.microsoft.com/office/drawing/2014/main" id="{93653830-61BE-D411-8A7E-B187E5742AA9}"/>
+              </a:ext>
+            </a:extLst>
+          </p:cNvPr>
+          <p:cNvSpPr>
+            <a:spLocks noGrp="1"/>
+          </p:cNvSpPr>
+          <p:nvPr>
+            <p:ph type="title"/>
+          </p:nvPr>
+        </p:nvSpPr>
+        <p:spPr/>
+        <p:txBody>
+          <a:bodyPr/>
+          <a:lstStyle/>
+          <a:p>
+            <a:r>
+              <a:rPr lang="pt-BR" dirty="0"/>
+              <a:t>Modelo de referência </a:t>
+            </a:r>
+            <a:r>
+              <a:rPr lang="pt-BR" dirty="0" err="1"/>
+              <a:t>osi</a:t>
+            </a:r>
+            <a:endParaRPr lang="pt-BR" dirty="0"/>
+          </a:p>
+        </p:txBody>
+      </p:sp>
+      <p:sp>
+        <p:nvSpPr>
+          <p:cNvPr id="3" name="Espaço Reservado para Conteúdo 2">
+            <a:extLst>
+              <a:ext uri="{FF2B5EF4-FFF2-40B4-BE49-F238E27FC236}">
+                <a16:creationId xmlns:a16="http://schemas.microsoft.com/office/drawing/2014/main" id="{16ADDCE8-4D6D-F500-4876-182C221919D0}"/>
+              </a:ext>
+            </a:extLst>
+          </p:cNvPr>
+          <p:cNvSpPr>
+            <a:spLocks noGrp="1"/>
+          </p:cNvSpPr>
+          <p:nvPr>
+            <p:ph idx="1"/>
+          </p:nvPr>
+        </p:nvSpPr>
+        <p:spPr/>
+        <p:txBody>
+          <a:bodyPr/>
+          <a:lstStyle/>
+          <a:p>
+            <a:r>
+              <a:rPr lang="pt-BR" dirty="0"/>
+              <a:t>Camada de Rede</a:t>
+            </a:r>
+          </a:p>
+          <a:p>
+            <a:pPr lvl="1"/>
+            <a:r>
+              <a:rPr lang="pt-BR" dirty="0"/>
+              <a:t>É sua função o estabelecimento de conexão fim-a-fim entre estações de forma transparente ao usuário</a:t>
+            </a:r>
+          </a:p>
+          <a:p>
+            <a:pPr lvl="1"/>
+            <a:r>
+              <a:rPr lang="pt-BR" dirty="0"/>
+              <a:t>Outras funções:</a:t>
+            </a:r>
+          </a:p>
+          <a:p>
+            <a:pPr lvl="2"/>
+            <a:r>
+              <a:rPr lang="pt-BR" dirty="0"/>
+              <a:t>Multiplexação (é uma técnica usada em telecomunicação que junta vários sinais para passarem por um único cabo ou meio)</a:t>
+            </a:r>
+          </a:p>
+          <a:p>
+            <a:pPr lvl="2"/>
+            <a:r>
+              <a:rPr lang="pt-BR" dirty="0"/>
+              <a:t>Endereçamento</a:t>
+            </a:r>
+          </a:p>
+          <a:p>
+            <a:pPr lvl="2"/>
+            <a:r>
+              <a:rPr lang="pt-BR" dirty="0"/>
+              <a:t>Roteamento</a:t>
+            </a:r>
+          </a:p>
+          <a:p>
+            <a:pPr lvl="2"/>
+            <a:r>
+              <a:rPr lang="pt-BR" dirty="0"/>
+              <a:t>Responsável por nomes</a:t>
+            </a:r>
+          </a:p>
+          <a:p>
+            <a:pPr lvl="2"/>
+            <a:r>
+              <a:rPr lang="pt-BR" dirty="0"/>
+              <a:t>Rotas e roteamento</a:t>
+            </a:r>
+          </a:p>
+          <a:p>
+            <a:pPr lvl="2"/>
+            <a:r>
+              <a:rPr lang="pt-BR" dirty="0"/>
+              <a:t>Estabelecimento de gateways (é um ponto de conexão ou sistema intermediário que traduz dados entre redes, dispositivos ou formatos diferentes)</a:t>
+            </a:r>
+          </a:p>
+          <a:p>
+            <a:endParaRPr lang="pt-BR" dirty="0"/>
+          </a:p>
+        </p:txBody>
+      </p:sp>
+    </p:spTree>
+    <p:extLst>
+      <p:ext uri="{BB962C8B-B14F-4D97-AF65-F5344CB8AC3E}">
+        <p14:creationId xmlns:p14="http://schemas.microsoft.com/office/powerpoint/2010/main" val="2267116923"/>
+      </p:ext>
+    </p:extLst>
+  </p:cSld>
+  <p:clrMapOvr>
+    <a:masterClrMapping/>
+  </p:clrMapOvr>
+</p:sld>
+</file>
+
+<file path=ppt/slides/slide48.xml><?xml version="1.0" encoding="utf-8"?>
+<p:sld xmlns:a="http://schemas.openxmlformats.org/drawingml/2006/main" xmlns:r="http://schemas.openxmlformats.org/officeDocument/2006/relationships" xmlns:p="http://schemas.openxmlformats.org/presentationml/2006/main">
+  <p:cSld>
+    <p:spTree>
+      <p:nvGrpSpPr>
+        <p:cNvPr id="1" name="">
+          <a:extLst>
+            <a:ext uri="{FF2B5EF4-FFF2-40B4-BE49-F238E27FC236}">
+              <a16:creationId xmlns:a16="http://schemas.microsoft.com/office/drawing/2014/main" id="{67C173DF-E353-777B-886A-0C8848915DCD}"/>
+            </a:ext>
+          </a:extLst>
+        </p:cNvPr>
+        <p:cNvGrpSpPr/>
+        <p:nvPr/>
+      </p:nvGrpSpPr>
+      <p:grpSpPr>
+        <a:xfrm>
+          <a:off x="0" y="0"/>
+          <a:ext cx="0" cy="0"/>
+          <a:chOff x="0" y="0"/>
+          <a:chExt cx="0" cy="0"/>
+        </a:xfrm>
+      </p:grpSpPr>
+      <p:sp>
+        <p:nvSpPr>
+          <p:cNvPr id="2" name="Título 1">
+            <a:extLst>
+              <a:ext uri="{FF2B5EF4-FFF2-40B4-BE49-F238E27FC236}">
+                <a16:creationId xmlns:a16="http://schemas.microsoft.com/office/drawing/2014/main" id="{2373BC1E-62B6-0A21-D3F0-7579248A12C4}"/>
+              </a:ext>
+            </a:extLst>
+          </p:cNvPr>
+          <p:cNvSpPr>
+            <a:spLocks noGrp="1"/>
+          </p:cNvSpPr>
+          <p:nvPr>
+            <p:ph type="title"/>
+          </p:nvPr>
+        </p:nvSpPr>
+        <p:spPr/>
+        <p:txBody>
+          <a:bodyPr/>
+          <a:lstStyle/>
+          <a:p>
+            <a:r>
+              <a:rPr lang="pt-BR" dirty="0"/>
+              <a:t>Modelo de referência </a:t>
+            </a:r>
+            <a:r>
+              <a:rPr lang="pt-BR" dirty="0" err="1"/>
+              <a:t>osi</a:t>
+            </a:r>
+            <a:endParaRPr lang="pt-BR" dirty="0"/>
+          </a:p>
+        </p:txBody>
+      </p:sp>
+      <p:sp>
+        <p:nvSpPr>
+          <p:cNvPr id="3" name="Espaço Reservado para Conteúdo 2">
+            <a:extLst>
+              <a:ext uri="{FF2B5EF4-FFF2-40B4-BE49-F238E27FC236}">
+                <a16:creationId xmlns:a16="http://schemas.microsoft.com/office/drawing/2014/main" id="{B6699D3F-12A8-C771-4BE8-72A7A13E9EFA}"/>
+              </a:ext>
+            </a:extLst>
+          </p:cNvPr>
+          <p:cNvSpPr>
+            <a:spLocks noGrp="1"/>
+          </p:cNvSpPr>
+          <p:nvPr>
+            <p:ph idx="1"/>
+          </p:nvPr>
+        </p:nvSpPr>
+        <p:spPr/>
+        <p:txBody>
+          <a:bodyPr/>
+          <a:lstStyle/>
+          <a:p>
+            <a:r>
+              <a:rPr lang="pt-BR" dirty="0"/>
+              <a:t>Camada de Transporte</a:t>
+            </a:r>
+          </a:p>
+          <a:p>
+            <a:pPr lvl="1"/>
+            <a:r>
+              <a:rPr lang="pt-BR" dirty="0"/>
+              <a:t>Sua função básica é aceitar dados da camada acima dela, dividi-los em dados unidades menores, repassar à camada de rede e assegurar que todos os fragmentos chegarão corretamente à outra extremidade</a:t>
+            </a:r>
+          </a:p>
+          <a:p>
+            <a:pPr lvl="1"/>
+            <a:r>
+              <a:rPr lang="pt-BR" dirty="0"/>
+              <a:t>Permite a gestão da comunicação fim-a-fim entre duas máquinas conectadas via rede</a:t>
+            </a:r>
+          </a:p>
+          <a:p>
+            <a:pPr lvl="1"/>
+            <a:endParaRPr lang="pt-BR" dirty="0"/>
+          </a:p>
+        </p:txBody>
+      </p:sp>
+    </p:spTree>
+    <p:extLst>
+      <p:ext uri="{BB962C8B-B14F-4D97-AF65-F5344CB8AC3E}">
+        <p14:creationId xmlns:p14="http://schemas.microsoft.com/office/powerpoint/2010/main" val="4170713381"/>
+      </p:ext>
+    </p:extLst>
+  </p:cSld>
+  <p:clrMapOvr>
+    <a:masterClrMapping/>
+  </p:clrMapOvr>
+</p:sld>
+</file>
+
+<file path=ppt/slides/slide49.xml><?xml version="1.0" encoding="utf-8"?>
+<p:sld xmlns:a="http://schemas.openxmlformats.org/drawingml/2006/main" xmlns:r="http://schemas.openxmlformats.org/officeDocument/2006/relationships" xmlns:p="http://schemas.openxmlformats.org/presentationml/2006/main">
+  <p:cSld>
+    <p:spTree>
+      <p:nvGrpSpPr>
+        <p:cNvPr id="1" name="">
+          <a:extLst>
+            <a:ext uri="{FF2B5EF4-FFF2-40B4-BE49-F238E27FC236}">
+              <a16:creationId xmlns:a16="http://schemas.microsoft.com/office/drawing/2014/main" id="{2D70819F-8447-5279-09C9-9122AB0814F6}"/>
+            </a:ext>
+          </a:extLst>
+        </p:cNvPr>
+        <p:cNvGrpSpPr/>
+        <p:nvPr/>
+      </p:nvGrpSpPr>
+      <p:grpSpPr>
+        <a:xfrm>
+          <a:off x="0" y="0"/>
+          <a:ext cx="0" cy="0"/>
+          <a:chOff x="0" y="0"/>
+          <a:chExt cx="0" cy="0"/>
+        </a:xfrm>
+      </p:grpSpPr>
+      <p:sp>
+        <p:nvSpPr>
+          <p:cNvPr id="2" name="Título 1">
+            <a:extLst>
+              <a:ext uri="{FF2B5EF4-FFF2-40B4-BE49-F238E27FC236}">
+                <a16:creationId xmlns:a16="http://schemas.microsoft.com/office/drawing/2014/main" id="{04C0C69D-7334-ABA2-A809-F2C9E3BD9DDB}"/>
+              </a:ext>
+            </a:extLst>
+          </p:cNvPr>
+          <p:cNvSpPr>
+            <a:spLocks noGrp="1"/>
+          </p:cNvSpPr>
+          <p:nvPr>
+            <p:ph type="title"/>
+          </p:nvPr>
+        </p:nvSpPr>
+        <p:spPr/>
+        <p:txBody>
+          <a:bodyPr/>
+          <a:lstStyle/>
+          <a:p>
+            <a:r>
+              <a:rPr lang="pt-BR" dirty="0"/>
+              <a:t>Modelo de referência </a:t>
+            </a:r>
+            <a:r>
+              <a:rPr lang="pt-BR" dirty="0" err="1"/>
+              <a:t>osi</a:t>
+            </a:r>
+            <a:endParaRPr lang="pt-BR" dirty="0"/>
+          </a:p>
+        </p:txBody>
+      </p:sp>
+      <p:sp>
+        <p:nvSpPr>
+          <p:cNvPr id="3" name="Espaço Reservado para Conteúdo 2">
+            <a:extLst>
+              <a:ext uri="{FF2B5EF4-FFF2-40B4-BE49-F238E27FC236}">
+                <a16:creationId xmlns:a16="http://schemas.microsoft.com/office/drawing/2014/main" id="{F9082003-8D04-F554-B74E-BFDEB041936A}"/>
+              </a:ext>
+            </a:extLst>
+          </p:cNvPr>
+          <p:cNvSpPr>
+            <a:spLocks noGrp="1"/>
+          </p:cNvSpPr>
+          <p:nvPr>
+            <p:ph idx="1"/>
+          </p:nvPr>
+        </p:nvSpPr>
+        <p:spPr/>
+        <p:txBody>
+          <a:bodyPr/>
+          <a:lstStyle/>
+          <a:p>
+            <a:r>
+              <a:rPr lang="pt-BR" dirty="0"/>
+              <a:t>Camada de Sessão</a:t>
+            </a:r>
+          </a:p>
+          <a:p>
+            <a:pPr lvl="1"/>
+            <a:r>
+              <a:rPr lang="pt-BR" dirty="0"/>
+              <a:t>Fornecimento de serviço para o estabelecimento de uma conexão de sessão entre duas entidades de apresentação</a:t>
+            </a:r>
+          </a:p>
+          <a:p>
+            <a:pPr lvl="1"/>
+            <a:r>
+              <a:rPr lang="pt-BR" dirty="0"/>
+              <a:t>Permite que usuários de diferentes máquinas estabeleçam sessões entre eles.</a:t>
+            </a:r>
+          </a:p>
+          <a:p>
+            <a:pPr lvl="1"/>
+            <a:r>
+              <a:rPr lang="pt-BR" dirty="0"/>
+              <a:t>Serviços</a:t>
+            </a:r>
+          </a:p>
+          <a:p>
+            <a:pPr lvl="2"/>
+            <a:r>
+              <a:rPr lang="pt-BR" dirty="0"/>
+              <a:t>Controle de diálogo</a:t>
+            </a:r>
+          </a:p>
+          <a:p>
+            <a:pPr lvl="2"/>
+            <a:r>
+              <a:rPr lang="pt-BR" dirty="0"/>
+              <a:t>Gerenciamento do token e</a:t>
+            </a:r>
+          </a:p>
+          <a:p>
+            <a:pPr lvl="2"/>
+            <a:r>
+              <a:rPr lang="pt-BR" dirty="0"/>
+              <a:t>Sincronização</a:t>
+            </a:r>
+          </a:p>
+          <a:p>
+            <a:pPr lvl="2"/>
+            <a:r>
+              <a:rPr lang="pt-BR" dirty="0"/>
+              <a:t>Segurança via mecanismo de criptografia</a:t>
+            </a:r>
+          </a:p>
+          <a:p>
+            <a:pPr lvl="2"/>
+            <a:r>
+              <a:rPr lang="pt-BR" dirty="0"/>
+              <a:t>Gerência de sessão</a:t>
+            </a:r>
+          </a:p>
+          <a:p>
+            <a:pPr lvl="1"/>
+            <a:endParaRPr lang="pt-BR" dirty="0"/>
+          </a:p>
+        </p:txBody>
+      </p:sp>
+    </p:spTree>
+    <p:extLst>
+      <p:ext uri="{BB962C8B-B14F-4D97-AF65-F5344CB8AC3E}">
+        <p14:creationId xmlns:p14="http://schemas.microsoft.com/office/powerpoint/2010/main" val="3321898828"/>
+      </p:ext>
+    </p:extLst>
+  </p:cSld>
+  <p:clrMapOvr>
+    <a:masterClrMapping/>
+  </p:clrMapOvr>
+</p:sld>
+</file>
+
+<file path=ppt/slides/slide5.xml><?xml version="1.0" encoding="utf-8"?>
+<p:sld xmlns:a="http://schemas.openxmlformats.org/drawingml/2006/main" xmlns:r="http://schemas.openxmlformats.org/officeDocument/2006/relationships" xmlns:p="http://schemas.openxmlformats.org/presentationml/2006/main">
+  <p:cSld>
+    <p:spTree>
+      <p:nvGrpSpPr>
+        <p:cNvPr id="1" name="">
+          <a:extLst>
+            <a:ext uri="{FF2B5EF4-FFF2-40B4-BE49-F238E27FC236}">
+              <a16:creationId xmlns:a16="http://schemas.microsoft.com/office/drawing/2014/main" id="{E648C740-AB91-8085-9D44-34376A769F66}"/>
+            </a:ext>
+          </a:extLst>
+        </p:cNvPr>
+        <p:cNvGrpSpPr/>
+        <p:nvPr/>
+      </p:nvGrpSpPr>
+      <p:grpSpPr>
+        <a:xfrm>
+          <a:off x="0" y="0"/>
+          <a:ext cx="0" cy="0"/>
+          <a:chOff x="0" y="0"/>
+          <a:chExt cx="0" cy="0"/>
+        </a:xfrm>
+      </p:grpSpPr>
+      <p:sp>
+        <p:nvSpPr>
+          <p:cNvPr id="2" name="Título 1">
+            <a:extLst>
+              <a:ext uri="{FF2B5EF4-FFF2-40B4-BE49-F238E27FC236}">
+                <a16:creationId xmlns:a16="http://schemas.microsoft.com/office/drawing/2014/main" id="{65585194-B9C6-7A57-5D9E-46F7B36CD00C}"/>
+              </a:ext>
+            </a:extLst>
+          </p:cNvPr>
+          <p:cNvSpPr>
+            <a:spLocks noGrp="1"/>
+          </p:cNvSpPr>
+          <p:nvPr>
+            <p:ph type="title"/>
+          </p:nvPr>
+        </p:nvSpPr>
+        <p:spPr/>
+        <p:txBody>
+          <a:bodyPr/>
+          <a:lstStyle/>
+          <a:p>
+            <a:r>
+              <a:rPr lang="pt-BR" dirty="0"/>
+              <a:t>Dados que podem ser transmitidos</a:t>
+            </a:r>
+          </a:p>
+        </p:txBody>
+      </p:sp>
+      <p:sp>
+        <p:nvSpPr>
+          <p:cNvPr id="3" name="Espaço Reservado para Conteúdo 2">
+            <a:extLst>
+              <a:ext uri="{FF2B5EF4-FFF2-40B4-BE49-F238E27FC236}">
+                <a16:creationId xmlns:a16="http://schemas.microsoft.com/office/drawing/2014/main" id="{826CCFED-089D-6B1D-833A-6AA35E4C33F3}"/>
+              </a:ext>
+            </a:extLst>
+          </p:cNvPr>
+          <p:cNvSpPr>
+            <a:spLocks noGrp="1"/>
+          </p:cNvSpPr>
+          <p:nvPr>
+            <p:ph idx="1"/>
+          </p:nvPr>
+        </p:nvSpPr>
+        <p:spPr>
+          <a:xfrm>
+            <a:off x="1395663" y="2180496"/>
+            <a:ext cx="10215144" cy="3678303"/>
+          </a:xfrm>
+        </p:spPr>
+        <p:txBody>
+          <a:bodyPr>
+            <a:normAutofit/>
+          </a:bodyPr>
+          <a:lstStyle/>
+          <a:p>
+            <a:r>
+              <a:rPr lang="pt-BR" dirty="0"/>
+              <a:t>os computadores processam informações calculando bits que podem ser convertidos em impulsos elétricos, portanto </a:t>
+            </a:r>
+            <a:r>
+              <a:rPr lang="pt-BR" b="1" dirty="0"/>
+              <a:t>toda informação que pode ser processada em bits, pode ser transmitida em uma rede</a:t>
+            </a:r>
+            <a:r>
+              <a:rPr lang="pt-BR" dirty="0"/>
+              <a:t>. </a:t>
+            </a:r>
+          </a:p>
+          <a:p>
+            <a:r>
+              <a:rPr lang="pt-BR" dirty="0"/>
+              <a:t>Sendo assim, o que não pode?</a:t>
+            </a:r>
+            <a:br>
+              <a:rPr lang="pt-BR" dirty="0"/>
+            </a:br>
+            <a:endParaRPr lang="pt-BR" sz="2400" dirty="0"/>
+          </a:p>
+        </p:txBody>
+      </p:sp>
+    </p:spTree>
+    <p:extLst>
+      <p:ext uri="{BB962C8B-B14F-4D97-AF65-F5344CB8AC3E}">
+        <p14:creationId xmlns:p14="http://schemas.microsoft.com/office/powerpoint/2010/main" val="459814593"/>
+      </p:ext>
+    </p:extLst>
+  </p:cSld>
+  <p:clrMapOvr>
+    <a:masterClrMapping/>
+  </p:clrMapOvr>
+</p:sld>
+</file>
+
+<file path=ppt/slides/slide50.xml><?xml version="1.0" encoding="utf-8"?>
+<p:sld xmlns:a="http://schemas.openxmlformats.org/drawingml/2006/main" xmlns:r="http://schemas.openxmlformats.org/officeDocument/2006/relationships" xmlns:p="http://schemas.openxmlformats.org/presentationml/2006/main">
+  <p:cSld>
+    <p:spTree>
+      <p:nvGrpSpPr>
+        <p:cNvPr id="1" name="">
+          <a:extLst>
+            <a:ext uri="{FF2B5EF4-FFF2-40B4-BE49-F238E27FC236}">
+              <a16:creationId xmlns:a16="http://schemas.microsoft.com/office/drawing/2014/main" id="{7A7D87F9-DEBC-F3F9-76C2-4EED5D05159E}"/>
+            </a:ext>
+          </a:extLst>
+        </p:cNvPr>
+        <p:cNvGrpSpPr/>
+        <p:nvPr/>
+      </p:nvGrpSpPr>
+      <p:grpSpPr>
+        <a:xfrm>
+          <a:off x="0" y="0"/>
+          <a:ext cx="0" cy="0"/>
+          <a:chOff x="0" y="0"/>
+          <a:chExt cx="0" cy="0"/>
+        </a:xfrm>
+      </p:grpSpPr>
+      <p:sp>
+        <p:nvSpPr>
+          <p:cNvPr id="2" name="Título 1">
+            <a:extLst>
+              <a:ext uri="{FF2B5EF4-FFF2-40B4-BE49-F238E27FC236}">
+                <a16:creationId xmlns:a16="http://schemas.microsoft.com/office/drawing/2014/main" id="{71C6469B-B965-DDBD-2293-989DEDCDE12E}"/>
+              </a:ext>
+            </a:extLst>
+          </p:cNvPr>
+          <p:cNvSpPr>
+            <a:spLocks noGrp="1"/>
+          </p:cNvSpPr>
+          <p:nvPr>
+            <p:ph type="title"/>
+          </p:nvPr>
+        </p:nvSpPr>
+        <p:spPr/>
+        <p:txBody>
+          <a:bodyPr/>
+          <a:lstStyle/>
+          <a:p>
+            <a:r>
+              <a:rPr lang="pt-BR" dirty="0"/>
+              <a:t>Modelo de referência </a:t>
+            </a:r>
+            <a:r>
+              <a:rPr lang="pt-BR" dirty="0" err="1"/>
+              <a:t>osi</a:t>
+            </a:r>
+            <a:endParaRPr lang="pt-BR" dirty="0"/>
+          </a:p>
+        </p:txBody>
+      </p:sp>
+      <p:sp>
+        <p:nvSpPr>
+          <p:cNvPr id="3" name="Espaço Reservado para Conteúdo 2">
+            <a:extLst>
+              <a:ext uri="{FF2B5EF4-FFF2-40B4-BE49-F238E27FC236}">
+                <a16:creationId xmlns:a16="http://schemas.microsoft.com/office/drawing/2014/main" id="{E06F2848-2FF1-B49C-BF23-98B1A760BFE9}"/>
+              </a:ext>
+            </a:extLst>
+          </p:cNvPr>
+          <p:cNvSpPr>
+            <a:spLocks noGrp="1"/>
+          </p:cNvSpPr>
+          <p:nvPr>
+            <p:ph idx="1"/>
+          </p:nvPr>
+        </p:nvSpPr>
+        <p:spPr/>
+        <p:txBody>
+          <a:bodyPr/>
+          <a:lstStyle/>
+          <a:p>
+            <a:r>
+              <a:rPr lang="pt-BR" dirty="0"/>
+              <a:t>Camada de Apresentação</a:t>
+            </a:r>
+          </a:p>
+          <a:p>
+            <a:pPr lvl="1"/>
+            <a:r>
+              <a:rPr lang="pt-BR" dirty="0"/>
+              <a:t>Está relacionada com a sintaxe das informações transmitidas</a:t>
+            </a:r>
+          </a:p>
+          <a:p>
+            <a:pPr lvl="1"/>
+            <a:r>
+              <a:rPr lang="pt-BR" dirty="0"/>
+              <a:t>Mecanismo de conversão de dados locais para um formato universal</a:t>
+            </a:r>
+          </a:p>
+          <a:p>
+            <a:pPr lvl="1"/>
+            <a:endParaRPr lang="pt-BR" dirty="0"/>
+          </a:p>
+        </p:txBody>
+      </p:sp>
+    </p:spTree>
+    <p:extLst>
+      <p:ext uri="{BB962C8B-B14F-4D97-AF65-F5344CB8AC3E}">
+        <p14:creationId xmlns:p14="http://schemas.microsoft.com/office/powerpoint/2010/main" val="2625125890"/>
+      </p:ext>
+    </p:extLst>
+  </p:cSld>
+  <p:clrMapOvr>
+    <a:masterClrMapping/>
+  </p:clrMapOvr>
+</p:sld>
+</file>
+
+<file path=ppt/slides/slide51.xml><?xml version="1.0" encoding="utf-8"?>
+<p:sld xmlns:a="http://schemas.openxmlformats.org/drawingml/2006/main" xmlns:r="http://schemas.openxmlformats.org/officeDocument/2006/relationships" xmlns:p="http://schemas.openxmlformats.org/presentationml/2006/main">
+  <p:cSld>
+    <p:spTree>
+      <p:nvGrpSpPr>
+        <p:cNvPr id="1" name="">
+          <a:extLst>
+            <a:ext uri="{FF2B5EF4-FFF2-40B4-BE49-F238E27FC236}">
+              <a16:creationId xmlns:a16="http://schemas.microsoft.com/office/drawing/2014/main" id="{3912A5E5-013E-478D-0A60-0649A7351D4E}"/>
+            </a:ext>
+          </a:extLst>
+        </p:cNvPr>
+        <p:cNvGrpSpPr/>
+        <p:nvPr/>
+      </p:nvGrpSpPr>
+      <p:grpSpPr>
+        <a:xfrm>
+          <a:off x="0" y="0"/>
+          <a:ext cx="0" cy="0"/>
+          <a:chOff x="0" y="0"/>
+          <a:chExt cx="0" cy="0"/>
+        </a:xfrm>
+      </p:grpSpPr>
+      <p:sp>
+        <p:nvSpPr>
+          <p:cNvPr id="2" name="Título 1">
+            <a:extLst>
+              <a:ext uri="{FF2B5EF4-FFF2-40B4-BE49-F238E27FC236}">
+                <a16:creationId xmlns:a16="http://schemas.microsoft.com/office/drawing/2014/main" id="{2028D6C3-9678-3D74-E49B-42E0BD79CE34}"/>
+              </a:ext>
+            </a:extLst>
+          </p:cNvPr>
+          <p:cNvSpPr>
+            <a:spLocks noGrp="1"/>
+          </p:cNvSpPr>
+          <p:nvPr>
+            <p:ph type="title"/>
+          </p:nvPr>
+        </p:nvSpPr>
+        <p:spPr/>
+        <p:txBody>
+          <a:bodyPr/>
+          <a:lstStyle/>
+          <a:p>
+            <a:r>
+              <a:rPr lang="pt-BR" dirty="0"/>
+              <a:t>Modelo de referência </a:t>
+            </a:r>
+            <a:r>
+              <a:rPr lang="pt-BR" dirty="0" err="1"/>
+              <a:t>osi</a:t>
+            </a:r>
+            <a:endParaRPr lang="pt-BR" dirty="0"/>
+          </a:p>
+        </p:txBody>
+      </p:sp>
+      <p:sp>
+        <p:nvSpPr>
+          <p:cNvPr id="3" name="Espaço Reservado para Conteúdo 2">
+            <a:extLst>
+              <a:ext uri="{FF2B5EF4-FFF2-40B4-BE49-F238E27FC236}">
+                <a16:creationId xmlns:a16="http://schemas.microsoft.com/office/drawing/2014/main" id="{229D6C34-71D6-9C78-E2C4-73BABFE343C8}"/>
+              </a:ext>
+            </a:extLst>
+          </p:cNvPr>
+          <p:cNvSpPr>
+            <a:spLocks noGrp="1"/>
+          </p:cNvSpPr>
+          <p:nvPr>
+            <p:ph idx="1"/>
+          </p:nvPr>
+        </p:nvSpPr>
+        <p:spPr/>
+        <p:txBody>
+          <a:bodyPr/>
+          <a:lstStyle/>
+          <a:p>
+            <a:r>
+              <a:rPr lang="pt-BR" dirty="0"/>
+              <a:t>Camada de Aplicação</a:t>
+            </a:r>
+          </a:p>
+          <a:p>
+            <a:pPr lvl="1"/>
+            <a:r>
+              <a:rPr lang="pt-BR" dirty="0"/>
+              <a:t>Principal propósito é servir como uma janela entre os usuários de comunicação do ambiente OSI</a:t>
+            </a:r>
+          </a:p>
+          <a:p>
+            <a:pPr lvl="1"/>
+            <a:r>
+              <a:rPr lang="pt-BR" dirty="0"/>
+              <a:t>É nela que identifica-se os parceiros na comunicação (por nome ou por endereço)</a:t>
+            </a:r>
+          </a:p>
+          <a:p>
+            <a:pPr lvl="1"/>
+            <a:r>
+              <a:rPr lang="pt-BR" dirty="0"/>
+              <a:t>Determina a qualidade mínima aceitável para o serviço</a:t>
+            </a:r>
+          </a:p>
+          <a:p>
+            <a:pPr lvl="1"/>
+            <a:r>
+              <a:rPr lang="pt-BR" dirty="0"/>
+              <a:t>Acesso a recursos como transferência de arquivos, correio eletrônico, gerenciamento de redes </a:t>
+            </a:r>
+            <a:r>
+              <a:rPr lang="pt-BR" dirty="0" err="1"/>
+              <a:t>etc</a:t>
+            </a:r>
+            <a:endParaRPr lang="pt-BR" dirty="0"/>
+          </a:p>
+          <a:p>
+            <a:pPr lvl="1"/>
+            <a:r>
+              <a:rPr lang="pt-BR" dirty="0"/>
+              <a:t>Conjunto de especificações de protocolos</a:t>
+            </a:r>
+          </a:p>
+          <a:p>
+            <a:pPr lvl="1"/>
+            <a:endParaRPr lang="pt-BR" dirty="0"/>
+          </a:p>
+        </p:txBody>
+      </p:sp>
+    </p:spTree>
+    <p:extLst>
+      <p:ext uri="{BB962C8B-B14F-4D97-AF65-F5344CB8AC3E}">
+        <p14:creationId xmlns:p14="http://schemas.microsoft.com/office/powerpoint/2010/main" val="1142326940"/>
+      </p:ext>
+    </p:extLst>
+  </p:cSld>
+  <p:clrMapOvr>
+    <a:masterClrMapping/>
+  </p:clrMapOvr>
+</p:sld>
+</file>
+
+<file path=ppt/slides/slide52.xml><?xml version="1.0" encoding="utf-8"?>
+<p:sld xmlns:a="http://schemas.openxmlformats.org/drawingml/2006/main" xmlns:r="http://schemas.openxmlformats.org/officeDocument/2006/relationships" xmlns:p="http://schemas.openxmlformats.org/presentationml/2006/main">
+  <p:cSld>
+    <p:spTree>
+      <p:nvGrpSpPr>
+        <p:cNvPr id="1" name="">
+          <a:extLst>
+            <a:ext uri="{FF2B5EF4-FFF2-40B4-BE49-F238E27FC236}">
+              <a16:creationId xmlns:a16="http://schemas.microsoft.com/office/drawing/2014/main" id="{B0F391BC-98F2-8B72-3D18-382D987E0EBB}"/>
+            </a:ext>
+          </a:extLst>
+        </p:cNvPr>
+        <p:cNvGrpSpPr/>
+        <p:nvPr/>
+      </p:nvGrpSpPr>
+      <p:grpSpPr>
+        <a:xfrm>
+          <a:off x="0" y="0"/>
+          <a:ext cx="0" cy="0"/>
+          <a:chOff x="0" y="0"/>
+          <a:chExt cx="0" cy="0"/>
+        </a:xfrm>
+      </p:grpSpPr>
+      <p:sp>
+        <p:nvSpPr>
+          <p:cNvPr id="2" name="Título 1">
+            <a:extLst>
+              <a:ext uri="{FF2B5EF4-FFF2-40B4-BE49-F238E27FC236}">
+                <a16:creationId xmlns:a16="http://schemas.microsoft.com/office/drawing/2014/main" id="{6C7B83CE-0608-D6E7-C94D-D56D75CA1078}"/>
+              </a:ext>
+            </a:extLst>
+          </p:cNvPr>
+          <p:cNvSpPr>
+            <a:spLocks noGrp="1"/>
+          </p:cNvSpPr>
+          <p:nvPr>
+            <p:ph type="title"/>
+          </p:nvPr>
+        </p:nvSpPr>
+        <p:spPr/>
+        <p:txBody>
+          <a:bodyPr/>
+          <a:lstStyle/>
+          <a:p>
+            <a:r>
+              <a:rPr lang="pt-BR" dirty="0"/>
+              <a:t>Modelo de referência </a:t>
+            </a:r>
+            <a:r>
+              <a:rPr lang="pt-BR" dirty="0" err="1"/>
+              <a:t>osi</a:t>
+            </a:r>
+            <a:endParaRPr lang="pt-BR" dirty="0"/>
+          </a:p>
+        </p:txBody>
+      </p:sp>
+      <p:sp>
+        <p:nvSpPr>
+          <p:cNvPr id="3" name="Espaço Reservado para Conteúdo 2">
+            <a:extLst>
+              <a:ext uri="{FF2B5EF4-FFF2-40B4-BE49-F238E27FC236}">
+                <a16:creationId xmlns:a16="http://schemas.microsoft.com/office/drawing/2014/main" id="{11543264-492C-AD2C-FCAB-5CDD725DC939}"/>
+              </a:ext>
+            </a:extLst>
+          </p:cNvPr>
+          <p:cNvSpPr>
+            <a:spLocks noGrp="1"/>
+          </p:cNvSpPr>
+          <p:nvPr>
+            <p:ph idx="1"/>
+          </p:nvPr>
+        </p:nvSpPr>
+        <p:spPr/>
+        <p:txBody>
+          <a:bodyPr>
+            <a:normAutofit fontScale="92500" lnSpcReduction="10000"/>
+          </a:bodyPr>
+          <a:lstStyle/>
+          <a:p>
+            <a:r>
+              <a:rPr lang="pt-BR" dirty="0"/>
+              <a:t>Quais as vantagens dessa hierarquia</a:t>
+            </a:r>
+          </a:p>
+          <a:p>
+            <a:pPr lvl="1"/>
+            <a:r>
+              <a:rPr lang="pt-BR" b="1" dirty="0"/>
+              <a:t>Simplificação:</a:t>
+            </a:r>
+            <a:r>
+              <a:rPr lang="pt-BR" dirty="0"/>
+              <a:t> a complexidade global é diminuída pelas abstrações, ou seja, não interessa a uma determinada camada como as demais implementam o fornecimento de determinadas funções e serviços; em outras palavras, cada camada cuida de si. </a:t>
+            </a:r>
+          </a:p>
+          <a:p>
+            <a:pPr lvl="1"/>
+            <a:r>
+              <a:rPr lang="pt-BR" b="1" dirty="0"/>
+              <a:t>Independência das camadas: </a:t>
+            </a:r>
+            <a:r>
+              <a:rPr lang="pt-BR" dirty="0"/>
+              <a:t>quando o modelo OSI divide-as em níveis ou camadas em hierarquia, associa a elas a liberdade de execução; dessa forma, cada camada preocupa-se unicamente em utilizar os serviços da inferior e fornecer os seus serviços à superior, independentemente do protocolo utilizado para elaborar o serviço. </a:t>
+            </a:r>
+          </a:p>
+          <a:p>
+            <a:pPr lvl="1"/>
+            <a:r>
+              <a:rPr lang="pt-BR" b="1" dirty="0"/>
+              <a:t>Facilidade na manutenção: </a:t>
+            </a:r>
+            <a:r>
+              <a:rPr lang="pt-BR" dirty="0"/>
+              <a:t>uma camada pode sofrer alterações sem alterar as demais, desde que não sejam modificados os serviços prestados por ela. </a:t>
+            </a:r>
+          </a:p>
+          <a:p>
+            <a:pPr lvl="1"/>
+            <a:r>
+              <a:rPr lang="pt-BR" b="1" dirty="0"/>
+              <a:t>Facilidade na evolução</a:t>
+            </a:r>
+            <a:r>
+              <a:rPr lang="pt-BR" dirty="0"/>
+              <a:t>: novos serviços, aplicações ou funções </a:t>
+            </a:r>
+            <a:r>
+              <a:rPr lang="pt-BR"/>
+              <a:t>podem ser implementados </a:t>
+            </a:r>
+            <a:r>
+              <a:rPr lang="pt-BR" dirty="0"/>
+              <a:t>em uma determinada camada apropriada, aproveitando serviços já fornecidos pelas inferiores </a:t>
+            </a:r>
+            <a:br>
+              <a:rPr lang="pt-BR" dirty="0"/>
+            </a:br>
+            <a:br>
+              <a:rPr lang="pt-BR" dirty="0"/>
+            </a:br>
+            <a:br>
+              <a:rPr lang="pt-BR" dirty="0"/>
+            </a:br>
+            <a:br>
+              <a:rPr lang="pt-BR" dirty="0"/>
+            </a:br>
+            <a:endParaRPr lang="pt-BR" dirty="0"/>
+          </a:p>
+          <a:p>
+            <a:pPr lvl="1"/>
+            <a:endParaRPr lang="pt-BR" dirty="0"/>
+          </a:p>
+        </p:txBody>
+      </p:sp>
+    </p:spTree>
+    <p:extLst>
+      <p:ext uri="{BB962C8B-B14F-4D97-AF65-F5344CB8AC3E}">
+        <p14:creationId xmlns:p14="http://schemas.microsoft.com/office/powerpoint/2010/main" val="3792217234"/>
+      </p:ext>
+    </p:extLst>
+  </p:cSld>
+  <p:clrMapOvr>
+    <a:masterClrMapping/>
+  </p:clrMapOvr>
+</p:sld>
+</file>
+
+<file path=ppt/slides/slide53.xml><?xml version="1.0" encoding="utf-8"?>
+<p:sld xmlns:a="http://schemas.openxmlformats.org/drawingml/2006/main" xmlns:r="http://schemas.openxmlformats.org/officeDocument/2006/relationships" xmlns:p="http://schemas.openxmlformats.org/presentationml/2006/main">
+  <p:cSld>
     <p:bg>
       <p:bgPr>
         <a:solidFill>
@@ -11432,123 +12932,6 @@
     <p:extLst>
       <p:ext uri="{BB962C8B-B14F-4D97-AF65-F5344CB8AC3E}">
         <p14:creationId xmlns:p14="http://schemas.microsoft.com/office/powerpoint/2010/main" val="3501347425"/>
-      </p:ext>
-    </p:extLst>
-  </p:cSld>
-  <p:clrMapOvr>
-    <a:masterClrMapping/>
-  </p:clrMapOvr>
-</p:sld>
-</file>
-
-<file path=ppt/slides/slide5.xml><?xml version="1.0" encoding="utf-8"?>
-<p:sld xmlns:a="http://schemas.openxmlformats.org/drawingml/2006/main" xmlns:r="http://schemas.openxmlformats.org/officeDocument/2006/relationships" xmlns:p="http://schemas.openxmlformats.org/presentationml/2006/main">
-  <p:cSld>
-    <p:spTree>
-      <p:nvGrpSpPr>
-        <p:cNvPr id="1" name="">
-          <a:extLst>
-            <a:ext uri="{FF2B5EF4-FFF2-40B4-BE49-F238E27FC236}">
-              <a16:creationId xmlns:a16="http://schemas.microsoft.com/office/drawing/2014/main" id="{E648C740-AB91-8085-9D44-34376A769F66}"/>
-            </a:ext>
-          </a:extLst>
-        </p:cNvPr>
-        <p:cNvGrpSpPr/>
-        <p:nvPr/>
-      </p:nvGrpSpPr>
-      <p:grpSpPr>
-        <a:xfrm>
-          <a:off x="0" y="0"/>
-          <a:ext cx="0" cy="0"/>
-          <a:chOff x="0" y="0"/>
-          <a:chExt cx="0" cy="0"/>
-        </a:xfrm>
-      </p:grpSpPr>
-      <p:sp>
-        <p:nvSpPr>
-          <p:cNvPr id="2" name="Título 1">
-            <a:extLst>
-              <a:ext uri="{FF2B5EF4-FFF2-40B4-BE49-F238E27FC236}">
-                <a16:creationId xmlns:a16="http://schemas.microsoft.com/office/drawing/2014/main" id="{65585194-B9C6-7A57-5D9E-46F7B36CD00C}"/>
-              </a:ext>
-            </a:extLst>
-          </p:cNvPr>
-          <p:cNvSpPr>
-            <a:spLocks noGrp="1"/>
-          </p:cNvSpPr>
-          <p:nvPr>
-            <p:ph type="title"/>
-          </p:nvPr>
-        </p:nvSpPr>
-        <p:spPr/>
-        <p:txBody>
-          <a:bodyPr/>
-          <a:lstStyle/>
-          <a:p>
-            <a:r>
-              <a:rPr lang="pt-BR" dirty="0"/>
-              <a:t>Dados que podem ser transmitidos</a:t>
-            </a:r>
-          </a:p>
-        </p:txBody>
-      </p:sp>
-      <p:sp>
-        <p:nvSpPr>
-          <p:cNvPr id="3" name="Espaço Reservado para Conteúdo 2">
-            <a:extLst>
-              <a:ext uri="{FF2B5EF4-FFF2-40B4-BE49-F238E27FC236}">
-                <a16:creationId xmlns:a16="http://schemas.microsoft.com/office/drawing/2014/main" id="{826CCFED-089D-6B1D-833A-6AA35E4C33F3}"/>
-              </a:ext>
-            </a:extLst>
-          </p:cNvPr>
-          <p:cNvSpPr>
-            <a:spLocks noGrp="1"/>
-          </p:cNvSpPr>
-          <p:nvPr>
-            <p:ph idx="1"/>
-          </p:nvPr>
-        </p:nvSpPr>
-        <p:spPr>
-          <a:xfrm>
-            <a:off x="1395663" y="2180496"/>
-            <a:ext cx="10215144" cy="3678303"/>
-          </a:xfrm>
-        </p:spPr>
-        <p:txBody>
-          <a:bodyPr>
-            <a:normAutofit/>
-          </a:bodyPr>
-          <a:lstStyle/>
-          <a:p>
-            <a:r>
-              <a:rPr lang="pt-BR" dirty="0"/>
-              <a:t>os computadores processam informações calculando bits que podem ser convertidos em impulsos elétricos, portanto </a:t>
-            </a:r>
-            <a:r>
-              <a:rPr lang="pt-BR" b="1" dirty="0"/>
-              <a:t>toda informação que pode ser processada em bits, pode ser transmitida em uma rede</a:t>
-            </a:r>
-            <a:r>
-              <a:rPr lang="pt-BR" dirty="0"/>
-              <a:t>. </a:t>
-            </a:r>
-          </a:p>
-          <a:p>
-            <a:r>
-              <a:rPr lang="pt-BR" dirty="0"/>
-              <a:t>Sendo assim, o que não pode?</a:t>
-            </a:r>
-            <a:br>
-              <a:rPr lang="pt-BR" dirty="0"/>
-            </a:br>
-            <a:endParaRPr lang="pt-BR" sz="2400" dirty="0"/>
-          </a:p>
-        </p:txBody>
-      </p:sp>
-    </p:spTree>
-    <p:extLst>
-      <p:ext uri="{BB962C8B-B14F-4D97-AF65-F5344CB8AC3E}">
-        <p14:creationId xmlns:p14="http://schemas.microsoft.com/office/powerpoint/2010/main" val="459814593"/>
       </p:ext>
     </p:extLst>
   </p:cSld>

--- a/Redes/REDES DE COMPUTADORES.pptx
+++ b/Redes/REDES DE COMPUTADORES.pptx
@@ -5,10 +5,10 @@
     <p:sldMasterId id="2147483672" r:id="rId1"/>
   </p:sldMasterIdLst>
   <p:notesMasterIdLst>
-    <p:notesMasterId r:id="rId55"/>
+    <p:notesMasterId r:id="rId62"/>
   </p:notesMasterIdLst>
   <p:handoutMasterIdLst>
-    <p:handoutMasterId r:id="rId56"/>
+    <p:handoutMasterId r:id="rId63"/>
   </p:handoutMasterIdLst>
   <p:sldIdLst>
     <p:sldId id="256" r:id="rId2"/>
@@ -63,7 +63,14 @@
     <p:sldId id="313" r:id="rId51"/>
     <p:sldId id="314" r:id="rId52"/>
     <p:sldId id="315" r:id="rId53"/>
-    <p:sldId id="260" r:id="rId54"/>
+    <p:sldId id="316" r:id="rId54"/>
+    <p:sldId id="317" r:id="rId55"/>
+    <p:sldId id="318" r:id="rId56"/>
+    <p:sldId id="319" r:id="rId57"/>
+    <p:sldId id="320" r:id="rId58"/>
+    <p:sldId id="321" r:id="rId59"/>
+    <p:sldId id="322" r:id="rId60"/>
+    <p:sldId id="260" r:id="rId61"/>
   </p:sldIdLst>
   <p:sldSz cx="12192000" cy="6858000"/>
   <p:notesSz cx="6858000" cy="9144000"/>
@@ -182,97 +189,6 @@
       <pc:docMkLst>
         <pc:docMk/>
       </pc:docMkLst>
-      <pc:sldChg chg="addSp modSp new mod">
-        <pc:chgData name="Joel Teixeira Cunha" userId="195451ac3a5e8dfd" providerId="LiveId" clId="{9D99295D-09A0-459E-AFDA-61FAD528DEBC}" dt="2026-05-20T00:14:12.908" v="2032" actId="20577"/>
-        <pc:sldMkLst>
-          <pc:docMk/>
-          <pc:sldMk cId="4066461457" sldId="296"/>
-        </pc:sldMkLst>
-      </pc:sldChg>
-      <pc:sldChg chg="addSp modSp new mod">
-        <pc:chgData name="Joel Teixeira Cunha" userId="195451ac3a5e8dfd" providerId="LiveId" clId="{9D99295D-09A0-459E-AFDA-61FAD528DEBC}" dt="2026-05-20T00:24:32.639" v="2491" actId="1076"/>
-        <pc:sldMkLst>
-          <pc:docMk/>
-          <pc:sldMk cId="686788975" sldId="297"/>
-        </pc:sldMkLst>
-      </pc:sldChg>
-      <pc:sldChg chg="addSp delSp modSp new mod">
-        <pc:chgData name="Joel Teixeira Cunha" userId="195451ac3a5e8dfd" providerId="LiveId" clId="{9D99295D-09A0-459E-AFDA-61FAD528DEBC}" dt="2026-05-20T00:21:51.129" v="2484" actId="1076"/>
-        <pc:sldMkLst>
-          <pc:docMk/>
-          <pc:sldMk cId="2555171411" sldId="298"/>
-        </pc:sldMkLst>
-      </pc:sldChg>
-      <pc:sldChg chg="addSp delSp modSp new del mod">
-        <pc:chgData name="Joel Teixeira Cunha" userId="195451ac3a5e8dfd" providerId="LiveId" clId="{9D99295D-09A0-459E-AFDA-61FAD528DEBC}" dt="2026-06-23T19:46:01.452" v="2503" actId="2696"/>
-        <pc:sldMkLst>
-          <pc:docMk/>
-          <pc:sldMk cId="1261736707" sldId="299"/>
-        </pc:sldMkLst>
-      </pc:sldChg>
-      <pc:sldChg chg="del">
-        <pc:chgData name="Joel Teixeira Cunha" userId="195451ac3a5e8dfd" providerId="LiveId" clId="{9D99295D-09A0-459E-AFDA-61FAD528DEBC}" dt="2026-06-23T19:40:21.765" v="2492" actId="47"/>
-        <pc:sldMkLst>
-          <pc:docMk/>
-          <pc:sldMk cId="1396634947" sldId="300"/>
-        </pc:sldMkLst>
-      </pc:sldChg>
-      <pc:sldChg chg="addSp modSp new mod">
-        <pc:chgData name="Joel Teixeira Cunha" userId="195451ac3a5e8dfd" providerId="LiveId" clId="{9D99295D-09A0-459E-AFDA-61FAD528DEBC}" dt="2026-06-23T19:50:01.100" v="2552" actId="14100"/>
-        <pc:sldMkLst>
-          <pc:docMk/>
-          <pc:sldMk cId="4047619075" sldId="300"/>
-        </pc:sldMkLst>
-      </pc:sldChg>
-      <pc:sldChg chg="modSp new mod">
-        <pc:chgData name="Joel Teixeira Cunha" userId="195451ac3a5e8dfd" providerId="LiveId" clId="{9D99295D-09A0-459E-AFDA-61FAD528DEBC}" dt="2026-06-23T20:02:28.793" v="2841" actId="20577"/>
-        <pc:sldMkLst>
-          <pc:docMk/>
-          <pc:sldMk cId="2012595901" sldId="301"/>
-        </pc:sldMkLst>
-      </pc:sldChg>
-      <pc:sldChg chg="del">
-        <pc:chgData name="Joel Teixeira Cunha" userId="195451ac3a5e8dfd" providerId="LiveId" clId="{9D99295D-09A0-459E-AFDA-61FAD528DEBC}" dt="2026-06-23T19:40:21.765" v="2492" actId="47"/>
-        <pc:sldMkLst>
-          <pc:docMk/>
-          <pc:sldMk cId="2228430991" sldId="301"/>
-        </pc:sldMkLst>
-      </pc:sldChg>
-      <pc:sldChg chg="del">
-        <pc:chgData name="Joel Teixeira Cunha" userId="195451ac3a5e8dfd" providerId="LiveId" clId="{9D99295D-09A0-459E-AFDA-61FAD528DEBC}" dt="2026-06-23T19:40:21.765" v="2492" actId="47"/>
-        <pc:sldMkLst>
-          <pc:docMk/>
-          <pc:sldMk cId="1137056065" sldId="302"/>
-        </pc:sldMkLst>
-      </pc:sldChg>
-      <pc:sldChg chg="addSp modSp add mod">
-        <pc:chgData name="Joel Teixeira Cunha" userId="195451ac3a5e8dfd" providerId="LiveId" clId="{9D99295D-09A0-459E-AFDA-61FAD528DEBC}" dt="2026-06-23T20:13:08.719" v="3137" actId="1076"/>
-        <pc:sldMkLst>
-          <pc:docMk/>
-          <pc:sldMk cId="2189762848" sldId="302"/>
-        </pc:sldMkLst>
-      </pc:sldChg>
-      <pc:sldChg chg="addSp modSp add mod">
-        <pc:chgData name="Joel Teixeira Cunha" userId="195451ac3a5e8dfd" providerId="LiveId" clId="{9D99295D-09A0-459E-AFDA-61FAD528DEBC}" dt="2026-06-23T22:36:48.798" v="3140" actId="1076"/>
-        <pc:sldMkLst>
-          <pc:docMk/>
-          <pc:sldMk cId="3132615768" sldId="303"/>
-        </pc:sldMkLst>
-      </pc:sldChg>
-      <pc:sldChg chg="del">
-        <pc:chgData name="Joel Teixeira Cunha" userId="195451ac3a5e8dfd" providerId="LiveId" clId="{9D99295D-09A0-459E-AFDA-61FAD528DEBC}" dt="2026-06-23T19:40:21.765" v="2492" actId="47"/>
-        <pc:sldMkLst>
-          <pc:docMk/>
-          <pc:sldMk cId="3752736611" sldId="303"/>
-        </pc:sldMkLst>
-      </pc:sldChg>
-      <pc:sldChg chg="del">
-        <pc:chgData name="Joel Teixeira Cunha" userId="195451ac3a5e8dfd" providerId="LiveId" clId="{9D99295D-09A0-459E-AFDA-61FAD528DEBC}" dt="2026-06-23T19:40:21.765" v="2492" actId="47"/>
-        <pc:sldMkLst>
-          <pc:docMk/>
-          <pc:sldMk cId="2415727671" sldId="304"/>
-        </pc:sldMkLst>
-      </pc:sldChg>
       <pc:sldChg chg="modSp new mod">
         <pc:chgData name="Joel Teixeira Cunha" userId="195451ac3a5e8dfd" providerId="LiveId" clId="{9D99295D-09A0-459E-AFDA-61FAD528DEBC}" dt="2026-07-23T14:09:51.978" v="3283" actId="20577"/>
         <pc:sldMkLst>
@@ -332,22 +248,6 @@
           <pc:docMk/>
           <pc:sldMk cId="3788522929" sldId="307"/>
         </pc:sldMkLst>
-        <pc:spChg chg="del">
-          <ac:chgData name="Joel Teixeira Cunha" userId="195451ac3a5e8dfd" providerId="LiveId" clId="{9D99295D-09A0-459E-AFDA-61FAD528DEBC}" dt="2026-08-04T22:02:47.380" v="3693" actId="478"/>
-          <ac:spMkLst>
-            <pc:docMk/>
-            <pc:sldMk cId="3788522929" sldId="307"/>
-            <ac:spMk id="3" creationId="{5239F6E7-0598-C70A-A443-697FED1943EB}"/>
-          </ac:spMkLst>
-        </pc:spChg>
-        <pc:spChg chg="add del mod">
-          <ac:chgData name="Joel Teixeira Cunha" userId="195451ac3a5e8dfd" providerId="LiveId" clId="{9D99295D-09A0-459E-AFDA-61FAD528DEBC}" dt="2026-08-04T22:02:52.841" v="3694" actId="478"/>
-          <ac:spMkLst>
-            <pc:docMk/>
-            <pc:sldMk cId="3788522929" sldId="307"/>
-            <ac:spMk id="5" creationId="{B99F0579-84BA-6DFD-ADA3-2ED15A2B23A6}"/>
-          </ac:spMkLst>
-        </pc:spChg>
         <pc:picChg chg="add mod">
           <ac:chgData name="Joel Teixeira Cunha" userId="195451ac3a5e8dfd" providerId="LiveId" clId="{9D99295D-09A0-459E-AFDA-61FAD528DEBC}" dt="2026-08-04T22:03:24.827" v="3698" actId="1076"/>
           <ac:picMkLst>
@@ -384,14 +284,6 @@
             <pc:docMk/>
             <pc:sldMk cId="377226178" sldId="309"/>
             <ac:spMk id="3" creationId="{AFAAAF7D-4FE8-7C8A-3AE5-C5A5DE62B1F3}"/>
-          </ac:spMkLst>
-        </pc:spChg>
-        <pc:spChg chg="add del">
-          <ac:chgData name="Joel Teixeira Cunha" userId="195451ac3a5e8dfd" providerId="LiveId" clId="{9D99295D-09A0-459E-AFDA-61FAD528DEBC}" dt="2026-08-04T22:32:50.993" v="4542" actId="22"/>
-          <ac:spMkLst>
-            <pc:docMk/>
-            <pc:sldMk cId="377226178" sldId="309"/>
-            <ac:spMk id="5" creationId="{6E1350ED-20F0-D0A0-1958-EA2C39C7ADF6}"/>
           </ac:spMkLst>
         </pc:spChg>
       </pc:sldChg>
@@ -490,67 +382,163 @@
   <pc:docChgLst>
     <pc:chgData name="Joel Teixeira Cunha" userId="195451ac3a5e8dfd" providerId="LiveId" clId="{2A4D4AF3-9DC9-4CE5-AE1A-E96DDBF3EED9}"/>
     <pc:docChg chg="undo custSel addSld delSld modSld modMainMaster">
-      <pc:chgData name="Joel Teixeira Cunha" userId="195451ac3a5e8dfd" providerId="LiveId" clId="{2A4D4AF3-9DC9-4CE5-AE1A-E96DDBF3EED9}" dt="2026-06-19T11:07:19.354" v="1051" actId="20577"/>
+      <pc:chgData name="Joel Teixeira Cunha" userId="195451ac3a5e8dfd" providerId="LiveId" clId="{2A4D4AF3-9DC9-4CE5-AE1A-E96DDBF3EED9}" dt="2026-08-20T14:24:02.516" v="1888" actId="1076"/>
       <pc:docMkLst>
         <pc:docMk/>
       </pc:docMkLst>
-      <pc:sldChg chg="modSp mod">
-        <pc:chgData name="Joel Teixeira Cunha" userId="195451ac3a5e8dfd" providerId="LiveId" clId="{2A4D4AF3-9DC9-4CE5-AE1A-E96DDBF3EED9}" dt="2026-06-03T11:22:01.766" v="1026" actId="1076"/>
+      <pc:sldChg chg="addSp modSp new mod">
+        <pc:chgData name="Joel Teixeira Cunha" userId="195451ac3a5e8dfd" providerId="LiveId" clId="{2A4D4AF3-9DC9-4CE5-AE1A-E96DDBF3EED9}" dt="2026-08-20T14:00:18.020" v="1563" actId="14100"/>
         <pc:sldMkLst>
           <pc:docMk/>
-          <pc:sldMk cId="1562692267" sldId="294"/>
+          <pc:sldMk cId="2733158575" sldId="316"/>
         </pc:sldMkLst>
+        <pc:spChg chg="mod">
+          <ac:chgData name="Joel Teixeira Cunha" userId="195451ac3a5e8dfd" providerId="LiveId" clId="{2A4D4AF3-9DC9-4CE5-AE1A-E96DDBF3EED9}" dt="2026-08-20T13:52:15.853" v="1080" actId="20577"/>
+          <ac:spMkLst>
+            <pc:docMk/>
+            <pc:sldMk cId="2733158575" sldId="316"/>
+            <ac:spMk id="2" creationId="{5D918B07-D4E0-374B-2F2B-566B4D09462D}"/>
+          </ac:spMkLst>
+        </pc:spChg>
+        <pc:spChg chg="mod">
+          <ac:chgData name="Joel Teixeira Cunha" userId="195451ac3a5e8dfd" providerId="LiveId" clId="{2A4D4AF3-9DC9-4CE5-AE1A-E96DDBF3EED9}" dt="2026-08-20T14:00:18.020" v="1563" actId="14100"/>
+          <ac:spMkLst>
+            <pc:docMk/>
+            <pc:sldMk cId="2733158575" sldId="316"/>
+            <ac:spMk id="3" creationId="{55F462E1-3E57-8FD7-3EAF-3F76B750C496}"/>
+          </ac:spMkLst>
+        </pc:spChg>
+        <pc:picChg chg="add mod">
+          <ac:chgData name="Joel Teixeira Cunha" userId="195451ac3a5e8dfd" providerId="LiveId" clId="{2A4D4AF3-9DC9-4CE5-AE1A-E96DDBF3EED9}" dt="2026-08-20T14:00:13.187" v="1562"/>
+          <ac:picMkLst>
+            <pc:docMk/>
+            <pc:sldMk cId="2733158575" sldId="316"/>
+            <ac:picMk id="4" creationId="{AF024ED5-1AF0-A4CB-04F7-1289AF797892}"/>
+          </ac:picMkLst>
+        </pc:picChg>
       </pc:sldChg>
-      <pc:sldChg chg="addSp modSp new mod modClrScheme chgLayout">
-        <pc:chgData name="Joel Teixeira Cunha" userId="195451ac3a5e8dfd" providerId="LiveId" clId="{2A4D4AF3-9DC9-4CE5-AE1A-E96DDBF3EED9}" dt="2026-06-02T13:59:51.330" v="6" actId="26606"/>
+      <pc:sldChg chg="modSp add mod">
+        <pc:chgData name="Joel Teixeira Cunha" userId="195451ac3a5e8dfd" providerId="LiveId" clId="{2A4D4AF3-9DC9-4CE5-AE1A-E96DDBF3EED9}" dt="2026-08-20T14:02:26.287" v="1618" actId="6549"/>
         <pc:sldMkLst>
           <pc:docMk/>
-          <pc:sldMk cId="1396634947" sldId="300"/>
+          <pc:sldMk cId="2149750584" sldId="317"/>
         </pc:sldMkLst>
+        <pc:spChg chg="mod">
+          <ac:chgData name="Joel Teixeira Cunha" userId="195451ac3a5e8dfd" providerId="LiveId" clId="{2A4D4AF3-9DC9-4CE5-AE1A-E96DDBF3EED9}" dt="2026-08-20T14:02:26.287" v="1618" actId="6549"/>
+          <ac:spMkLst>
+            <pc:docMk/>
+            <pc:sldMk cId="2149750584" sldId="317"/>
+            <ac:spMk id="3" creationId="{6BDCAB86-F3FC-6F0C-CB9C-3D17ADF4D747}"/>
+          </ac:spMkLst>
+        </pc:spChg>
       </pc:sldChg>
-      <pc:sldChg chg="modSp new mod">
-        <pc:chgData name="Joel Teixeira Cunha" userId="195451ac3a5e8dfd" providerId="LiveId" clId="{2A4D4AF3-9DC9-4CE5-AE1A-E96DDBF3EED9}" dt="2026-06-02T14:01:55.757" v="216" actId="20577"/>
+      <pc:sldChg chg="modSp add mod">
+        <pc:chgData name="Joel Teixeira Cunha" userId="195451ac3a5e8dfd" providerId="LiveId" clId="{2A4D4AF3-9DC9-4CE5-AE1A-E96DDBF3EED9}" dt="2026-08-20T14:05:15.477" v="1654" actId="20577"/>
         <pc:sldMkLst>
           <pc:docMk/>
-          <pc:sldMk cId="2228430991" sldId="301"/>
+          <pc:sldMk cId="2869903520" sldId="318"/>
         </pc:sldMkLst>
+        <pc:spChg chg="mod">
+          <ac:chgData name="Joel Teixeira Cunha" userId="195451ac3a5e8dfd" providerId="LiveId" clId="{2A4D4AF3-9DC9-4CE5-AE1A-E96DDBF3EED9}" dt="2026-08-20T14:05:15.477" v="1654" actId="20577"/>
+          <ac:spMkLst>
+            <pc:docMk/>
+            <pc:sldMk cId="2869903520" sldId="318"/>
+            <ac:spMk id="3" creationId="{FA770BFF-BD8D-81D8-E15D-C057EDD299D0}"/>
+          </ac:spMkLst>
+        </pc:spChg>
       </pc:sldChg>
-      <pc:sldChg chg="addSp delSp modSp add mod modClrScheme chgLayout">
-        <pc:chgData name="Joel Teixeira Cunha" userId="195451ac3a5e8dfd" providerId="LiveId" clId="{2A4D4AF3-9DC9-4CE5-AE1A-E96DDBF3EED9}" dt="2026-06-02T14:11:11.776" v="503" actId="3064"/>
+      <pc:sldChg chg="modSp add mod">
+        <pc:chgData name="Joel Teixeira Cunha" userId="195451ac3a5e8dfd" providerId="LiveId" clId="{2A4D4AF3-9DC9-4CE5-AE1A-E96DDBF3EED9}" dt="2026-08-20T14:12:11.588" v="1722" actId="20577"/>
         <pc:sldMkLst>
           <pc:docMk/>
-          <pc:sldMk cId="1137056065" sldId="302"/>
+          <pc:sldMk cId="1228248521" sldId="319"/>
         </pc:sldMkLst>
+        <pc:spChg chg="mod">
+          <ac:chgData name="Joel Teixeira Cunha" userId="195451ac3a5e8dfd" providerId="LiveId" clId="{2A4D4AF3-9DC9-4CE5-AE1A-E96DDBF3EED9}" dt="2026-08-20T14:12:11.588" v="1722" actId="20577"/>
+          <ac:spMkLst>
+            <pc:docMk/>
+            <pc:sldMk cId="1228248521" sldId="319"/>
+            <ac:spMk id="3" creationId="{D42E5233-CEB7-B163-4875-35DBF12F5E24}"/>
+          </ac:spMkLst>
+        </pc:spChg>
       </pc:sldChg>
-      <pc:sldChg chg="addSp modSp add mod">
-        <pc:chgData name="Joel Teixeira Cunha" userId="195451ac3a5e8dfd" providerId="LiveId" clId="{2A4D4AF3-9DC9-4CE5-AE1A-E96DDBF3EED9}" dt="2026-06-02T14:16:58.847" v="1009" actId="27636"/>
+      <pc:sldChg chg="modSp add mod">
+        <pc:chgData name="Joel Teixeira Cunha" userId="195451ac3a5e8dfd" providerId="LiveId" clId="{2A4D4AF3-9DC9-4CE5-AE1A-E96DDBF3EED9}" dt="2026-08-20T14:14:46.342" v="1805" actId="20577"/>
         <pc:sldMkLst>
           <pc:docMk/>
-          <pc:sldMk cId="3752736611" sldId="303"/>
+          <pc:sldMk cId="3820146771" sldId="320"/>
         </pc:sldMkLst>
+        <pc:spChg chg="mod">
+          <ac:chgData name="Joel Teixeira Cunha" userId="195451ac3a5e8dfd" providerId="LiveId" clId="{2A4D4AF3-9DC9-4CE5-AE1A-E96DDBF3EED9}" dt="2026-08-20T14:14:46.342" v="1805" actId="20577"/>
+          <ac:spMkLst>
+            <pc:docMk/>
+            <pc:sldMk cId="3820146771" sldId="320"/>
+            <ac:spMk id="3" creationId="{581B1CEA-95AA-6922-BACE-ADF079EF8CCF}"/>
+          </ac:spMkLst>
+        </pc:spChg>
       </pc:sldChg>
-      <pc:sldChg chg="modSp add mod">
-        <pc:chgData name="Joel Teixeira Cunha" userId="195451ac3a5e8dfd" providerId="LiveId" clId="{2A4D4AF3-9DC9-4CE5-AE1A-E96DDBF3EED9}" dt="2026-06-19T11:07:19.354" v="1051" actId="20577"/>
+      <pc:sldChg chg="addSp delSp modSp new mod">
+        <pc:chgData name="Joel Teixeira Cunha" userId="195451ac3a5e8dfd" providerId="LiveId" clId="{2A4D4AF3-9DC9-4CE5-AE1A-E96DDBF3EED9}" dt="2026-08-20T14:21:23.764" v="1852" actId="20577"/>
         <pc:sldMkLst>
           <pc:docMk/>
-          <pc:sldMk cId="2415727671" sldId="304"/>
+          <pc:sldMk cId="980300009" sldId="321"/>
         </pc:sldMkLst>
+        <pc:spChg chg="mod">
+          <ac:chgData name="Joel Teixeira Cunha" userId="195451ac3a5e8dfd" providerId="LiveId" clId="{2A4D4AF3-9DC9-4CE5-AE1A-E96DDBF3EED9}" dt="2026-08-20T14:21:23.764" v="1852" actId="20577"/>
+          <ac:spMkLst>
+            <pc:docMk/>
+            <pc:sldMk cId="980300009" sldId="321"/>
+            <ac:spMk id="2" creationId="{D320D295-81D5-446A-ACC7-06BAA67E6E23}"/>
+          </ac:spMkLst>
+        </pc:spChg>
+        <pc:spChg chg="del">
+          <ac:chgData name="Joel Teixeira Cunha" userId="195451ac3a5e8dfd" providerId="LiveId" clId="{2A4D4AF3-9DC9-4CE5-AE1A-E96DDBF3EED9}" dt="2026-08-20T14:20:58.821" v="1807" actId="478"/>
+          <ac:spMkLst>
+            <pc:docMk/>
+            <pc:sldMk cId="980300009" sldId="321"/>
+            <ac:spMk id="3" creationId="{2EBDC01C-68F2-F0E1-A306-281E88AE82FA}"/>
+          </ac:spMkLst>
+        </pc:spChg>
+        <pc:picChg chg="add mod">
+          <ac:chgData name="Joel Teixeira Cunha" userId="195451ac3a5e8dfd" providerId="LiveId" clId="{2A4D4AF3-9DC9-4CE5-AE1A-E96DDBF3EED9}" dt="2026-08-20T14:21:12.187" v="1810" actId="1076"/>
+          <ac:picMkLst>
+            <pc:docMk/>
+            <pc:sldMk cId="980300009" sldId="321"/>
+            <ac:picMk id="5" creationId="{2FC25E0B-C292-8303-78AA-2B52BF69443D}"/>
+          </ac:picMkLst>
+        </pc:picChg>
       </pc:sldChg>
-      <pc:sldMasterChg chg="modSldLayout">
-        <pc:chgData name="Joel Teixeira Cunha" userId="195451ac3a5e8dfd" providerId="LiveId" clId="{2A4D4AF3-9DC9-4CE5-AE1A-E96DDBF3EED9}" dt="2026-06-02T14:09:52.376" v="498"/>
-        <pc:sldMasterMkLst>
+      <pc:sldChg chg="addSp delSp modSp new mod">
+        <pc:chgData name="Joel Teixeira Cunha" userId="195451ac3a5e8dfd" providerId="LiveId" clId="{2A4D4AF3-9DC9-4CE5-AE1A-E96DDBF3EED9}" dt="2026-08-20T14:24:02.516" v="1888" actId="1076"/>
+        <pc:sldMkLst>
           <pc:docMk/>
-          <pc:sldMasterMk cId="82855549" sldId="2147483672"/>
-        </pc:sldMasterMkLst>
-        <pc:sldLayoutChg chg="addSp delSp modSp mod">
-          <pc:chgData name="Joel Teixeira Cunha" userId="195451ac3a5e8dfd" providerId="LiveId" clId="{2A4D4AF3-9DC9-4CE5-AE1A-E96DDBF3EED9}" dt="2026-06-02T14:09:52.376" v="498"/>
-          <pc:sldLayoutMkLst>
+          <pc:sldMk cId="2912682521" sldId="322"/>
+        </pc:sldMkLst>
+        <pc:spChg chg="mod">
+          <ac:chgData name="Joel Teixeira Cunha" userId="195451ac3a5e8dfd" providerId="LiveId" clId="{2A4D4AF3-9DC9-4CE5-AE1A-E96DDBF3EED9}" dt="2026-08-20T14:23:50.901" v="1884" actId="20577"/>
+          <ac:spMkLst>
             <pc:docMk/>
-            <pc:sldMasterMk cId="82855549" sldId="2147483672"/>
-            <pc:sldLayoutMk cId="2739981630" sldId="2147483674"/>
-          </pc:sldLayoutMkLst>
-        </pc:sldLayoutChg>
-      </pc:sldMasterChg>
+            <pc:sldMk cId="2912682521" sldId="322"/>
+            <ac:spMk id="2" creationId="{8E4BD435-008A-A119-7F99-BA5B78C10A22}"/>
+          </ac:spMkLst>
+        </pc:spChg>
+        <pc:spChg chg="del">
+          <ac:chgData name="Joel Teixeira Cunha" userId="195451ac3a5e8dfd" providerId="LiveId" clId="{2A4D4AF3-9DC9-4CE5-AE1A-E96DDBF3EED9}" dt="2026-08-20T14:23:55.352" v="1885" actId="478"/>
+          <ac:spMkLst>
+            <pc:docMk/>
+            <pc:sldMk cId="2912682521" sldId="322"/>
+            <ac:spMk id="3" creationId="{51EC37F3-1571-9A0F-0C95-87D72D474032}"/>
+          </ac:spMkLst>
+        </pc:spChg>
+        <pc:picChg chg="add mod">
+          <ac:chgData name="Joel Teixeira Cunha" userId="195451ac3a5e8dfd" providerId="LiveId" clId="{2A4D4AF3-9DC9-4CE5-AE1A-E96DDBF3EED9}" dt="2026-08-20T14:24:02.516" v="1888" actId="1076"/>
+          <ac:picMkLst>
+            <pc:docMk/>
+            <pc:sldMk cId="2912682521" sldId="322"/>
+            <ac:picMk id="5" creationId="{2945FA95-6A3E-047F-E376-B80C87BD7D6E}"/>
+          </ac:picMkLst>
+        </pc:picChg>
+      </pc:sldChg>
     </pc:docChg>
   </pc:docChgLst>
 </pc:chgInfo>
@@ -652,7 +640,7 @@
             <a:pPr rtl="0"/>
             <a:fld id="{A517C7B7-34F5-4531-9889-28687F60FAC8}" type="datetime1">
               <a:rPr lang="pt-BR" smtClean="0"/>
-              <a:t>04/08/2026</a:t>
+              <a:t>20/08/2026</a:t>
             </a:fld>
             <a:endParaRPr lang="pt-BR" dirty="0"/>
           </a:p>
@@ -833,7 +821,7 @@
             <a:fld id="{40C3EC75-555C-481D-9088-738CE6DDFC83}" type="datetime1">
               <a:rPr lang="pt-BR" smtClean="0"/>
               <a:pPr/>
-              <a:t>04/08/2026</a:t>
+              <a:t>20/08/2026</a:t>
             </a:fld>
             <a:endParaRPr lang="pt-BR" dirty="0"/>
           </a:p>
@@ -1256,7 +1244,7 @@
             <a:pPr rtl="0"/>
             <a:fld id="{C6B3AB32-59DF-41F1-9618-EDFBF5049629}" type="slidenum">
               <a:rPr lang="pt-BR" smtClean="0"/>
-              <a:t>53</a:t>
+              <a:t>60</a:t>
             </a:fld>
             <a:endParaRPr lang="pt-BR"/>
           </a:p>
@@ -1521,7 +1509,7 @@
             <a:pPr rtl="0"/>
             <a:fld id="{2AF5B136-74F1-42D3-987D-A097EEF8F2FE}" type="datetime1">
               <a:rPr lang="pt-BR" noProof="0" smtClean="0"/>
-              <a:t>04/08/2026</a:t>
+              <a:t>20/08/2026</a:t>
             </a:fld>
             <a:endParaRPr lang="pt-BR" noProof="0"/>
           </a:p>
@@ -1786,7 +1774,7 @@
             <a:pPr rtl="0"/>
             <a:fld id="{0229B074-15EB-43FB-8347-3A734D799093}" type="datetime1">
               <a:rPr lang="pt-BR" noProof="0" smtClean="0"/>
-              <a:t>04/08/2026</a:t>
+              <a:t>20/08/2026</a:t>
             </a:fld>
             <a:endParaRPr lang="pt-BR" noProof="0"/>
           </a:p>
@@ -2024,7 +2012,7 @@
             <a:pPr rtl="0"/>
             <a:fld id="{036303E3-8DE9-4C2D-91EE-6F377AE582A8}" type="datetime1">
               <a:rPr lang="pt-BR" noProof="0" smtClean="0"/>
-              <a:t>04/08/2026</a:t>
+              <a:t>20/08/2026</a:t>
             </a:fld>
             <a:endParaRPr lang="pt-BR" noProof="0"/>
           </a:p>
@@ -2267,7 +2255,7 @@
             <a:pPr rtl="0"/>
             <a:fld id="{B04AF3F4-81C7-4F15-8991-6D0E8D06651A}" type="datetime1">
               <a:rPr lang="pt-BR" noProof="0" smtClean="0"/>
-              <a:t>04/08/2026</a:t>
+              <a:t>20/08/2026</a:t>
             </a:fld>
             <a:endParaRPr lang="pt-BR" noProof="0"/>
           </a:p>
@@ -2578,7 +2566,7 @@
             <a:pPr rtl="0"/>
             <a:fld id="{6E2946E4-8964-43BF-B1D5-4261B83248E5}" type="datetime1">
               <a:rPr lang="pt-BR" noProof="0" smtClean="0"/>
-              <a:t>04/08/2026</a:t>
+              <a:t>20/08/2026</a:t>
             </a:fld>
             <a:endParaRPr lang="pt-BR" noProof="0"/>
           </a:p>
@@ -2882,7 +2870,7 @@
             <a:pPr rtl="0"/>
             <a:fld id="{97C9F420-083C-437A-9265-7F13EB97C6A2}" type="datetime1">
               <a:rPr lang="pt-BR" noProof="0" smtClean="0"/>
-              <a:t>04/08/2026</a:t>
+              <a:t>20/08/2026</a:t>
             </a:fld>
             <a:endParaRPr lang="pt-BR" noProof="0"/>
           </a:p>
@@ -3306,7 +3294,7 @@
             <a:pPr rtl="0"/>
             <a:fld id="{BE07AF20-ED70-4B21-B799-75BB5818AB43}" type="datetime1">
               <a:rPr lang="pt-BR" noProof="0" smtClean="0"/>
-              <a:t>04/08/2026</a:t>
+              <a:t>20/08/2026</a:t>
             </a:fld>
             <a:endParaRPr lang="pt-BR" noProof="0"/>
           </a:p>
@@ -3405,7 +3393,7 @@
             <a:pPr rtl="0"/>
             <a:fld id="{0D33D876-8C34-42FC-BFF7-457557B97BB7}" type="datetime1">
               <a:rPr lang="pt-BR" noProof="0" smtClean="0"/>
-              <a:t>04/08/2026</a:t>
+              <a:t>20/08/2026</a:t>
             </a:fld>
             <a:endParaRPr lang="pt-BR" noProof="0"/>
           </a:p>
@@ -3571,7 +3559,7 @@
             <a:pPr rtl="0"/>
             <a:fld id="{4592437E-206F-4A1C-947F-806A50A40B88}" type="datetime1">
               <a:rPr lang="pt-BR" noProof="0" smtClean="0"/>
-              <a:t>04/08/2026</a:t>
+              <a:t>20/08/2026</a:t>
             </a:fld>
             <a:endParaRPr lang="pt-BR" noProof="0"/>
           </a:p>
@@ -3952,7 +3940,7 @@
             <a:pPr rtl="0"/>
             <a:fld id="{B036DDBC-F1EF-4D09-A533-5995BC167053}" type="datetime1">
               <a:rPr lang="pt-BR" noProof="0" smtClean="0"/>
-              <a:t>04/08/2026</a:t>
+              <a:t>20/08/2026</a:t>
             </a:fld>
             <a:endParaRPr lang="pt-BR" noProof="0"/>
           </a:p>
@@ -4245,7 +4233,7 @@
             <a:pPr rtl="0"/>
             <a:fld id="{DFFDDC01-A1CF-4C3A-BE96-FBC60101324D}" type="datetime1">
               <a:rPr lang="pt-BR" noProof="0" smtClean="0"/>
-              <a:t>04/08/2026</a:t>
+              <a:t>20/08/2026</a:t>
             </a:fld>
             <a:endParaRPr lang="pt-BR" noProof="0"/>
           </a:p>
@@ -4459,7 +4447,7 @@
             <a:pPr rtl="0"/>
             <a:fld id="{52266794-2CD5-4ED3-94F8-8B8DC65FDDE3}" type="datetime1">
               <a:rPr lang="pt-BR" noProof="0" smtClean="0"/>
-              <a:t>04/08/2026</a:t>
+              <a:t>20/08/2026</a:t>
             </a:fld>
             <a:endParaRPr lang="pt-BR" noProof="0"/>
           </a:p>
@@ -12504,6 +12492,1396 @@
 <file path=ppt/slides/slide53.xml><?xml version="1.0" encoding="utf-8"?>
 <p:sld xmlns:a="http://schemas.openxmlformats.org/drawingml/2006/main" xmlns:r="http://schemas.openxmlformats.org/officeDocument/2006/relationships" xmlns:p="http://schemas.openxmlformats.org/presentationml/2006/main">
   <p:cSld>
+    <p:spTree>
+      <p:nvGrpSpPr>
+        <p:cNvPr id="1" name=""/>
+        <p:cNvGrpSpPr/>
+        <p:nvPr/>
+      </p:nvGrpSpPr>
+      <p:grpSpPr>
+        <a:xfrm>
+          <a:off x="0" y="0"/>
+          <a:ext cx="0" cy="0"/>
+          <a:chOff x="0" y="0"/>
+          <a:chExt cx="0" cy="0"/>
+        </a:xfrm>
+      </p:grpSpPr>
+      <p:sp>
+        <p:nvSpPr>
+          <p:cNvPr id="2" name="Título 1">
+            <a:extLst>
+              <a:ext uri="{FF2B5EF4-FFF2-40B4-BE49-F238E27FC236}">
+                <a16:creationId xmlns:a16="http://schemas.microsoft.com/office/drawing/2014/main" id="{5D918B07-D4E0-374B-2F2B-566B4D09462D}"/>
+              </a:ext>
+            </a:extLst>
+          </p:cNvPr>
+          <p:cNvSpPr>
+            <a:spLocks noGrp="1"/>
+          </p:cNvSpPr>
+          <p:nvPr>
+            <p:ph type="title"/>
+          </p:nvPr>
+        </p:nvSpPr>
+        <p:spPr/>
+        <p:txBody>
+          <a:bodyPr/>
+          <a:lstStyle/>
+          <a:p>
+            <a:r>
+              <a:rPr lang="pt-BR" dirty="0"/>
+              <a:t>Modelo de referência </a:t>
+            </a:r>
+            <a:r>
+              <a:rPr lang="pt-BR" dirty="0" err="1"/>
+              <a:t>tcp/ip</a:t>
+            </a:r>
+            <a:endParaRPr lang="pt-BR" dirty="0"/>
+          </a:p>
+        </p:txBody>
+      </p:sp>
+      <p:sp>
+        <p:nvSpPr>
+          <p:cNvPr id="3" name="Espaço Reservado para Conteúdo 2">
+            <a:extLst>
+              <a:ext uri="{FF2B5EF4-FFF2-40B4-BE49-F238E27FC236}">
+                <a16:creationId xmlns:a16="http://schemas.microsoft.com/office/drawing/2014/main" id="{55F462E1-3E57-8FD7-3EAF-3F76B750C496}"/>
+              </a:ext>
+            </a:extLst>
+          </p:cNvPr>
+          <p:cNvSpPr>
+            <a:spLocks noGrp="1"/>
+          </p:cNvSpPr>
+          <p:nvPr>
+            <p:ph idx="1"/>
+          </p:nvPr>
+        </p:nvSpPr>
+        <p:spPr>
+          <a:xfrm>
+            <a:off x="581193" y="2180496"/>
+            <a:ext cx="8293218" cy="3678303"/>
+          </a:xfrm>
+        </p:spPr>
+        <p:txBody>
+          <a:bodyPr/>
+          <a:lstStyle/>
+          <a:p>
+            <a:r>
+              <a:rPr lang="pt-BR" dirty="0"/>
+              <a:t>Surgiu com o objetivo de conectar várias redes de maneira uniforme</a:t>
+            </a:r>
+          </a:p>
+          <a:p>
+            <a:r>
+              <a:rPr lang="pt-BR" dirty="0"/>
+              <a:t>Ficou conhecida pelos dois grandes protocolos:  TCP (</a:t>
+            </a:r>
+            <a:r>
+              <a:rPr lang="pt-BR" dirty="0" err="1"/>
+              <a:t>Transmission</a:t>
+            </a:r>
+            <a:r>
+              <a:rPr lang="pt-BR" dirty="0"/>
+              <a:t> </a:t>
+            </a:r>
+            <a:r>
+              <a:rPr lang="pt-BR" dirty="0" err="1"/>
+              <a:t>Control</a:t>
+            </a:r>
+            <a:r>
+              <a:rPr lang="pt-BR" dirty="0"/>
+              <a:t> </a:t>
+            </a:r>
+            <a:r>
+              <a:rPr lang="pt-BR" dirty="0" err="1"/>
+              <a:t>Protocol</a:t>
+            </a:r>
+            <a:r>
+              <a:rPr lang="pt-BR" dirty="0"/>
+              <a:t>) e IP (Internet </a:t>
+            </a:r>
+            <a:r>
+              <a:rPr lang="pt-BR" dirty="0" err="1"/>
+              <a:t>Protocol</a:t>
+            </a:r>
+            <a:r>
+              <a:rPr lang="pt-BR" dirty="0"/>
+              <a:t>)</a:t>
+            </a:r>
+          </a:p>
+          <a:p>
+            <a:r>
+              <a:rPr lang="pt-BR" dirty="0"/>
+              <a:t>O protocolo IP é </a:t>
+            </a:r>
+            <a:r>
+              <a:rPr lang="pt-BR" dirty="0" err="1"/>
+              <a:t>roteável</a:t>
+            </a:r>
+            <a:r>
+              <a:rPr lang="pt-BR" dirty="0"/>
+              <a:t>, podendo ser utilizado em grandes redes e de longa distância, podendo alcançar o mesmo destino por diversos caminhos diferentes</a:t>
+            </a:r>
+          </a:p>
+          <a:p>
+            <a:r>
+              <a:rPr lang="pt-BR" dirty="0"/>
+              <a:t>Possui arquitetura aberta e qualquer fabricante pode implementá-lo em seu sistema operacional</a:t>
+            </a:r>
+          </a:p>
+          <a:p>
+            <a:r>
+              <a:rPr lang="pt-BR" dirty="0"/>
+              <a:t>Possui quatro camadas</a:t>
+            </a:r>
+          </a:p>
+        </p:txBody>
+      </p:sp>
+      <p:pic>
+        <p:nvPicPr>
+          <p:cNvPr id="4" name="Imagem 3" descr="Redes Brasil">
+            <a:extLst>
+              <a:ext uri="{FF2B5EF4-FFF2-40B4-BE49-F238E27FC236}">
+                <a16:creationId xmlns:a16="http://schemas.microsoft.com/office/drawing/2014/main" id="{AF024ED5-1AF0-A4CB-04F7-1289AF797892}"/>
+              </a:ext>
+            </a:extLst>
+          </p:cNvPr>
+          <p:cNvPicPr>
+            <a:picLocks noChangeAspect="1"/>
+          </p:cNvPicPr>
+          <p:nvPr/>
+        </p:nvPicPr>
+        <p:blipFill>
+          <a:blip r:embed="rId2">
+            <a:clrChange>
+              <a:clrFrom>
+                <a:srgbClr val="FFFFFF"/>
+              </a:clrFrom>
+              <a:clrTo>
+                <a:srgbClr val="FFFFFF">
+                  <a:alpha val="0"/>
+                </a:srgbClr>
+              </a:clrTo>
+            </a:clrChange>
+          </a:blip>
+          <a:stretch>
+            <a:fillRect/>
+          </a:stretch>
+        </p:blipFill>
+        <p:spPr>
+          <a:xfrm>
+            <a:off x="8874410" y="1431444"/>
+            <a:ext cx="2867025" cy="4724400"/>
+          </a:xfrm>
+          <a:prstGeom prst="rect">
+            <a:avLst/>
+          </a:prstGeom>
+        </p:spPr>
+      </p:pic>
+    </p:spTree>
+    <p:extLst>
+      <p:ext uri="{BB962C8B-B14F-4D97-AF65-F5344CB8AC3E}">
+        <p14:creationId xmlns:p14="http://schemas.microsoft.com/office/powerpoint/2010/main" val="2733158575"/>
+      </p:ext>
+    </p:extLst>
+  </p:cSld>
+  <p:clrMapOvr>
+    <a:masterClrMapping/>
+  </p:clrMapOvr>
+</p:sld>
+</file>
+
+<file path=ppt/slides/slide54.xml><?xml version="1.0" encoding="utf-8"?>
+<p:sld xmlns:a="http://schemas.openxmlformats.org/drawingml/2006/main" xmlns:r="http://schemas.openxmlformats.org/officeDocument/2006/relationships" xmlns:p="http://schemas.openxmlformats.org/presentationml/2006/main">
+  <p:cSld>
+    <p:spTree>
+      <p:nvGrpSpPr>
+        <p:cNvPr id="1" name="">
+          <a:extLst>
+            <a:ext uri="{FF2B5EF4-FFF2-40B4-BE49-F238E27FC236}">
+              <a16:creationId xmlns:a16="http://schemas.microsoft.com/office/drawing/2014/main" id="{CC8816C9-BF52-0B49-77BA-CB87827B45B7}"/>
+            </a:ext>
+          </a:extLst>
+        </p:cNvPr>
+        <p:cNvGrpSpPr/>
+        <p:nvPr/>
+      </p:nvGrpSpPr>
+      <p:grpSpPr>
+        <a:xfrm>
+          <a:off x="0" y="0"/>
+          <a:ext cx="0" cy="0"/>
+          <a:chOff x="0" y="0"/>
+          <a:chExt cx="0" cy="0"/>
+        </a:xfrm>
+      </p:grpSpPr>
+      <p:sp>
+        <p:nvSpPr>
+          <p:cNvPr id="2" name="Título 1">
+            <a:extLst>
+              <a:ext uri="{FF2B5EF4-FFF2-40B4-BE49-F238E27FC236}">
+                <a16:creationId xmlns:a16="http://schemas.microsoft.com/office/drawing/2014/main" id="{1ABFC94D-0092-BDB9-2A59-D3F74C2AB473}"/>
+              </a:ext>
+            </a:extLst>
+          </p:cNvPr>
+          <p:cNvSpPr>
+            <a:spLocks noGrp="1"/>
+          </p:cNvSpPr>
+          <p:nvPr>
+            <p:ph type="title"/>
+          </p:nvPr>
+        </p:nvSpPr>
+        <p:spPr/>
+        <p:txBody>
+          <a:bodyPr/>
+          <a:lstStyle/>
+          <a:p>
+            <a:r>
+              <a:rPr lang="pt-BR" dirty="0"/>
+              <a:t>Modelo de referência </a:t>
+            </a:r>
+            <a:r>
+              <a:rPr lang="pt-BR" dirty="0" err="1"/>
+              <a:t>tcp/ip</a:t>
+            </a:r>
+            <a:endParaRPr lang="pt-BR" dirty="0"/>
+          </a:p>
+        </p:txBody>
+      </p:sp>
+      <p:sp>
+        <p:nvSpPr>
+          <p:cNvPr id="3" name="Espaço Reservado para Conteúdo 2">
+            <a:extLst>
+              <a:ext uri="{FF2B5EF4-FFF2-40B4-BE49-F238E27FC236}">
+                <a16:creationId xmlns:a16="http://schemas.microsoft.com/office/drawing/2014/main" id="{6BDCAB86-F3FC-6F0C-CB9C-3D17ADF4D747}"/>
+              </a:ext>
+            </a:extLst>
+          </p:cNvPr>
+          <p:cNvSpPr>
+            <a:spLocks noGrp="1"/>
+          </p:cNvSpPr>
+          <p:nvPr>
+            <p:ph idx="1"/>
+          </p:nvPr>
+        </p:nvSpPr>
+        <p:spPr>
+          <a:xfrm>
+            <a:off x="581193" y="2180496"/>
+            <a:ext cx="8293218" cy="3678303"/>
+          </a:xfrm>
+        </p:spPr>
+        <p:txBody>
+          <a:bodyPr/>
+          <a:lstStyle/>
+          <a:p>
+            <a:r>
+              <a:rPr lang="pt-BR" dirty="0"/>
+              <a:t>Camada de enlace (link)</a:t>
+            </a:r>
+          </a:p>
+          <a:p>
+            <a:r>
+              <a:rPr lang="pt-BR" dirty="0"/>
+              <a:t>É responsável por enviar o datagrama recebido pela camada de internet em forma de um quadro através da rede; </a:t>
+            </a:r>
+          </a:p>
+          <a:p>
+            <a:r>
+              <a:rPr lang="pt-BR" dirty="0"/>
+              <a:t>a camada de acesso à rede prepara o pacote de dados para transmissão da estação de trabalho a um roteador localizado entre a rede local e a internet. </a:t>
+            </a:r>
+          </a:p>
+          <a:p>
+            <a:r>
+              <a:rPr lang="pt-BR" dirty="0"/>
+              <a:t>É a última camada antes de os dados serem enviados para transmissão pelo meio.</a:t>
+            </a:r>
+          </a:p>
+          <a:p>
+            <a:r>
+              <a:rPr lang="pt-BR" dirty="0"/>
+              <a:t>Representam as camadas de enlace e física do modelo OSI </a:t>
+            </a:r>
+            <a:br>
+              <a:rPr lang="pt-BR" dirty="0"/>
+            </a:br>
+            <a:endParaRPr lang="pt-BR" dirty="0"/>
+          </a:p>
+        </p:txBody>
+      </p:sp>
+      <p:pic>
+        <p:nvPicPr>
+          <p:cNvPr id="4" name="Imagem 3" descr="Redes Brasil">
+            <a:extLst>
+              <a:ext uri="{FF2B5EF4-FFF2-40B4-BE49-F238E27FC236}">
+                <a16:creationId xmlns:a16="http://schemas.microsoft.com/office/drawing/2014/main" id="{C31C5011-DBE7-2185-AD58-886BF6763BCA}"/>
+              </a:ext>
+            </a:extLst>
+          </p:cNvPr>
+          <p:cNvPicPr>
+            <a:picLocks noChangeAspect="1"/>
+          </p:cNvPicPr>
+          <p:nvPr/>
+        </p:nvPicPr>
+        <p:blipFill>
+          <a:blip r:embed="rId2">
+            <a:clrChange>
+              <a:clrFrom>
+                <a:srgbClr val="FFFFFF"/>
+              </a:clrFrom>
+              <a:clrTo>
+                <a:srgbClr val="FFFFFF">
+                  <a:alpha val="0"/>
+                </a:srgbClr>
+              </a:clrTo>
+            </a:clrChange>
+          </a:blip>
+          <a:stretch>
+            <a:fillRect/>
+          </a:stretch>
+        </p:blipFill>
+        <p:spPr>
+          <a:xfrm>
+            <a:off x="8874410" y="1431444"/>
+            <a:ext cx="2867025" cy="4724400"/>
+          </a:xfrm>
+          <a:prstGeom prst="rect">
+            <a:avLst/>
+          </a:prstGeom>
+        </p:spPr>
+      </p:pic>
+    </p:spTree>
+    <p:extLst>
+      <p:ext uri="{BB962C8B-B14F-4D97-AF65-F5344CB8AC3E}">
+        <p14:creationId xmlns:p14="http://schemas.microsoft.com/office/powerpoint/2010/main" val="2149750584"/>
+      </p:ext>
+    </p:extLst>
+  </p:cSld>
+  <p:clrMapOvr>
+    <a:masterClrMapping/>
+  </p:clrMapOvr>
+</p:sld>
+</file>
+
+<file path=ppt/slides/slide55.xml><?xml version="1.0" encoding="utf-8"?>
+<p:sld xmlns:a="http://schemas.openxmlformats.org/drawingml/2006/main" xmlns:r="http://schemas.openxmlformats.org/officeDocument/2006/relationships" xmlns:p="http://schemas.openxmlformats.org/presentationml/2006/main">
+  <p:cSld>
+    <p:spTree>
+      <p:nvGrpSpPr>
+        <p:cNvPr id="1" name="">
+          <a:extLst>
+            <a:ext uri="{FF2B5EF4-FFF2-40B4-BE49-F238E27FC236}">
+              <a16:creationId xmlns:a16="http://schemas.microsoft.com/office/drawing/2014/main" id="{381F6F18-033E-F3BC-E62B-3C627D02209E}"/>
+            </a:ext>
+          </a:extLst>
+        </p:cNvPr>
+        <p:cNvGrpSpPr/>
+        <p:nvPr/>
+      </p:nvGrpSpPr>
+      <p:grpSpPr>
+        <a:xfrm>
+          <a:off x="0" y="0"/>
+          <a:ext cx="0" cy="0"/>
+          <a:chOff x="0" y="0"/>
+          <a:chExt cx="0" cy="0"/>
+        </a:xfrm>
+      </p:grpSpPr>
+      <p:sp>
+        <p:nvSpPr>
+          <p:cNvPr id="2" name="Título 1">
+            <a:extLst>
+              <a:ext uri="{FF2B5EF4-FFF2-40B4-BE49-F238E27FC236}">
+                <a16:creationId xmlns:a16="http://schemas.microsoft.com/office/drawing/2014/main" id="{8D2CB983-CB32-EFC1-0F46-FBF3CEDF93EE}"/>
+              </a:ext>
+            </a:extLst>
+          </p:cNvPr>
+          <p:cNvSpPr>
+            <a:spLocks noGrp="1"/>
+          </p:cNvSpPr>
+          <p:nvPr>
+            <p:ph type="title"/>
+          </p:nvPr>
+        </p:nvSpPr>
+        <p:spPr/>
+        <p:txBody>
+          <a:bodyPr/>
+          <a:lstStyle/>
+          <a:p>
+            <a:r>
+              <a:rPr lang="pt-BR" dirty="0"/>
+              <a:t>Modelo de referência </a:t>
+            </a:r>
+            <a:r>
+              <a:rPr lang="pt-BR" dirty="0" err="1"/>
+              <a:t>tcp/ip</a:t>
+            </a:r>
+            <a:endParaRPr lang="pt-BR" dirty="0"/>
+          </a:p>
+        </p:txBody>
+      </p:sp>
+      <p:sp>
+        <p:nvSpPr>
+          <p:cNvPr id="3" name="Espaço Reservado para Conteúdo 2">
+            <a:extLst>
+              <a:ext uri="{FF2B5EF4-FFF2-40B4-BE49-F238E27FC236}">
+                <a16:creationId xmlns:a16="http://schemas.microsoft.com/office/drawing/2014/main" id="{FA770BFF-BD8D-81D8-E15D-C057EDD299D0}"/>
+              </a:ext>
+            </a:extLst>
+          </p:cNvPr>
+          <p:cNvSpPr>
+            <a:spLocks noGrp="1"/>
+          </p:cNvSpPr>
+          <p:nvPr>
+            <p:ph idx="1"/>
+          </p:nvPr>
+        </p:nvSpPr>
+        <p:spPr>
+          <a:xfrm>
+            <a:off x="581193" y="2180496"/>
+            <a:ext cx="8293218" cy="3678303"/>
+          </a:xfrm>
+        </p:spPr>
+        <p:txBody>
+          <a:bodyPr>
+            <a:normAutofit/>
+          </a:bodyPr>
+          <a:lstStyle/>
+          <a:p>
+            <a:r>
+              <a:rPr lang="pt-BR" dirty="0"/>
+              <a:t>Camada internet</a:t>
+            </a:r>
+          </a:p>
+          <a:p>
+            <a:pPr lvl="1"/>
+            <a:r>
+              <a:rPr lang="pt-BR" dirty="0"/>
+              <a:t>Muitas vezes é chamada também de </a:t>
+            </a:r>
+            <a:r>
+              <a:rPr lang="pt-BR" dirty="0" err="1"/>
+              <a:t>inter-redes</a:t>
+            </a:r>
+            <a:r>
+              <a:rPr lang="pt-BR" dirty="0"/>
+              <a:t>. </a:t>
+            </a:r>
+          </a:p>
+          <a:p>
+            <a:pPr lvl="1"/>
+            <a:r>
+              <a:rPr lang="pt-BR" dirty="0"/>
+              <a:t>É responsável pelo roteamento de pacotes, isto é, adiciona ao datagrama informações sobre o caminho que ele deverá percorrer. Essa camada é bem semelhante à camada de rede do modelo OSI. </a:t>
+            </a:r>
+          </a:p>
+          <a:p>
+            <a:pPr lvl="1"/>
+            <a:r>
+              <a:rPr lang="pt-BR" dirty="0"/>
+              <a:t>Há vários protocolos que podem operar na camada de internet, como por exemplo: IP </a:t>
+            </a:r>
+            <a:r>
+              <a:rPr lang="pt-BR" i="1" dirty="0"/>
+              <a:t>(Internet </a:t>
+            </a:r>
+            <a:r>
+              <a:rPr lang="pt-BR" i="1" dirty="0" err="1"/>
+              <a:t>Protocol</a:t>
+            </a:r>
+            <a:r>
+              <a:rPr lang="pt-BR" dirty="0"/>
+              <a:t>), ICMP </a:t>
+            </a:r>
+            <a:r>
+              <a:rPr lang="pt-BR" i="1" dirty="0"/>
+              <a:t>(</a:t>
+            </a:r>
+            <a:r>
+              <a:rPr lang="pt-BR" i="1" dirty="0" err="1"/>
+              <a:t>Interent</a:t>
+            </a:r>
+            <a:r>
+              <a:rPr lang="pt-BR" i="1" dirty="0"/>
+              <a:t> </a:t>
+            </a:r>
+            <a:r>
+              <a:rPr lang="pt-BR" i="1" dirty="0" err="1"/>
+              <a:t>Control</a:t>
+            </a:r>
+            <a:r>
+              <a:rPr lang="pt-BR" i="1" dirty="0"/>
+              <a:t> </a:t>
+            </a:r>
+            <a:r>
+              <a:rPr lang="pt-BR" i="1" dirty="0" err="1"/>
+              <a:t>Message</a:t>
+            </a:r>
+            <a:r>
+              <a:rPr lang="pt-BR" i="1" dirty="0"/>
+              <a:t> </a:t>
+            </a:r>
+            <a:r>
+              <a:rPr lang="pt-BR" i="1" dirty="0" err="1"/>
+              <a:t>Protocol</a:t>
+            </a:r>
+            <a:r>
+              <a:rPr lang="pt-BR" dirty="0"/>
+              <a:t>), ARP (</a:t>
+            </a:r>
+            <a:r>
+              <a:rPr lang="pt-BR" i="1" dirty="0" err="1"/>
+              <a:t>Address</a:t>
+            </a:r>
+            <a:r>
+              <a:rPr lang="pt-BR" i="1" dirty="0"/>
+              <a:t> </a:t>
+            </a:r>
+            <a:r>
+              <a:rPr lang="pt-BR" i="1" dirty="0" err="1"/>
+              <a:t>Resolution</a:t>
+            </a:r>
+            <a:r>
+              <a:rPr lang="pt-BR" i="1" dirty="0"/>
+              <a:t> </a:t>
+            </a:r>
+            <a:r>
+              <a:rPr lang="pt-BR" i="1" dirty="0" err="1"/>
+              <a:t>Protocol</a:t>
+            </a:r>
+            <a:r>
+              <a:rPr lang="pt-BR" i="1" dirty="0"/>
+              <a:t>).</a:t>
+            </a:r>
+          </a:p>
+          <a:p>
+            <a:pPr lvl="1"/>
+            <a:r>
+              <a:rPr lang="pt-BR" dirty="0"/>
+              <a:t>A internet tem esse nome devido a essa camada e ao uso do protocolo IP. </a:t>
+            </a:r>
+            <a:br>
+              <a:rPr lang="pt-BR" dirty="0"/>
+            </a:br>
+            <a:br>
+              <a:rPr lang="pt-BR" dirty="0"/>
+            </a:br>
+            <a:endParaRPr lang="pt-BR" dirty="0"/>
+          </a:p>
+        </p:txBody>
+      </p:sp>
+      <p:pic>
+        <p:nvPicPr>
+          <p:cNvPr id="4" name="Imagem 3" descr="Redes Brasil">
+            <a:extLst>
+              <a:ext uri="{FF2B5EF4-FFF2-40B4-BE49-F238E27FC236}">
+                <a16:creationId xmlns:a16="http://schemas.microsoft.com/office/drawing/2014/main" id="{9D43FE7E-E154-FB27-81C5-6AFDB8F89FC6}"/>
+              </a:ext>
+            </a:extLst>
+          </p:cNvPr>
+          <p:cNvPicPr>
+            <a:picLocks noChangeAspect="1"/>
+          </p:cNvPicPr>
+          <p:nvPr/>
+        </p:nvPicPr>
+        <p:blipFill>
+          <a:blip r:embed="rId2">
+            <a:clrChange>
+              <a:clrFrom>
+                <a:srgbClr val="FFFFFF"/>
+              </a:clrFrom>
+              <a:clrTo>
+                <a:srgbClr val="FFFFFF">
+                  <a:alpha val="0"/>
+                </a:srgbClr>
+              </a:clrTo>
+            </a:clrChange>
+          </a:blip>
+          <a:stretch>
+            <a:fillRect/>
+          </a:stretch>
+        </p:blipFill>
+        <p:spPr>
+          <a:xfrm>
+            <a:off x="8874410" y="1431444"/>
+            <a:ext cx="2867025" cy="4724400"/>
+          </a:xfrm>
+          <a:prstGeom prst="rect">
+            <a:avLst/>
+          </a:prstGeom>
+        </p:spPr>
+      </p:pic>
+    </p:spTree>
+    <p:extLst>
+      <p:ext uri="{BB962C8B-B14F-4D97-AF65-F5344CB8AC3E}">
+        <p14:creationId xmlns:p14="http://schemas.microsoft.com/office/powerpoint/2010/main" val="2869903520"/>
+      </p:ext>
+    </p:extLst>
+  </p:cSld>
+  <p:clrMapOvr>
+    <a:masterClrMapping/>
+  </p:clrMapOvr>
+</p:sld>
+</file>
+
+<file path=ppt/slides/slide56.xml><?xml version="1.0" encoding="utf-8"?>
+<p:sld xmlns:a="http://schemas.openxmlformats.org/drawingml/2006/main" xmlns:r="http://schemas.openxmlformats.org/officeDocument/2006/relationships" xmlns:p="http://schemas.openxmlformats.org/presentationml/2006/main">
+  <p:cSld>
+    <p:spTree>
+      <p:nvGrpSpPr>
+        <p:cNvPr id="1" name="">
+          <a:extLst>
+            <a:ext uri="{FF2B5EF4-FFF2-40B4-BE49-F238E27FC236}">
+              <a16:creationId xmlns:a16="http://schemas.microsoft.com/office/drawing/2014/main" id="{A3B359E9-C6D7-4A2B-C557-4AF78453269A}"/>
+            </a:ext>
+          </a:extLst>
+        </p:cNvPr>
+        <p:cNvGrpSpPr/>
+        <p:nvPr/>
+      </p:nvGrpSpPr>
+      <p:grpSpPr>
+        <a:xfrm>
+          <a:off x="0" y="0"/>
+          <a:ext cx="0" cy="0"/>
+          <a:chOff x="0" y="0"/>
+          <a:chExt cx="0" cy="0"/>
+        </a:xfrm>
+      </p:grpSpPr>
+      <p:sp>
+        <p:nvSpPr>
+          <p:cNvPr id="2" name="Título 1">
+            <a:extLst>
+              <a:ext uri="{FF2B5EF4-FFF2-40B4-BE49-F238E27FC236}">
+                <a16:creationId xmlns:a16="http://schemas.microsoft.com/office/drawing/2014/main" id="{01D3FD27-75C8-8153-BEFF-FB21768BEF10}"/>
+              </a:ext>
+            </a:extLst>
+          </p:cNvPr>
+          <p:cNvSpPr>
+            <a:spLocks noGrp="1"/>
+          </p:cNvSpPr>
+          <p:nvPr>
+            <p:ph type="title"/>
+          </p:nvPr>
+        </p:nvSpPr>
+        <p:spPr/>
+        <p:txBody>
+          <a:bodyPr/>
+          <a:lstStyle/>
+          <a:p>
+            <a:r>
+              <a:rPr lang="pt-BR" dirty="0"/>
+              <a:t>Modelo de referência </a:t>
+            </a:r>
+            <a:r>
+              <a:rPr lang="pt-BR" dirty="0" err="1"/>
+              <a:t>tcp/ip</a:t>
+            </a:r>
+            <a:endParaRPr lang="pt-BR" dirty="0"/>
+          </a:p>
+        </p:txBody>
+      </p:sp>
+      <p:sp>
+        <p:nvSpPr>
+          <p:cNvPr id="3" name="Espaço Reservado para Conteúdo 2">
+            <a:extLst>
+              <a:ext uri="{FF2B5EF4-FFF2-40B4-BE49-F238E27FC236}">
+                <a16:creationId xmlns:a16="http://schemas.microsoft.com/office/drawing/2014/main" id="{D42E5233-CEB7-B163-4875-35DBF12F5E24}"/>
+              </a:ext>
+            </a:extLst>
+          </p:cNvPr>
+          <p:cNvSpPr>
+            <a:spLocks noGrp="1"/>
+          </p:cNvSpPr>
+          <p:nvPr>
+            <p:ph idx="1"/>
+          </p:nvPr>
+        </p:nvSpPr>
+        <p:spPr>
+          <a:xfrm>
+            <a:off x="581193" y="2180496"/>
+            <a:ext cx="8293218" cy="3678303"/>
+          </a:xfrm>
+        </p:spPr>
+        <p:txBody>
+          <a:bodyPr>
+            <a:normAutofit fontScale="92500" lnSpcReduction="20000"/>
+          </a:bodyPr>
+          <a:lstStyle/>
+          <a:p>
+            <a:r>
+              <a:rPr lang="pt-BR" dirty="0"/>
+              <a:t>Camada de transporte</a:t>
+            </a:r>
+          </a:p>
+          <a:p>
+            <a:r>
+              <a:rPr lang="pt-BR" dirty="0"/>
+              <a:t>É responsável por pegar os dados enviados da camada de aplicação e transformá-los em pacotes, a serem repassados para a camada de internet (rede), estabelecendo assim a conexão entre pares dos </a:t>
+            </a:r>
+            <a:r>
+              <a:rPr lang="pt-BR" i="1" dirty="0"/>
+              <a:t>hosts </a:t>
+            </a:r>
+            <a:r>
+              <a:rPr lang="pt-BR" dirty="0"/>
+              <a:t>de origem e destino. </a:t>
+            </a:r>
+          </a:p>
+          <a:p>
+            <a:r>
+              <a:rPr lang="pt-BR" dirty="0"/>
+              <a:t>Dois protocolos são importantes aqui. </a:t>
+            </a:r>
+          </a:p>
+          <a:p>
+            <a:r>
+              <a:rPr lang="pt-BR" dirty="0"/>
+              <a:t>O TCP é um protocolo orientado a conexão que permite entrega sem erros de fluxos de </a:t>
+            </a:r>
+            <a:r>
+              <a:rPr lang="pt-BR" i="1" dirty="0"/>
+              <a:t>bytes </a:t>
+            </a:r>
+            <a:r>
+              <a:rPr lang="pt-BR" dirty="0"/>
+              <a:t>originários de uma determinada máquina em qualquer computador da rede. </a:t>
+            </a:r>
+          </a:p>
+          <a:p>
+            <a:r>
+              <a:rPr lang="pt-BR" dirty="0"/>
+              <a:t>O UDP (Protocolo de Datagrama do Usuário) é um protocolo sem conexão e não confiável destinado a aplicações que não querem controle de fluxo nem manutenção da sequência das mensagens enviadas</a:t>
+            </a:r>
+          </a:p>
+          <a:p>
+            <a:r>
+              <a:rPr lang="pt-BR" dirty="0"/>
+              <a:t>A camada de transporte desempenha as de comunicação fim-a-fim entre duas máquinas, existindo duas implementações primárias: o UDP sem conexão e o TCP com conexão. </a:t>
+            </a:r>
+            <a:br>
+              <a:rPr lang="pt-BR" dirty="0"/>
+            </a:br>
+            <a:br>
+              <a:rPr lang="pt-BR" dirty="0"/>
+            </a:br>
+            <a:endParaRPr lang="pt-BR" dirty="0"/>
+          </a:p>
+        </p:txBody>
+      </p:sp>
+      <p:pic>
+        <p:nvPicPr>
+          <p:cNvPr id="4" name="Imagem 3" descr="Redes Brasil">
+            <a:extLst>
+              <a:ext uri="{FF2B5EF4-FFF2-40B4-BE49-F238E27FC236}">
+                <a16:creationId xmlns:a16="http://schemas.microsoft.com/office/drawing/2014/main" id="{98D315BF-2C7E-4DBF-3BF2-5F935E089A94}"/>
+              </a:ext>
+            </a:extLst>
+          </p:cNvPr>
+          <p:cNvPicPr>
+            <a:picLocks noChangeAspect="1"/>
+          </p:cNvPicPr>
+          <p:nvPr/>
+        </p:nvPicPr>
+        <p:blipFill>
+          <a:blip r:embed="rId2">
+            <a:clrChange>
+              <a:clrFrom>
+                <a:srgbClr val="FFFFFF"/>
+              </a:clrFrom>
+              <a:clrTo>
+                <a:srgbClr val="FFFFFF">
+                  <a:alpha val="0"/>
+                </a:srgbClr>
+              </a:clrTo>
+            </a:clrChange>
+          </a:blip>
+          <a:stretch>
+            <a:fillRect/>
+          </a:stretch>
+        </p:blipFill>
+        <p:spPr>
+          <a:xfrm>
+            <a:off x="8874410" y="1431444"/>
+            <a:ext cx="2867025" cy="4724400"/>
+          </a:xfrm>
+          <a:prstGeom prst="rect">
+            <a:avLst/>
+          </a:prstGeom>
+        </p:spPr>
+      </p:pic>
+    </p:spTree>
+    <p:extLst>
+      <p:ext uri="{BB962C8B-B14F-4D97-AF65-F5344CB8AC3E}">
+        <p14:creationId xmlns:p14="http://schemas.microsoft.com/office/powerpoint/2010/main" val="1228248521"/>
+      </p:ext>
+    </p:extLst>
+  </p:cSld>
+  <p:clrMapOvr>
+    <a:masterClrMapping/>
+  </p:clrMapOvr>
+</p:sld>
+</file>
+
+<file path=ppt/slides/slide57.xml><?xml version="1.0" encoding="utf-8"?>
+<p:sld xmlns:a="http://schemas.openxmlformats.org/drawingml/2006/main" xmlns:r="http://schemas.openxmlformats.org/officeDocument/2006/relationships" xmlns:p="http://schemas.openxmlformats.org/presentationml/2006/main">
+  <p:cSld>
+    <p:spTree>
+      <p:nvGrpSpPr>
+        <p:cNvPr id="1" name="">
+          <a:extLst>
+            <a:ext uri="{FF2B5EF4-FFF2-40B4-BE49-F238E27FC236}">
+              <a16:creationId xmlns:a16="http://schemas.microsoft.com/office/drawing/2014/main" id="{296314B1-02E9-716A-ABAC-23D61001C9BE}"/>
+            </a:ext>
+          </a:extLst>
+        </p:cNvPr>
+        <p:cNvGrpSpPr/>
+        <p:nvPr/>
+      </p:nvGrpSpPr>
+      <p:grpSpPr>
+        <a:xfrm>
+          <a:off x="0" y="0"/>
+          <a:ext cx="0" cy="0"/>
+          <a:chOff x="0" y="0"/>
+          <a:chExt cx="0" cy="0"/>
+        </a:xfrm>
+      </p:grpSpPr>
+      <p:sp>
+        <p:nvSpPr>
+          <p:cNvPr id="2" name="Título 1">
+            <a:extLst>
+              <a:ext uri="{FF2B5EF4-FFF2-40B4-BE49-F238E27FC236}">
+                <a16:creationId xmlns:a16="http://schemas.microsoft.com/office/drawing/2014/main" id="{882FA11C-F6A4-9ADC-5781-A9361334A086}"/>
+              </a:ext>
+            </a:extLst>
+          </p:cNvPr>
+          <p:cNvSpPr>
+            <a:spLocks noGrp="1"/>
+          </p:cNvSpPr>
+          <p:nvPr>
+            <p:ph type="title"/>
+          </p:nvPr>
+        </p:nvSpPr>
+        <p:spPr/>
+        <p:txBody>
+          <a:bodyPr/>
+          <a:lstStyle/>
+          <a:p>
+            <a:r>
+              <a:rPr lang="pt-BR" dirty="0"/>
+              <a:t>Modelo de referência </a:t>
+            </a:r>
+            <a:r>
+              <a:rPr lang="pt-BR" dirty="0" err="1"/>
+              <a:t>tcp/ip</a:t>
+            </a:r>
+            <a:endParaRPr lang="pt-BR" dirty="0"/>
+          </a:p>
+        </p:txBody>
+      </p:sp>
+      <p:sp>
+        <p:nvSpPr>
+          <p:cNvPr id="3" name="Espaço Reservado para Conteúdo 2">
+            <a:extLst>
+              <a:ext uri="{FF2B5EF4-FFF2-40B4-BE49-F238E27FC236}">
+                <a16:creationId xmlns:a16="http://schemas.microsoft.com/office/drawing/2014/main" id="{581B1CEA-95AA-6922-BACE-ADF079EF8CCF}"/>
+              </a:ext>
+            </a:extLst>
+          </p:cNvPr>
+          <p:cNvSpPr>
+            <a:spLocks noGrp="1"/>
+          </p:cNvSpPr>
+          <p:nvPr>
+            <p:ph idx="1"/>
+          </p:nvPr>
+        </p:nvSpPr>
+        <p:spPr>
+          <a:xfrm>
+            <a:off x="581193" y="2180496"/>
+            <a:ext cx="8293218" cy="3678303"/>
+          </a:xfrm>
+        </p:spPr>
+        <p:txBody>
+          <a:bodyPr>
+            <a:normAutofit/>
+          </a:bodyPr>
+          <a:lstStyle/>
+          <a:p>
+            <a:r>
+              <a:rPr lang="pt-BR" dirty="0"/>
+              <a:t>Camada de aplicação</a:t>
+            </a:r>
+          </a:p>
+          <a:p>
+            <a:pPr lvl="1"/>
+            <a:r>
+              <a:rPr lang="pt-BR" dirty="0"/>
+              <a:t>Essa camada suporta os protocolos:</a:t>
+            </a:r>
+          </a:p>
+          <a:p>
+            <a:pPr lvl="1"/>
+            <a:r>
+              <a:rPr lang="pt-BR" dirty="0"/>
+              <a:t>a) HTTP (</a:t>
+            </a:r>
+            <a:r>
+              <a:rPr lang="pt-BR" i="1" dirty="0"/>
+              <a:t>Hypertext </a:t>
+            </a:r>
+            <a:r>
+              <a:rPr lang="pt-BR" i="1" dirty="0" err="1"/>
+              <a:t>Transfer</a:t>
+            </a:r>
+            <a:r>
+              <a:rPr lang="pt-BR" i="1" dirty="0"/>
+              <a:t> </a:t>
+            </a:r>
+            <a:r>
+              <a:rPr lang="pt-BR" i="1" dirty="0" err="1"/>
+              <a:t>Protocol</a:t>
+            </a:r>
+            <a:r>
+              <a:rPr lang="pt-BR" dirty="0"/>
+              <a:t>): é um protocolo de transferência de hipertexto; é aquele que usamos quando estamos navegando na internet. Ele permite que os navegadores e servidores web possam enviar e receber páginas da World </a:t>
+            </a:r>
+            <a:r>
+              <a:rPr lang="pt-BR" dirty="0" err="1"/>
+              <a:t>Wide</a:t>
+            </a:r>
+            <a:r>
+              <a:rPr lang="pt-BR" dirty="0"/>
+              <a:t> Web.</a:t>
+            </a:r>
+          </a:p>
+          <a:p>
+            <a:pPr lvl="1"/>
+            <a:r>
+              <a:rPr lang="pt-BR" dirty="0"/>
+              <a:t>b) FTP (</a:t>
+            </a:r>
+            <a:r>
+              <a:rPr lang="pt-BR" i="1" dirty="0"/>
+              <a:t>File </a:t>
+            </a:r>
+            <a:r>
+              <a:rPr lang="pt-BR" i="1" dirty="0" err="1"/>
+              <a:t>Transfer</a:t>
+            </a:r>
+            <a:r>
+              <a:rPr lang="pt-BR" i="1" dirty="0"/>
+              <a:t> </a:t>
+            </a:r>
+            <a:r>
+              <a:rPr lang="pt-BR" i="1" dirty="0" err="1"/>
+              <a:t>Protocol</a:t>
+            </a:r>
+            <a:r>
+              <a:rPr lang="pt-BR" dirty="0"/>
+              <a:t>): é um protocolo de transferência de arquivos; é justamente aquele que permite fazer </a:t>
+            </a:r>
+            <a:r>
+              <a:rPr lang="pt-BR" i="1" dirty="0"/>
+              <a:t>downloads, </a:t>
+            </a:r>
+            <a:r>
+              <a:rPr lang="pt-BR" dirty="0"/>
+              <a:t>ou seja, transferências de arquivo de um sistema de computadores para outro. </a:t>
+            </a:r>
+            <a:br>
+              <a:rPr lang="pt-BR" dirty="0"/>
+            </a:br>
+            <a:br>
+              <a:rPr lang="pt-BR" dirty="0"/>
+            </a:br>
+            <a:endParaRPr lang="pt-BR" dirty="0"/>
+          </a:p>
+        </p:txBody>
+      </p:sp>
+      <p:pic>
+        <p:nvPicPr>
+          <p:cNvPr id="4" name="Imagem 3" descr="Redes Brasil">
+            <a:extLst>
+              <a:ext uri="{FF2B5EF4-FFF2-40B4-BE49-F238E27FC236}">
+                <a16:creationId xmlns:a16="http://schemas.microsoft.com/office/drawing/2014/main" id="{1BFA30A4-413C-024E-FD11-F659CC2E975C}"/>
+              </a:ext>
+            </a:extLst>
+          </p:cNvPr>
+          <p:cNvPicPr>
+            <a:picLocks noChangeAspect="1"/>
+          </p:cNvPicPr>
+          <p:nvPr/>
+        </p:nvPicPr>
+        <p:blipFill>
+          <a:blip r:embed="rId2">
+            <a:clrChange>
+              <a:clrFrom>
+                <a:srgbClr val="FFFFFF"/>
+              </a:clrFrom>
+              <a:clrTo>
+                <a:srgbClr val="FFFFFF">
+                  <a:alpha val="0"/>
+                </a:srgbClr>
+              </a:clrTo>
+            </a:clrChange>
+          </a:blip>
+          <a:stretch>
+            <a:fillRect/>
+          </a:stretch>
+        </p:blipFill>
+        <p:spPr>
+          <a:xfrm>
+            <a:off x="8874410" y="1431444"/>
+            <a:ext cx="2867025" cy="4724400"/>
+          </a:xfrm>
+          <a:prstGeom prst="rect">
+            <a:avLst/>
+          </a:prstGeom>
+        </p:spPr>
+      </p:pic>
+    </p:spTree>
+    <p:extLst>
+      <p:ext uri="{BB962C8B-B14F-4D97-AF65-F5344CB8AC3E}">
+        <p14:creationId xmlns:p14="http://schemas.microsoft.com/office/powerpoint/2010/main" val="3820146771"/>
+      </p:ext>
+    </p:extLst>
+  </p:cSld>
+  <p:clrMapOvr>
+    <a:masterClrMapping/>
+  </p:clrMapOvr>
+</p:sld>
+</file>
+
+<file path=ppt/slides/slide58.xml><?xml version="1.0" encoding="utf-8"?>
+<p:sld xmlns:a="http://schemas.openxmlformats.org/drawingml/2006/main" xmlns:r="http://schemas.openxmlformats.org/officeDocument/2006/relationships" xmlns:p="http://schemas.openxmlformats.org/presentationml/2006/main">
+  <p:cSld>
+    <p:spTree>
+      <p:nvGrpSpPr>
+        <p:cNvPr id="1" name=""/>
+        <p:cNvGrpSpPr/>
+        <p:nvPr/>
+      </p:nvGrpSpPr>
+      <p:grpSpPr>
+        <a:xfrm>
+          <a:off x="0" y="0"/>
+          <a:ext cx="0" cy="0"/>
+          <a:chOff x="0" y="0"/>
+          <a:chExt cx="0" cy="0"/>
+        </a:xfrm>
+      </p:grpSpPr>
+      <p:sp>
+        <p:nvSpPr>
+          <p:cNvPr id="2" name="Título 1">
+            <a:extLst>
+              <a:ext uri="{FF2B5EF4-FFF2-40B4-BE49-F238E27FC236}">
+                <a16:creationId xmlns:a16="http://schemas.microsoft.com/office/drawing/2014/main" id="{D320D295-81D5-446A-ACC7-06BAA67E6E23}"/>
+              </a:ext>
+            </a:extLst>
+          </p:cNvPr>
+          <p:cNvSpPr>
+            <a:spLocks noGrp="1"/>
+          </p:cNvSpPr>
+          <p:nvPr>
+            <p:ph type="title"/>
+          </p:nvPr>
+        </p:nvSpPr>
+        <p:spPr/>
+        <p:txBody>
+          <a:bodyPr/>
+          <a:lstStyle/>
+          <a:p>
+            <a:r>
+              <a:rPr lang="pt-BR" dirty="0"/>
+              <a:t>Comparação entre as duas camadas</a:t>
+            </a:r>
+          </a:p>
+        </p:txBody>
+      </p:sp>
+      <p:pic>
+        <p:nvPicPr>
+          <p:cNvPr id="5" name="Imagem 4">
+            <a:extLst>
+              <a:ext uri="{FF2B5EF4-FFF2-40B4-BE49-F238E27FC236}">
+                <a16:creationId xmlns:a16="http://schemas.microsoft.com/office/drawing/2014/main" id="{2FC25E0B-C292-8303-78AA-2B52BF69443D}"/>
+              </a:ext>
+            </a:extLst>
+          </p:cNvPr>
+          <p:cNvPicPr>
+            <a:picLocks noChangeAspect="1"/>
+          </p:cNvPicPr>
+          <p:nvPr/>
+        </p:nvPicPr>
+        <p:blipFill>
+          <a:blip r:embed="rId2"/>
+          <a:stretch>
+            <a:fillRect/>
+          </a:stretch>
+        </p:blipFill>
+        <p:spPr>
+          <a:xfrm>
+            <a:off x="3225574" y="2107493"/>
+            <a:ext cx="4742770" cy="4750507"/>
+          </a:xfrm>
+          <a:prstGeom prst="rect">
+            <a:avLst/>
+          </a:prstGeom>
+        </p:spPr>
+      </p:pic>
+    </p:spTree>
+    <p:extLst>
+      <p:ext uri="{BB962C8B-B14F-4D97-AF65-F5344CB8AC3E}">
+        <p14:creationId xmlns:p14="http://schemas.microsoft.com/office/powerpoint/2010/main" val="980300009"/>
+      </p:ext>
+    </p:extLst>
+  </p:cSld>
+  <p:clrMapOvr>
+    <a:masterClrMapping/>
+  </p:clrMapOvr>
+</p:sld>
+</file>
+
+<file path=ppt/slides/slide59.xml><?xml version="1.0" encoding="utf-8"?>
+<p:sld xmlns:a="http://schemas.openxmlformats.org/drawingml/2006/main" xmlns:r="http://schemas.openxmlformats.org/officeDocument/2006/relationships" xmlns:p="http://schemas.openxmlformats.org/presentationml/2006/main">
+  <p:cSld>
+    <p:spTree>
+      <p:nvGrpSpPr>
+        <p:cNvPr id="1" name=""/>
+        <p:cNvGrpSpPr/>
+        <p:nvPr/>
+      </p:nvGrpSpPr>
+      <p:grpSpPr>
+        <a:xfrm>
+          <a:off x="0" y="0"/>
+          <a:ext cx="0" cy="0"/>
+          <a:chOff x="0" y="0"/>
+          <a:chExt cx="0" cy="0"/>
+        </a:xfrm>
+      </p:grpSpPr>
+      <p:sp>
+        <p:nvSpPr>
+          <p:cNvPr id="2" name="Título 1">
+            <a:extLst>
+              <a:ext uri="{FF2B5EF4-FFF2-40B4-BE49-F238E27FC236}">
+                <a16:creationId xmlns:a16="http://schemas.microsoft.com/office/drawing/2014/main" id="{8E4BD435-008A-A119-7F99-BA5B78C10A22}"/>
+              </a:ext>
+            </a:extLst>
+          </p:cNvPr>
+          <p:cNvSpPr>
+            <a:spLocks noGrp="1"/>
+          </p:cNvSpPr>
+          <p:nvPr>
+            <p:ph type="title"/>
+          </p:nvPr>
+        </p:nvSpPr>
+        <p:spPr/>
+        <p:txBody>
+          <a:bodyPr/>
+          <a:lstStyle/>
+          <a:p>
+            <a:r>
+              <a:rPr lang="pt-BR" dirty="0"/>
+              <a:t>Rota de transmissão e recepção</a:t>
+            </a:r>
+          </a:p>
+        </p:txBody>
+      </p:sp>
+      <p:pic>
+        <p:nvPicPr>
+          <p:cNvPr id="5" name="Imagem 4">
+            <a:extLst>
+              <a:ext uri="{FF2B5EF4-FFF2-40B4-BE49-F238E27FC236}">
+                <a16:creationId xmlns:a16="http://schemas.microsoft.com/office/drawing/2014/main" id="{2945FA95-6A3E-047F-E376-B80C87BD7D6E}"/>
+              </a:ext>
+            </a:extLst>
+          </p:cNvPr>
+          <p:cNvPicPr>
+            <a:picLocks noChangeAspect="1"/>
+          </p:cNvPicPr>
+          <p:nvPr/>
+        </p:nvPicPr>
+        <p:blipFill>
+          <a:blip r:embed="rId2"/>
+          <a:stretch>
+            <a:fillRect/>
+          </a:stretch>
+        </p:blipFill>
+        <p:spPr>
+          <a:xfrm>
+            <a:off x="3632192" y="1886602"/>
+            <a:ext cx="4927615" cy="4269242"/>
+          </a:xfrm>
+          <a:prstGeom prst="rect">
+            <a:avLst/>
+          </a:prstGeom>
+        </p:spPr>
+      </p:pic>
+    </p:spTree>
+    <p:extLst>
+      <p:ext uri="{BB962C8B-B14F-4D97-AF65-F5344CB8AC3E}">
+        <p14:creationId xmlns:p14="http://schemas.microsoft.com/office/powerpoint/2010/main" val="2912682521"/>
+      </p:ext>
+    </p:extLst>
+  </p:cSld>
+  <p:clrMapOvr>
+    <a:masterClrMapping/>
+  </p:clrMapOvr>
+</p:sld>
+</file>
+
+<file path=ppt/slides/slide6.xml><?xml version="1.0" encoding="utf-8"?>
+<p:sld xmlns:a="http://schemas.openxmlformats.org/drawingml/2006/main" xmlns:r="http://schemas.openxmlformats.org/officeDocument/2006/relationships" xmlns:p="http://schemas.openxmlformats.org/presentationml/2006/main">
+  <p:cSld>
+    <p:spTree>
+      <p:nvGrpSpPr>
+        <p:cNvPr id="1" name=""/>
+        <p:cNvGrpSpPr/>
+        <p:nvPr/>
+      </p:nvGrpSpPr>
+      <p:grpSpPr>
+        <a:xfrm>
+          <a:off x="0" y="0"/>
+          <a:ext cx="0" cy="0"/>
+          <a:chOff x="0" y="0"/>
+          <a:chExt cx="0" cy="0"/>
+        </a:xfrm>
+      </p:grpSpPr>
+      <p:sp>
+        <p:nvSpPr>
+          <p:cNvPr id="2" name="Título 1">
+            <a:extLst>
+              <a:ext uri="{FF2B5EF4-FFF2-40B4-BE49-F238E27FC236}">
+                <a16:creationId xmlns:a16="http://schemas.microsoft.com/office/drawing/2014/main" id="{A502F1FA-A26A-E35B-5405-D39548BE08CB}"/>
+              </a:ext>
+            </a:extLst>
+          </p:cNvPr>
+          <p:cNvSpPr>
+            <a:spLocks noGrp="1"/>
+          </p:cNvSpPr>
+          <p:nvPr>
+            <p:ph type="title"/>
+          </p:nvPr>
+        </p:nvSpPr>
+        <p:spPr/>
+        <p:txBody>
+          <a:bodyPr/>
+          <a:lstStyle/>
+          <a:p>
+            <a:r>
+              <a:rPr lang="pt-BR" dirty="0"/>
+              <a:t>Redes ponto a ponto</a:t>
+            </a:r>
+          </a:p>
+        </p:txBody>
+      </p:sp>
+      <p:sp>
+        <p:nvSpPr>
+          <p:cNvPr id="3" name="Espaço Reservado para Conteúdo 2">
+            <a:extLst>
+              <a:ext uri="{FF2B5EF4-FFF2-40B4-BE49-F238E27FC236}">
+                <a16:creationId xmlns:a16="http://schemas.microsoft.com/office/drawing/2014/main" id="{776D22D0-BA47-36F9-02F2-D6C5E1ECA960}"/>
+              </a:ext>
+            </a:extLst>
+          </p:cNvPr>
+          <p:cNvSpPr>
+            <a:spLocks noGrp="1"/>
+          </p:cNvSpPr>
+          <p:nvPr>
+            <p:ph idx="1"/>
+          </p:nvPr>
+        </p:nvSpPr>
+        <p:spPr/>
+        <p:txBody>
+          <a:bodyPr/>
+          <a:lstStyle/>
+          <a:p>
+            <a:r>
+              <a:rPr lang="pt-BR" dirty="0"/>
+              <a:t>os computadores são ligados entre si para a troca de informações, porém a maioria dos recursos não pode ser compartilhada fazendo com que cada </a:t>
+            </a:r>
+            <a:r>
+              <a:rPr lang="pt-BR" b="1" dirty="0"/>
+              <a:t>host </a:t>
+            </a:r>
+            <a:r>
+              <a:rPr lang="pt-BR" dirty="0"/>
+              <a:t>deva possuir os próprios recursos e aplicações como um programa, </a:t>
+            </a:r>
+            <a:br>
+              <a:rPr lang="pt-BR" dirty="0"/>
+            </a:br>
+            <a:endParaRPr lang="pt-BR" dirty="0"/>
+          </a:p>
+        </p:txBody>
+      </p:sp>
+      <p:pic>
+        <p:nvPicPr>
+          <p:cNvPr id="1026" name="Picture 2" descr="Topologia Ponto a Ponto: conheça esse formato de rede!">
+            <a:extLst>
+              <a:ext uri="{FF2B5EF4-FFF2-40B4-BE49-F238E27FC236}">
+                <a16:creationId xmlns:a16="http://schemas.microsoft.com/office/drawing/2014/main" id="{C7E03C99-7F35-117C-1F50-578D554A1F2C}"/>
+              </a:ext>
+            </a:extLst>
+          </p:cNvPr>
+          <p:cNvPicPr>
+            <a:picLocks noChangeAspect="1" noChangeArrowheads="1"/>
+          </p:cNvPicPr>
+          <p:nvPr/>
+        </p:nvPicPr>
+        <p:blipFill>
+          <a:blip r:embed="rId2">
+            <a:clrChange>
+              <a:clrFrom>
+                <a:srgbClr val="FFFFFF"/>
+              </a:clrFrom>
+              <a:clrTo>
+                <a:srgbClr val="FFFFFF">
+                  <a:alpha val="0"/>
+                </a:srgbClr>
+              </a:clrTo>
+            </a:clrChange>
+            <a:extLst>
+              <a:ext uri="{28A0092B-C50C-407E-A947-70E740481C1C}">
+                <a14:useLocalDpi xmlns:a14="http://schemas.microsoft.com/office/drawing/2010/main" val="0"/>
+              </a:ext>
+            </a:extLst>
+          </a:blip>
+          <a:srcRect/>
+          <a:stretch>
+            <a:fillRect/>
+          </a:stretch>
+        </p:blipFill>
+        <p:spPr bwMode="auto">
+          <a:xfrm>
+            <a:off x="2724149" y="1715956"/>
+            <a:ext cx="6743700" cy="2152650"/>
+          </a:xfrm>
+          <a:prstGeom prst="rect">
+            <a:avLst/>
+          </a:prstGeom>
+          <a:noFill/>
+          <a:extLst>
+            <a:ext uri="{909E8E84-426E-40DD-AFC4-6F175D3DCCD1}">
+              <a14:hiddenFill xmlns:a14="http://schemas.microsoft.com/office/drawing/2010/main">
+                <a:solidFill>
+                  <a:srgbClr val="FFFFFF"/>
+                </a:solidFill>
+              </a14:hiddenFill>
+            </a:ext>
+          </a:extLst>
+        </p:spPr>
+      </p:pic>
+    </p:spTree>
+    <p:extLst>
+      <p:ext uri="{BB962C8B-B14F-4D97-AF65-F5344CB8AC3E}">
+        <p14:creationId xmlns:p14="http://schemas.microsoft.com/office/powerpoint/2010/main" val="1387197296"/>
+      </p:ext>
+    </p:extLst>
+  </p:cSld>
+  <p:clrMapOvr>
+    <a:masterClrMapping/>
+  </p:clrMapOvr>
+</p:sld>
+</file>
+
+<file path=ppt/slides/slide60.xml><?xml version="1.0" encoding="utf-8"?>
+<p:sld xmlns:a="http://schemas.openxmlformats.org/drawingml/2006/main" xmlns:r="http://schemas.openxmlformats.org/officeDocument/2006/relationships" xmlns:p="http://schemas.openxmlformats.org/presentationml/2006/main">
+  <p:cSld>
     <p:bg>
       <p:bgPr>
         <a:solidFill>
@@ -12932,161 +14310,6 @@
     <p:extLst>
       <p:ext uri="{BB962C8B-B14F-4D97-AF65-F5344CB8AC3E}">
         <p14:creationId xmlns:p14="http://schemas.microsoft.com/office/powerpoint/2010/main" val="3501347425"/>
-      </p:ext>
-    </p:extLst>
-  </p:cSld>
-  <p:clrMapOvr>
-    <a:masterClrMapping/>
-  </p:clrMapOvr>
-</p:sld>
-</file>
-
-<file path=ppt/slides/slide6.xml><?xml version="1.0" encoding="utf-8"?>
-<p:sld xmlns:a="http://schemas.openxmlformats.org/drawingml/2006/main" xmlns:r="http://schemas.openxmlformats.org/officeDocument/2006/relationships" xmlns:p="http://schemas.openxmlformats.org/presentationml/2006/main">
-  <p:cSld>
-    <p:spTree>
-      <p:nvGrpSpPr>
-        <p:cNvPr id="1" name=""/>
-        <p:cNvGrpSpPr/>
-        <p:nvPr/>
-      </p:nvGrpSpPr>
-      <p:grpSpPr>
-        <a:xfrm>
-          <a:off x="0" y="0"/>
-          <a:ext cx="0" cy="0"/>
-          <a:chOff x="0" y="0"/>
-          <a:chExt cx="0" cy="0"/>
-        </a:xfrm>
-      </p:grpSpPr>
-      <p:sp>
-        <p:nvSpPr>
-          <p:cNvPr id="2" name="Título 1">
-            <a:extLst>
-              <a:ext uri="{FF2B5EF4-FFF2-40B4-BE49-F238E27FC236}">
-                <a16:creationId xmlns:a16="http://schemas.microsoft.com/office/drawing/2014/main" id="{A502F1FA-A26A-E35B-5405-D39548BE08CB}"/>
-              </a:ext>
-            </a:extLst>
-          </p:cNvPr>
-          <p:cNvSpPr>
-            <a:spLocks noGrp="1"/>
-          </p:cNvSpPr>
-          <p:nvPr>
-            <p:ph type="title"/>
-          </p:nvPr>
-        </p:nvSpPr>
-        <p:spPr/>
-        <p:txBody>
-          <a:bodyPr/>
-          <a:lstStyle/>
-          <a:p>
-            <a:r>
-              <a:rPr lang="pt-BR" dirty="0"/>
-              <a:t>Redes ponto a ponto</a:t>
-            </a:r>
-          </a:p>
-        </p:txBody>
-      </p:sp>
-      <p:sp>
-        <p:nvSpPr>
-          <p:cNvPr id="3" name="Espaço Reservado para Conteúdo 2">
-            <a:extLst>
-              <a:ext uri="{FF2B5EF4-FFF2-40B4-BE49-F238E27FC236}">
-                <a16:creationId xmlns:a16="http://schemas.microsoft.com/office/drawing/2014/main" id="{776D22D0-BA47-36F9-02F2-D6C5E1ECA960}"/>
-              </a:ext>
-            </a:extLst>
-          </p:cNvPr>
-          <p:cNvSpPr>
-            <a:spLocks noGrp="1"/>
-          </p:cNvSpPr>
-          <p:nvPr>
-            <p:ph idx="1"/>
-          </p:nvPr>
-        </p:nvSpPr>
-        <p:spPr/>
-        <p:txBody>
-          <a:bodyPr/>
-          <a:lstStyle/>
-          <a:p>
-            <a:r>
-              <a:rPr lang="pt-BR" dirty="0"/>
-              <a:t>os computadores são ligados entre si para a troca de informações, porém a maioria dos recursos não pode ser compartilhada fazendo com que cada </a:t>
-            </a:r>
-            <a:r>
-              <a:rPr lang="pt-BR" b="1" dirty="0"/>
-              <a:t>host </a:t>
-            </a:r>
-            <a:r>
-              <a:rPr lang="pt-BR" dirty="0"/>
-              <a:t>deva possuir os próprios recursos e aplicações como um programa, </a:t>
-            </a:r>
-            <a:br>
-              <a:rPr lang="pt-BR" dirty="0"/>
-            </a:br>
-            <a:endParaRPr lang="pt-BR" dirty="0"/>
-          </a:p>
-        </p:txBody>
-      </p:sp>
-      <p:pic>
-        <p:nvPicPr>
-          <p:cNvPr id="1026" name="Picture 2" descr="Topologia Ponto a Ponto: conheça esse formato de rede!">
-            <a:extLst>
-              <a:ext uri="{FF2B5EF4-FFF2-40B4-BE49-F238E27FC236}">
-                <a16:creationId xmlns:a16="http://schemas.microsoft.com/office/drawing/2014/main" id="{C7E03C99-7F35-117C-1F50-578D554A1F2C}"/>
-              </a:ext>
-            </a:extLst>
-          </p:cNvPr>
-          <p:cNvPicPr>
-            <a:picLocks noChangeAspect="1" noChangeArrowheads="1"/>
-          </p:cNvPicPr>
-          <p:nvPr/>
-        </p:nvPicPr>
-        <p:blipFill>
-          <a:blip r:embed="rId2">
-            <a:clrChange>
-              <a:clrFrom>
-                <a:srgbClr val="FFFFFF"/>
-              </a:clrFrom>
-              <a:clrTo>
-                <a:srgbClr val="FFFFFF">
-                  <a:alpha val="0"/>
-                </a:srgbClr>
-              </a:clrTo>
-            </a:clrChange>
-            <a:extLst>
-              <a:ext uri="{28A0092B-C50C-407E-A947-70E740481C1C}">
-                <a14:useLocalDpi xmlns:a14="http://schemas.microsoft.com/office/drawing/2010/main" val="0"/>
-              </a:ext>
-            </a:extLst>
-          </a:blip>
-          <a:srcRect/>
-          <a:stretch>
-            <a:fillRect/>
-          </a:stretch>
-        </p:blipFill>
-        <p:spPr bwMode="auto">
-          <a:xfrm>
-            <a:off x="2724149" y="1715956"/>
-            <a:ext cx="6743700" cy="2152650"/>
-          </a:xfrm>
-          <a:prstGeom prst="rect">
-            <a:avLst/>
-          </a:prstGeom>
-          <a:noFill/>
-          <a:extLst>
-            <a:ext uri="{909E8E84-426E-40DD-AFC4-6F175D3DCCD1}">
-              <a14:hiddenFill xmlns:a14="http://schemas.microsoft.com/office/drawing/2010/main">
-                <a:solidFill>
-                  <a:srgbClr val="FFFFFF"/>
-                </a:solidFill>
-              </a14:hiddenFill>
-            </a:ext>
-          </a:extLst>
-        </p:spPr>
-      </p:pic>
-    </p:spTree>
-    <p:extLst>
-      <p:ext uri="{BB962C8B-B14F-4D97-AF65-F5344CB8AC3E}">
-        <p14:creationId xmlns:p14="http://schemas.microsoft.com/office/powerpoint/2010/main" val="1387197296"/>
       </p:ext>
     </p:extLst>
   </p:cSld>
